--- a/reviews/storyboard-bariah/k5_calibration/K5PL06T03B03_STORYBOARD_KALIBRASI_DRAF_v0_1.pptx
+++ b/reviews/storyboard-bariah/k5_calibration/K5PL06T03B03_STORYBOARD_KALIBRASI_DRAF_v0_1.pptx
@@ -19,6 +19,10 @@
     <p:sldId id="267" r:id="rId19"/>
     <p:sldId id="268" r:id="rId20"/>
     <p:sldId id="269" r:id="rId21"/>
+    <p:sldId id="270" r:id="rId22"/>
+    <p:sldId id="271" r:id="rId23"/>
+    <p:sldId id="272" r:id="rId24"/>
+    <p:sldId id="273" r:id="rId25"/>
   </p:sldIdLst>
   <p:sldSz cx="12192000" cy="6858000" type="screen4x3"/>
   <p:notesSz cx="6858000" cy="9144000"/>
@@ -532,7 +536,7 @@
           <a:p/>
           <a:p>
             <a:r>
-              <a:t>DRAFT_FOR_BARIAH_REVIEW · NOT_INSTRUCTIONALLY_APPROVED · NOT_LEARNER_FACING_FINAL</a:t>
+              <a:t>TECHNICAL_PROOF · DRAFT_FOR_BARIAH_REVIEW · NOT_INSTRUCTIONALLY_APPROVED · NOT_LEARNER_FACING_FINAL</a:t>
             </a:r>
           </a:p>
         </p:txBody>
@@ -602,24 +606,24 @@
           <a:lstStyle/>
           <a:p>
             <a:r>
-              <a:t>VO (Hilmi): Enam komponen infrastruktur landskap dan fungsi setiap satu. Titik kegagalan yang paling kerap bagi setiap komponen. Dokumen kawalan yang mengikat kontraktor: lukisan struktur, pelan ukur, pelan saliran.</a:t>
+              <a:t>VO (Hilmi): Jajaran pagar mesti ditanda mengikut Pelan Ukur Sempadan untuk mengelakkan pencerobohan tanah.</a:t>
             </a:r>
           </a:p>
           <a:p/>
           <a:p>
             <a:r>
-              <a:t>Baris sumber: tiada — skrin struktur</a:t>
-            </a:r>
-          </a:p>
-          <a:p>
-            <a:r>
-              <a:t>Keputusan Bariah: A6</a:t>
+              <a:t>Baris sumber: T03B03-ROW-042, T03B03-ROW-043, T03B03-ROW-044, T03B03-ROW-046, T03B03-ROW-045, T03B03-ROW-047, T03B03-ROW-049, T03B03-ROW-051, T03B03-ROW-053, T03B03-ROW-048, T03B03-ROW-050, T03B03-ROW-052, T03B03-ROW-054</a:t>
+            </a:r>
+          </a:p>
+          <a:p>
+            <a:r>
+              <a:t>Keputusan Bariah: A1, A2</a:t>
             </a:r>
           </a:p>
           <a:p/>
           <a:p>
             <a:r>
-              <a:t>DRAFT_FOR_BARIAH_REVIEW · NOT_INSTRUCTIONALLY_APPROVED · NOT_LEARNER_FACING_FINAL</a:t>
+              <a:t>TECHNICAL_PROOF · DRAFT_FOR_BARIAH_REVIEW · NOT_INSTRUCTIONALLY_APPROVED · NOT_LEARNER_FACING_FINAL</a:t>
             </a:r>
           </a:p>
         </p:txBody>
@@ -689,24 +693,24 @@
           <a:lstStyle/>
           <a:p>
             <a:r>
-              <a:t>VO (Hilmi): Jawab kelima-lima soalan.</a:t>
+              <a:t>VO (Hilmi): Swale ialah parit cetek dan lebar yang ditanami tumbuhan, alternatif kepada longkang konkrit, yang memperlahankan aliran dan menggalakkan penyerapan.</a:t>
             </a:r>
           </a:p>
           <a:p/>
           <a:p>
             <a:r>
-              <a:t>Baris sumber: T03B03-ROW-013, T03B03-ROW-041, T03B03-ROW-048, T03B03-ROW-056, T03B03-ROW-058, T03B03-ROW-063, T03B03-ROW-076</a:t>
-            </a:r>
-          </a:p>
-          <a:p>
-            <a:r>
-              <a:t>Keputusan Bariah: A7</a:t>
+              <a:t>Baris sumber: T03B03-ROW-055, T03B03-ROW-056, T03B03-ROW-057, T03B03-ROW-059, T03B03-ROW-058, T03B03-ROW-060, T03B03-ROW-062, T03B03-ROW-061, T03B03-ROW-063</a:t>
+            </a:r>
+          </a:p>
+          <a:p>
+            <a:r>
+              <a:t>Keputusan Bariah: A1, A2</a:t>
             </a:r>
           </a:p>
           <a:p/>
           <a:p>
             <a:r>
-              <a:t>DRAFT_FOR_BARIAH_REVIEW · NOT_INSTRUCTIONALLY_APPROVED · NOT_LEARNER_FACING_FINAL</a:t>
+              <a:t>TECHNICAL_PROOF · DRAFT_FOR_BARIAH_REVIEW · NOT_INSTRUCTIONALLY_APPROVED · NOT_LEARNER_FACING_FINAL</a:t>
             </a:r>
           </a:p>
         </p:txBody>
@@ -776,24 +780,24 @@
           <a:lstStyle/>
           <a:p>
             <a:r>
-              <a:t>VO (Hilmi): Jawab kelima-lima soalan.</a:t>
+              <a:t>VO (Hilmi): Permukaan jalan akses dibina dengan kamber — kecerunan melintang dari tengah ke tepi — supaya air tidak bertakung.</a:t>
             </a:r>
           </a:p>
           <a:p/>
           <a:p>
             <a:r>
-              <a:t>Baris sumber: T03B03-ROW-013, T03B03-ROW-041, T03B03-ROW-048, T03B03-ROW-056, T03B03-ROW-058, T03B03-ROW-063, T03B03-ROW-076</a:t>
-            </a:r>
-          </a:p>
-          <a:p>
-            <a:r>
-              <a:t>Keputusan Bariah: A7</a:t>
+              <a:t>Baris sumber: T03B03-ROW-064, T03B03-ROW-065, T03B03-ROW-066, T03B03-ROW-068, T03B03-ROW-067, T03B03-ROW-069, T03B03-ROW-071, T03B03-ROW-073, T03B03-ROW-075, T03B03-ROW-070, T03B03-ROW-072, T03B03-ROW-074, T03B03-ROW-076</a:t>
+            </a:r>
+          </a:p>
+          <a:p>
+            <a:r>
+              <a:t>Keputusan Bariah: A1, A2</a:t>
             </a:r>
           </a:p>
           <a:p/>
           <a:p>
             <a:r>
-              <a:t>DRAFT_FOR_BARIAH_REVIEW · NOT_INSTRUCTIONALLY_APPROVED · NOT_LEARNER_FACING_FINAL</a:t>
+              <a:t>TECHNICAL_PROOF · DRAFT_FOR_BARIAH_REVIEW · NOT_INSTRUCTIONALLY_APPROVED · NOT_LEARNER_FACING_FINAL</a:t>
             </a:r>
           </a:p>
         </p:txBody>
@@ -863,6 +867,354 @@
           <a:lstStyle/>
           <a:p>
             <a:r>
+              <a:t>VO (Hilmi): Permukaan jalan akses dibina dengan kamber — kecerunan melintang dari tengah ke tepi — supaya air tidak bertakung.</a:t>
+            </a:r>
+          </a:p>
+          <a:p/>
+          <a:p>
+            <a:r>
+              <a:t>Baris sumber: T03B03-ROW-064, T03B03-ROW-065, T03B03-ROW-066, T03B03-ROW-068, T03B03-ROW-067, T03B03-ROW-069, T03B03-ROW-071, T03B03-ROW-073, T03B03-ROW-075, T03B03-ROW-070, T03B03-ROW-072, T03B03-ROW-074, T03B03-ROW-076</a:t>
+            </a:r>
+          </a:p>
+          <a:p>
+            <a:r>
+              <a:t>Keputusan Bariah: A1, A2</a:t>
+            </a:r>
+          </a:p>
+          <a:p/>
+          <a:p>
+            <a:r>
+              <a:t>TECHNICAL_PROOF · DRAFT_FOR_BARIAH_REVIEW · NOT_INSTRUCTIONALLY_APPROVED · NOT_LEARNER_FACING_FINAL</a:t>
+            </a:r>
+          </a:p>
+        </p:txBody>
+      </p:sp>
+      <p:sp>
+        <p:nvSpPr>
+          <p:cNvPr id="4" name="Slide Number Placeholder 3"/>
+          <p:cNvSpPr>
+            <a:spLocks noGrp="1"/>
+          </p:cNvSpPr>
+          <p:nvPr>
+            <p:ph type="sldNum" idx="5" sz="quarter"/>
+          </p:nvPr>
+        </p:nvSpPr>
+        <p:spPr/>
+      </p:sp>
+    </p:spTree>
+  </p:cSld>
+  <p:clrMapOvr>
+    <a:masterClrMapping/>
+  </p:clrMapOvr>
+</p:notes>
+</file>
+
+<file path=ppt/notesSlides/notesSlide14.xml><?xml version="1.0" encoding="utf-8"?>
+<p:notes xmlns:a="http://schemas.openxmlformats.org/drawingml/2006/main" xmlns:p="http://schemas.openxmlformats.org/presentationml/2006/main" xmlns:r="http://schemas.openxmlformats.org/officeDocument/2006/relationships">
+  <p:cSld>
+    <p:spTree>
+      <p:nvGrpSpPr>
+        <p:cNvPr id="1" name=""/>
+        <p:cNvGrpSpPr/>
+        <p:nvPr/>
+      </p:nvGrpSpPr>
+      <p:grpSpPr>
+        <a:xfrm>
+          <a:off x="0" y="0"/>
+          <a:ext cx="0" cy="0"/>
+          <a:chOff x="0" y="0"/>
+          <a:chExt cx="0" cy="0"/>
+        </a:xfrm>
+      </p:grpSpPr>
+      <p:sp>
+        <p:nvSpPr>
+          <p:cNvPr id="2" name="Slide Image Placeholder 1"/>
+          <p:cNvSpPr>
+            <a:spLocks noGrp="1"/>
+          </p:cNvSpPr>
+          <p:nvPr>
+            <p:ph type="sldImg" idx="2"/>
+          </p:nvPr>
+        </p:nvSpPr>
+        <p:spPr/>
+      </p:sp>
+      <p:sp>
+        <p:nvSpPr>
+          <p:cNvPr id="3" name="Notes Placeholder 2"/>
+          <p:cNvSpPr>
+            <a:spLocks noGrp="1"/>
+          </p:cNvSpPr>
+          <p:nvPr>
+            <p:ph type="body" idx="3" sz="quarter"/>
+          </p:nvPr>
+        </p:nvSpPr>
+        <p:spPr/>
+        <p:txBody>
+          <a:bodyPr/>
+          <a:lstStyle/>
+          <a:p>
+            <a:r>
+              <a:t>VO (Hilmi): Enam komponen infrastruktur landskap dan fungsi setiap satu. Titik kegagalan yang paling kerap bagi setiap komponen. Dokumen kawalan yang mengikat kontraktor: lukisan struktur, pelan ukur, pelan saliran.</a:t>
+            </a:r>
+          </a:p>
+          <a:p/>
+          <a:p>
+            <a:r>
+              <a:t>Baris sumber: tiada — skrin struktur</a:t>
+            </a:r>
+          </a:p>
+          <a:p>
+            <a:r>
+              <a:t>Keputusan Bariah: A6</a:t>
+            </a:r>
+          </a:p>
+          <a:p/>
+          <a:p>
+            <a:r>
+              <a:t>TECHNICAL_PROOF · DRAFT_FOR_BARIAH_REVIEW · NOT_INSTRUCTIONALLY_APPROVED · NOT_LEARNER_FACING_FINAL</a:t>
+            </a:r>
+          </a:p>
+        </p:txBody>
+      </p:sp>
+      <p:sp>
+        <p:nvSpPr>
+          <p:cNvPr id="4" name="Slide Number Placeholder 3"/>
+          <p:cNvSpPr>
+            <a:spLocks noGrp="1"/>
+          </p:cNvSpPr>
+          <p:nvPr>
+            <p:ph type="sldNum" idx="5" sz="quarter"/>
+          </p:nvPr>
+        </p:nvSpPr>
+        <p:spPr/>
+      </p:sp>
+    </p:spTree>
+  </p:cSld>
+  <p:clrMapOvr>
+    <a:masterClrMapping/>
+  </p:clrMapOvr>
+</p:notes>
+</file>
+
+<file path=ppt/notesSlides/notesSlide15.xml><?xml version="1.0" encoding="utf-8"?>
+<p:notes xmlns:a="http://schemas.openxmlformats.org/drawingml/2006/main" xmlns:p="http://schemas.openxmlformats.org/presentationml/2006/main" xmlns:r="http://schemas.openxmlformats.org/officeDocument/2006/relationships">
+  <p:cSld>
+    <p:spTree>
+      <p:nvGrpSpPr>
+        <p:cNvPr id="1" name=""/>
+        <p:cNvGrpSpPr/>
+        <p:nvPr/>
+      </p:nvGrpSpPr>
+      <p:grpSpPr>
+        <a:xfrm>
+          <a:off x="0" y="0"/>
+          <a:ext cx="0" cy="0"/>
+          <a:chOff x="0" y="0"/>
+          <a:chExt cx="0" cy="0"/>
+        </a:xfrm>
+      </p:grpSpPr>
+      <p:sp>
+        <p:nvSpPr>
+          <p:cNvPr id="2" name="Slide Image Placeholder 1"/>
+          <p:cNvSpPr>
+            <a:spLocks noGrp="1"/>
+          </p:cNvSpPr>
+          <p:nvPr>
+            <p:ph type="sldImg" idx="2"/>
+          </p:nvPr>
+        </p:nvSpPr>
+        <p:spPr/>
+      </p:sp>
+      <p:sp>
+        <p:nvSpPr>
+          <p:cNvPr id="3" name="Notes Placeholder 2"/>
+          <p:cNvSpPr>
+            <a:spLocks noGrp="1"/>
+          </p:cNvSpPr>
+          <p:nvPr>
+            <p:ph type="body" idx="3" sz="quarter"/>
+          </p:nvPr>
+        </p:nvSpPr>
+        <p:spPr/>
+        <p:txBody>
+          <a:bodyPr/>
+          <a:lstStyle/>
+          <a:p>
+            <a:r>
+              <a:t>VO (Hilmi): Jawab kelima-lima soalan.</a:t>
+            </a:r>
+          </a:p>
+          <a:p/>
+          <a:p>
+            <a:r>
+              <a:t>Baris sumber: T03B03-ROW-013, T03B03-ROW-041, T03B03-ROW-048, T03B03-ROW-056, T03B03-ROW-058, T03B03-ROW-063, T03B03-ROW-076</a:t>
+            </a:r>
+          </a:p>
+          <a:p>
+            <a:r>
+              <a:t>Keputusan Bariah: A7</a:t>
+            </a:r>
+          </a:p>
+          <a:p/>
+          <a:p>
+            <a:r>
+              <a:t>TECHNICAL_PROOF · DRAFT_FOR_BARIAH_REVIEW · NOT_INSTRUCTIONALLY_APPROVED · NOT_LEARNER_FACING_FINAL</a:t>
+            </a:r>
+          </a:p>
+        </p:txBody>
+      </p:sp>
+      <p:sp>
+        <p:nvSpPr>
+          <p:cNvPr id="4" name="Slide Number Placeholder 3"/>
+          <p:cNvSpPr>
+            <a:spLocks noGrp="1"/>
+          </p:cNvSpPr>
+          <p:nvPr>
+            <p:ph type="sldNum" idx="5" sz="quarter"/>
+          </p:nvPr>
+        </p:nvSpPr>
+        <p:spPr/>
+      </p:sp>
+    </p:spTree>
+  </p:cSld>
+  <p:clrMapOvr>
+    <a:masterClrMapping/>
+  </p:clrMapOvr>
+</p:notes>
+</file>
+
+<file path=ppt/notesSlides/notesSlide16.xml><?xml version="1.0" encoding="utf-8"?>
+<p:notes xmlns:a="http://schemas.openxmlformats.org/drawingml/2006/main" xmlns:p="http://schemas.openxmlformats.org/presentationml/2006/main" xmlns:r="http://schemas.openxmlformats.org/officeDocument/2006/relationships">
+  <p:cSld>
+    <p:spTree>
+      <p:nvGrpSpPr>
+        <p:cNvPr id="1" name=""/>
+        <p:cNvGrpSpPr/>
+        <p:nvPr/>
+      </p:nvGrpSpPr>
+      <p:grpSpPr>
+        <a:xfrm>
+          <a:off x="0" y="0"/>
+          <a:ext cx="0" cy="0"/>
+          <a:chOff x="0" y="0"/>
+          <a:chExt cx="0" cy="0"/>
+        </a:xfrm>
+      </p:grpSpPr>
+      <p:sp>
+        <p:nvSpPr>
+          <p:cNvPr id="2" name="Slide Image Placeholder 1"/>
+          <p:cNvSpPr>
+            <a:spLocks noGrp="1"/>
+          </p:cNvSpPr>
+          <p:nvPr>
+            <p:ph type="sldImg" idx="2"/>
+          </p:nvPr>
+        </p:nvSpPr>
+        <p:spPr/>
+      </p:sp>
+      <p:sp>
+        <p:nvSpPr>
+          <p:cNvPr id="3" name="Notes Placeholder 2"/>
+          <p:cNvSpPr>
+            <a:spLocks noGrp="1"/>
+          </p:cNvSpPr>
+          <p:nvPr>
+            <p:ph type="body" idx="3" sz="quarter"/>
+          </p:nvPr>
+        </p:nvSpPr>
+        <p:spPr/>
+        <p:txBody>
+          <a:bodyPr/>
+          <a:lstStyle/>
+          <a:p>
+            <a:r>
+              <a:t>VO (Hilmi): Jawab kelima-lima soalan.</a:t>
+            </a:r>
+          </a:p>
+          <a:p/>
+          <a:p>
+            <a:r>
+              <a:t>Baris sumber: T03B03-ROW-013, T03B03-ROW-041, T03B03-ROW-048, T03B03-ROW-056, T03B03-ROW-058, T03B03-ROW-063, T03B03-ROW-076</a:t>
+            </a:r>
+          </a:p>
+          <a:p>
+            <a:r>
+              <a:t>Keputusan Bariah: A7</a:t>
+            </a:r>
+          </a:p>
+          <a:p/>
+          <a:p>
+            <a:r>
+              <a:t>TECHNICAL_PROOF · DRAFT_FOR_BARIAH_REVIEW · NOT_INSTRUCTIONALLY_APPROVED · NOT_LEARNER_FACING_FINAL</a:t>
+            </a:r>
+          </a:p>
+        </p:txBody>
+      </p:sp>
+      <p:sp>
+        <p:nvSpPr>
+          <p:cNvPr id="4" name="Slide Number Placeholder 3"/>
+          <p:cNvSpPr>
+            <a:spLocks noGrp="1"/>
+          </p:cNvSpPr>
+          <p:nvPr>
+            <p:ph type="sldNum" idx="5" sz="quarter"/>
+          </p:nvPr>
+        </p:nvSpPr>
+        <p:spPr/>
+      </p:sp>
+    </p:spTree>
+  </p:cSld>
+  <p:clrMapOvr>
+    <a:masterClrMapping/>
+  </p:clrMapOvr>
+</p:notes>
+</file>
+
+<file path=ppt/notesSlides/notesSlide17.xml><?xml version="1.0" encoding="utf-8"?>
+<p:notes xmlns:a="http://schemas.openxmlformats.org/drawingml/2006/main" xmlns:p="http://schemas.openxmlformats.org/presentationml/2006/main" xmlns:r="http://schemas.openxmlformats.org/officeDocument/2006/relationships">
+  <p:cSld>
+    <p:spTree>
+      <p:nvGrpSpPr>
+        <p:cNvPr id="1" name=""/>
+        <p:cNvGrpSpPr/>
+        <p:nvPr/>
+      </p:nvGrpSpPr>
+      <p:grpSpPr>
+        <a:xfrm>
+          <a:off x="0" y="0"/>
+          <a:ext cx="0" cy="0"/>
+          <a:chOff x="0" y="0"/>
+          <a:chExt cx="0" cy="0"/>
+        </a:xfrm>
+      </p:grpSpPr>
+      <p:sp>
+        <p:nvSpPr>
+          <p:cNvPr id="2" name="Slide Image Placeholder 1"/>
+          <p:cNvSpPr>
+            <a:spLocks noGrp="1"/>
+          </p:cNvSpPr>
+          <p:nvPr>
+            <p:ph type="sldImg" idx="2"/>
+          </p:nvPr>
+        </p:nvSpPr>
+        <p:spPr/>
+      </p:sp>
+      <p:sp>
+        <p:nvSpPr>
+          <p:cNvPr id="3" name="Notes Placeholder 2"/>
+          <p:cNvSpPr>
+            <a:spLocks noGrp="1"/>
+          </p:cNvSpPr>
+          <p:nvPr>
+            <p:ph type="body" idx="3" sz="quarter"/>
+          </p:nvPr>
+        </p:nvSpPr>
+        <p:spPr/>
+        <p:txBody>
+          <a:bodyPr/>
+          <a:lstStyle/>
+          <a:p>
+            <a:r>
               <a:t>VO (Hilmi): Tamat Bahagian 3. Teruskan pembelajaran ke bahagian seterusnya</a:t>
             </a:r>
           </a:p>
@@ -880,7 +1232,7 @@
           <a:p/>
           <a:p>
             <a:r>
-              <a:t>DRAFT_FOR_BARIAH_REVIEW · NOT_INSTRUCTIONALLY_APPROVED · NOT_LEARNER_FACING_FINAL</a:t>
+              <a:t>TECHNICAL_PROOF · DRAFT_FOR_BARIAH_REVIEW · NOT_INSTRUCTIONALLY_APPROVED · NOT_LEARNER_FACING_FINAL</a:t>
             </a:r>
           </a:p>
         </p:txBody>
@@ -967,7 +1319,7 @@
           <a:p/>
           <a:p>
             <a:r>
-              <a:t>DRAFT_FOR_BARIAH_REVIEW · NOT_INSTRUCTIONALLY_APPROVED · NOT_LEARNER_FACING_FINAL</a:t>
+              <a:t>TECHNICAL_PROOF · DRAFT_FOR_BARIAH_REVIEW · NOT_INSTRUCTIONALLY_APPROVED · NOT_LEARNER_FACING_FINAL</a:t>
             </a:r>
           </a:p>
         </p:txBody>
@@ -1054,7 +1406,7 @@
           <a:p/>
           <a:p>
             <a:r>
-              <a:t>DRAFT_FOR_BARIAH_REVIEW · NOT_INSTRUCTIONALLY_APPROVED · NOT_LEARNER_FACING_FINAL</a:t>
+              <a:t>TECHNICAL_PROOF · DRAFT_FOR_BARIAH_REVIEW · NOT_INSTRUCTIONALLY_APPROVED · NOT_LEARNER_FACING_FINAL</a:t>
             </a:r>
           </a:p>
         </p:txBody>
@@ -1141,7 +1493,7 @@
           <a:p/>
           <a:p>
             <a:r>
-              <a:t>DRAFT_FOR_BARIAH_REVIEW · NOT_INSTRUCTIONALLY_APPROVED · NOT_LEARNER_FACING_FINAL</a:t>
+              <a:t>TECHNICAL_PROOF · DRAFT_FOR_BARIAH_REVIEW · NOT_INSTRUCTIONALLY_APPROVED · NOT_LEARNER_FACING_FINAL</a:t>
             </a:r>
           </a:p>
         </p:txBody>
@@ -1211,13 +1563,13 @@
           <a:lstStyle/>
           <a:p>
             <a:r>
-              <a:t>VO (Hilmi): Sistem saliran bawah tanah mesti disambungkan ke saluran keluar yang berfungsi.</a:t>
+              <a:t>VO (Hilmi): Busut tanah dibina berlapis, setiap lapisan tidak melebihi 300mm tebal, dan setiap lapisan dipadatkan. Kecerunan busut dibentuk mengikut nisbah yang ditetapkan dalam lukisan, contohnya 1:3. Bahan timbus mesti bebas daripada sisa binaan, akar kayu dan batu besar.</a:t>
             </a:r>
           </a:p>
           <a:p/>
           <a:p>
             <a:r>
-              <a:t>Baris sumber: T03B03-ROW-016, T03B03-ROW-017, T03B03-ROW-019, T03B03-ROW-018, T03B03-ROW-020, T03B03-ROW-022, T03B03-ROW-030, T03B03-ROW-021, T03B03-ROW-023, T03B03-ROW-024, T03B03-ROW-025, T03B03-ROW-026, T03B03-ROW-027, T03B03-ROW-028, T03B03-ROW-029, T03B03-ROW-031</a:t>
+              <a:t>Baris sumber: T03B03-ROW-002, T03B03-ROW-003, T03B03-ROW-007, T03B03-ROW-004, T03B03-ROW-005, T03B03-ROW-006, T03B03-ROW-008, T03B03-ROW-010, T03B03-ROW-012, T03B03-ROW-014, T03B03-ROW-009, T03B03-ROW-011, T03B03-ROW-013, T03B03-ROW-015</a:t>
             </a:r>
           </a:p>
           <a:p>
@@ -1228,7 +1580,7 @@
           <a:p/>
           <a:p>
             <a:r>
-              <a:t>DRAFT_FOR_BARIAH_REVIEW · NOT_INSTRUCTIONALLY_APPROVED · NOT_LEARNER_FACING_FINAL</a:t>
+              <a:t>TECHNICAL_PROOF · DRAFT_FOR_BARIAH_REVIEW · NOT_INSTRUCTIONALLY_APPROVED · NOT_LEARNER_FACING_FINAL</a:t>
             </a:r>
           </a:p>
         </p:txBody>
@@ -1298,13 +1650,13 @@
           <a:lstStyle/>
           <a:p>
             <a:r>
-              <a:t>VO (Hilmi): Dinding penahan mesti dibina mematuhi sepenuhnya lukisan struktur jurutera bertauliah; tapak asas adalah komponen paling kritikal. Kegagalan dinding penahan selalunya berpunca daripada tekanan air, jadi sistem perparitan di belakang dinding adalah wajib.</a:t>
+              <a:t>VO (Hilmi): Sistem saliran bawah tanah mesti disambungkan ke saluran keluar yang berfungsi.</a:t>
             </a:r>
           </a:p>
           <a:p/>
           <a:p>
             <a:r>
-              <a:t>Baris sumber: T03B03-ROW-032, T03B03-ROW-033, T03B03-ROW-035, T03B03-ROW-034, T03B03-ROW-036, T03B03-ROW-038, T03B03-ROW-040, T03B03-ROW-037, T03B03-ROW-039, T03B03-ROW-041</a:t>
+              <a:t>Baris sumber: T03B03-ROW-016, T03B03-ROW-017, T03B03-ROW-019, T03B03-ROW-018, T03B03-ROW-020, T03B03-ROW-022, T03B03-ROW-030, T03B03-ROW-021, T03B03-ROW-023, T03B03-ROW-024, T03B03-ROW-025, T03B03-ROW-026, T03B03-ROW-027, T03B03-ROW-028, T03B03-ROW-029, T03B03-ROW-031</a:t>
             </a:r>
           </a:p>
           <a:p>
@@ -1315,7 +1667,7 @@
           <a:p/>
           <a:p>
             <a:r>
-              <a:t>DRAFT_FOR_BARIAH_REVIEW · NOT_INSTRUCTIONALLY_APPROVED · NOT_LEARNER_FACING_FINAL</a:t>
+              <a:t>TECHNICAL_PROOF · DRAFT_FOR_BARIAH_REVIEW · NOT_INSTRUCTIONALLY_APPROVED · NOT_LEARNER_FACING_FINAL</a:t>
             </a:r>
           </a:p>
         </p:txBody>
@@ -1385,13 +1737,13 @@
           <a:lstStyle/>
           <a:p>
             <a:r>
-              <a:t>VO (Hilmi): Jajaran pagar mesti ditanda mengikut Pelan Ukur Sempadan untuk mengelakkan pencerobohan tanah.</a:t>
+              <a:t>VO (Hilmi): Sistem saliran bawah tanah mesti disambungkan ke saluran keluar yang berfungsi.</a:t>
             </a:r>
           </a:p>
           <a:p/>
           <a:p>
             <a:r>
-              <a:t>Baris sumber: T03B03-ROW-042, T03B03-ROW-043, T03B03-ROW-044, T03B03-ROW-046, T03B03-ROW-045, T03B03-ROW-047, T03B03-ROW-049, T03B03-ROW-051, T03B03-ROW-053, T03B03-ROW-048, T03B03-ROW-050, T03B03-ROW-052, T03B03-ROW-054</a:t>
+              <a:t>Baris sumber: T03B03-ROW-016, T03B03-ROW-017, T03B03-ROW-019, T03B03-ROW-018, T03B03-ROW-020, T03B03-ROW-022, T03B03-ROW-030, T03B03-ROW-021, T03B03-ROW-023, T03B03-ROW-024, T03B03-ROW-025, T03B03-ROW-026, T03B03-ROW-027, T03B03-ROW-028, T03B03-ROW-029, T03B03-ROW-031</a:t>
             </a:r>
           </a:p>
           <a:p>
@@ -1402,7 +1754,7 @@
           <a:p/>
           <a:p>
             <a:r>
-              <a:t>DRAFT_FOR_BARIAH_REVIEW · NOT_INSTRUCTIONALLY_APPROVED · NOT_LEARNER_FACING_FINAL</a:t>
+              <a:t>TECHNICAL_PROOF · DRAFT_FOR_BARIAH_REVIEW · NOT_INSTRUCTIONALLY_APPROVED · NOT_LEARNER_FACING_FINAL</a:t>
             </a:r>
           </a:p>
         </p:txBody>
@@ -1472,13 +1824,13 @@
           <a:lstStyle/>
           <a:p>
             <a:r>
-              <a:t>VO (Hilmi): Swale ialah parit cetek dan lebar yang ditanami tumbuhan, alternatif kepada longkang konkrit, yang memperlahankan aliran dan menggalakkan penyerapan.</a:t>
+              <a:t>VO (Hilmi): Dinding penahan mesti dibina mematuhi sepenuhnya lukisan struktur jurutera bertauliah; tapak asas adalah komponen paling kritikal. Kegagalan dinding penahan selalunya berpunca daripada tekanan air, jadi sistem perparitan di belakang dinding adalah wajib.</a:t>
             </a:r>
           </a:p>
           <a:p/>
           <a:p>
             <a:r>
-              <a:t>Baris sumber: T03B03-ROW-055, T03B03-ROW-056, T03B03-ROW-057, T03B03-ROW-059, T03B03-ROW-058, T03B03-ROW-060, T03B03-ROW-062, T03B03-ROW-061, T03B03-ROW-063</a:t>
+              <a:t>Baris sumber: T03B03-ROW-032, T03B03-ROW-033, T03B03-ROW-035, T03B03-ROW-034, T03B03-ROW-036, T03B03-ROW-038, T03B03-ROW-040, T03B03-ROW-037, T03B03-ROW-039, T03B03-ROW-041</a:t>
             </a:r>
           </a:p>
           <a:p>
@@ -1489,7 +1841,7 @@
           <a:p/>
           <a:p>
             <a:r>
-              <a:t>DRAFT_FOR_BARIAH_REVIEW · NOT_INSTRUCTIONALLY_APPROVED · NOT_LEARNER_FACING_FINAL</a:t>
+              <a:t>TECHNICAL_PROOF · DRAFT_FOR_BARIAH_REVIEW · NOT_INSTRUCTIONALLY_APPROVED · NOT_LEARNER_FACING_FINAL</a:t>
             </a:r>
           </a:p>
         </p:txBody>
@@ -1559,13 +1911,13 @@
           <a:lstStyle/>
           <a:p>
             <a:r>
-              <a:t>VO (Hilmi): Permukaan jalan akses dibina dengan kamber — kecerunan melintang dari tengah ke tepi — supaya air tidak bertakung.</a:t>
+              <a:t>VO (Hilmi): Jajaran pagar mesti ditanda mengikut Pelan Ukur Sempadan untuk mengelakkan pencerobohan tanah.</a:t>
             </a:r>
           </a:p>
           <a:p/>
           <a:p>
             <a:r>
-              <a:t>Baris sumber: T03B03-ROW-064, T03B03-ROW-065, T03B03-ROW-066, T03B03-ROW-068, T03B03-ROW-067, T03B03-ROW-069, T03B03-ROW-071, T03B03-ROW-073, T03B03-ROW-075, T03B03-ROW-070, T03B03-ROW-072, T03B03-ROW-074, T03B03-ROW-076</a:t>
+              <a:t>Baris sumber: T03B03-ROW-042, T03B03-ROW-043, T03B03-ROW-044, T03B03-ROW-046, T03B03-ROW-045, T03B03-ROW-047, T03B03-ROW-049, T03B03-ROW-051, T03B03-ROW-053, T03B03-ROW-048, T03B03-ROW-050, T03B03-ROW-052, T03B03-ROW-054</a:t>
             </a:r>
           </a:p>
           <a:p>
@@ -1576,7 +1928,7 @@
           <a:p/>
           <a:p>
             <a:r>
-              <a:t>DRAFT_FOR_BARIAH_REVIEW · NOT_INSTRUCTIONALLY_APPROVED · NOT_LEARNER_FACING_FINAL</a:t>
+              <a:t>TECHNICAL_PROOF · DRAFT_FOR_BARIAH_REVIEW · NOT_INSTRUCTIONALLY_APPROVED · NOT_LEARNER_FACING_FINAL</a:t>
             </a:r>
           </a:p>
         </p:txBody>
@@ -4600,7 +4952,7 @@
         </p:spPr>
         <p:txBody>
           <a:bodyPr wrap="square" lIns="0" rIns="0" tIns="0" bIns="0">
-            <a:spAutoFit/>
+            <a:noAutofit/>
           </a:bodyPr>
           <a:lstStyle/>
           <a:p>
@@ -4660,7 +5012,7 @@
                 </a:solidFill>
                 <a:latin typeface="Arial"/>
               </a:rPr>
-              <a:t>DRAFT_FOR_BARIAH_REVIEW · NOT_INSTRUCTIONALLY_APPROVED · NOT_LEARNER_FACING_FINAL</a:t>
+              <a:t>TECHNICAL_PROOF · DRAFT_FOR_BARIAH_REVIEW · NOT_INSTRUCTIONALLY_APPROVED · NOT_LEARNER_FACING_FINAL</a:t>
             </a:r>
           </a:p>
           <a:p>
@@ -4744,7 +5096,7 @@
                 </a:solidFill>
                 <a:latin typeface="Arial"/>
               </a:rPr>
-              <a:t>Warna teks: biru = baris modul terkawal (S = verbatim, S~ = ayat pertama) · hijau = keputusan Bariah · ungu = draf CAIR (d = kuiz, r = beat Rumusan) · merah = ruang menunggu keputusan · kelabu = elemen antara muka</a:t>
+              <a:t>[S] baris modul verbatim · [S~] ayat pertama baris modul · [A] keputusan Bariah · [D] draf kuiz CAIR · [R] beat Rumusan CAIR · [P] menunggu keputusan · [U] elemen antara muka</a:t>
             </a:r>
           </a:p>
         </p:txBody>
@@ -4785,7 +5137,7 @@
         </p:spPr>
         <p:txBody>
           <a:bodyPr wrap="square" lIns="0" rIns="0" tIns="0" bIns="0">
-            <a:spAutoFit/>
+            <a:noAutofit/>
           </a:bodyPr>
           <a:lstStyle/>
           <a:p>
@@ -4797,7 +5149,7 @@
                 </a:solidFill>
                 <a:latin typeface="Arial"/>
               </a:rPr>
-              <a:t>T03B03-S09   ·   click-to-reveal   ·   CONTENT</a:t>
+              <a:t>T03B03-S07   ·   click-to-reveal   ·   CONTENT</a:t>
             </a:r>
           </a:p>
           <a:p>
@@ -4809,7 +5161,7 @@
                 </a:solidFill>
                 <a:latin typeface="Arial"/>
               </a:rPr>
-              <a:t>Jalan akses</a:t>
+              <a:t>Fencing   ·   halaman 1/2</a:t>
             </a:r>
           </a:p>
         </p:txBody>
@@ -4843,7 +5195,7 @@
           <a:fillRef idx="3">
             <a:schemeClr val="accent1"/>
           </a:fillRef>
-          <a:effectRef idx="2">
+          <a:effectRef idx="0">
             <a:schemeClr val="accent1"/>
           </a:effectRef>
           <a:fontRef idx="minor">
@@ -4851,7 +5203,9 @@
           </a:fontRef>
         </p:style>
         <p:txBody>
-          <a:bodyPr rtlCol="0" anchor="ctr"/>
+          <a:bodyPr rtlCol="0" anchor="ctr">
+            <a:noAutofit/>
+          </a:bodyPr>
           <a:lstStyle/>
           <a:p>
             <a:pPr algn="ctr"/>
@@ -4876,7 +5230,7 @@
         </p:spPr>
         <p:txBody>
           <a:bodyPr wrap="square" lIns="0" rIns="0" tIns="0" bIns="0">
-            <a:spAutoFit/>
+            <a:noAutofit/>
           </a:bodyPr>
           <a:lstStyle/>
           <a:p>
@@ -4900,7 +5254,7 @@
                 </a:solidFill>
                 <a:latin typeface="Arial"/>
               </a:rPr>
-              <a:t>S · Jalan akses</a:t>
+              <a:t>[S] Fencing</a:t>
             </a:r>
           </a:p>
           <a:p>
@@ -4912,7 +5266,7 @@
                 </a:solidFill>
                 <a:latin typeface="Arial"/>
               </a:rPr>
-              <a:t>S · Jalan akses dalam konteks landskap menyediakan laluan untuk kenderaan penyelenggaraan atau laluan pejalan kaki utama.</a:t>
+              <a:t>[S] Pagar dibina untuk tujuan keselamatan, menandakan sempadan, privasi, atau sebagai elemen hiasan.</a:t>
             </a:r>
           </a:p>
           <a:p>
@@ -4924,7 +5278,7 @@
                 </a:solidFill>
                 <a:latin typeface="Arial"/>
               </a:rPr>
-              <a:t>S~ · Permukaan jalan akses dibina dengan kamber — kecerunan melintang dari tengah ke tepi — supaya air tidak bertakung.</a:t>
+              <a:t>[S~] Jajaran pagar mesti ditanda mengikut Pelan Ukur Sempadan untuk mengelakkan pencerobohan tanah.</a:t>
             </a:r>
           </a:p>
           <a:p>
@@ -4936,7 +5290,7 @@
                 </a:solidFill>
                 <a:latin typeface="Arial"/>
               </a:rPr>
-              <a:t>S · Fungsi</a:t>
+              <a:t>[S] Fungsi</a:t>
             </a:r>
           </a:p>
           <a:p>
@@ -4948,7 +5302,7 @@
                 </a:solidFill>
                 <a:latin typeface="Arial"/>
               </a:rPr>
-              <a:t>S · Menyediakan perhubungan dan akses ke seluruh kawasan tapak.</a:t>
+              <a:t>[S] Mengawal akses, menetapkan sempadan hartanah, dan meningkatkan keselamatan.</a:t>
             </a:r>
           </a:p>
           <a:p>
@@ -4960,7 +5314,7 @@
                 </a:solidFill>
                 <a:latin typeface="Arial"/>
               </a:rPr>
-              <a:t>S · Fokus Utama Kontraktor</a:t>
+              <a:t>[S] Fokus Utama Kontraktor</a:t>
             </a:r>
           </a:p>
           <a:p>
@@ -4972,7 +5326,7 @@
                 </a:solidFill>
                 <a:latin typeface="Arial"/>
               </a:rPr>
-              <a:t>S · Penyediaan Tapak Asas (Sub-base)</a:t>
+              <a:t>[S] Penjajaran Sempadan</a:t>
             </a:r>
           </a:p>
           <a:p>
@@ -4984,7 +5338,7 @@
                 </a:solidFill>
                 <a:latin typeface="Arial"/>
               </a:rPr>
-              <a:t>S · Kualiti jalan bergantung pada tapak asasnya. Lapisan tanah asal mesti dipadatkan, diikuti dengan lapisan batu kasaran (crusher run) yang dipadatkan mengikut ketebalan yang ditetapkan dalam lukisan.</a:t>
+              <a:t>[S] Jajaran pagar mesti ditanda mengikut Pelan Ukur Sempadan untuk mengelakkan isu pencerobohan tanah.</a:t>
             </a:r>
           </a:p>
           <a:p>
@@ -4996,7 +5350,7 @@
                 </a:solidFill>
                 <a:latin typeface="Arial"/>
               </a:rPr>
-              <a:t>S · Pemasangan Bebendul (Kerb)</a:t>
+              <a:t>[S] Pemasangan Tiang</a:t>
             </a:r>
           </a:p>
           <a:p>
@@ -5008,7 +5362,7 @@
                 </a:solidFill>
                 <a:latin typeface="Arial"/>
               </a:rPr>
-              <a:t>S · Bebendul konkrit dipasang di kedua-dua belah jalan untuk menetapkan jajaran dan menahan lapisan permukaan.</a:t>
+              <a:t>[S] Kestabilan pagar bergantung pada tiangnya. Tiang mesti dipasang pada jarak yang seragam dan ditanam dalam tapak konkrit dengan saiz dan kedalaman yang mencukupi seperti dalam spesifikasi.</a:t>
             </a:r>
           </a:p>
           <a:p>
@@ -5020,7 +5374,7 @@
                 </a:solidFill>
                 <a:latin typeface="Arial"/>
               </a:rPr>
-              <a:t>S · Lapisan Permukaan</a:t>
+              <a:t>[S] Ketegangan Pemasangan</a:t>
             </a:r>
           </a:p>
           <a:p>
@@ -5032,43 +5386,7 @@
                 </a:solidFill>
                 <a:latin typeface="Arial"/>
               </a:rPr>
-              <a:t>S · Permukaan akhir boleh terdiri daripada pelbagai bahan seperti premix/asphalt, blok turapan (interlocking pavers), atau konkrit bertetulang, dan mesti dibina mengikut spesifikasi yang betul.</a:t>
-            </a:r>
-          </a:p>
-          <a:p>
-            <a:pPr algn="l" lvl="1"/>
-            <a:r>
-              <a:rPr sz="1400" b="0" i="0">
-                <a:solidFill>
-                  <a:srgbClr val="0D47A1"/>
-                </a:solidFill>
-                <a:latin typeface="Arial"/>
-              </a:rPr>
-              <a:t>S · Kamber (Camber)</a:t>
-            </a:r>
-          </a:p>
-          <a:p>
-            <a:pPr algn="l" lvl="2"/>
-            <a:r>
-              <a:rPr sz="1400" b="0" i="0">
-                <a:solidFill>
-                  <a:srgbClr val="0D47A1"/>
-                </a:solidFill>
-                <a:latin typeface="Arial"/>
-              </a:rPr>
-              <a:t>S · Permukaan jalan mesti dibina dengan sedikit kecerunan melintang dari bahagian tengah ke tepi untuk memastikan air hujan mengalir ke sistem perparitan.</a:t>
-            </a:r>
-          </a:p>
-          <a:p>
-            <a:pPr algn="l"/>
-            <a:r>
-              <a:rPr sz="1200" b="0" i="0">
-                <a:solidFill>
-                  <a:srgbClr val="6B6B6B"/>
-                </a:solidFill>
-                <a:latin typeface="Arial"/>
-              </a:rPr>
-              <a:t>u · Klik setiap tajuk untuk memaparkan maklumat.</a:t>
+              <a:t>[S] Bagi pagar jenis jejaring (chain-link) atau BRC, ia mesti ditegangkan dengan sempurna untuk mengelakkannya daripada melendut.</a:t>
             </a:r>
           </a:p>
         </p:txBody>
@@ -5091,7 +5409,7 @@
         </p:spPr>
         <p:txBody>
           <a:bodyPr wrap="square" lIns="0" rIns="0" tIns="0" bIns="0">
-            <a:spAutoFit/>
+            <a:noAutofit/>
           </a:bodyPr>
           <a:lstStyle/>
           <a:p>
@@ -5127,7 +5445,7 @@
                 </a:solidFill>
                 <a:latin typeface="Arial"/>
               </a:rPr>
-              <a:t>1. Penyediaan Tapak Asas (Sub-base)</a:t>
+              <a:t>1. Penjajaran Sempadan</a:t>
             </a:r>
           </a:p>
           <a:p>
@@ -5139,7 +5457,7 @@
                 </a:solidFill>
                 <a:latin typeface="Arial"/>
               </a:rPr>
-              <a:t>2. Pemasangan Bebendul (Kerb)</a:t>
+              <a:t>2. Pemasangan Tiang</a:t>
             </a:r>
           </a:p>
           <a:p>
@@ -5151,7 +5469,7 @@
                 </a:solidFill>
                 <a:latin typeface="Arial"/>
               </a:rPr>
-              <a:t>3. Lapisan Permukaan</a:t>
+              <a:t>3. Ketegangan Pemasangan</a:t>
             </a:r>
           </a:p>
           <a:p>
@@ -5163,7 +5481,7 @@
                 </a:solidFill>
                 <a:latin typeface="Arial"/>
               </a:rPr>
-              <a:t>4. Kamber (Camber)</a:t>
+              <a:t>4. Kemasan Anti-Karat</a:t>
             </a:r>
           </a:p>
           <a:p>
@@ -5193,49 +5511,37 @@
           <a:p>
             <a:pPr algn="l"/>
             <a:r>
-              <a:rPr sz="1000" b="0" i="0">
+              <a:rPr sz="1000" b="0" i="1">
+                <a:solidFill>
+                  <a:srgbClr val="6B6B6B"/>
+                </a:solidFill>
+                <a:latin typeface="Arial"/>
+              </a:rPr>
+              <a:t>Tiada visual khusus</a:t>
+            </a:r>
+          </a:p>
+          <a:p>
+            <a:pPr algn="l"/>
+            <a:r>
+              <a:rPr sz="800" b="0" i="0">
                 <a:solidFill>
                   <a:srgbClr val="1A1A1A"/>
                 </a:solidFill>
                 <a:latin typeface="Arial"/>
               </a:rPr>
-              <a:t>Susunan lapisan jalan akses: sub-base, bebendul, permukaan, kamber</a:t>
-            </a:r>
-          </a:p>
-          <a:p>
-            <a:pPr algn="l"/>
-            <a:r>
-              <a:rPr sz="900" b="0" i="0">
-                <a:solidFill>
-                  <a:srgbClr val="6B6B6B"/>
-                </a:solidFill>
-                <a:latin typeface="Arial"/>
-              </a:rPr>
-              <a:t>Tiada rajah sumber — subjek calon sahaja</a:t>
-            </a:r>
-          </a:p>
-          <a:p>
-            <a:pPr algn="l"/>
-            <a:r>
-              <a:rPr sz="900" b="1" i="0">
-                <a:solidFill>
-                  <a:srgbClr val="B71C1C"/>
-                </a:solidFill>
-                <a:latin typeface="Arial"/>
-              </a:rPr>
-              <a:t>SUBJEK VISUAL: PENDING_BARIAH_UNIT_REVIEW</a:t>
-            </a:r>
-          </a:p>
-          <a:p>
-            <a:pPr algn="l"/>
-            <a:r>
-              <a:rPr sz="900" b="1" i="0">
-                <a:solidFill>
-                  <a:srgbClr val="B71C1C"/>
-                </a:solidFill>
-                <a:latin typeface="Arial"/>
-              </a:rPr>
-              <a:t>ASET VISUAL BELUM DIHASILKAN — NOT_MMD_ASSET</a:t>
+              <a:t/>
+            </a:r>
+          </a:p>
+          <a:p>
+            <a:pPr algn="l"/>
+            <a:r>
+              <a:rPr sz="1000" b="1" i="0">
+                <a:solidFill>
+                  <a:srgbClr val="6B6B6B"/>
+                </a:solidFill>
+                <a:latin typeface="Arial"/>
+              </a:rPr>
+              <a:t>SUMBER DAN KEPUTUSAN</a:t>
             </a:r>
           </a:p>
           <a:p>
@@ -5243,35 +5549,11 @@
             <a:r>
               <a:rPr sz="800" b="0" i="0">
                 <a:solidFill>
-                  <a:srgbClr val="1A1A1A"/>
-                </a:solidFill>
-                <a:latin typeface="Arial"/>
-              </a:rPr>
-              <a:t/>
-            </a:r>
-          </a:p>
-          <a:p>
-            <a:pPr algn="l"/>
-            <a:r>
-              <a:rPr sz="1000" b="1" i="0">
-                <a:solidFill>
-                  <a:srgbClr val="6B6B6B"/>
-                </a:solidFill>
-                <a:latin typeface="Arial"/>
-              </a:rPr>
-              <a:t>SUMBER DAN KEPUTUSAN</a:t>
-            </a:r>
-          </a:p>
-          <a:p>
-            <a:pPr algn="l"/>
-            <a:r>
-              <a:rPr sz="800" b="0" i="0">
-                <a:solidFill>
                   <a:srgbClr val="0D47A1"/>
                 </a:solidFill>
                 <a:latin typeface="Arial"/>
               </a:rPr>
-              <a:t>Baris modul: T03B03-ROW-064, T03B03-ROW-065, T03B03-ROW-066, T03B03-ROW-068, T03B03-ROW-067, T03B03-ROW-069, T03B03-ROW-071, T03B03-ROW-073, T03B03-ROW-075, T03B03-ROW-070 (+3)</a:t>
+              <a:t>Baris modul: T03B03-ROW-042, T03B03-ROW-043, T03B03-ROW-044, T03B03-ROW-046, T03B03-ROW-045, T03B03-ROW-047, T03B03-ROW-049, T03B03-ROW-051, T03B03-ROW-053, T03B03-ROW-048 (+3)</a:t>
             </a:r>
           </a:p>
           <a:p>
@@ -5306,7 +5588,7 @@
         </p:spPr>
         <p:txBody>
           <a:bodyPr wrap="square" lIns="0" rIns="0" tIns="0" bIns="0">
-            <a:spAutoFit/>
+            <a:noAutofit/>
           </a:bodyPr>
           <a:lstStyle/>
           <a:p>
@@ -5318,7 +5600,7 @@
                 </a:solidFill>
                 <a:latin typeface="Arial"/>
               </a:rPr>
-              <a:t>K5-PL06-T03-B03 · skrin 9 daripada 12   ·   DRAFT_FOR_BARIAH_REVIEW · NOT_INSTRUCTIONALLY_APPROVED · NOT_LEARNER_FACING_FINAL</a:t>
+              <a:t>K5-PL06-T03-B03 · skrin 7 daripada 12  ·  halaman 1/2   ·   TECHNICAL_PROOF · DRAFT_FOR_BARIAH_REVIEW · NOT_INSTRUCTIONALLY_APPROVED · NOT_LEARNER_FACING_FINAL</a:t>
             </a:r>
           </a:p>
         </p:txBody>
@@ -5359,7 +5641,7 @@
         </p:spPr>
         <p:txBody>
           <a:bodyPr wrap="square" lIns="0" rIns="0" tIns="0" bIns="0">
-            <a:spAutoFit/>
+            <a:noAutofit/>
           </a:bodyPr>
           <a:lstStyle/>
           <a:p>
@@ -5371,7 +5653,7 @@
                 </a:solidFill>
                 <a:latin typeface="Arial"/>
               </a:rPr>
-              <a:t>T03B03-S10   ·   static content   ·   RUMUSAN</a:t>
+              <a:t>T03B03-S07   ·   click-to-reveal   ·   CONTENT</a:t>
             </a:r>
           </a:p>
           <a:p>
@@ -5383,7 +5665,7 @@
                 </a:solidFill>
                 <a:latin typeface="Arial"/>
               </a:rPr>
-              <a:t>Rumusan</a:t>
+              <a:t>Fencing   ·   halaman 2/2</a:t>
             </a:r>
           </a:p>
         </p:txBody>
@@ -5417,7 +5699,7 @@
           <a:fillRef idx="3">
             <a:schemeClr val="accent1"/>
           </a:fillRef>
-          <a:effectRef idx="2">
+          <a:effectRef idx="0">
             <a:schemeClr val="accent1"/>
           </a:effectRef>
           <a:fontRef idx="minor">
@@ -5425,7 +5707,9 @@
           </a:fontRef>
         </p:style>
         <p:txBody>
-          <a:bodyPr rtlCol="0" anchor="ctr"/>
+          <a:bodyPr rtlCol="0" anchor="ctr">
+            <a:noAutofit/>
+          </a:bodyPr>
           <a:lstStyle/>
           <a:p>
             <a:pPr algn="ctr"/>
@@ -5450,7 +5734,7 @@
         </p:spPr>
         <p:txBody>
           <a:bodyPr wrap="square" lIns="0" rIns="0" tIns="0" bIns="0">
-            <a:spAutoFit/>
+            <a:noAutofit/>
           </a:bodyPr>
           <a:lstStyle/>
           <a:p>
@@ -5462,55 +5746,43 @@
                 </a:solidFill>
                 <a:latin typeface="Arial"/>
               </a:rPr>
-              <a:t>KANDUNGAN SKRIN</a:t>
-            </a:r>
-          </a:p>
-          <a:p>
-            <a:pPr algn="l"/>
+              <a:t>KANDUNGAN SKRIN (sambungan)</a:t>
+            </a:r>
+          </a:p>
+          <a:p>
+            <a:pPr algn="l" lvl="1"/>
             <a:r>
               <a:rPr sz="1400" b="0" i="0">
                 <a:solidFill>
-                  <a:srgbClr val="6A1B9A"/>
-                </a:solidFill>
-                <a:latin typeface="Arial"/>
-              </a:rPr>
-              <a:t>r · Kepentingan: Enam komponen infrastruktur landskap dan fungsi setiap satu.</a:t>
-            </a:r>
-          </a:p>
-          <a:p>
-            <a:pPr algn="l"/>
+                  <a:srgbClr val="0D47A1"/>
+                </a:solidFill>
+                <a:latin typeface="Arial"/>
+              </a:rPr>
+              <a:t>[S] Kemasan Anti-Karat</a:t>
+            </a:r>
+          </a:p>
+          <a:p>
+            <a:pPr algn="l" lvl="2"/>
             <a:r>
               <a:rPr sz="1400" b="0" i="0">
                 <a:solidFill>
-                  <a:srgbClr val="6A1B9A"/>
-                </a:solidFill>
-                <a:latin typeface="Arial"/>
-              </a:rPr>
-              <a:t>r · Skop dan Isi Utama: Titik kegagalan yang paling kerap bagi setiap komponen.</a:t>
-            </a:r>
-          </a:p>
-          <a:p>
-            <a:pPr algn="l"/>
-            <a:r>
-              <a:rPr sz="1400" b="0" i="0">
-                <a:solidFill>
-                  <a:srgbClr val="6A1B9A"/>
-                </a:solidFill>
-                <a:latin typeface="Arial"/>
-              </a:rPr>
-              <a:t>r · Manfaat: Dokumen kawalan yang mengikat kontraktor: lukisan struktur, pelan ukur, pelan saliran.</a:t>
-            </a:r>
-          </a:p>
-          <a:p>
-            <a:pPr algn="l"/>
-            <a:r>
-              <a:rPr sz="1400" b="0" i="0">
-                <a:solidFill>
-                  <a:srgbClr val="B71C1C"/>
-                </a:solidFill>
-                <a:latin typeface="Arial"/>
-              </a:rPr>
-              <a:t>P · MONTAJ RUMUSAN · PROVISIONAL_VISUAL_DIRECTION · PENDING_BARIAH_UNIT_REVIEW · NOT_MMD_ASSET</a:t>
+                  <a:srgbClr val="0D47A1"/>
+                </a:solidFill>
+                <a:latin typeface="Arial"/>
+              </a:rPr>
+              <a:t>[S] Pastikan semua komponen keluli mempunyai lapisan pelindung karat yang sempurna seperti tergalvani panas (hot-dip galvanized) atau cat epoksi.</a:t>
+            </a:r>
+          </a:p>
+          <a:p>
+            <a:pPr algn="l"/>
+            <a:r>
+              <a:rPr sz="1200" b="0" i="0">
+                <a:solidFill>
+                  <a:srgbClr val="6B6B6B"/>
+                </a:solidFill>
+                <a:latin typeface="Arial"/>
+              </a:rPr>
+              <a:t>[U] Klik setiap tajuk untuk memaparkan maklumat.</a:t>
             </a:r>
           </a:p>
         </p:txBody>
@@ -5533,7 +5805,7 @@
         </p:spPr>
         <p:txBody>
           <a:bodyPr wrap="square" lIns="0" rIns="0" tIns="0" bIns="0">
-            <a:spAutoFit/>
+            <a:noAutofit/>
           </a:bodyPr>
           <a:lstStyle/>
           <a:p>
@@ -5551,13 +5823,97 @@
           <a:p>
             <a:pPr algn="l"/>
             <a:r>
+              <a:rPr sz="1000" b="0" i="0">
+                <a:solidFill>
+                  <a:srgbClr val="1A1A1A"/>
+                </a:solidFill>
+                <a:latin typeface="Arial"/>
+              </a:rPr>
+              <a:t>click-to-reveal · 4 panel</a:t>
+            </a:r>
+          </a:p>
+          <a:p>
+            <a:pPr algn="l" lvl="1"/>
+            <a:r>
+              <a:rPr sz="900" b="0" i="0">
+                <a:solidFill>
+                  <a:srgbClr val="1A1A1A"/>
+                </a:solidFill>
+                <a:latin typeface="Arial"/>
+              </a:rPr>
+              <a:t>1. Penjajaran Sempadan</a:t>
+            </a:r>
+          </a:p>
+          <a:p>
+            <a:pPr algn="l" lvl="1"/>
+            <a:r>
+              <a:rPr sz="900" b="0" i="0">
+                <a:solidFill>
+                  <a:srgbClr val="1A1A1A"/>
+                </a:solidFill>
+                <a:latin typeface="Arial"/>
+              </a:rPr>
+              <a:t>2. Pemasangan Tiang</a:t>
+            </a:r>
+          </a:p>
+          <a:p>
+            <a:pPr algn="l" lvl="1"/>
+            <a:r>
+              <a:rPr sz="900" b="0" i="0">
+                <a:solidFill>
+                  <a:srgbClr val="1A1A1A"/>
+                </a:solidFill>
+                <a:latin typeface="Arial"/>
+              </a:rPr>
+              <a:t>3. Ketegangan Pemasangan</a:t>
+            </a:r>
+          </a:p>
+          <a:p>
+            <a:pPr algn="l" lvl="1"/>
+            <a:r>
+              <a:rPr sz="900" b="0" i="0">
+                <a:solidFill>
+                  <a:srgbClr val="1A1A1A"/>
+                </a:solidFill>
+                <a:latin typeface="Arial"/>
+              </a:rPr>
+              <a:t>4. Kemasan Anti-Karat</a:t>
+            </a:r>
+          </a:p>
+          <a:p>
+            <a:pPr algn="l"/>
+            <a:r>
+              <a:rPr sz="800" b="0" i="0">
+                <a:solidFill>
+                  <a:srgbClr val="1A1A1A"/>
+                </a:solidFill>
+                <a:latin typeface="Arial"/>
+              </a:rPr>
+              <a:t/>
+            </a:r>
+          </a:p>
+          <a:p>
+            <a:pPr algn="l"/>
+            <a:r>
+              <a:rPr sz="1000" b="1" i="0">
+                <a:solidFill>
+                  <a:srgbClr val="6B6B6B"/>
+                </a:solidFill>
+                <a:latin typeface="Arial"/>
+              </a:rPr>
+              <a:t>VISUAL</a:t>
+            </a:r>
+          </a:p>
+          <a:p>
+            <a:pPr algn="l"/>
+            <a:r>
               <a:rPr sz="1000" b="0" i="1">
                 <a:solidFill>
                   <a:srgbClr val="6B6B6B"/>
                 </a:solidFill>
                 <a:latin typeface="Arial"/>
               </a:rPr>
-              <a:t>Tiada interaksi — skrin statik</a:t>
+              <a:t>Tiada visual khusus</a:t>
             </a:r>
           </a:p>
           <a:p>
@@ -5581,55 +5937,7 @@
                 </a:solidFill>
                 <a:latin typeface="Arial"/>
               </a:rPr>
-              <a:t>VISUAL</a:t>
-            </a:r>
-          </a:p>
-          <a:p>
-            <a:pPr algn="l"/>
-            <a:r>
-              <a:rPr sz="1000" b="0" i="0">
-                <a:solidFill>
-                  <a:srgbClr val="1A1A1A"/>
-                </a:solidFill>
-                <a:latin typeface="Arial"/>
-              </a:rPr>
-              <a:t>Montaj tiga komponen mengikut tiga beat Rumusan</a:t>
-            </a:r>
-          </a:p>
-          <a:p>
-            <a:pPr algn="l"/>
-            <a:r>
-              <a:rPr sz="900" b="0" i="0">
-                <a:solidFill>
-                  <a:srgbClr val="6B6B6B"/>
-                </a:solidFill>
-                <a:latin typeface="Arial"/>
-              </a:rPr>
-              <a:t>Tiada rajah sumber — subjek calon sahaja</a:t>
-            </a:r>
-          </a:p>
-          <a:p>
-            <a:pPr algn="l"/>
-            <a:r>
-              <a:rPr sz="900" b="1" i="0">
-                <a:solidFill>
-                  <a:srgbClr val="B71C1C"/>
-                </a:solidFill>
-                <a:latin typeface="Arial"/>
-              </a:rPr>
-              <a:t>PROVISIONAL_VISUAL_DIRECTION · PENDING_BARIAH_UNIT_REVIEW · NOT_MMD_ASSET</a:t>
-            </a:r>
-          </a:p>
-          <a:p>
-            <a:pPr algn="l"/>
-            <a:r>
-              <a:rPr sz="900" b="1" i="0">
-                <a:solidFill>
-                  <a:srgbClr val="B71C1C"/>
-                </a:solidFill>
-                <a:latin typeface="Arial"/>
-              </a:rPr>
-              <a:t>ASET VISUAL BELUM DIHASILKAN — NOT_MMD_ASSET</a:t>
+              <a:t>SUMBER DAN KEPUTUSAN</a:t>
             </a:r>
           </a:p>
           <a:p>
@@ -5637,23 +5945,11 @@
             <a:r>
               <a:rPr sz="800" b="0" i="0">
                 <a:solidFill>
-                  <a:srgbClr val="1A1A1A"/>
-                </a:solidFill>
-                <a:latin typeface="Arial"/>
-              </a:rPr>
-              <a:t/>
-            </a:r>
-          </a:p>
-          <a:p>
-            <a:pPr algn="l"/>
-            <a:r>
-              <a:rPr sz="1000" b="1" i="0">
-                <a:solidFill>
-                  <a:srgbClr val="6B6B6B"/>
-                </a:solidFill>
-                <a:latin typeface="Arial"/>
-              </a:rPr>
-              <a:t>SUMBER DAN KEPUTUSAN</a:t>
+                  <a:srgbClr val="0D47A1"/>
+                </a:solidFill>
+                <a:latin typeface="Arial"/>
+              </a:rPr>
+              <a:t>Baris modul: T03B03-ROW-042, T03B03-ROW-043, T03B03-ROW-044, T03B03-ROW-046, T03B03-ROW-045, T03B03-ROW-047, T03B03-ROW-049, T03B03-ROW-051, T03B03-ROW-053, T03B03-ROW-048 (+3)</a:t>
             </a:r>
           </a:p>
           <a:p>
@@ -5661,23 +5957,11 @@
             <a:r>
               <a:rPr sz="800" b="0" i="0">
                 <a:solidFill>
-                  <a:srgbClr val="0D47A1"/>
-                </a:solidFill>
-                <a:latin typeface="Arial"/>
-              </a:rPr>
-              <a:t>Skrin struktur — tiada baris modul</a:t>
-            </a:r>
-          </a:p>
-          <a:p>
-            <a:pPr algn="l"/>
-            <a:r>
-              <a:rPr sz="800" b="0" i="0">
-                <a:solidFill>
-                  <a:srgbClr val="6B6B6B"/>
-                </a:solidFill>
-                <a:latin typeface="Arial"/>
-              </a:rPr>
-              <a:t>Keputusan Bariah: A6</a:t>
+                  <a:srgbClr val="6B6B6B"/>
+                </a:solidFill>
+                <a:latin typeface="Arial"/>
+              </a:rPr>
+              <a:t>Keputusan Bariah: A1, A2</a:t>
             </a:r>
           </a:p>
         </p:txBody>
@@ -5700,7 +5984,7 @@
         </p:spPr>
         <p:txBody>
           <a:bodyPr wrap="square" lIns="0" rIns="0" tIns="0" bIns="0">
-            <a:spAutoFit/>
+            <a:noAutofit/>
           </a:bodyPr>
           <a:lstStyle/>
           <a:p>
@@ -5712,7 +5996,7 @@
                 </a:solidFill>
                 <a:latin typeface="Arial"/>
               </a:rPr>
-              <a:t>K5-PL06-T03-B03 · skrin 10 daripada 12   ·   DRAFT_FOR_BARIAH_REVIEW · NOT_INSTRUCTIONALLY_APPROVED · NOT_LEARNER_FACING_FINAL</a:t>
+              <a:t>K5-PL06-T03-B03 · skrin 7 daripada 12  ·  halaman 2/2   ·   TECHNICAL_PROOF · DRAFT_FOR_BARIAH_REVIEW · NOT_INSTRUCTIONALLY_APPROVED · NOT_LEARNER_FACING_FINAL</a:t>
             </a:r>
           </a:p>
         </p:txBody>
@@ -5753,7 +6037,7 @@
         </p:spPr>
         <p:txBody>
           <a:bodyPr wrap="square" lIns="0" rIns="0" tIns="0" bIns="0">
-            <a:spAutoFit/>
+            <a:noAutofit/>
           </a:bodyPr>
           <a:lstStyle/>
           <a:p>
@@ -5765,7 +6049,7 @@
                 </a:solidFill>
                 <a:latin typeface="Arial"/>
               </a:rPr>
-              <a:t>T03B03-S11   ·   static content   ·   KUIZ</a:t>
+              <a:t>T03B03-S08   ·   click-to-reveal   ·   CONTENT</a:t>
             </a:r>
           </a:p>
           <a:p>
@@ -5777,7 +6061,7 @@
                 </a:solidFill>
                 <a:latin typeface="Arial"/>
               </a:rPr>
-              <a:t>Kuiz  (1/2)</a:t>
+              <a:t>Swale/ Natural Drain</a:t>
             </a:r>
           </a:p>
         </p:txBody>
@@ -5811,7 +6095,7 @@
           <a:fillRef idx="3">
             <a:schemeClr val="accent1"/>
           </a:fillRef>
-          <a:effectRef idx="2">
+          <a:effectRef idx="0">
             <a:schemeClr val="accent1"/>
           </a:effectRef>
           <a:fontRef idx="minor">
@@ -5819,7 +6103,9 @@
           </a:fontRef>
         </p:style>
         <p:txBody>
-          <a:bodyPr rtlCol="0" anchor="ctr"/>
+          <a:bodyPr rtlCol="0" anchor="ctr">
+            <a:noAutofit/>
+          </a:bodyPr>
           <a:lstStyle/>
           <a:p>
             <a:pPr algn="ctr"/>
@@ -5844,7 +6130,7 @@
         </p:spPr>
         <p:txBody>
           <a:bodyPr wrap="square" lIns="0" rIns="0" tIns="0" bIns="0">
-            <a:spAutoFit/>
+            <a:noAutofit/>
           </a:bodyPr>
           <a:lstStyle/>
           <a:p>
@@ -5864,11 +6150,47 @@
             <a:r>
               <a:rPr sz="1400" b="0" i="0">
                 <a:solidFill>
-                  <a:srgbClr val="6A1B9A"/>
-                </a:solidFill>
-                <a:latin typeface="Arial"/>
-              </a:rPr>
-              <a:t>d · Q1 · Apakah ketebalan maksimum setiap lapisan semasa membina busut tanah (earthmound)?</a:t>
+                  <a:srgbClr val="0D47A1"/>
+                </a:solidFill>
+                <a:latin typeface="Arial"/>
+              </a:rPr>
+              <a:t>[S] Swale/ Natural Drain</a:t>
+            </a:r>
+          </a:p>
+          <a:p>
+            <a:pPr algn="l"/>
+            <a:r>
+              <a:rPr sz="1400" b="0" i="0">
+                <a:solidFill>
+                  <a:srgbClr val="0D47A1"/>
+                </a:solidFill>
+                <a:latin typeface="Arial"/>
+              </a:rPr>
+              <a:t>[S] Swale adalah sejenis parit yang cetek, lebar, dan ditanami dengan rumput atau tumbuhan. Ia merupakan alternatif mesra alam kepada parit konkrit.</a:t>
+            </a:r>
+          </a:p>
+          <a:p>
+            <a:pPr algn="l"/>
+            <a:r>
+              <a:rPr sz="1400" b="0" i="0">
+                <a:solidFill>
+                  <a:srgbClr val="0D47A1"/>
+                </a:solidFill>
+                <a:latin typeface="Arial"/>
+              </a:rPr>
+              <a:t>[S~] Swale ialah parit cetek dan lebar yang ditanami tumbuhan, alternatif kepada longkang konkrit, yang memperlahankan aliran dan menggalakkan penyerapan.</a:t>
+            </a:r>
+          </a:p>
+          <a:p>
+            <a:pPr algn="l"/>
+            <a:r>
+              <a:rPr sz="1400" b="0" i="0">
+                <a:solidFill>
+                  <a:srgbClr val="0D47A1"/>
+                </a:solidFill>
+                <a:latin typeface="Arial"/>
+              </a:rPr>
+              <a:t>[S] Fungsi</a:t>
             </a:r>
           </a:p>
           <a:p>
@@ -5876,11 +6198,23 @@
             <a:r>
               <a:rPr sz="1400" b="0" i="0">
                 <a:solidFill>
-                  <a:srgbClr val="6A1B9A"/>
-                </a:solidFill>
-                <a:latin typeface="Arial"/>
-              </a:rPr>
-              <a:t>d · [dicadangkan betul] Tidak melebihi 300mm setiap lapisan, dan setiap lapisan dipadatkan.</a:t>
+                  <a:srgbClr val="0D47A1"/>
+                </a:solidFill>
+                <a:latin typeface="Arial"/>
+              </a:rPr>
+              <a:t>[S] Menguruskan aliran air larian permukaan dengan memperlahankannya, menggalakkan penyerapan air ke dalam tanah, dan menapis bahan cemar.</a:t>
+            </a:r>
+          </a:p>
+          <a:p>
+            <a:pPr algn="l"/>
+            <a:r>
+              <a:rPr sz="1400" b="0" i="0">
+                <a:solidFill>
+                  <a:srgbClr val="0D47A1"/>
+                </a:solidFill>
+                <a:latin typeface="Arial"/>
+              </a:rPr>
+              <a:t>[S] Fokus Utama Kontraktor:</a:t>
             </a:r>
           </a:p>
           <a:p>
@@ -5888,11 +6222,23 @@
             <a:r>
               <a:rPr sz="1400" b="0" i="0">
                 <a:solidFill>
-                  <a:srgbClr val="6A1B9A"/>
-                </a:solidFill>
-                <a:latin typeface="Arial"/>
-              </a:rPr>
-              <a:t>d · Tidak melebihi 600mm, dipadatkan sekali pada akhir</a:t>
+                  <a:srgbClr val="0D47A1"/>
+                </a:solidFill>
+                <a:latin typeface="Arial"/>
+              </a:rPr>
+              <a:t>[S] Pembentukan Landskap</a:t>
+            </a:r>
+          </a:p>
+          <a:p>
+            <a:pPr algn="l" lvl="2"/>
+            <a:r>
+              <a:rPr sz="1400" b="0" i="0">
+                <a:solidFill>
+                  <a:srgbClr val="0D47A1"/>
+                </a:solidFill>
+                <a:latin typeface="Arial"/>
+              </a:rPr>
+              <a:t>[S] Swale dibentuk melalui kerja penggalian yang minimum untuk menghasilkan satu lekukan yang landai dan lebar, bukannya parit yang dalam dan curam.</a:t>
             </a:r>
           </a:p>
           <a:p>
@@ -5900,191 +6246,35 @@
             <a:r>
               <a:rPr sz="1400" b="0" i="0">
                 <a:solidFill>
-                  <a:srgbClr val="6A1B9A"/>
-                </a:solidFill>
-                <a:latin typeface="Arial"/>
-              </a:rPr>
-              <a:t>d · Tiada had ketebalan selagi jentera boleh memadat</a:t>
-            </a:r>
-          </a:p>
-          <a:p>
-            <a:pPr algn="l" lvl="1"/>
+                  <a:srgbClr val="0D47A1"/>
+                </a:solidFill>
+                <a:latin typeface="Arial"/>
+              </a:rPr>
+              <a:t>[S] Penanaman Tumbuhan</a:t>
+            </a:r>
+          </a:p>
+          <a:p>
+            <a:pPr algn="l" lvl="2"/>
             <a:r>
               <a:rPr sz="1400" b="0" i="0">
                 <a:solidFill>
-                  <a:srgbClr val="6A1B9A"/>
-                </a:solidFill>
-                <a:latin typeface="Arial"/>
-              </a:rPr>
-              <a:t>d · Satu lapisan penuh sehingga ketinggian puncak</a:t>
-            </a:r>
-          </a:p>
-          <a:p>
-            <a:pPr algn="l"/>
-            <a:r>
-              <a:rPr sz="1400" b="0" i="0">
-                <a:solidFill>
-                  <a:srgbClr val="6A1B9A"/>
-                </a:solidFill>
-                <a:latin typeface="Arial"/>
-              </a:rPr>
-              <a:t>d · Q2 · Mengapakah sistem perparitan di belakang dinding penahan adalah wajib?</a:t>
-            </a:r>
-          </a:p>
-          <a:p>
-            <a:pPr algn="l" lvl="1"/>
-            <a:r>
-              <a:rPr sz="1400" b="0" i="0">
-                <a:solidFill>
-                  <a:srgbClr val="6A1B9A"/>
-                </a:solidFill>
-                <a:latin typeface="Arial"/>
-              </a:rPr>
-              <a:t>d · [dicadangkan betul] Kerana kegagalan dinding penahan selalunya berpunca daripada tekanan air (hydrostatic pressure).</a:t>
-            </a:r>
-          </a:p>
-          <a:p>
-            <a:pPr algn="l" lvl="1"/>
-            <a:r>
-              <a:rPr sz="1400" b="0" i="0">
-                <a:solidFill>
-                  <a:srgbClr val="6A1B9A"/>
-                </a:solidFill>
-                <a:latin typeface="Arial"/>
-              </a:rPr>
-              <a:t>d · Kerana ia mengurangkan kos konkrit dinding</a:t>
-            </a:r>
-          </a:p>
-          <a:p>
-            <a:pPr algn="l" lvl="1"/>
-            <a:r>
-              <a:rPr sz="1400" b="0" i="0">
-                <a:solidFill>
-                  <a:srgbClr val="6A1B9A"/>
-                </a:solidFill>
-                <a:latin typeface="Arial"/>
-              </a:rPr>
-              <a:t>d · Kerana ia diperlukan untuk kemasan estetik belakang dinding</a:t>
-            </a:r>
-          </a:p>
-          <a:p>
-            <a:pPr algn="l" lvl="1"/>
-            <a:r>
-              <a:rPr sz="1400" b="0" i="0">
-                <a:solidFill>
-                  <a:srgbClr val="6A1B9A"/>
-                </a:solidFill>
-                <a:latin typeface="Arial"/>
-              </a:rPr>
-              <a:t>d · Kerana ia menggantikan keperluan tapak asas</a:t>
-            </a:r>
-          </a:p>
-          <a:p>
-            <a:pPr algn="l"/>
-            <a:r>
-              <a:rPr sz="1400" b="0" i="0">
-                <a:solidFill>
-                  <a:srgbClr val="6A1B9A"/>
-                </a:solidFill>
-                <a:latin typeface="Arial"/>
-              </a:rPr>
-              <a:t>d · Q3 · Pelan manakah yang menentukan jajaran pagar di tapak?</a:t>
-            </a:r>
-          </a:p>
-          <a:p>
-            <a:pPr algn="l" lvl="1"/>
-            <a:r>
-              <a:rPr sz="1400" b="0" i="0">
-                <a:solidFill>
-                  <a:srgbClr val="6A1B9A"/>
-                </a:solidFill>
-                <a:latin typeface="Arial"/>
-              </a:rPr>
-              <a:t>d · [dicadangkan betul] Pelan Ukur Sempadan.</a:t>
-            </a:r>
-          </a:p>
-          <a:p>
-            <a:pPr algn="l" lvl="1"/>
-            <a:r>
-              <a:rPr sz="1400" b="0" i="0">
-                <a:solidFill>
-                  <a:srgbClr val="6A1B9A"/>
-                </a:solidFill>
-                <a:latin typeface="Arial"/>
-              </a:rPr>
-              <a:t>d · Pelan Saliran</a:t>
-            </a:r>
-          </a:p>
-          <a:p>
-            <a:pPr algn="l" lvl="1"/>
-            <a:r>
-              <a:rPr sz="1400" b="0" i="0">
-                <a:solidFill>
-                  <a:srgbClr val="6A1B9A"/>
-                </a:solidFill>
-                <a:latin typeface="Arial"/>
-              </a:rPr>
-              <a:t>d · Lukisan Struktur Jurutera</a:t>
-            </a:r>
-          </a:p>
-          <a:p>
-            <a:pPr algn="l" lvl="1"/>
-            <a:r>
-              <a:rPr sz="1400" b="0" i="0">
-                <a:solidFill>
-                  <a:srgbClr val="6A1B9A"/>
-                </a:solidFill>
-                <a:latin typeface="Arial"/>
-              </a:rPr>
-              <a:t>d · Pelan Susun Atur Tanaman</a:t>
-            </a:r>
-          </a:p>
-          <a:p>
-            <a:pPr algn="l"/>
-            <a:r>
-              <a:rPr sz="1400" b="0" i="0">
-                <a:solidFill>
-                  <a:srgbClr val="6A1B9A"/>
-                </a:solidFill>
-                <a:latin typeface="Arial"/>
-              </a:rPr>
-              <a:t>d · Q4 · Apakah fungsi kamber (camber) pada permukaan jalan akses?</a:t>
-            </a:r>
-          </a:p>
-          <a:p>
-            <a:pPr algn="l" lvl="1"/>
-            <a:r>
-              <a:rPr sz="1400" b="0" i="0">
-                <a:solidFill>
-                  <a:srgbClr val="6A1B9A"/>
-                </a:solidFill>
-                <a:latin typeface="Arial"/>
-              </a:rPr>
-              <a:t>d · [dicadangkan betul] Memberikan kecerunan melintang dari tengah ke tepi supaya air tidak bertakung di permukaan.</a:t>
-            </a:r>
-          </a:p>
-          <a:p>
-            <a:pPr algn="l" lvl="1"/>
-            <a:r>
-              <a:rPr sz="1400" b="0" i="0">
-                <a:solidFill>
-                  <a:srgbClr val="6A1B9A"/>
-                </a:solidFill>
-                <a:latin typeface="Arial"/>
-              </a:rPr>
-              <a:t>d · Menambah ketebalan lapisan permukaan di bahagian tengah</a:t>
-            </a:r>
-          </a:p>
-          <a:p>
-            <a:pPr algn="l" lvl="1"/>
-            <a:r>
-              <a:rPr sz="1400" b="0" i="0">
-                <a:solidFill>
-                  <a:srgbClr val="6A1B9A"/>
-                </a:solidFill>
-                <a:latin typeface="Arial"/>
-              </a:rPr>
-              <a:t>d · Menandakan sempadan jalan untuk pemandu</a:t>
+                  <a:srgbClr val="0D47A1"/>
+                </a:solidFill>
+                <a:latin typeface="Arial"/>
+              </a:rPr>
+              <a:t>[S] Permukaan swale mesti ditanam dengan spesies rumput atau tumbuhan tahan air yang sesuai. Tumbuh-tumbuhan ini berfungsi untuk menstabilkan tanah, mengelakkan hakisan, dan membantu dalam proses penapisan air.</a:t>
+            </a:r>
+          </a:p>
+          <a:p>
+            <a:pPr algn="l"/>
+            <a:r>
+              <a:rPr sz="1200" b="0" i="0">
+                <a:solidFill>
+                  <a:srgbClr val="6B6B6B"/>
+                </a:solidFill>
+                <a:latin typeface="Arial"/>
+              </a:rPr>
+              <a:t>[U] Klik setiap tajuk untuk memaparkan maklumat.</a:t>
             </a:r>
           </a:p>
         </p:txBody>
@@ -6107,7 +6297,7 @@
         </p:spPr>
         <p:txBody>
           <a:bodyPr wrap="square" lIns="0" rIns="0" tIns="0" bIns="0">
-            <a:spAutoFit/>
+            <a:noAutofit/>
           </a:bodyPr>
           <a:lstStyle/>
           <a:p>
@@ -6125,13 +6315,37 @@
           <a:p>
             <a:pPr algn="l"/>
             <a:r>
-              <a:rPr sz="1000" b="0" i="1">
-                <a:solidFill>
-                  <a:srgbClr val="6B6B6B"/>
-                </a:solidFill>
-                <a:latin typeface="Arial"/>
-              </a:rPr>
-              <a:t>Tiada interaksi — skrin statik</a:t>
+              <a:rPr sz="1000" b="0" i="0">
+                <a:solidFill>
+                  <a:srgbClr val="1A1A1A"/>
+                </a:solidFill>
+                <a:latin typeface="Arial"/>
+              </a:rPr>
+              <a:t>click-to-reveal · 2 panel</a:t>
+            </a:r>
+          </a:p>
+          <a:p>
+            <a:pPr algn="l" lvl="1"/>
+            <a:r>
+              <a:rPr sz="900" b="0" i="0">
+                <a:solidFill>
+                  <a:srgbClr val="1A1A1A"/>
+                </a:solidFill>
+                <a:latin typeface="Arial"/>
+              </a:rPr>
+              <a:t>1. Pembentukan Landskap</a:t>
+            </a:r>
+          </a:p>
+          <a:p>
+            <a:pPr algn="l" lvl="1"/>
+            <a:r>
+              <a:rPr sz="900" b="0" i="0">
+                <a:solidFill>
+                  <a:srgbClr val="1A1A1A"/>
+                </a:solidFill>
+                <a:latin typeface="Arial"/>
+              </a:rPr>
+              <a:t>2. Penanaman Tumbuhan</a:t>
             </a:r>
           </a:p>
           <a:p>
@@ -6161,13 +6375,49 @@
           <a:p>
             <a:pPr algn="l"/>
             <a:r>
-              <a:rPr sz="1000" b="0" i="1">
-                <a:solidFill>
-                  <a:srgbClr val="6B6B6B"/>
-                </a:solidFill>
-                <a:latin typeface="Arial"/>
-              </a:rPr>
-              <a:t>Tiada visual khusus</a:t>
+              <a:rPr sz="1000" b="0" i="0">
+                <a:solidFill>
+                  <a:srgbClr val="1A1A1A"/>
+                </a:solidFill>
+                <a:latin typeface="Arial"/>
+              </a:rPr>
+              <a:t>Keratan rentas swale bertanam</a:t>
+            </a:r>
+          </a:p>
+          <a:p>
+            <a:pPr algn="l"/>
+            <a:r>
+              <a:rPr sz="900" b="0" i="0">
+                <a:solidFill>
+                  <a:srgbClr val="6B6B6B"/>
+                </a:solidFill>
+                <a:latin typeface="Arial"/>
+              </a:rPr>
+              <a:t>Tiada rajah sumber — subjek calon sahaja</a:t>
+            </a:r>
+          </a:p>
+          <a:p>
+            <a:pPr algn="l"/>
+            <a:r>
+              <a:rPr sz="900" b="1" i="0">
+                <a:solidFill>
+                  <a:srgbClr val="B71C1C"/>
+                </a:solidFill>
+                <a:latin typeface="Arial"/>
+              </a:rPr>
+              <a:t>SUBJEK VISUAL: PENDING_BARIAH_UNIT_REVIEW</a:t>
+            </a:r>
+          </a:p>
+          <a:p>
+            <a:pPr algn="l"/>
+            <a:r>
+              <a:rPr sz="900" b="1" i="0">
+                <a:solidFill>
+                  <a:srgbClr val="B71C1C"/>
+                </a:solidFill>
+                <a:latin typeface="Arial"/>
+              </a:rPr>
+              <a:t>ASET VISUAL BELUM DIHASILKAN — NOT_MMD_ASSET</a:t>
             </a:r>
           </a:p>
           <a:p>
@@ -6203,7 +6453,7 @@
                 </a:solidFill>
                 <a:latin typeface="Arial"/>
               </a:rPr>
-              <a:t>Baris modul: T03B03-ROW-013, T03B03-ROW-041, T03B03-ROW-048, T03B03-ROW-056, T03B03-ROW-058, T03B03-ROW-063, T03B03-ROW-076</a:t>
+              <a:t>Baris modul: T03B03-ROW-055, T03B03-ROW-056, T03B03-ROW-057, T03B03-ROW-059, T03B03-ROW-058, T03B03-ROW-060, T03B03-ROW-062, T03B03-ROW-061, T03B03-ROW-063</a:t>
             </a:r>
           </a:p>
           <a:p>
@@ -6215,7 +6465,7 @@
                 </a:solidFill>
                 <a:latin typeface="Arial"/>
               </a:rPr>
-              <a:t>Keputusan Bariah: A7</a:t>
+              <a:t>Keputusan Bariah: A1, A2</a:t>
             </a:r>
           </a:p>
         </p:txBody>
@@ -6238,7 +6488,7 @@
         </p:spPr>
         <p:txBody>
           <a:bodyPr wrap="square" lIns="0" rIns="0" tIns="0" bIns="0">
-            <a:spAutoFit/>
+            <a:noAutofit/>
           </a:bodyPr>
           <a:lstStyle/>
           <a:p>
@@ -6250,7 +6500,7 @@
                 </a:solidFill>
                 <a:latin typeface="Arial"/>
               </a:rPr>
-              <a:t>K5-PL06-T03-B03 · skrin 11 daripada 12  ·  halaman 1/2   ·   DRAFT_FOR_BARIAH_REVIEW · NOT_INSTRUCTIONALLY_APPROVED · NOT_LEARNER_FACING_FINAL</a:t>
+              <a:t>K5-PL06-T03-B03 · skrin 8 daripada 12   ·   TECHNICAL_PROOF · DRAFT_FOR_BARIAH_REVIEW · NOT_INSTRUCTIONALLY_APPROVED · NOT_LEARNER_FACING_FINAL</a:t>
             </a:r>
           </a:p>
         </p:txBody>
@@ -6291,7 +6541,7 @@
         </p:spPr>
         <p:txBody>
           <a:bodyPr wrap="square" lIns="0" rIns="0" tIns="0" bIns="0">
-            <a:spAutoFit/>
+            <a:noAutofit/>
           </a:bodyPr>
           <a:lstStyle/>
           <a:p>
@@ -6303,7 +6553,7 @@
                 </a:solidFill>
                 <a:latin typeface="Arial"/>
               </a:rPr>
-              <a:t>T03B03-S11   ·   static content   ·   KUIZ</a:t>
+              <a:t>T03B03-S09   ·   click-to-reveal   ·   CONTENT</a:t>
             </a:r>
           </a:p>
           <a:p>
@@ -6315,7 +6565,7 @@
                 </a:solidFill>
                 <a:latin typeface="Arial"/>
               </a:rPr>
-              <a:t>Kuiz  (2/2)</a:t>
+              <a:t>Jalan akses   ·   halaman 1/2</a:t>
             </a:r>
           </a:p>
         </p:txBody>
@@ -6349,7 +6599,7 @@
           <a:fillRef idx="3">
             <a:schemeClr val="accent1"/>
           </a:fillRef>
-          <a:effectRef idx="2">
+          <a:effectRef idx="0">
             <a:schemeClr val="accent1"/>
           </a:effectRef>
           <a:fontRef idx="minor">
@@ -6357,7 +6607,9 @@
           </a:fontRef>
         </p:style>
         <p:txBody>
-          <a:bodyPr rtlCol="0" anchor="ctr"/>
+          <a:bodyPr rtlCol="0" anchor="ctr">
+            <a:noAutofit/>
+          </a:bodyPr>
           <a:lstStyle/>
           <a:p>
             <a:pPr algn="ctr"/>
@@ -6382,7 +6634,7 @@
         </p:spPr>
         <p:txBody>
           <a:bodyPr wrap="square" lIns="0" rIns="0" tIns="0" bIns="0">
-            <a:spAutoFit/>
+            <a:noAutofit/>
           </a:bodyPr>
           <a:lstStyle/>
           <a:p>
@@ -6394,7 +6646,55 @@
                 </a:solidFill>
                 <a:latin typeface="Arial"/>
               </a:rPr>
-              <a:t>KANDUNGAN SKRIN (sambungan)</a:t>
+              <a:t>KANDUNGAN SKRIN</a:t>
+            </a:r>
+          </a:p>
+          <a:p>
+            <a:pPr algn="l"/>
+            <a:r>
+              <a:rPr sz="1400" b="0" i="0">
+                <a:solidFill>
+                  <a:srgbClr val="0D47A1"/>
+                </a:solidFill>
+                <a:latin typeface="Arial"/>
+              </a:rPr>
+              <a:t>[S] Jalan akses</a:t>
+            </a:r>
+          </a:p>
+          <a:p>
+            <a:pPr algn="l"/>
+            <a:r>
+              <a:rPr sz="1400" b="0" i="0">
+                <a:solidFill>
+                  <a:srgbClr val="0D47A1"/>
+                </a:solidFill>
+                <a:latin typeface="Arial"/>
+              </a:rPr>
+              <a:t>[S] Jalan akses dalam konteks landskap menyediakan laluan untuk kenderaan penyelenggaraan atau laluan pejalan kaki utama.</a:t>
+            </a:r>
+          </a:p>
+          <a:p>
+            <a:pPr algn="l"/>
+            <a:r>
+              <a:rPr sz="1400" b="0" i="0">
+                <a:solidFill>
+                  <a:srgbClr val="0D47A1"/>
+                </a:solidFill>
+                <a:latin typeface="Arial"/>
+              </a:rPr>
+              <a:t>[S~] Permukaan jalan akses dibina dengan kamber — kecerunan melintang dari tengah ke tepi — supaya air tidak bertakung.</a:t>
+            </a:r>
+          </a:p>
+          <a:p>
+            <a:pPr algn="l"/>
+            <a:r>
+              <a:rPr sz="1400" b="0" i="0">
+                <a:solidFill>
+                  <a:srgbClr val="0D47A1"/>
+                </a:solidFill>
+                <a:latin typeface="Arial"/>
+              </a:rPr>
+              <a:t>[S] Fungsi</a:t>
             </a:r>
           </a:p>
           <a:p>
@@ -6402,11 +6702,11 @@
             <a:r>
               <a:rPr sz="1400" b="0" i="0">
                 <a:solidFill>
-                  <a:srgbClr val="6A1B9A"/>
-                </a:solidFill>
-                <a:latin typeface="Arial"/>
-              </a:rPr>
-              <a:t>d · Menahan lapisan permukaan daripada bergerak ke tepi</a:t>
+                  <a:srgbClr val="0D47A1"/>
+                </a:solidFill>
+                <a:latin typeface="Arial"/>
+              </a:rPr>
+              <a:t>[S] Menyediakan perhubungan dan akses ke seluruh kawasan tapak.</a:t>
             </a:r>
           </a:p>
           <a:p>
@@ -6414,11 +6714,11 @@
             <a:r>
               <a:rPr sz="1400" b="0" i="0">
                 <a:solidFill>
-                  <a:srgbClr val="6A1B9A"/>
-                </a:solidFill>
-                <a:latin typeface="Arial"/>
-              </a:rPr>
-              <a:t>d · Q5 · Pilih SEMUA ciri yang menepati swale sebagai alternatif kepada longkang konkrit.</a:t>
+                  <a:srgbClr val="0D47A1"/>
+                </a:solidFill>
+                <a:latin typeface="Arial"/>
+              </a:rPr>
+              <a:t>[S] Fokus Utama Kontraktor</a:t>
             </a:r>
           </a:p>
           <a:p>
@@ -6426,11 +6726,23 @@
             <a:r>
               <a:rPr sz="1400" b="0" i="0">
                 <a:solidFill>
-                  <a:srgbClr val="6A1B9A"/>
-                </a:solidFill>
-                <a:latin typeface="Arial"/>
-              </a:rPr>
-              <a:t>d · [dicadangkan betul] Parit yang cetek dan lebar</a:t>
+                  <a:srgbClr val="0D47A1"/>
+                </a:solidFill>
+                <a:latin typeface="Arial"/>
+              </a:rPr>
+              <a:t>[S] Penyediaan Tapak Asas (Sub-base)</a:t>
+            </a:r>
+          </a:p>
+          <a:p>
+            <a:pPr algn="l" lvl="2"/>
+            <a:r>
+              <a:rPr sz="1400" b="0" i="0">
+                <a:solidFill>
+                  <a:srgbClr val="0D47A1"/>
+                </a:solidFill>
+                <a:latin typeface="Arial"/>
+              </a:rPr>
+              <a:t>[S] Kualiti jalan bergantung pada tapak asasnya. Lapisan tanah asal mesti dipadatkan, diikuti dengan lapisan batu kasaran (crusher run) yang dipadatkan mengikut ketebalan yang ditetapkan dalam lukisan.</a:t>
             </a:r>
           </a:p>
           <a:p>
@@ -6438,11 +6750,23 @@
             <a:r>
               <a:rPr sz="1400" b="0" i="0">
                 <a:solidFill>
-                  <a:srgbClr val="6A1B9A"/>
-                </a:solidFill>
-                <a:latin typeface="Arial"/>
-              </a:rPr>
-              <a:t>d · [dicadangkan betul] Ditanami rumput atau tumbuhan tahan air</a:t>
+                  <a:srgbClr val="0D47A1"/>
+                </a:solidFill>
+                <a:latin typeface="Arial"/>
+              </a:rPr>
+              <a:t>[S] Pemasangan Bebendul (Kerb)</a:t>
+            </a:r>
+          </a:p>
+          <a:p>
+            <a:pPr algn="l" lvl="2"/>
+            <a:r>
+              <a:rPr sz="1400" b="0" i="0">
+                <a:solidFill>
+                  <a:srgbClr val="0D47A1"/>
+                </a:solidFill>
+                <a:latin typeface="Arial"/>
+              </a:rPr>
+              <a:t>[S] Bebendul konkrit dipasang di kedua-dua belah jalan untuk menetapkan jajaran dan menahan lapisan permukaan.</a:t>
             </a:r>
           </a:p>
           <a:p>
@@ -6450,71 +6774,23 @@
             <a:r>
               <a:rPr sz="1400" b="0" i="0">
                 <a:solidFill>
-                  <a:srgbClr val="6A1B9A"/>
-                </a:solidFill>
-                <a:latin typeface="Arial"/>
-              </a:rPr>
-              <a:t>d · [dicadangkan betul] Memperlahankan aliran air larian permukaan</a:t>
-            </a:r>
-          </a:p>
-          <a:p>
-            <a:pPr algn="l" lvl="1"/>
+                  <a:srgbClr val="0D47A1"/>
+                </a:solidFill>
+                <a:latin typeface="Arial"/>
+              </a:rPr>
+              <a:t>[S] Lapisan Permukaan</a:t>
+            </a:r>
+          </a:p>
+          <a:p>
+            <a:pPr algn="l" lvl="2"/>
             <a:r>
               <a:rPr sz="1400" b="0" i="0">
                 <a:solidFill>
-                  <a:srgbClr val="6A1B9A"/>
-                </a:solidFill>
-                <a:latin typeface="Arial"/>
-              </a:rPr>
-              <a:t>d · [dicadangkan betul] Menggalakkan penyerapan air ke dalam tanah</a:t>
-            </a:r>
-          </a:p>
-          <a:p>
-            <a:pPr algn="l" lvl="1"/>
-            <a:r>
-              <a:rPr sz="1400" b="0" i="0">
-                <a:solidFill>
-                  <a:srgbClr val="6A1B9A"/>
-                </a:solidFill>
-                <a:latin typeface="Arial"/>
-              </a:rPr>
-              <a:t>d · Dilapisi konkrit di seluruh permukaannya</a:t>
-            </a:r>
-          </a:p>
-          <a:p>
-            <a:pPr algn="l" lvl="1"/>
-            <a:r>
-              <a:rPr sz="1400" b="0" i="0">
-                <a:solidFill>
-                  <a:srgbClr val="6A1B9A"/>
-                </a:solidFill>
-                <a:latin typeface="Arial"/>
-              </a:rPr>
-              <a:t>d · Direka untuk mempercepatkan aliran ke saluran keluar</a:t>
-            </a:r>
-          </a:p>
-          <a:p>
-            <a:pPr algn="l"/>
-            <a:r>
-              <a:rPr sz="1400" b="0" i="0">
-                <a:solidFill>
-                  <a:srgbClr val="1B5E20"/>
-                </a:solidFill>
-                <a:latin typeface="Arial"/>
-              </a:rPr>
-              <a:t>A · Markah lulus 60 peratus</a:t>
-            </a:r>
-          </a:p>
-          <a:p>
-            <a:pPr algn="l"/>
-            <a:r>
-              <a:rPr sz="1400" b="0" i="0">
-                <a:solidFill>
-                  <a:srgbClr val="B71C1C"/>
-                </a:solidFill>
-                <a:latin typeface="Arial"/>
-              </a:rPr>
-              <a:t>P · KUNCI JAWAPAN: DRAFTED_NOT_APPROVED</a:t>
+                  <a:srgbClr val="0D47A1"/>
+                </a:solidFill>
+                <a:latin typeface="Arial"/>
+              </a:rPr>
+              <a:t>[S] Permukaan akhir boleh terdiri daripada pelbagai bahan seperti premix/asphalt, blok turapan (interlocking pavers), atau konkrit bertetulang, dan mesti dibina mengikut spesifikasi yang betul.</a:t>
             </a:r>
           </a:p>
         </p:txBody>
@@ -6537,7 +6813,7 @@
         </p:spPr>
         <p:txBody>
           <a:bodyPr wrap="square" lIns="0" rIns="0" tIns="0" bIns="0">
-            <a:spAutoFit/>
+            <a:noAutofit/>
           </a:bodyPr>
           <a:lstStyle/>
           <a:p>
@@ -6555,13 +6831,61 @@
           <a:p>
             <a:pPr algn="l"/>
             <a:r>
-              <a:rPr sz="1000" b="0" i="1">
-                <a:solidFill>
-                  <a:srgbClr val="6B6B6B"/>
-                </a:solidFill>
-                <a:latin typeface="Arial"/>
-              </a:rPr>
-              <a:t>Tiada interaksi — skrin statik</a:t>
+              <a:rPr sz="1000" b="0" i="0">
+                <a:solidFill>
+                  <a:srgbClr val="1A1A1A"/>
+                </a:solidFill>
+                <a:latin typeface="Arial"/>
+              </a:rPr>
+              <a:t>click-to-reveal · 4 panel</a:t>
+            </a:r>
+          </a:p>
+          <a:p>
+            <a:pPr algn="l" lvl="1"/>
+            <a:r>
+              <a:rPr sz="900" b="0" i="0">
+                <a:solidFill>
+                  <a:srgbClr val="1A1A1A"/>
+                </a:solidFill>
+                <a:latin typeface="Arial"/>
+              </a:rPr>
+              <a:t>1. Penyediaan Tapak Asas (Sub-base)</a:t>
+            </a:r>
+          </a:p>
+          <a:p>
+            <a:pPr algn="l" lvl="1"/>
+            <a:r>
+              <a:rPr sz="900" b="0" i="0">
+                <a:solidFill>
+                  <a:srgbClr val="1A1A1A"/>
+                </a:solidFill>
+                <a:latin typeface="Arial"/>
+              </a:rPr>
+              <a:t>2. Pemasangan Bebendul (Kerb)</a:t>
+            </a:r>
+          </a:p>
+          <a:p>
+            <a:pPr algn="l" lvl="1"/>
+            <a:r>
+              <a:rPr sz="900" b="0" i="0">
+                <a:solidFill>
+                  <a:srgbClr val="1A1A1A"/>
+                </a:solidFill>
+                <a:latin typeface="Arial"/>
+              </a:rPr>
+              <a:t>3. Lapisan Permukaan</a:t>
+            </a:r>
+          </a:p>
+          <a:p>
+            <a:pPr algn="l" lvl="1"/>
+            <a:r>
+              <a:rPr sz="900" b="0" i="0">
+                <a:solidFill>
+                  <a:srgbClr val="1A1A1A"/>
+                </a:solidFill>
+                <a:latin typeface="Arial"/>
+              </a:rPr>
+              <a:t>4. Kamber (Camber)</a:t>
             </a:r>
           </a:p>
           <a:p>
@@ -6591,13 +6915,49 @@
           <a:p>
             <a:pPr algn="l"/>
             <a:r>
-              <a:rPr sz="1000" b="0" i="1">
-                <a:solidFill>
-                  <a:srgbClr val="6B6B6B"/>
-                </a:solidFill>
-                <a:latin typeface="Arial"/>
-              </a:rPr>
-              <a:t>Tiada visual khusus</a:t>
+              <a:rPr sz="1000" b="0" i="0">
+                <a:solidFill>
+                  <a:srgbClr val="1A1A1A"/>
+                </a:solidFill>
+                <a:latin typeface="Arial"/>
+              </a:rPr>
+              <a:t>Susunan lapisan jalan akses: sub-base, bebendul, permukaan, kamber</a:t>
+            </a:r>
+          </a:p>
+          <a:p>
+            <a:pPr algn="l"/>
+            <a:r>
+              <a:rPr sz="900" b="0" i="0">
+                <a:solidFill>
+                  <a:srgbClr val="6B6B6B"/>
+                </a:solidFill>
+                <a:latin typeface="Arial"/>
+              </a:rPr>
+              <a:t>Tiada rajah sumber — subjek calon sahaja</a:t>
+            </a:r>
+          </a:p>
+          <a:p>
+            <a:pPr algn="l"/>
+            <a:r>
+              <a:rPr sz="900" b="1" i="0">
+                <a:solidFill>
+                  <a:srgbClr val="B71C1C"/>
+                </a:solidFill>
+                <a:latin typeface="Arial"/>
+              </a:rPr>
+              <a:t>SUBJEK VISUAL: PENDING_BARIAH_UNIT_REVIEW</a:t>
+            </a:r>
+          </a:p>
+          <a:p>
+            <a:pPr algn="l"/>
+            <a:r>
+              <a:rPr sz="900" b="1" i="0">
+                <a:solidFill>
+                  <a:srgbClr val="B71C1C"/>
+                </a:solidFill>
+                <a:latin typeface="Arial"/>
+              </a:rPr>
+              <a:t>ASET VISUAL BELUM DIHASILKAN — NOT_MMD_ASSET</a:t>
             </a:r>
           </a:p>
           <a:p>
@@ -6633,7 +6993,7 @@
                 </a:solidFill>
                 <a:latin typeface="Arial"/>
               </a:rPr>
-              <a:t>Baris modul: T03B03-ROW-013, T03B03-ROW-041, T03B03-ROW-048, T03B03-ROW-056, T03B03-ROW-058, T03B03-ROW-063, T03B03-ROW-076</a:t>
+              <a:t>Baris modul: T03B03-ROW-064, T03B03-ROW-065, T03B03-ROW-066, T03B03-ROW-068, T03B03-ROW-067, T03B03-ROW-069, T03B03-ROW-071, T03B03-ROW-073, T03B03-ROW-075, T03B03-ROW-070 (+3)</a:t>
             </a:r>
           </a:p>
           <a:p>
@@ -6645,7 +7005,7 @@
                 </a:solidFill>
                 <a:latin typeface="Arial"/>
               </a:rPr>
-              <a:t>Keputusan Bariah: A7</a:t>
+              <a:t>Keputusan Bariah: A1, A2</a:t>
             </a:r>
           </a:p>
         </p:txBody>
@@ -6668,7 +7028,7 @@
         </p:spPr>
         <p:txBody>
           <a:bodyPr wrap="square" lIns="0" rIns="0" tIns="0" bIns="0">
-            <a:spAutoFit/>
+            <a:noAutofit/>
           </a:bodyPr>
           <a:lstStyle/>
           <a:p>
@@ -6680,7 +7040,7 @@
                 </a:solidFill>
                 <a:latin typeface="Arial"/>
               </a:rPr>
-              <a:t>K5-PL06-T03-B03 · skrin 11 daripada 12  ·  halaman 2/2   ·   DRAFT_FOR_BARIAH_REVIEW · NOT_INSTRUCTIONALLY_APPROVED · NOT_LEARNER_FACING_FINAL</a:t>
+              <a:t>K5-PL06-T03-B03 · skrin 9 daripada 12  ·  halaman 1/2   ·   TECHNICAL_PROOF · DRAFT_FOR_BARIAH_REVIEW · NOT_INSTRUCTIONALLY_APPROVED · NOT_LEARNER_FACING_FINAL</a:t>
             </a:r>
           </a:p>
         </p:txBody>
@@ -6721,7 +7081,7 @@
         </p:spPr>
         <p:txBody>
           <a:bodyPr wrap="square" lIns="0" rIns="0" tIns="0" bIns="0">
-            <a:spAutoFit/>
+            <a:noAutofit/>
           </a:bodyPr>
           <a:lstStyle/>
           <a:p>
@@ -6733,7 +7093,7 @@
                 </a:solidFill>
                 <a:latin typeface="Arial"/>
               </a:rPr>
-              <a:t>T03B03-S12   ·   static content   ·   TAMAT</a:t>
+              <a:t>T03B03-S09   ·   click-to-reveal   ·   CONTENT</a:t>
             </a:r>
           </a:p>
           <a:p>
@@ -6745,7 +7105,7 @@
                 </a:solidFill>
                 <a:latin typeface="Arial"/>
               </a:rPr>
-              <a:t>Tamat Bahagian</a:t>
+              <a:t>Jalan akses   ·   halaman 2/2</a:t>
             </a:r>
           </a:p>
         </p:txBody>
@@ -6779,7 +7139,7 @@
           <a:fillRef idx="3">
             <a:schemeClr val="accent1"/>
           </a:fillRef>
-          <a:effectRef idx="2">
+          <a:effectRef idx="0">
             <a:schemeClr val="accent1"/>
           </a:effectRef>
           <a:fontRef idx="minor">
@@ -6787,7 +7147,9 @@
           </a:fontRef>
         </p:style>
         <p:txBody>
-          <a:bodyPr rtlCol="0" anchor="ctr"/>
+          <a:bodyPr rtlCol="0" anchor="ctr">
+            <a:noAutofit/>
+          </a:bodyPr>
           <a:lstStyle/>
           <a:p>
             <a:pPr algn="ctr"/>
@@ -6812,7 +7174,7 @@
         </p:spPr>
         <p:txBody>
           <a:bodyPr wrap="square" lIns="0" rIns="0" tIns="0" bIns="0">
-            <a:spAutoFit/>
+            <a:noAutofit/>
           </a:bodyPr>
           <a:lstStyle/>
           <a:p>
@@ -6824,19 +7186,31 @@
                 </a:solidFill>
                 <a:latin typeface="Arial"/>
               </a:rPr>
-              <a:t>KANDUNGAN SKRIN</a:t>
-            </a:r>
-          </a:p>
-          <a:p>
-            <a:pPr algn="l"/>
+              <a:t>KANDUNGAN SKRIN (sambungan)</a:t>
+            </a:r>
+          </a:p>
+          <a:p>
+            <a:pPr algn="l" lvl="1"/>
             <a:r>
               <a:rPr sz="1400" b="0" i="0">
                 <a:solidFill>
-                  <a:srgbClr val="1B5E20"/>
-                </a:solidFill>
-                <a:latin typeface="Arial"/>
-              </a:rPr>
-              <a:t>A · Tamat Bahagian 3. Teruskan pembelajaran ke bahagian seterusnya</a:t>
+                  <a:srgbClr val="0D47A1"/>
+                </a:solidFill>
+                <a:latin typeface="Arial"/>
+              </a:rPr>
+              <a:t>[S] Kamber (Camber)</a:t>
+            </a:r>
+          </a:p>
+          <a:p>
+            <a:pPr algn="l" lvl="2"/>
+            <a:r>
+              <a:rPr sz="1400" b="0" i="0">
+                <a:solidFill>
+                  <a:srgbClr val="0D47A1"/>
+                </a:solidFill>
+                <a:latin typeface="Arial"/>
+              </a:rPr>
+              <a:t>[S] Permukaan jalan mesti dibina dengan sedikit kecerunan melintang dari bahagian tengah ke tepi untuk memastikan air hujan mengalir ke sistem perparitan.</a:t>
             </a:r>
           </a:p>
           <a:p>
@@ -6848,7 +7222,7 @@
                 </a:solidFill>
                 <a:latin typeface="Arial"/>
               </a:rPr>
-              <a:t>u · SETERUSNYA</a:t>
+              <a:t>[U] Klik setiap tajuk untuk memaparkan maklumat.</a:t>
             </a:r>
           </a:p>
         </p:txBody>
@@ -6871,7 +7245,7 @@
         </p:spPr>
         <p:txBody>
           <a:bodyPr wrap="square" lIns="0" rIns="0" tIns="0" bIns="0">
-            <a:spAutoFit/>
+            <a:noAutofit/>
           </a:bodyPr>
           <a:lstStyle/>
           <a:p>
@@ -6889,13 +7263,61 @@
           <a:p>
             <a:pPr algn="l"/>
             <a:r>
-              <a:rPr sz="1000" b="0" i="1">
-                <a:solidFill>
-                  <a:srgbClr val="6B6B6B"/>
-                </a:solidFill>
-                <a:latin typeface="Arial"/>
-              </a:rPr>
-              <a:t>Tiada interaksi — skrin statik</a:t>
+              <a:rPr sz="1000" b="0" i="0">
+                <a:solidFill>
+                  <a:srgbClr val="1A1A1A"/>
+                </a:solidFill>
+                <a:latin typeface="Arial"/>
+              </a:rPr>
+              <a:t>click-to-reveal · 4 panel</a:t>
+            </a:r>
+          </a:p>
+          <a:p>
+            <a:pPr algn="l" lvl="1"/>
+            <a:r>
+              <a:rPr sz="900" b="0" i="0">
+                <a:solidFill>
+                  <a:srgbClr val="1A1A1A"/>
+                </a:solidFill>
+                <a:latin typeface="Arial"/>
+              </a:rPr>
+              <a:t>1. Penyediaan Tapak Asas (Sub-base)</a:t>
+            </a:r>
+          </a:p>
+          <a:p>
+            <a:pPr algn="l" lvl="1"/>
+            <a:r>
+              <a:rPr sz="900" b="0" i="0">
+                <a:solidFill>
+                  <a:srgbClr val="1A1A1A"/>
+                </a:solidFill>
+                <a:latin typeface="Arial"/>
+              </a:rPr>
+              <a:t>2. Pemasangan Bebendul (Kerb)</a:t>
+            </a:r>
+          </a:p>
+          <a:p>
+            <a:pPr algn="l" lvl="1"/>
+            <a:r>
+              <a:rPr sz="900" b="0" i="0">
+                <a:solidFill>
+                  <a:srgbClr val="1A1A1A"/>
+                </a:solidFill>
+                <a:latin typeface="Arial"/>
+              </a:rPr>
+              <a:t>3. Lapisan Permukaan</a:t>
+            </a:r>
+          </a:p>
+          <a:p>
+            <a:pPr algn="l" lvl="1"/>
+            <a:r>
+              <a:rPr sz="900" b="0" i="0">
+                <a:solidFill>
+                  <a:srgbClr val="1A1A1A"/>
+                </a:solidFill>
+                <a:latin typeface="Arial"/>
+              </a:rPr>
+              <a:t>4. Kamber (Camber)</a:t>
             </a:r>
           </a:p>
           <a:p>
@@ -6925,13 +7347,49 @@
           <a:p>
             <a:pPr algn="l"/>
             <a:r>
-              <a:rPr sz="1000" b="0" i="1">
-                <a:solidFill>
-                  <a:srgbClr val="6B6B6B"/>
-                </a:solidFill>
-                <a:latin typeface="Arial"/>
-              </a:rPr>
-              <a:t>Tiada visual khusus</a:t>
+              <a:rPr sz="1000" b="0" i="0">
+                <a:solidFill>
+                  <a:srgbClr val="1A1A1A"/>
+                </a:solidFill>
+                <a:latin typeface="Arial"/>
+              </a:rPr>
+              <a:t>Susunan lapisan jalan akses: sub-base, bebendul, permukaan, kamber</a:t>
+            </a:r>
+          </a:p>
+          <a:p>
+            <a:pPr algn="l"/>
+            <a:r>
+              <a:rPr sz="900" b="0" i="0">
+                <a:solidFill>
+                  <a:srgbClr val="6B6B6B"/>
+                </a:solidFill>
+                <a:latin typeface="Arial"/>
+              </a:rPr>
+              <a:t>Tiada rajah sumber — subjek calon sahaja</a:t>
+            </a:r>
+          </a:p>
+          <a:p>
+            <a:pPr algn="l"/>
+            <a:r>
+              <a:rPr sz="900" b="1" i="0">
+                <a:solidFill>
+                  <a:srgbClr val="B71C1C"/>
+                </a:solidFill>
+                <a:latin typeface="Arial"/>
+              </a:rPr>
+              <a:t>SUBJEK VISUAL: PENDING_BARIAH_UNIT_REVIEW</a:t>
+            </a:r>
+          </a:p>
+          <a:p>
+            <a:pPr algn="l"/>
+            <a:r>
+              <a:rPr sz="900" b="1" i="0">
+                <a:solidFill>
+                  <a:srgbClr val="B71C1C"/>
+                </a:solidFill>
+                <a:latin typeface="Arial"/>
+              </a:rPr>
+              <a:t>ASET VISUAL BELUM DIHASILKAN — NOT_MMD_ASSET</a:t>
             </a:r>
           </a:p>
           <a:p>
@@ -6967,7 +7425,7 @@
                 </a:solidFill>
                 <a:latin typeface="Arial"/>
               </a:rPr>
-              <a:t>Skrin struktur — tiada baris modul</a:t>
+              <a:t>Baris modul: T03B03-ROW-064, T03B03-ROW-065, T03B03-ROW-066, T03B03-ROW-068, T03B03-ROW-067, T03B03-ROW-069, T03B03-ROW-071, T03B03-ROW-073, T03B03-ROW-075, T03B03-ROW-070 (+3)</a:t>
             </a:r>
           </a:p>
           <a:p>
@@ -6979,7 +7437,7 @@
                 </a:solidFill>
                 <a:latin typeface="Arial"/>
               </a:rPr>
-              <a:t>Keputusan Bariah: D4</a:t>
+              <a:t>Keputusan Bariah: A1, A2</a:t>
             </a:r>
           </a:p>
         </p:txBody>
@@ -7002,7 +7460,7 @@
         </p:spPr>
         <p:txBody>
           <a:bodyPr wrap="square" lIns="0" rIns="0" tIns="0" bIns="0">
-            <a:spAutoFit/>
+            <a:noAutofit/>
           </a:bodyPr>
           <a:lstStyle/>
           <a:p>
@@ -7014,7 +7472,7 @@
                 </a:solidFill>
                 <a:latin typeface="Arial"/>
               </a:rPr>
-              <a:t>K5-PL06-T03-B03 · skrin 12 daripada 12   ·   DRAFT_FOR_BARIAH_REVIEW · NOT_INSTRUCTIONALLY_APPROVED · NOT_LEARNER_FACING_FINAL</a:t>
+              <a:t>K5-PL06-T03-B03 · skrin 9 daripada 12  ·  halaman 2/2   ·   TECHNICAL_PROOF · DRAFT_FOR_BARIAH_REVIEW · NOT_INSTRUCTIONALLY_APPROVED · NOT_LEARNER_FACING_FINAL</a:t>
             </a:r>
           </a:p>
         </p:txBody>
@@ -7027,7 +7485,7 @@
 </p:sld>
 </file>
 
-<file path=ppt/slides/slide2.xml><?xml version="1.0" encoding="utf-8"?>
+<file path=ppt/slides/slide15.xml><?xml version="1.0" encoding="utf-8"?>
 <p:sld xmlns:a="http://schemas.openxmlformats.org/drawingml/2006/main" xmlns:p="http://schemas.openxmlformats.org/presentationml/2006/main" xmlns:r="http://schemas.openxmlformats.org/officeDocument/2006/relationships">
   <p:cSld>
     <p:spTree>
@@ -7055,7 +7513,7 @@
         </p:spPr>
         <p:txBody>
           <a:bodyPr wrap="square" lIns="0" rIns="0" tIns="0" bIns="0">
-            <a:spAutoFit/>
+            <a:noAutofit/>
           </a:bodyPr>
           <a:lstStyle/>
           <a:p>
@@ -7067,7 +7525,7 @@
                 </a:solidFill>
                 <a:latin typeface="Arial"/>
               </a:rPr>
-              <a:t>T03B03-S01   ·   static content   ·   SHELL_ENTRY</a:t>
+              <a:t>T03B03-S10   ·   static content   ·   RUMUSAN</a:t>
             </a:r>
           </a:p>
           <a:p>
@@ -7079,7 +7537,7 @@
                 </a:solidFill>
                 <a:latin typeface="Arial"/>
               </a:rPr>
-              <a:t>Infrastruktur</a:t>
+              <a:t>Rumusan</a:t>
             </a:r>
           </a:p>
         </p:txBody>
@@ -7113,7 +7571,7 @@
           <a:fillRef idx="3">
             <a:schemeClr val="accent1"/>
           </a:fillRef>
-          <a:effectRef idx="2">
+          <a:effectRef idx="0">
             <a:schemeClr val="accent1"/>
           </a:effectRef>
           <a:fontRef idx="minor">
@@ -7121,7 +7579,9 @@
           </a:fontRef>
         </p:style>
         <p:txBody>
-          <a:bodyPr rtlCol="0" anchor="ctr"/>
+          <a:bodyPr rtlCol="0" anchor="ctr">
+            <a:noAutofit/>
+          </a:bodyPr>
           <a:lstStyle/>
           <a:p>
             <a:pPr algn="ctr"/>
@@ -7146,7 +7606,7 @@
         </p:spPr>
         <p:txBody>
           <a:bodyPr wrap="square" lIns="0" rIns="0" tIns="0" bIns="0">
-            <a:spAutoFit/>
+            <a:noAutofit/>
           </a:bodyPr>
           <a:lstStyle/>
           <a:p>
@@ -7166,11 +7626,11 @@
             <a:r>
               <a:rPr sz="1400" b="0" i="0">
                 <a:solidFill>
-                  <a:srgbClr val="0D47A1"/>
-                </a:solidFill>
-                <a:latin typeface="Arial"/>
-              </a:rPr>
-              <a:t>S · Infrastruktur</a:t>
+                  <a:srgbClr val="6A1B9A"/>
+                </a:solidFill>
+                <a:latin typeface="Arial"/>
+              </a:rPr>
+              <a:t>[R] Kepentingan: Enam komponen infrastruktur landskap dan fungsi setiap satu.</a:t>
             </a:r>
           </a:p>
           <a:p>
@@ -7178,23 +7638,35 @@
             <a:r>
               <a:rPr sz="1400" b="0" i="0">
                 <a:solidFill>
-                  <a:srgbClr val="1B5E20"/>
-                </a:solidFill>
-                <a:latin typeface="Arial"/>
-              </a:rPr>
-              <a:t>A · Narator: Hilmi</a:t>
-            </a:r>
-          </a:p>
-          <a:p>
-            <a:pPr algn="l"/>
-            <a:r>
-              <a:rPr sz="1200" b="0" i="0">
-                <a:solidFill>
-                  <a:srgbClr val="6B6B6B"/>
-                </a:solidFill>
-                <a:latin typeface="Arial"/>
-              </a:rPr>
-              <a:t>u · MULA</a:t>
+                  <a:srgbClr val="6A1B9A"/>
+                </a:solidFill>
+                <a:latin typeface="Arial"/>
+              </a:rPr>
+              <a:t>[R] Skop dan Isi Utama: Titik kegagalan yang paling kerap bagi setiap komponen.</a:t>
+            </a:r>
+          </a:p>
+          <a:p>
+            <a:pPr algn="l"/>
+            <a:r>
+              <a:rPr sz="1400" b="0" i="0">
+                <a:solidFill>
+                  <a:srgbClr val="6A1B9A"/>
+                </a:solidFill>
+                <a:latin typeface="Arial"/>
+              </a:rPr>
+              <a:t>[R] Manfaat: Dokumen kawalan yang mengikat kontraktor: lukisan struktur, pelan ukur, pelan saliran.</a:t>
+            </a:r>
+          </a:p>
+          <a:p>
+            <a:pPr algn="l"/>
+            <a:r>
+              <a:rPr sz="1400" b="0" i="0">
+                <a:solidFill>
+                  <a:srgbClr val="B71C1C"/>
+                </a:solidFill>
+                <a:latin typeface="Arial"/>
+              </a:rPr>
+              <a:t>[P] MONTAJ RUMUSAN · PROVISIONAL_VISUAL_DIRECTION · PENDING_BARIAH_UNIT_REVIEW · NOT_MMD_ASSET</a:t>
             </a:r>
           </a:p>
         </p:txBody>
@@ -7217,7 +7689,7 @@
         </p:spPr>
         <p:txBody>
           <a:bodyPr wrap="square" lIns="0" rIns="0" tIns="0" bIns="0">
-            <a:spAutoFit/>
+            <a:noAutofit/>
           </a:bodyPr>
           <a:lstStyle/>
           <a:p>
@@ -7271,13 +7743,49 @@
           <a:p>
             <a:pPr algn="l"/>
             <a:r>
-              <a:rPr sz="1000" b="0" i="1">
-                <a:solidFill>
-                  <a:srgbClr val="6B6B6B"/>
-                </a:solidFill>
-                <a:latin typeface="Arial"/>
-              </a:rPr>
-              <a:t>Tiada visual khusus</a:t>
+              <a:rPr sz="1000" b="0" i="0">
+                <a:solidFill>
+                  <a:srgbClr val="1A1A1A"/>
+                </a:solidFill>
+                <a:latin typeface="Arial"/>
+              </a:rPr>
+              <a:t>Montaj tiga komponen mengikut tiga beat Rumusan</a:t>
+            </a:r>
+          </a:p>
+          <a:p>
+            <a:pPr algn="l"/>
+            <a:r>
+              <a:rPr sz="900" b="0" i="0">
+                <a:solidFill>
+                  <a:srgbClr val="6B6B6B"/>
+                </a:solidFill>
+                <a:latin typeface="Arial"/>
+              </a:rPr>
+              <a:t>Tiada rajah sumber — subjek calon sahaja</a:t>
+            </a:r>
+          </a:p>
+          <a:p>
+            <a:pPr algn="l"/>
+            <a:r>
+              <a:rPr sz="900" b="1" i="0">
+                <a:solidFill>
+                  <a:srgbClr val="B71C1C"/>
+                </a:solidFill>
+                <a:latin typeface="Arial"/>
+              </a:rPr>
+              <a:t>PROVISIONAL_VISUAL_DIRECTION · PENDING_BARIAH_UNIT_REVIEW · NOT_MMD_ASSET</a:t>
+            </a:r>
+          </a:p>
+          <a:p>
+            <a:pPr algn="l"/>
+            <a:r>
+              <a:rPr sz="900" b="1" i="0">
+                <a:solidFill>
+                  <a:srgbClr val="B71C1C"/>
+                </a:solidFill>
+                <a:latin typeface="Arial"/>
+              </a:rPr>
+              <a:t>ASET VISUAL BELUM DIHASILKAN — NOT_MMD_ASSET</a:t>
             </a:r>
           </a:p>
           <a:p>
@@ -7313,7 +7821,7 @@
                 </a:solidFill>
                 <a:latin typeface="Arial"/>
               </a:rPr>
-              <a:t>Baris modul: T03B03-ROW-001</a:t>
+              <a:t>Skrin struktur — tiada baris modul</a:t>
             </a:r>
           </a:p>
           <a:p>
@@ -7325,7 +7833,7 @@
                 </a:solidFill>
                 <a:latin typeface="Arial"/>
               </a:rPr>
-              <a:t>Keputusan Bariah: D2, D4</a:t>
+              <a:t>Keputusan Bariah: A6</a:t>
             </a:r>
           </a:p>
         </p:txBody>
@@ -7348,7 +7856,7 @@
         </p:spPr>
         <p:txBody>
           <a:bodyPr wrap="square" lIns="0" rIns="0" tIns="0" bIns="0">
-            <a:spAutoFit/>
+            <a:noAutofit/>
           </a:bodyPr>
           <a:lstStyle/>
           <a:p>
@@ -7360,7 +7868,7 @@
                 </a:solidFill>
                 <a:latin typeface="Arial"/>
               </a:rPr>
-              <a:t>K5-PL06-T03-B03 · skrin 1 daripada 12   ·   DRAFT_FOR_BARIAH_REVIEW · NOT_INSTRUCTIONALLY_APPROVED · NOT_LEARNER_FACING_FINAL</a:t>
+              <a:t>K5-PL06-T03-B03 · skrin 10 daripada 12   ·   TECHNICAL_PROOF · DRAFT_FOR_BARIAH_REVIEW · NOT_INSTRUCTIONALLY_APPROVED · NOT_LEARNER_FACING_FINAL</a:t>
             </a:r>
           </a:p>
         </p:txBody>
@@ -7373,7 +7881,7 @@
 </p:sld>
 </file>
 
-<file path=ppt/slides/slide3.xml><?xml version="1.0" encoding="utf-8"?>
+<file path=ppt/slides/slide16.xml><?xml version="1.0" encoding="utf-8"?>
 <p:sld xmlns:a="http://schemas.openxmlformats.org/drawingml/2006/main" xmlns:p="http://schemas.openxmlformats.org/presentationml/2006/main" xmlns:r="http://schemas.openxmlformats.org/officeDocument/2006/relationships">
   <p:cSld>
     <p:spTree>
@@ -7401,7 +7909,7 @@
         </p:spPr>
         <p:txBody>
           <a:bodyPr wrap="square" lIns="0" rIns="0" tIns="0" bIns="0">
-            <a:spAutoFit/>
+            <a:noAutofit/>
           </a:bodyPr>
           <a:lstStyle/>
           <a:p>
@@ -7413,7 +7921,7 @@
                 </a:solidFill>
                 <a:latin typeface="Arial"/>
               </a:rPr>
-              <a:t>T03B03-S02   ·   scenario/dialogue only where justified   ·   SCENARIO</a:t>
+              <a:t>T03B03-S11   ·   static content   ·   KUIZ</a:t>
             </a:r>
           </a:p>
           <a:p>
@@ -7425,7 +7933,7 @@
                 </a:solidFill>
                 <a:latin typeface="Arial"/>
               </a:rPr>
-              <a:t>Situasi di tapak</a:t>
+              <a:t>Kuiz   ·   halaman 1/2</a:t>
             </a:r>
           </a:p>
         </p:txBody>
@@ -7459,7 +7967,7 @@
           <a:fillRef idx="3">
             <a:schemeClr val="accent1"/>
           </a:fillRef>
-          <a:effectRef idx="2">
+          <a:effectRef idx="0">
             <a:schemeClr val="accent1"/>
           </a:effectRef>
           <a:fontRef idx="minor">
@@ -7467,7 +7975,9 @@
           </a:fontRef>
         </p:style>
         <p:txBody>
-          <a:bodyPr rtlCol="0" anchor="ctr"/>
+          <a:bodyPr rtlCol="0" anchor="ctr">
+            <a:noAutofit/>
+          </a:bodyPr>
           <a:lstStyle/>
           <a:p>
             <a:pPr algn="ctr"/>
@@ -7492,7 +8002,7 @@
         </p:spPr>
         <p:txBody>
           <a:bodyPr wrap="square" lIns="0" rIns="0" tIns="0" bIns="0">
-            <a:spAutoFit/>
+            <a:noAutofit/>
           </a:bodyPr>
           <a:lstStyle/>
           <a:p>
@@ -7510,73 +8020,193 @@
           <a:p>
             <a:pPr algn="l"/>
             <a:r>
-              <a:rPr sz="1200" b="0" i="0">
-                <a:solidFill>
-                  <a:srgbClr val="6B6B6B"/>
-                </a:solidFill>
-                <a:latin typeface="Arial"/>
-              </a:rPr>
-              <a:t>u · SITUASI</a:t>
-            </a:r>
-          </a:p>
-          <a:p>
-            <a:pPr algn="l"/>
-            <a:r>
               <a:rPr sz="1400" b="0" i="0">
                 <a:solidFill>
-                  <a:srgbClr val="B71C1C"/>
-                </a:solidFill>
-                <a:latin typeface="Arial"/>
-              </a:rPr>
-              <a:t>P · WATAK: PENDING_UNIT_REVIEW — D1 menetapkan watak dipilih per unit</a:t>
-            </a:r>
-          </a:p>
-          <a:p>
-            <a:pPr algn="l"/>
+                  <a:srgbClr val="6A1B9A"/>
+                </a:solidFill>
+                <a:latin typeface="Arial"/>
+              </a:rPr>
+              <a:t>[D] Q1 · Apakah ketebalan maksimum setiap lapisan semasa membina busut tanah (earthmound)?</a:t>
+            </a:r>
+          </a:p>
+          <a:p>
+            <a:pPr algn="l" lvl="1"/>
             <a:r>
               <a:rPr sz="1400" b="0" i="0">
                 <a:solidFill>
-                  <a:srgbClr val="0D47A1"/>
-                </a:solidFill>
-                <a:latin typeface="Arial"/>
-              </a:rPr>
-              <a:t>S · Dinding penahan mesti dibina dengan mematuhi sepenuhnya Lukisan Struktur Jurutera Bertauliah (Ir.). Sebarang perubahan memerlukan kelulusan jurutera.</a:t>
-            </a:r>
-          </a:p>
-          <a:p>
-            <a:pPr algn="l"/>
+                  <a:srgbClr val="6A1B9A"/>
+                </a:solidFill>
+                <a:latin typeface="Arial"/>
+              </a:rPr>
+              <a:t>[D] [dicadangkan betul] Tidak melebihi 300mm setiap lapisan, dan setiap lapisan dipadatkan.</a:t>
+            </a:r>
+          </a:p>
+          <a:p>
+            <a:pPr algn="l" lvl="1"/>
             <a:r>
               <a:rPr sz="1400" b="0" i="0">
                 <a:solidFill>
-                  <a:srgbClr val="0D47A1"/>
-                </a:solidFill>
-                <a:latin typeface="Arial"/>
-              </a:rPr>
-              <a:t>S · Jajaran pagar mesti ditanda mengikut Pelan Ukur Sempadan untuk mengelakkan isu pencerobohan tanah.</a:t>
-            </a:r>
-          </a:p>
-          <a:p>
-            <a:pPr algn="l"/>
+                  <a:srgbClr val="6A1B9A"/>
+                </a:solidFill>
+                <a:latin typeface="Arial"/>
+              </a:rPr>
+              <a:t>[D] Tidak melebihi 600mm, dipadatkan sekali pada akhir</a:t>
+            </a:r>
+          </a:p>
+          <a:p>
+            <a:pPr algn="l" lvl="1"/>
             <a:r>
               <a:rPr sz="1400" b="0" i="0">
                 <a:solidFill>
-                  <a:srgbClr val="0D47A1"/>
-                </a:solidFill>
-                <a:latin typeface="Arial"/>
-              </a:rPr>
-              <a:t>S · Pastikan semua komponen keluli mempunyai lapisan pelindung karat yang sempurna seperti tergalvani panas (hot-dip galvanized) atau cat epoksi.</a:t>
-            </a:r>
-          </a:p>
-          <a:p>
-            <a:pPr algn="l"/>
+                  <a:srgbClr val="6A1B9A"/>
+                </a:solidFill>
+                <a:latin typeface="Arial"/>
+              </a:rPr>
+              <a:t>[D] Tiada had ketebalan selagi jentera boleh memadat</a:t>
+            </a:r>
+          </a:p>
+          <a:p>
+            <a:pPr algn="l" lvl="1"/>
             <a:r>
               <a:rPr sz="1400" b="0" i="0">
                 <a:solidFill>
-                  <a:srgbClr val="B71C1C"/>
-                </a:solidFill>
-                <a:latin typeface="Arial"/>
-              </a:rPr>
-              <a:t>P · DRAFT_FOR_BARIAH_REVIEW · NOT_INSTRUCTIONALLY_APPROVED · NOT_LEARNER_FACING_FINAL</a:t>
+                  <a:srgbClr val="6A1B9A"/>
+                </a:solidFill>
+                <a:latin typeface="Arial"/>
+              </a:rPr>
+              <a:t>[D] Satu lapisan penuh sehingga ketinggian puncak</a:t>
+            </a:r>
+          </a:p>
+          <a:p>
+            <a:pPr algn="l"/>
+            <a:r>
+              <a:rPr sz="1400" b="0" i="0">
+                <a:solidFill>
+                  <a:srgbClr val="6A1B9A"/>
+                </a:solidFill>
+                <a:latin typeface="Arial"/>
+              </a:rPr>
+              <a:t>[D] Q2 · Mengapakah sistem perparitan di belakang dinding penahan adalah wajib?</a:t>
+            </a:r>
+          </a:p>
+          <a:p>
+            <a:pPr algn="l" lvl="1"/>
+            <a:r>
+              <a:rPr sz="1400" b="0" i="0">
+                <a:solidFill>
+                  <a:srgbClr val="6A1B9A"/>
+                </a:solidFill>
+                <a:latin typeface="Arial"/>
+              </a:rPr>
+              <a:t>[D] [dicadangkan betul] Kerana kegagalan dinding penahan selalunya berpunca daripada tekanan air (hydrostatic pressure).</a:t>
+            </a:r>
+          </a:p>
+          <a:p>
+            <a:pPr algn="l" lvl="1"/>
+            <a:r>
+              <a:rPr sz="1400" b="0" i="0">
+                <a:solidFill>
+                  <a:srgbClr val="6A1B9A"/>
+                </a:solidFill>
+                <a:latin typeface="Arial"/>
+              </a:rPr>
+              <a:t>[D] Kerana ia mengurangkan kos konkrit dinding</a:t>
+            </a:r>
+          </a:p>
+          <a:p>
+            <a:pPr algn="l" lvl="1"/>
+            <a:r>
+              <a:rPr sz="1400" b="0" i="0">
+                <a:solidFill>
+                  <a:srgbClr val="6A1B9A"/>
+                </a:solidFill>
+                <a:latin typeface="Arial"/>
+              </a:rPr>
+              <a:t>[D] Kerana ia diperlukan untuk kemasan estetik belakang dinding</a:t>
+            </a:r>
+          </a:p>
+          <a:p>
+            <a:pPr algn="l" lvl="1"/>
+            <a:r>
+              <a:rPr sz="1400" b="0" i="0">
+                <a:solidFill>
+                  <a:srgbClr val="6A1B9A"/>
+                </a:solidFill>
+                <a:latin typeface="Arial"/>
+              </a:rPr>
+              <a:t>[D] Kerana ia menggantikan keperluan tapak asas</a:t>
+            </a:r>
+          </a:p>
+          <a:p>
+            <a:pPr algn="l"/>
+            <a:r>
+              <a:rPr sz="1400" b="0" i="0">
+                <a:solidFill>
+                  <a:srgbClr val="6A1B9A"/>
+                </a:solidFill>
+                <a:latin typeface="Arial"/>
+              </a:rPr>
+              <a:t>[D] Q3 · Pelan manakah yang menentukan jajaran pagar di tapak?</a:t>
+            </a:r>
+          </a:p>
+          <a:p>
+            <a:pPr algn="l" lvl="1"/>
+            <a:r>
+              <a:rPr sz="1400" b="0" i="0">
+                <a:solidFill>
+                  <a:srgbClr val="6A1B9A"/>
+                </a:solidFill>
+                <a:latin typeface="Arial"/>
+              </a:rPr>
+              <a:t>[D] [dicadangkan betul] Pelan Ukur Sempadan.</a:t>
+            </a:r>
+          </a:p>
+          <a:p>
+            <a:pPr algn="l" lvl="1"/>
+            <a:r>
+              <a:rPr sz="1400" b="0" i="0">
+                <a:solidFill>
+                  <a:srgbClr val="6A1B9A"/>
+                </a:solidFill>
+                <a:latin typeface="Arial"/>
+              </a:rPr>
+              <a:t>[D] Pelan Saliran</a:t>
+            </a:r>
+          </a:p>
+          <a:p>
+            <a:pPr algn="l" lvl="1"/>
+            <a:r>
+              <a:rPr sz="1400" b="0" i="0">
+                <a:solidFill>
+                  <a:srgbClr val="6A1B9A"/>
+                </a:solidFill>
+                <a:latin typeface="Arial"/>
+              </a:rPr>
+              <a:t>[D] Lukisan Struktur Jurutera</a:t>
+            </a:r>
+          </a:p>
+          <a:p>
+            <a:pPr algn="l" lvl="1"/>
+            <a:r>
+              <a:rPr sz="1400" b="0" i="0">
+                <a:solidFill>
+                  <a:srgbClr val="6A1B9A"/>
+                </a:solidFill>
+                <a:latin typeface="Arial"/>
+              </a:rPr>
+              <a:t>[D] Pelan Susun Atur Tanaman</a:t>
+            </a:r>
+          </a:p>
+          <a:p>
+            <a:pPr algn="l"/>
+            <a:r>
+              <a:rPr sz="1400" b="0" i="0">
+                <a:solidFill>
+                  <a:srgbClr val="6A1B9A"/>
+                </a:solidFill>
+                <a:latin typeface="Arial"/>
+              </a:rPr>
+              <a:t>[D] Q4 · Apakah fungsi kamber (camber) pada permukaan jalan akses?</a:t>
             </a:r>
           </a:p>
         </p:txBody>
@@ -7599,7 +8229,7 @@
         </p:spPr>
         <p:txBody>
           <a:bodyPr wrap="square" lIns="0" rIns="0" tIns="0" bIns="0">
-            <a:spAutoFit/>
+            <a:noAutofit/>
           </a:bodyPr>
           <a:lstStyle/>
           <a:p>
@@ -7695,7 +8325,7 @@
                 </a:solidFill>
                 <a:latin typeface="Arial"/>
               </a:rPr>
-              <a:t>Baris modul: T03B03-ROW-037, T03B03-ROW-048, T03B03-ROW-054</a:t>
+              <a:t>Baris modul: T03B03-ROW-013, T03B03-ROW-041, T03B03-ROW-048, T03B03-ROW-056, T03B03-ROW-058, T03B03-ROW-063, T03B03-ROW-076</a:t>
             </a:r>
           </a:p>
           <a:p>
@@ -7707,7 +8337,7 @@
                 </a:solidFill>
                 <a:latin typeface="Arial"/>
               </a:rPr>
-              <a:t>Keputusan Bariah: D3, A5, D1</a:t>
+              <a:t>Keputusan Bariah: A7</a:t>
             </a:r>
           </a:p>
         </p:txBody>
@@ -7730,7 +8360,7 @@
         </p:spPr>
         <p:txBody>
           <a:bodyPr wrap="square" lIns="0" rIns="0" tIns="0" bIns="0">
-            <a:spAutoFit/>
+            <a:noAutofit/>
           </a:bodyPr>
           <a:lstStyle/>
           <a:p>
@@ -7742,7 +8372,7 @@
                 </a:solidFill>
                 <a:latin typeface="Arial"/>
               </a:rPr>
-              <a:t>K5-PL06-T03-B03 · skrin 2 daripada 12   ·   DRAFT_FOR_BARIAH_REVIEW · NOT_INSTRUCTIONALLY_APPROVED · NOT_LEARNER_FACING_FINAL</a:t>
+              <a:t>K5-PL06-T03-B03 · skrin 11 daripada 12  ·  halaman 1/2   ·   TECHNICAL_PROOF · DRAFT_FOR_BARIAH_REVIEW · NOT_INSTRUCTIONALLY_APPROVED · NOT_LEARNER_FACING_FINAL</a:t>
             </a:r>
           </a:p>
         </p:txBody>
@@ -7755,7 +8385,7 @@
 </p:sld>
 </file>
 
-<file path=ppt/slides/slide4.xml><?xml version="1.0" encoding="utf-8"?>
+<file path=ppt/slides/slide17.xml><?xml version="1.0" encoding="utf-8"?>
 <p:sld xmlns:a="http://schemas.openxmlformats.org/drawingml/2006/main" xmlns:p="http://schemas.openxmlformats.org/presentationml/2006/main" xmlns:r="http://schemas.openxmlformats.org/officeDocument/2006/relationships">
   <p:cSld>
     <p:spTree>
@@ -7783,7 +8413,7 @@
         </p:spPr>
         <p:txBody>
           <a:bodyPr wrap="square" lIns="0" rIns="0" tIns="0" bIns="0">
-            <a:spAutoFit/>
+            <a:noAutofit/>
           </a:bodyPr>
           <a:lstStyle/>
           <a:p>
@@ -7795,7 +8425,7 @@
                 </a:solidFill>
                 <a:latin typeface="Arial"/>
               </a:rPr>
-              <a:t>T03B03-S03   ·   static content   ·   SHELL_ORIENTATION</a:t>
+              <a:t>T03B03-S11   ·   static content   ·   KUIZ</a:t>
             </a:r>
           </a:p>
           <a:p>
@@ -7807,7 +8437,7 @@
                 </a:solidFill>
                 <a:latin typeface="Arial"/>
               </a:rPr>
-              <a:t>Apa yang anda akan pelajari</a:t>
+              <a:t>Kuiz   ·   halaman 2/2</a:t>
             </a:r>
           </a:p>
         </p:txBody>
@@ -7841,7 +8471,7 @@
           <a:fillRef idx="3">
             <a:schemeClr val="accent1"/>
           </a:fillRef>
-          <a:effectRef idx="2">
+          <a:effectRef idx="0">
             <a:schemeClr val="accent1"/>
           </a:effectRef>
           <a:fontRef idx="minor">
@@ -7849,7 +8479,9 @@
           </a:fontRef>
         </p:style>
         <p:txBody>
-          <a:bodyPr rtlCol="0" anchor="ctr"/>
+          <a:bodyPr rtlCol="0" anchor="ctr">
+            <a:noAutofit/>
+          </a:bodyPr>
           <a:lstStyle/>
           <a:p>
             <a:pPr algn="ctr"/>
@@ -7874,7 +8506,7 @@
         </p:spPr>
         <p:txBody>
           <a:bodyPr wrap="square" lIns="0" rIns="0" tIns="0" bIns="0">
-            <a:spAutoFit/>
+            <a:noAutofit/>
           </a:bodyPr>
           <a:lstStyle/>
           <a:p>
@@ -7886,67 +8518,55 @@
                 </a:solidFill>
                 <a:latin typeface="Arial"/>
               </a:rPr>
-              <a:t>KANDUNGAN SKRIN</a:t>
-            </a:r>
-          </a:p>
-          <a:p>
-            <a:pPr algn="l"/>
-            <a:r>
-              <a:rPr sz="1200" b="0" i="0">
-                <a:solidFill>
-                  <a:srgbClr val="6B6B6B"/>
-                </a:solidFill>
-                <a:latin typeface="Arial"/>
-              </a:rPr>
-              <a:t>u · Klik setiap tajuk untuk memaparkan maklumat.</a:t>
-            </a:r>
-          </a:p>
-          <a:p>
-            <a:pPr algn="l"/>
+              <a:t>KANDUNGAN SKRIN (sambungan)</a:t>
+            </a:r>
+          </a:p>
+          <a:p>
+            <a:pPr algn="l" lvl="1"/>
             <a:r>
               <a:rPr sz="1400" b="0" i="0">
                 <a:solidFill>
-                  <a:srgbClr val="0D47A1"/>
-                </a:solidFill>
-                <a:latin typeface="Arial"/>
-              </a:rPr>
-              <a:t>S · Landform / Earthmound</a:t>
-            </a:r>
-          </a:p>
-          <a:p>
-            <a:pPr algn="l"/>
+                  <a:srgbClr val="6A1B9A"/>
+                </a:solidFill>
+                <a:latin typeface="Arial"/>
+              </a:rPr>
+              <a:t>[D] [dicadangkan betul] Memberikan kecerunan melintang dari tengah ke tepi supaya air tidak bertakung di permukaan.</a:t>
+            </a:r>
+          </a:p>
+          <a:p>
+            <a:pPr algn="l" lvl="1"/>
             <a:r>
               <a:rPr sz="1400" b="0" i="0">
                 <a:solidFill>
-                  <a:srgbClr val="0D47A1"/>
-                </a:solidFill>
-                <a:latin typeface="Arial"/>
-              </a:rPr>
-              <a:t>S · Sub soil drainage</a:t>
-            </a:r>
-          </a:p>
-          <a:p>
-            <a:pPr algn="l"/>
+                  <a:srgbClr val="6A1B9A"/>
+                </a:solidFill>
+                <a:latin typeface="Arial"/>
+              </a:rPr>
+              <a:t>[D] Menambah ketebalan lapisan permukaan di bahagian tengah</a:t>
+            </a:r>
+          </a:p>
+          <a:p>
+            <a:pPr algn="l" lvl="1"/>
             <a:r>
               <a:rPr sz="1400" b="0" i="0">
                 <a:solidFill>
-                  <a:srgbClr val="0D47A1"/>
-                </a:solidFill>
-                <a:latin typeface="Arial"/>
-              </a:rPr>
-              <a:t>S · Dinding Penahan (Retaining Wall)</a:t>
-            </a:r>
-          </a:p>
-          <a:p>
-            <a:pPr algn="l"/>
+                  <a:srgbClr val="6A1B9A"/>
+                </a:solidFill>
+                <a:latin typeface="Arial"/>
+              </a:rPr>
+              <a:t>[D] Menandakan sempadan jalan untuk pemandu</a:t>
+            </a:r>
+          </a:p>
+          <a:p>
+            <a:pPr algn="l" lvl="1"/>
             <a:r>
               <a:rPr sz="1400" b="0" i="0">
                 <a:solidFill>
-                  <a:srgbClr val="0D47A1"/>
-                </a:solidFill>
-                <a:latin typeface="Arial"/>
-              </a:rPr>
-              <a:t>S · Fencing</a:t>
+                  <a:srgbClr val="6A1B9A"/>
+                </a:solidFill>
+                <a:latin typeface="Arial"/>
+              </a:rPr>
+              <a:t>[D] Menahan lapisan permukaan daripada bergerak ke tepi</a:t>
             </a:r>
           </a:p>
           <a:p>
@@ -7954,23 +8574,107 @@
             <a:r>
               <a:rPr sz="1400" b="0" i="0">
                 <a:solidFill>
-                  <a:srgbClr val="0D47A1"/>
-                </a:solidFill>
-                <a:latin typeface="Arial"/>
-              </a:rPr>
-              <a:t>S · Swale/ Natural Drain</a:t>
-            </a:r>
-          </a:p>
-          <a:p>
-            <a:pPr algn="l"/>
+                  <a:srgbClr val="6A1B9A"/>
+                </a:solidFill>
+                <a:latin typeface="Arial"/>
+              </a:rPr>
+              <a:t>[D] Q5 · Pilih SEMUA ciri yang menepati swale sebagai alternatif kepada longkang konkrit.</a:t>
+            </a:r>
+          </a:p>
+          <a:p>
+            <a:pPr algn="l" lvl="1"/>
             <a:r>
               <a:rPr sz="1400" b="0" i="0">
                 <a:solidFill>
-                  <a:srgbClr val="0D47A1"/>
-                </a:solidFill>
-                <a:latin typeface="Arial"/>
-              </a:rPr>
-              <a:t>S · Jalan akses</a:t>
+                  <a:srgbClr val="6A1B9A"/>
+                </a:solidFill>
+                <a:latin typeface="Arial"/>
+              </a:rPr>
+              <a:t>[D] [dicadangkan betul] Parit yang cetek dan lebar</a:t>
+            </a:r>
+          </a:p>
+          <a:p>
+            <a:pPr algn="l" lvl="1"/>
+            <a:r>
+              <a:rPr sz="1400" b="0" i="0">
+                <a:solidFill>
+                  <a:srgbClr val="6A1B9A"/>
+                </a:solidFill>
+                <a:latin typeface="Arial"/>
+              </a:rPr>
+              <a:t>[D] [dicadangkan betul] Ditanami rumput atau tumbuhan tahan air</a:t>
+            </a:r>
+          </a:p>
+          <a:p>
+            <a:pPr algn="l" lvl="1"/>
+            <a:r>
+              <a:rPr sz="1400" b="0" i="0">
+                <a:solidFill>
+                  <a:srgbClr val="6A1B9A"/>
+                </a:solidFill>
+                <a:latin typeface="Arial"/>
+              </a:rPr>
+              <a:t>[D] [dicadangkan betul] Memperlahankan aliran air larian permukaan</a:t>
+            </a:r>
+          </a:p>
+          <a:p>
+            <a:pPr algn="l" lvl="1"/>
+            <a:r>
+              <a:rPr sz="1400" b="0" i="0">
+                <a:solidFill>
+                  <a:srgbClr val="6A1B9A"/>
+                </a:solidFill>
+                <a:latin typeface="Arial"/>
+              </a:rPr>
+              <a:t>[D] [dicadangkan betul] Menggalakkan penyerapan air ke dalam tanah</a:t>
+            </a:r>
+          </a:p>
+          <a:p>
+            <a:pPr algn="l" lvl="1"/>
+            <a:r>
+              <a:rPr sz="1400" b="0" i="0">
+                <a:solidFill>
+                  <a:srgbClr val="6A1B9A"/>
+                </a:solidFill>
+                <a:latin typeface="Arial"/>
+              </a:rPr>
+              <a:t>[D] Dilapisi konkrit di seluruh permukaannya</a:t>
+            </a:r>
+          </a:p>
+          <a:p>
+            <a:pPr algn="l" lvl="1"/>
+            <a:r>
+              <a:rPr sz="1400" b="0" i="0">
+                <a:solidFill>
+                  <a:srgbClr val="6A1B9A"/>
+                </a:solidFill>
+                <a:latin typeface="Arial"/>
+              </a:rPr>
+              <a:t>[D] Direka untuk mempercepatkan aliran ke saluran keluar</a:t>
+            </a:r>
+          </a:p>
+          <a:p>
+            <a:pPr algn="l"/>
+            <a:r>
+              <a:rPr sz="1400" b="0" i="0">
+                <a:solidFill>
+                  <a:srgbClr val="1B5E20"/>
+                </a:solidFill>
+                <a:latin typeface="Arial"/>
+              </a:rPr>
+              <a:t>[A] Markah lulus 60 peratus</a:t>
+            </a:r>
+          </a:p>
+          <a:p>
+            <a:pPr algn="l"/>
+            <a:r>
+              <a:rPr sz="1400" b="0" i="0">
+                <a:solidFill>
+                  <a:srgbClr val="B71C1C"/>
+                </a:solidFill>
+                <a:latin typeface="Arial"/>
+              </a:rPr>
+              <a:t>[P] KUNCI JAWAPAN: DRAFTED_NOT_APPROVED</a:t>
             </a:r>
           </a:p>
         </p:txBody>
@@ -7993,7 +8697,7 @@
         </p:spPr>
         <p:txBody>
           <a:bodyPr wrap="square" lIns="0" rIns="0" tIns="0" bIns="0">
-            <a:spAutoFit/>
+            <a:noAutofit/>
           </a:bodyPr>
           <a:lstStyle/>
           <a:p>
@@ -8089,7 +8793,7 @@
                 </a:solidFill>
                 <a:latin typeface="Arial"/>
               </a:rPr>
-              <a:t>Baris modul: T03B03-ROW-002, T03B03-ROW-016, T03B03-ROW-032, T03B03-ROW-042, T03B03-ROW-055, T03B03-ROW-064</a:t>
+              <a:t>Baris modul: T03B03-ROW-013, T03B03-ROW-041, T03B03-ROW-048, T03B03-ROW-056, T03B03-ROW-058, T03B03-ROW-063, T03B03-ROW-076</a:t>
             </a:r>
           </a:p>
           <a:p>
@@ -8101,7 +8805,7 @@
                 </a:solidFill>
                 <a:latin typeface="Arial"/>
               </a:rPr>
-              <a:t>Keputusan Bariah: A1</a:t>
+              <a:t>Keputusan Bariah: A7</a:t>
             </a:r>
           </a:p>
         </p:txBody>
@@ -8124,7 +8828,7 @@
         </p:spPr>
         <p:txBody>
           <a:bodyPr wrap="square" lIns="0" rIns="0" tIns="0" bIns="0">
-            <a:spAutoFit/>
+            <a:noAutofit/>
           </a:bodyPr>
           <a:lstStyle/>
           <a:p>
@@ -8136,7 +8840,7 @@
                 </a:solidFill>
                 <a:latin typeface="Arial"/>
               </a:rPr>
-              <a:t>K5-PL06-T03-B03 · skrin 3 daripada 12   ·   DRAFT_FOR_BARIAH_REVIEW · NOT_INSTRUCTIONALLY_APPROVED · NOT_LEARNER_FACING_FINAL</a:t>
+              <a:t>K5-PL06-T03-B03 · skrin 11 daripada 12  ·  halaman 2/2   ·   TECHNICAL_PROOF · DRAFT_FOR_BARIAH_REVIEW · NOT_INSTRUCTIONALLY_APPROVED · NOT_LEARNER_FACING_FINAL</a:t>
             </a:r>
           </a:p>
         </p:txBody>
@@ -8149,7 +8853,7 @@
 </p:sld>
 </file>
 
-<file path=ppt/slides/slide5.xml><?xml version="1.0" encoding="utf-8"?>
+<file path=ppt/slides/slide18.xml><?xml version="1.0" encoding="utf-8"?>
 <p:sld xmlns:a="http://schemas.openxmlformats.org/drawingml/2006/main" xmlns:p="http://schemas.openxmlformats.org/presentationml/2006/main" xmlns:r="http://schemas.openxmlformats.org/officeDocument/2006/relationships">
   <p:cSld>
     <p:spTree>
@@ -8177,7 +8881,7 @@
         </p:spPr>
         <p:txBody>
           <a:bodyPr wrap="square" lIns="0" rIns="0" tIns="0" bIns="0">
-            <a:spAutoFit/>
+            <a:noAutofit/>
           </a:bodyPr>
           <a:lstStyle/>
           <a:p>
@@ -8189,7 +8893,7 @@
                 </a:solidFill>
                 <a:latin typeface="Arial"/>
               </a:rPr>
-              <a:t>T03B03-S04   ·   click-to-reveal   ·   CONTENT</a:t>
+              <a:t>T03B03-S12   ·   static content   ·   TAMAT</a:t>
             </a:r>
           </a:p>
           <a:p>
@@ -8201,7 +8905,7 @@
                 </a:solidFill>
                 <a:latin typeface="Arial"/>
               </a:rPr>
-              <a:t>Landform / Earthmound</a:t>
+              <a:t>Tamat Bahagian</a:t>
             </a:r>
           </a:p>
         </p:txBody>
@@ -8235,7 +8939,7 @@
           <a:fillRef idx="3">
             <a:schemeClr val="accent1"/>
           </a:fillRef>
-          <a:effectRef idx="2">
+          <a:effectRef idx="0">
             <a:schemeClr val="accent1"/>
           </a:effectRef>
           <a:fontRef idx="minor">
@@ -8243,7 +8947,9 @@
           </a:fontRef>
         </p:style>
         <p:txBody>
-          <a:bodyPr rtlCol="0" anchor="ctr"/>
+          <a:bodyPr rtlCol="0" anchor="ctr">
+            <a:noAutofit/>
+          </a:bodyPr>
           <a:lstStyle/>
           <a:p>
             <a:pPr algn="ctr"/>
@@ -8268,7 +8974,7 @@
         </p:spPr>
         <p:txBody>
           <a:bodyPr wrap="square" lIns="0" rIns="0" tIns="0" bIns="0">
-            <a:spAutoFit/>
+            <a:noAutofit/>
           </a:bodyPr>
           <a:lstStyle/>
           <a:p>
@@ -8288,179 +8994,11 @@
             <a:r>
               <a:rPr sz="1400" b="0" i="0">
                 <a:solidFill>
-                  <a:srgbClr val="0D47A1"/>
-                </a:solidFill>
-                <a:latin typeface="Arial"/>
-              </a:rPr>
-              <a:t>S · Landform / Earthmound</a:t>
-            </a:r>
-          </a:p>
-          <a:p>
-            <a:pPr algn="l"/>
-            <a:r>
-              <a:rPr sz="1400" b="0" i="0">
-                <a:solidFill>
-                  <a:srgbClr val="0D47A1"/>
-                </a:solidFill>
-                <a:latin typeface="Arial"/>
-              </a:rPr>
-              <a:t>S~ · Busut tanah dibina berlapis, setiap lapisan tidak melebihi 300mm tebal, dan setiap lapisan dipadatkan.</a:t>
-            </a:r>
-          </a:p>
-          <a:p>
-            <a:pPr algn="l"/>
-            <a:r>
-              <a:rPr sz="1400" b="0" i="0">
-                <a:solidFill>
-                  <a:srgbClr val="0D47A1"/>
-                </a:solidFill>
-                <a:latin typeface="Arial"/>
-              </a:rPr>
-              <a:t>S · Fungsi</a:t>
-            </a:r>
-          </a:p>
-          <a:p>
-            <a:pPr algn="l" lvl="1"/>
-            <a:r>
-              <a:rPr sz="1400" b="0" i="0">
-                <a:solidFill>
-                  <a:srgbClr val="0D47A1"/>
-                </a:solidFill>
-                <a:latin typeface="Arial"/>
-              </a:rPr>
-              <a:t>S · Mewujudkan pemandangan yang menarik secara visual serta mengurangkan kerataan tapak.</a:t>
-            </a:r>
-          </a:p>
-          <a:p>
-            <a:pPr algn="l" lvl="1"/>
-            <a:r>
-              <a:rPr sz="1400" b="0" i="0">
-                <a:solidFill>
-                  <a:srgbClr val="0D47A1"/>
-                </a:solidFill>
-                <a:latin typeface="Arial"/>
-              </a:rPr>
-              <a:t>S · Berfungsi sebagai penghadang visual atau bunyi.</a:t>
-            </a:r>
-          </a:p>
-          <a:p>
-            <a:pPr algn="l" lvl="1"/>
-            <a:r>
-              <a:rPr sz="1400" b="0" i="0">
-                <a:solidFill>
-                  <a:srgbClr val="0D47A1"/>
-                </a:solidFill>
-                <a:latin typeface="Arial"/>
-              </a:rPr>
-              <a:t>S · Mengawal dan mengarahkan aliran air permukaan.</a:t>
-            </a:r>
-          </a:p>
-          <a:p>
-            <a:pPr algn="l"/>
-            <a:r>
-              <a:rPr sz="1400" b="0" i="0">
-                <a:solidFill>
-                  <a:srgbClr val="0D47A1"/>
-                </a:solidFill>
-                <a:latin typeface="Arial"/>
-              </a:rPr>
-              <a:t>S · Fokus Utama Kontraktor</a:t>
-            </a:r>
-          </a:p>
-          <a:p>
-            <a:pPr algn="l" lvl="1"/>
-            <a:r>
-              <a:rPr sz="1400" b="0" i="0">
-                <a:solidFill>
-                  <a:srgbClr val="0D47A1"/>
-                </a:solidFill>
-                <a:latin typeface="Arial"/>
-              </a:rPr>
-              <a:t>S · Penandaan Tapak (Setting Out)</a:t>
-            </a:r>
-          </a:p>
-          <a:p>
-            <a:pPr algn="l" lvl="2"/>
-            <a:r>
-              <a:rPr sz="1400" b="0" i="0">
-                <a:solidFill>
-                  <a:srgbClr val="0D47A1"/>
-                </a:solidFill>
-                <a:latin typeface="Arial"/>
-              </a:rPr>
-              <a:t>S · Lokasi, keluasan tapak, dan ketinggian puncak busut mesti ditanda dengan tepat di tapak mengikut pelan kerja tanah (Earthwork Plan).</a:t>
-            </a:r>
-          </a:p>
-          <a:p>
-            <a:pPr algn="l" lvl="1"/>
-            <a:r>
-              <a:rPr sz="1400" b="0" i="0">
-                <a:solidFill>
-                  <a:srgbClr val="0D47A1"/>
-                </a:solidFill>
-                <a:latin typeface="Arial"/>
-              </a:rPr>
-              <a:t>S · Bahan Timbus</a:t>
-            </a:r>
-          </a:p>
-          <a:p>
-            <a:pPr algn="l" lvl="2"/>
-            <a:r>
-              <a:rPr sz="1400" b="0" i="0">
-                <a:solidFill>
-                  <a:srgbClr val="0D47A1"/>
-                </a:solidFill>
-                <a:latin typeface="Arial"/>
-              </a:rPr>
-              <a:t>S · Bahan tanah yang digunakan mestilah bahan yang sesuai, bebas daripada sisa binaan, akar kayu, dan batu besar. Tanah mestilah diluluskan oleh Pegawai Penguasa (S.O.).</a:t>
-            </a:r>
-          </a:p>
-          <a:p>
-            <a:pPr algn="l" lvl="1"/>
-            <a:r>
-              <a:rPr sz="1400" b="0" i="0">
-                <a:solidFill>
-                  <a:srgbClr val="0D47A1"/>
-                </a:solidFill>
-                <a:latin typeface="Arial"/>
-              </a:rPr>
-              <a:t>S · Pemadatan Berlapis</a:t>
-            </a:r>
-          </a:p>
-          <a:p>
-            <a:pPr algn="l" lvl="2"/>
-            <a:r>
-              <a:rPr sz="1400" b="0" i="0">
-                <a:solidFill>
-                  <a:srgbClr val="0D47A1"/>
-                </a:solidFill>
-                <a:latin typeface="Arial"/>
-              </a:rPr>
-              <a:t>S · Busut tanah mesti dibina secara berperingkat dalam lapisan-lapisan tidak melebihi 300mm tebal. Setiap lapisan wajib dipadatkan dengan sempurna menggunakan jentera pemadat (compactor) untuk mengelakkan mendapan (settlement) pada masa hadapan.</a:t>
-            </a:r>
-          </a:p>
-          <a:p>
-            <a:pPr algn="l" lvl="1"/>
-            <a:r>
-              <a:rPr sz="1400" b="0" i="0">
-                <a:solidFill>
-                  <a:srgbClr val="0D47A1"/>
-                </a:solidFill>
-                <a:latin typeface="Arial"/>
-              </a:rPr>
-              <a:t>S · Kecerunan Akhir</a:t>
-            </a:r>
-          </a:p>
-          <a:p>
-            <a:pPr algn="l" lvl="2"/>
-            <a:r>
-              <a:rPr sz="1400" b="0" i="0">
-                <a:solidFill>
-                  <a:srgbClr val="0D47A1"/>
-                </a:solidFill>
-                <a:latin typeface="Arial"/>
-              </a:rPr>
-              <a:t>S · Kecerunan busut mesti dibentuk mengikut nisbah yang ditetapkan dalam lukisan (cth: 1:3) untuk memastikan kestabilan dan mengelakkan hakisan. Permukaan akhir mesti dilindungi segera dengan rumput atau tanaman penutup bumi.</a:t>
+                  <a:srgbClr val="1B5E20"/>
+                </a:solidFill>
+                <a:latin typeface="Arial"/>
+              </a:rPr>
+              <a:t>[A] Tamat Bahagian 3. Teruskan pembelajaran ke bahagian seterusnya</a:t>
             </a:r>
           </a:p>
           <a:p>
@@ -8472,7 +9010,7 @@
                 </a:solidFill>
                 <a:latin typeface="Arial"/>
               </a:rPr>
-              <a:t>u · Klik setiap tajuk untuk memaparkan maklumat.</a:t>
+              <a:t>[U] SETERUSNYA</a:t>
             </a:r>
           </a:p>
         </p:txBody>
@@ -8495,7 +9033,7 @@
         </p:spPr>
         <p:txBody>
           <a:bodyPr wrap="square" lIns="0" rIns="0" tIns="0" bIns="0">
-            <a:spAutoFit/>
+            <a:noAutofit/>
           </a:bodyPr>
           <a:lstStyle/>
           <a:p>
@@ -8513,61 +9051,73 @@
           <a:p>
             <a:pPr algn="l"/>
             <a:r>
-              <a:rPr sz="1000" b="0" i="0">
+              <a:rPr sz="1000" b="0" i="1">
+                <a:solidFill>
+                  <a:srgbClr val="6B6B6B"/>
+                </a:solidFill>
+                <a:latin typeface="Arial"/>
+              </a:rPr>
+              <a:t>Tiada interaksi — skrin statik</a:t>
+            </a:r>
+          </a:p>
+          <a:p>
+            <a:pPr algn="l"/>
+            <a:r>
+              <a:rPr sz="800" b="0" i="0">
                 <a:solidFill>
                   <a:srgbClr val="1A1A1A"/>
                 </a:solidFill>
                 <a:latin typeface="Arial"/>
               </a:rPr>
-              <a:t>click-to-reveal · 4 panel</a:t>
-            </a:r>
-          </a:p>
-          <a:p>
-            <a:pPr algn="l" lvl="1"/>
-            <a:r>
-              <a:rPr sz="900" b="0" i="0">
+              <a:t/>
+            </a:r>
+          </a:p>
+          <a:p>
+            <a:pPr algn="l"/>
+            <a:r>
+              <a:rPr sz="1000" b="1" i="0">
+                <a:solidFill>
+                  <a:srgbClr val="6B6B6B"/>
+                </a:solidFill>
+                <a:latin typeface="Arial"/>
+              </a:rPr>
+              <a:t>VISUAL</a:t>
+            </a:r>
+          </a:p>
+          <a:p>
+            <a:pPr algn="l"/>
+            <a:r>
+              <a:rPr sz="1000" b="0" i="1">
+                <a:solidFill>
+                  <a:srgbClr val="6B6B6B"/>
+                </a:solidFill>
+                <a:latin typeface="Arial"/>
+              </a:rPr>
+              <a:t>Tiada visual khusus</a:t>
+            </a:r>
+          </a:p>
+          <a:p>
+            <a:pPr algn="l"/>
+            <a:r>
+              <a:rPr sz="800" b="0" i="0">
                 <a:solidFill>
                   <a:srgbClr val="1A1A1A"/>
                 </a:solidFill>
                 <a:latin typeface="Arial"/>
               </a:rPr>
-              <a:t>1. Penandaan Tapak (Setting Out)</a:t>
-            </a:r>
-          </a:p>
-          <a:p>
-            <a:pPr algn="l" lvl="1"/>
-            <a:r>
-              <a:rPr sz="900" b="0" i="0">
-                <a:solidFill>
-                  <a:srgbClr val="1A1A1A"/>
-                </a:solidFill>
-                <a:latin typeface="Arial"/>
-              </a:rPr>
-              <a:t>2. Bahan Timbus</a:t>
-            </a:r>
-          </a:p>
-          <a:p>
-            <a:pPr algn="l" lvl="1"/>
-            <a:r>
-              <a:rPr sz="900" b="0" i="0">
-                <a:solidFill>
-                  <a:srgbClr val="1A1A1A"/>
-                </a:solidFill>
-                <a:latin typeface="Arial"/>
-              </a:rPr>
-              <a:t>3. Pemadatan Berlapis</a:t>
-            </a:r>
-          </a:p>
-          <a:p>
-            <a:pPr algn="l" lvl="1"/>
-            <a:r>
-              <a:rPr sz="900" b="0" i="0">
-                <a:solidFill>
-                  <a:srgbClr val="1A1A1A"/>
-                </a:solidFill>
-                <a:latin typeface="Arial"/>
-              </a:rPr>
-              <a:t>4. Kecerunan Akhir</a:t>
+              <a:t/>
+            </a:r>
+          </a:p>
+          <a:p>
+            <a:pPr algn="l"/>
+            <a:r>
+              <a:rPr sz="1000" b="1" i="0">
+                <a:solidFill>
+                  <a:srgbClr val="6B6B6B"/>
+                </a:solidFill>
+                <a:latin typeface="Arial"/>
+              </a:rPr>
+              <a:t>SUMBER DAN KEPUTUSAN</a:t>
             </a:r>
           </a:p>
           <a:p>
@@ -8575,71 +9125,11 @@
             <a:r>
               <a:rPr sz="800" b="0" i="0">
                 <a:solidFill>
-                  <a:srgbClr val="1A1A1A"/>
-                </a:solidFill>
-                <a:latin typeface="Arial"/>
-              </a:rPr>
-              <a:t/>
-            </a:r>
-          </a:p>
-          <a:p>
-            <a:pPr algn="l"/>
-            <a:r>
-              <a:rPr sz="1000" b="1" i="0">
-                <a:solidFill>
-                  <a:srgbClr val="6B6B6B"/>
-                </a:solidFill>
-                <a:latin typeface="Arial"/>
-              </a:rPr>
-              <a:t>VISUAL</a:t>
-            </a:r>
-          </a:p>
-          <a:p>
-            <a:pPr algn="l"/>
-            <a:r>
-              <a:rPr sz="1000" b="0" i="0">
-                <a:solidFill>
-                  <a:srgbClr val="1A1A1A"/>
-                </a:solidFill>
-                <a:latin typeface="Arial"/>
-              </a:rPr>
-              <a:t>Busut tanah berlapis 300mm dengan kecerunan 1:3</a:t>
-            </a:r>
-          </a:p>
-          <a:p>
-            <a:pPr algn="l"/>
-            <a:r>
-              <a:rPr sz="900" b="0" i="0">
-                <a:solidFill>
-                  <a:srgbClr val="6B6B6B"/>
-                </a:solidFill>
-                <a:latin typeface="Arial"/>
-              </a:rPr>
-              <a:t>Tiada rajah sumber — subjek calon sahaja</a:t>
-            </a:r>
-          </a:p>
-          <a:p>
-            <a:pPr algn="l"/>
-            <a:r>
-              <a:rPr sz="900" b="1" i="0">
-                <a:solidFill>
-                  <a:srgbClr val="B71C1C"/>
-                </a:solidFill>
-                <a:latin typeface="Arial"/>
-              </a:rPr>
-              <a:t>SUBJEK VISUAL: PENDING_BARIAH_UNIT_REVIEW</a:t>
-            </a:r>
-          </a:p>
-          <a:p>
-            <a:pPr algn="l"/>
-            <a:r>
-              <a:rPr sz="900" b="1" i="0">
-                <a:solidFill>
-                  <a:srgbClr val="B71C1C"/>
-                </a:solidFill>
-                <a:latin typeface="Arial"/>
-              </a:rPr>
-              <a:t>ASET VISUAL BELUM DIHASILKAN — NOT_MMD_ASSET</a:t>
+                  <a:srgbClr val="0D47A1"/>
+                </a:solidFill>
+                <a:latin typeface="Arial"/>
+              </a:rPr>
+              <a:t>Skrin struktur — tiada baris modul</a:t>
             </a:r>
           </a:p>
           <a:p>
@@ -8647,47 +9137,11 @@
             <a:r>
               <a:rPr sz="800" b="0" i="0">
                 <a:solidFill>
-                  <a:srgbClr val="1A1A1A"/>
-                </a:solidFill>
-                <a:latin typeface="Arial"/>
-              </a:rPr>
-              <a:t/>
-            </a:r>
-          </a:p>
-          <a:p>
-            <a:pPr algn="l"/>
-            <a:r>
-              <a:rPr sz="1000" b="1" i="0">
-                <a:solidFill>
-                  <a:srgbClr val="6B6B6B"/>
-                </a:solidFill>
-                <a:latin typeface="Arial"/>
-              </a:rPr>
-              <a:t>SUMBER DAN KEPUTUSAN</a:t>
-            </a:r>
-          </a:p>
-          <a:p>
-            <a:pPr algn="l"/>
-            <a:r>
-              <a:rPr sz="800" b="0" i="0">
-                <a:solidFill>
-                  <a:srgbClr val="0D47A1"/>
-                </a:solidFill>
-                <a:latin typeface="Arial"/>
-              </a:rPr>
-              <a:t>Baris modul: T03B03-ROW-002, T03B03-ROW-003, T03B03-ROW-007, T03B03-ROW-004, T03B03-ROW-005, T03B03-ROW-006, T03B03-ROW-008, T03B03-ROW-010, T03B03-ROW-012, T03B03-ROW-014 (+4)</a:t>
-            </a:r>
-          </a:p>
-          <a:p>
-            <a:pPr algn="l"/>
-            <a:r>
-              <a:rPr sz="800" b="0" i="0">
-                <a:solidFill>
-                  <a:srgbClr val="6B6B6B"/>
-                </a:solidFill>
-                <a:latin typeface="Arial"/>
-              </a:rPr>
-              <a:t>Keputusan Bariah: A1, A2</a:t>
+                  <a:srgbClr val="6B6B6B"/>
+                </a:solidFill>
+                <a:latin typeface="Arial"/>
+              </a:rPr>
+              <a:t>Keputusan Bariah: D4</a:t>
             </a:r>
           </a:p>
         </p:txBody>
@@ -8710,7 +9164,7 @@
         </p:spPr>
         <p:txBody>
           <a:bodyPr wrap="square" lIns="0" rIns="0" tIns="0" bIns="0">
-            <a:spAutoFit/>
+            <a:noAutofit/>
           </a:bodyPr>
           <a:lstStyle/>
           <a:p>
@@ -8722,7 +9176,7 @@
                 </a:solidFill>
                 <a:latin typeface="Arial"/>
               </a:rPr>
-              <a:t>K5-PL06-T03-B03 · skrin 4 daripada 12   ·   DRAFT_FOR_BARIAH_REVIEW · NOT_INSTRUCTIONALLY_APPROVED · NOT_LEARNER_FACING_FINAL</a:t>
+              <a:t>K5-PL06-T03-B03 · skrin 12 daripada 12   ·   TECHNICAL_PROOF · DRAFT_FOR_BARIAH_REVIEW · NOT_INSTRUCTIONALLY_APPROVED · NOT_LEARNER_FACING_FINAL</a:t>
             </a:r>
           </a:p>
         </p:txBody>
@@ -8735,7 +9189,7 @@
 </p:sld>
 </file>
 
-<file path=ppt/slides/slide6.xml><?xml version="1.0" encoding="utf-8"?>
+<file path=ppt/slides/slide2.xml><?xml version="1.0" encoding="utf-8"?>
 <p:sld xmlns:a="http://schemas.openxmlformats.org/drawingml/2006/main" xmlns:p="http://schemas.openxmlformats.org/presentationml/2006/main" xmlns:r="http://schemas.openxmlformats.org/officeDocument/2006/relationships">
   <p:cSld>
     <p:spTree>
@@ -8763,7 +9217,7 @@
         </p:spPr>
         <p:txBody>
           <a:bodyPr wrap="square" lIns="0" rIns="0" tIns="0" bIns="0">
-            <a:spAutoFit/>
+            <a:noAutofit/>
           </a:bodyPr>
           <a:lstStyle/>
           <a:p>
@@ -8775,7 +9229,7 @@
                 </a:solidFill>
                 <a:latin typeface="Arial"/>
               </a:rPr>
-              <a:t>T03B03-S05   ·   click-to-reveal   ·   CONTENT</a:t>
+              <a:t>T03B03-S01   ·   static content   ·   SHELL_ENTRY</a:t>
             </a:r>
           </a:p>
           <a:p>
@@ -8787,7 +9241,7 @@
                 </a:solidFill>
                 <a:latin typeface="Arial"/>
               </a:rPr>
-              <a:t>Sub soil drainage</a:t>
+              <a:t>Infrastruktur</a:t>
             </a:r>
           </a:p>
         </p:txBody>
@@ -8821,7 +9275,7 @@
           <a:fillRef idx="3">
             <a:schemeClr val="accent1"/>
           </a:fillRef>
-          <a:effectRef idx="2">
+          <a:effectRef idx="0">
             <a:schemeClr val="accent1"/>
           </a:effectRef>
           <a:fontRef idx="minor">
@@ -8829,7 +9283,9 @@
           </a:fontRef>
         </p:style>
         <p:txBody>
-          <a:bodyPr rtlCol="0" anchor="ctr"/>
+          <a:bodyPr rtlCol="0" anchor="ctr">
+            <a:noAutofit/>
+          </a:bodyPr>
           <a:lstStyle/>
           <a:p>
             <a:pPr algn="ctr"/>
@@ -8854,7 +9310,7 @@
         </p:spPr>
         <p:txBody>
           <a:bodyPr wrap="square" lIns="0" rIns="0" tIns="0" bIns="0">
-            <a:spAutoFit/>
+            <a:noAutofit/>
           </a:bodyPr>
           <a:lstStyle/>
           <a:p>
@@ -8878,7 +9334,7 @@
                 </a:solidFill>
                 <a:latin typeface="Arial"/>
               </a:rPr>
-              <a:t>S · Sub soil drainage</a:t>
+              <a:t>[S] Infrastruktur</a:t>
             </a:r>
           </a:p>
           <a:p>
@@ -8886,191 +9342,11 @@
             <a:r>
               <a:rPr sz="1400" b="0" i="0">
                 <a:solidFill>
-                  <a:srgbClr val="0D47A1"/>
-                </a:solidFill>
-                <a:latin typeface="Arial"/>
-              </a:rPr>
-              <a:t>S~ · Sistem saliran bawah tanah mesti disambungkan ke saluran keluar yang berfungsi.</a:t>
-            </a:r>
-          </a:p>
-          <a:p>
-            <a:pPr algn="l"/>
-            <a:r>
-              <a:rPr sz="1400" b="0" i="0">
-                <a:solidFill>
-                  <a:srgbClr val="0D47A1"/>
-                </a:solidFill>
-                <a:latin typeface="Arial"/>
-              </a:rPr>
-              <a:t>S · Fungsi</a:t>
-            </a:r>
-          </a:p>
-          <a:p>
-            <a:pPr algn="l" lvl="1"/>
-            <a:r>
-              <a:rPr sz="1400" b="0" i="0">
-                <a:solidFill>
-                  <a:srgbClr val="0D47A1"/>
-                </a:solidFill>
-                <a:latin typeface="Arial"/>
-              </a:rPr>
-              <a:t>S · Mengelakkan tanah daripada menjadi tepu air, yang boleh merosakkan akar tanaman dan menjadikan kawasan tidak boleh digunakan.</a:t>
-            </a:r>
-          </a:p>
-          <a:p>
-            <a:pPr algn="l"/>
-            <a:r>
-              <a:rPr sz="1400" b="0" i="0">
-                <a:solidFill>
-                  <a:srgbClr val="0D47A1"/>
-                </a:solidFill>
-                <a:latin typeface="Arial"/>
-              </a:rPr>
-              <a:t>S · Fokus Utama Kontraktor</a:t>
-            </a:r>
-          </a:p>
-          <a:p>
-            <a:pPr algn="l" lvl="1"/>
-            <a:r>
-              <a:rPr sz="1400" b="0" i="0">
-                <a:solidFill>
-                  <a:srgbClr val="0D47A1"/>
-                </a:solidFill>
-                <a:latin typeface="Arial"/>
-              </a:rPr>
-              <a:t>S · Penggalian Peparit</a:t>
-            </a:r>
-          </a:p>
-          <a:p>
-            <a:pPr algn="l" lvl="2"/>
-            <a:r>
-              <a:rPr sz="1400" b="0" i="0">
-                <a:solidFill>
-                  <a:srgbClr val="0D47A1"/>
-                </a:solidFill>
-                <a:latin typeface="Arial"/>
-              </a:rPr>
-              <a:t>S · Peparit (trench) digali mengikut jajaran, kedalaman, dan kecerunan yang ditetapkan dalam Pelan Saliran (Drainage Plan). Kecerunan yang betul adalah kritikal untuk memastikan air mengalir.</a:t>
-            </a:r>
-          </a:p>
-          <a:p>
-            <a:pPr algn="l" lvl="1"/>
-            <a:r>
-              <a:rPr sz="1400" b="0" i="0">
-                <a:solidFill>
-                  <a:srgbClr val="0D47A1"/>
-                </a:solidFill>
-                <a:latin typeface="Arial"/>
-              </a:rPr>
-              <a:t>S · Pemasangan Sistematik</a:t>
-            </a:r>
-          </a:p>
-          <a:p>
-            <a:pPr algn="l" lvl="2"/>
-            <a:r>
-              <a:rPr sz="1400" b="0" i="0">
-                <a:solidFill>
-                  <a:srgbClr val="0D47A1"/>
-                </a:solidFill>
-                <a:latin typeface="Arial"/>
-              </a:rPr>
-              <a:t>S · Proses pemasangan yang betul adalah kunci kejayaan sistem ini:</a:t>
-            </a:r>
-          </a:p>
-          <a:p>
-            <a:pPr algn="l" lvl="2"/>
-            <a:r>
-              <a:rPr sz="1400" b="0" i="0">
-                <a:solidFill>
-                  <a:srgbClr val="0D47A1"/>
-                </a:solidFill>
-                <a:latin typeface="Arial"/>
-              </a:rPr>
-              <a:t>S · Lapik peparit dengan kain geotekstil (geotextile fabric).</a:t>
-            </a:r>
-          </a:p>
-          <a:p>
-            <a:pPr algn="l" lvl="2"/>
-            <a:r>
-              <a:rPr sz="1400" b="0" i="0">
-                <a:solidFill>
-                  <a:srgbClr val="0D47A1"/>
-                </a:solidFill>
-                <a:latin typeface="Arial"/>
-              </a:rPr>
-              <a:t>S · Letakkan lapisan batu kelikir penapis (filter aggregate).</a:t>
-            </a:r>
-          </a:p>
-          <a:p>
-            <a:pPr algn="l" lvl="2"/>
-            <a:r>
-              <a:rPr sz="1400" b="0" i="0">
-                <a:solidFill>
-                  <a:srgbClr val="0D47A1"/>
-                </a:solidFill>
-                <a:latin typeface="Arial"/>
-              </a:rPr>
-              <a:t>S · Pasang paip berlubang (perforated pipe) dengan lubangnya menghadap ke bawah.</a:t>
-            </a:r>
-          </a:p>
-          <a:p>
-            <a:pPr algn="l" lvl="2"/>
-            <a:r>
-              <a:rPr sz="1400" b="0" i="0">
-                <a:solidFill>
-                  <a:srgbClr val="0D47A1"/>
-                </a:solidFill>
-                <a:latin typeface="Arial"/>
-              </a:rPr>
-              <a:t>S · Timbus sekeliling paip dengan batu kelikir.</a:t>
-            </a:r>
-          </a:p>
-          <a:p>
-            <a:pPr algn="l" lvl="2"/>
-            <a:r>
-              <a:rPr sz="1400" b="0" i="0">
-                <a:solidFill>
-                  <a:srgbClr val="0D47A1"/>
-                </a:solidFill>
-                <a:latin typeface="Arial"/>
-              </a:rPr>
-              <a:t>S · Lipat lebihan geotekstil untuk menutup lapisan batu kelikir.</a:t>
-            </a:r>
-          </a:p>
-          <a:p>
-            <a:pPr algn="l" lvl="2"/>
-            <a:r>
-              <a:rPr sz="1400" b="0" i="0">
-                <a:solidFill>
-                  <a:srgbClr val="0D47A1"/>
-                </a:solidFill>
-                <a:latin typeface="Arial"/>
-              </a:rPr>
-              <a:t>S · Timbus lapisan atas dengan pasir kasar dan tanah atas.</a:t>
-            </a:r>
-          </a:p>
-          <a:p>
-            <a:pPr algn="l" lvl="1"/>
-            <a:r>
-              <a:rPr sz="1400" b="0" i="0">
-                <a:solidFill>
-                  <a:srgbClr val="0D47A1"/>
-                </a:solidFill>
-                <a:latin typeface="Arial"/>
-              </a:rPr>
-              <a:t>S · Sambungan ke Saluran Keluar</a:t>
-            </a:r>
-          </a:p>
-          <a:p>
-            <a:pPr algn="l" lvl="2"/>
-            <a:r>
-              <a:rPr sz="1400" b="0" i="0">
-                <a:solidFill>
-                  <a:srgbClr val="0D47A1"/>
-                </a:solidFill>
-                <a:latin typeface="Arial"/>
-              </a:rPr>
-              <a:t>S · Pastikan sistem saliran bawah tanah ini disambungkan ke saluran keluar yang berfungsi seperti parit utama atau sump.</a:t>
+                  <a:srgbClr val="1B5E20"/>
+                </a:solidFill>
+                <a:latin typeface="Arial"/>
+              </a:rPr>
+              <a:t>[A] Narator: Hilmi</a:t>
             </a:r>
           </a:p>
           <a:p>
@@ -9082,7 +9358,7 @@
                 </a:solidFill>
                 <a:latin typeface="Arial"/>
               </a:rPr>
-              <a:t>u · Klik setiap tajuk untuk memaparkan maklumat.</a:t>
+              <a:t>[U] MULA</a:t>
             </a:r>
           </a:p>
         </p:txBody>
@@ -9105,7 +9381,7 @@
         </p:spPr>
         <p:txBody>
           <a:bodyPr wrap="square" lIns="0" rIns="0" tIns="0" bIns="0">
-            <a:spAutoFit/>
+            <a:noAutofit/>
           </a:bodyPr>
           <a:lstStyle/>
           <a:p>
@@ -9123,49 +9399,73 @@
           <a:p>
             <a:pPr algn="l"/>
             <a:r>
-              <a:rPr sz="1000" b="0" i="0">
+              <a:rPr sz="1000" b="0" i="1">
+                <a:solidFill>
+                  <a:srgbClr val="6B6B6B"/>
+                </a:solidFill>
+                <a:latin typeface="Arial"/>
+              </a:rPr>
+              <a:t>Tiada interaksi — skrin statik</a:t>
+            </a:r>
+          </a:p>
+          <a:p>
+            <a:pPr algn="l"/>
+            <a:r>
+              <a:rPr sz="800" b="0" i="0">
                 <a:solidFill>
                   <a:srgbClr val="1A1A1A"/>
                 </a:solidFill>
                 <a:latin typeface="Arial"/>
               </a:rPr>
-              <a:t>click-to-reveal · 3 panel</a:t>
-            </a:r>
-          </a:p>
-          <a:p>
-            <a:pPr algn="l" lvl="1"/>
-            <a:r>
-              <a:rPr sz="900" b="0" i="0">
+              <a:t/>
+            </a:r>
+          </a:p>
+          <a:p>
+            <a:pPr algn="l"/>
+            <a:r>
+              <a:rPr sz="1000" b="1" i="0">
+                <a:solidFill>
+                  <a:srgbClr val="6B6B6B"/>
+                </a:solidFill>
+                <a:latin typeface="Arial"/>
+              </a:rPr>
+              <a:t>VISUAL</a:t>
+            </a:r>
+          </a:p>
+          <a:p>
+            <a:pPr algn="l"/>
+            <a:r>
+              <a:rPr sz="1000" b="0" i="1">
+                <a:solidFill>
+                  <a:srgbClr val="6B6B6B"/>
+                </a:solidFill>
+                <a:latin typeface="Arial"/>
+              </a:rPr>
+              <a:t>Tiada visual khusus</a:t>
+            </a:r>
+          </a:p>
+          <a:p>
+            <a:pPr algn="l"/>
+            <a:r>
+              <a:rPr sz="800" b="0" i="0">
                 <a:solidFill>
                   <a:srgbClr val="1A1A1A"/>
                 </a:solidFill>
                 <a:latin typeface="Arial"/>
               </a:rPr>
-              <a:t>1. Penggalian Peparit</a:t>
-            </a:r>
-          </a:p>
-          <a:p>
-            <a:pPr algn="l" lvl="1"/>
-            <a:r>
-              <a:rPr sz="900" b="0" i="0">
-                <a:solidFill>
-                  <a:srgbClr val="1A1A1A"/>
-                </a:solidFill>
-                <a:latin typeface="Arial"/>
-              </a:rPr>
-              <a:t>2. Pemasangan Sistematik</a:t>
-            </a:r>
-          </a:p>
-          <a:p>
-            <a:pPr algn="l" lvl="1"/>
-            <a:r>
-              <a:rPr sz="900" b="0" i="0">
-                <a:solidFill>
-                  <a:srgbClr val="1A1A1A"/>
-                </a:solidFill>
-                <a:latin typeface="Arial"/>
-              </a:rPr>
-              <a:t>3. Sambungan ke Saluran Keluar</a:t>
+              <a:t/>
+            </a:r>
+          </a:p>
+          <a:p>
+            <a:pPr algn="l"/>
+            <a:r>
+              <a:rPr sz="1000" b="1" i="0">
+                <a:solidFill>
+                  <a:srgbClr val="6B6B6B"/>
+                </a:solidFill>
+                <a:latin typeface="Arial"/>
+              </a:rPr>
+              <a:t>SUMBER DAN KEPUTUSAN</a:t>
             </a:r>
           </a:p>
           <a:p>
@@ -9173,35 +9473,11 @@
             <a:r>
               <a:rPr sz="800" b="0" i="0">
                 <a:solidFill>
-                  <a:srgbClr val="1A1A1A"/>
-                </a:solidFill>
-                <a:latin typeface="Arial"/>
-              </a:rPr>
-              <a:t/>
-            </a:r>
-          </a:p>
-          <a:p>
-            <a:pPr algn="l"/>
-            <a:r>
-              <a:rPr sz="1000" b="1" i="0">
-                <a:solidFill>
-                  <a:srgbClr val="6B6B6B"/>
-                </a:solidFill>
-                <a:latin typeface="Arial"/>
-              </a:rPr>
-              <a:t>VISUAL</a:t>
-            </a:r>
-          </a:p>
-          <a:p>
-            <a:pPr algn="l"/>
-            <a:r>
-              <a:rPr sz="1000" b="0" i="1">
-                <a:solidFill>
-                  <a:srgbClr val="6B6B6B"/>
-                </a:solidFill>
-                <a:latin typeface="Arial"/>
-              </a:rPr>
-              <a:t>Tiada visual khusus</a:t>
+                  <a:srgbClr val="0D47A1"/>
+                </a:solidFill>
+                <a:latin typeface="Arial"/>
+              </a:rPr>
+              <a:t>Baris modul: T03B03-ROW-001</a:t>
             </a:r>
           </a:p>
           <a:p>
@@ -9209,47 +9485,11 @@
             <a:r>
               <a:rPr sz="800" b="0" i="0">
                 <a:solidFill>
-                  <a:srgbClr val="1A1A1A"/>
-                </a:solidFill>
-                <a:latin typeface="Arial"/>
-              </a:rPr>
-              <a:t/>
-            </a:r>
-          </a:p>
-          <a:p>
-            <a:pPr algn="l"/>
-            <a:r>
-              <a:rPr sz="1000" b="1" i="0">
-                <a:solidFill>
-                  <a:srgbClr val="6B6B6B"/>
-                </a:solidFill>
-                <a:latin typeface="Arial"/>
-              </a:rPr>
-              <a:t>SUMBER DAN KEPUTUSAN</a:t>
-            </a:r>
-          </a:p>
-          <a:p>
-            <a:pPr algn="l"/>
-            <a:r>
-              <a:rPr sz="800" b="0" i="0">
-                <a:solidFill>
-                  <a:srgbClr val="0D47A1"/>
-                </a:solidFill>
-                <a:latin typeface="Arial"/>
-              </a:rPr>
-              <a:t>Baris modul: T03B03-ROW-016, T03B03-ROW-017, T03B03-ROW-019, T03B03-ROW-018, T03B03-ROW-020, T03B03-ROW-022, T03B03-ROW-030, T03B03-ROW-021, T03B03-ROW-023, T03B03-ROW-024 (+6)</a:t>
-            </a:r>
-          </a:p>
-          <a:p>
-            <a:pPr algn="l"/>
-            <a:r>
-              <a:rPr sz="800" b="0" i="0">
-                <a:solidFill>
-                  <a:srgbClr val="6B6B6B"/>
-                </a:solidFill>
-                <a:latin typeface="Arial"/>
-              </a:rPr>
-              <a:t>Keputusan Bariah: A1, A2</a:t>
+                  <a:srgbClr val="6B6B6B"/>
+                </a:solidFill>
+                <a:latin typeface="Arial"/>
+              </a:rPr>
+              <a:t>Keputusan Bariah: D2, D4</a:t>
             </a:r>
           </a:p>
         </p:txBody>
@@ -9272,7 +9512,7 @@
         </p:spPr>
         <p:txBody>
           <a:bodyPr wrap="square" lIns="0" rIns="0" tIns="0" bIns="0">
-            <a:spAutoFit/>
+            <a:noAutofit/>
           </a:bodyPr>
           <a:lstStyle/>
           <a:p>
@@ -9284,7 +9524,7 @@
                 </a:solidFill>
                 <a:latin typeface="Arial"/>
               </a:rPr>
-              <a:t>K5-PL06-T03-B03 · skrin 5 daripada 12   ·   DRAFT_FOR_BARIAH_REVIEW · NOT_INSTRUCTIONALLY_APPROVED · NOT_LEARNER_FACING_FINAL</a:t>
+              <a:t>K5-PL06-T03-B03 · skrin 1 daripada 12   ·   TECHNICAL_PROOF · DRAFT_FOR_BARIAH_REVIEW · NOT_INSTRUCTIONALLY_APPROVED · NOT_LEARNER_FACING_FINAL</a:t>
             </a:r>
           </a:p>
         </p:txBody>
@@ -9297,7 +9537,7 @@
 </p:sld>
 </file>
 
-<file path=ppt/slides/slide7.xml><?xml version="1.0" encoding="utf-8"?>
+<file path=ppt/slides/slide3.xml><?xml version="1.0" encoding="utf-8"?>
 <p:sld xmlns:a="http://schemas.openxmlformats.org/drawingml/2006/main" xmlns:p="http://schemas.openxmlformats.org/presentationml/2006/main" xmlns:r="http://schemas.openxmlformats.org/officeDocument/2006/relationships">
   <p:cSld>
     <p:spTree>
@@ -9325,7 +9565,7 @@
         </p:spPr>
         <p:txBody>
           <a:bodyPr wrap="square" lIns="0" rIns="0" tIns="0" bIns="0">
-            <a:spAutoFit/>
+            <a:noAutofit/>
           </a:bodyPr>
           <a:lstStyle/>
           <a:p>
@@ -9337,7 +9577,7 @@
                 </a:solidFill>
                 <a:latin typeface="Arial"/>
               </a:rPr>
-              <a:t>T03B03-S06   ·   click-to-reveal   ·   CONTENT</a:t>
+              <a:t>T03B03-S02   ·   scenario/dialogue only where justified   ·   SCENARIO</a:t>
             </a:r>
           </a:p>
           <a:p>
@@ -9349,7 +9589,7 @@
                 </a:solidFill>
                 <a:latin typeface="Arial"/>
               </a:rPr>
-              <a:t>Dinding Penahan (Retaining Wall)</a:t>
+              <a:t>Situasi di tapak</a:t>
             </a:r>
           </a:p>
         </p:txBody>
@@ -9383,7 +9623,7 @@
           <a:fillRef idx="3">
             <a:schemeClr val="accent1"/>
           </a:fillRef>
-          <a:effectRef idx="2">
+          <a:effectRef idx="0">
             <a:schemeClr val="accent1"/>
           </a:effectRef>
           <a:fontRef idx="minor">
@@ -9391,7 +9631,9 @@
           </a:fontRef>
         </p:style>
         <p:txBody>
-          <a:bodyPr rtlCol="0" anchor="ctr"/>
+          <a:bodyPr rtlCol="0" anchor="ctr">
+            <a:noAutofit/>
+          </a:bodyPr>
           <a:lstStyle/>
           <a:p>
             <a:pPr algn="ctr"/>
@@ -9416,7 +9658,7 @@
         </p:spPr>
         <p:txBody>
           <a:bodyPr wrap="square" lIns="0" rIns="0" tIns="0" bIns="0">
-            <a:spAutoFit/>
+            <a:noAutofit/>
           </a:bodyPr>
           <a:lstStyle/>
           <a:p>
@@ -9434,13 +9676,37 @@
           <a:p>
             <a:pPr algn="l"/>
             <a:r>
+              <a:rPr sz="1200" b="0" i="0">
+                <a:solidFill>
+                  <a:srgbClr val="6B6B6B"/>
+                </a:solidFill>
+                <a:latin typeface="Arial"/>
+              </a:rPr>
+              <a:t>[U] SITUASI</a:t>
+            </a:r>
+          </a:p>
+          <a:p>
+            <a:pPr algn="l"/>
+            <a:r>
               <a:rPr sz="1400" b="0" i="0">
                 <a:solidFill>
+                  <a:srgbClr val="B71C1C"/>
+                </a:solidFill>
+                <a:latin typeface="Arial"/>
+              </a:rPr>
+              <a:t>[P] WATAK: PENDING_UNIT_REVIEW — D1 menetapkan watak dipilih per unit</a:t>
+            </a:r>
+          </a:p>
+          <a:p>
+            <a:pPr algn="l"/>
+            <a:r>
+              <a:rPr sz="1400" b="0" i="0">
+                <a:solidFill>
                   <a:srgbClr val="0D47A1"/>
                 </a:solidFill>
                 <a:latin typeface="Arial"/>
               </a:rPr>
-              <a:t>S · Dinding Penahan (Retaining Wall)</a:t>
+              <a:t>[S] Dinding penahan mesti dibina dengan mematuhi sepenuhnya Lukisan Struktur Jurutera Bertauliah (Ir.). Sebarang perubahan memerlukan kelulusan jurutera.</a:t>
             </a:r>
           </a:p>
           <a:p>
@@ -9452,7 +9718,7 @@
                 </a:solidFill>
                 <a:latin typeface="Arial"/>
               </a:rPr>
-              <a:t>S~ · Dinding penahan mesti dibina mematuhi sepenuhnya lukisan struktur jurutera bertauliah; tapak asas adalah komponen paling kritikal.</a:t>
+              <a:t>[S] Jajaran pagar mesti ditanda mengikut Pelan Ukur Sempadan untuk mengelakkan isu pencerobohan tanah.</a:t>
             </a:r>
           </a:p>
           <a:p>
@@ -9464,115 +9730,19 @@
                 </a:solidFill>
                 <a:latin typeface="Arial"/>
               </a:rPr>
-              <a:t>S · Fungsi</a:t>
-            </a:r>
-          </a:p>
-          <a:p>
-            <a:pPr algn="l" lvl="1"/>
+              <a:t>[S] Pastikan semua komponen keluli mempunyai lapisan pelindung karat yang sempurna seperti tergalvani panas (hot-dip galvanized) atau cat epoksi.</a:t>
+            </a:r>
+          </a:p>
+          <a:p>
+            <a:pPr algn="l"/>
             <a:r>
               <a:rPr sz="1400" b="0" i="0">
                 <a:solidFill>
-                  <a:srgbClr val="0D47A1"/>
-                </a:solidFill>
-                <a:latin typeface="Arial"/>
-              </a:rPr>
-              <a:t>S · Membentuk kawasan rata di lereng bukit, menstabilkan cerun, dan menetapkan sempadan aras.</a:t>
-            </a:r>
-          </a:p>
-          <a:p>
-            <a:pPr algn="l"/>
-            <a:r>
-              <a:rPr sz="1400" b="0" i="0">
-                <a:solidFill>
-                  <a:srgbClr val="0D47A1"/>
-                </a:solidFill>
-                <a:latin typeface="Arial"/>
-              </a:rPr>
-              <a:t>S · Fokus Utama Kontraktor</a:t>
-            </a:r>
-          </a:p>
-          <a:p>
-            <a:pPr algn="l" lvl="1"/>
-            <a:r>
-              <a:rPr sz="1400" b="0" i="0">
-                <a:solidFill>
-                  <a:srgbClr val="0D47A1"/>
-                </a:solidFill>
-                <a:latin typeface="Arial"/>
-              </a:rPr>
-              <a:t>S · Lukisan Jurutera</a:t>
-            </a:r>
-          </a:p>
-          <a:p>
-            <a:pPr algn="l" lvl="2"/>
-            <a:r>
-              <a:rPr sz="1400" b="0" i="0">
-                <a:solidFill>
-                  <a:srgbClr val="0D47A1"/>
-                </a:solidFill>
-                <a:latin typeface="Arial"/>
-              </a:rPr>
-              <a:t>S · Dinding penahan mesti dibina dengan mematuhi sepenuhnya Lukisan Struktur Jurutera Bertauliah (Ir.). Sebarang perubahan memerlukan kelulusan jurutera.</a:t>
-            </a:r>
-          </a:p>
-          <a:p>
-            <a:pPr algn="l" lvl="1"/>
-            <a:r>
-              <a:rPr sz="1400" b="0" i="0">
-                <a:solidFill>
-                  <a:srgbClr val="0D47A1"/>
-                </a:solidFill>
-                <a:latin typeface="Arial"/>
-              </a:rPr>
-              <a:t>S · Pembinaan Tapak Asas (Foundation)</a:t>
-            </a:r>
-          </a:p>
-          <a:p>
-            <a:pPr algn="l" lvl="2"/>
-            <a:r>
-              <a:rPr sz="1400" b="0" i="0">
-                <a:solidFill>
-                  <a:srgbClr val="0D47A1"/>
-                </a:solidFill>
-                <a:latin typeface="Arial"/>
-              </a:rPr>
-              <a:t>S · Tapak asas adalah komponen paling kritikal. Ia mesti dibina di atas tanah yang stabil pada kedalaman dan saiz yang betul.</a:t>
-            </a:r>
-          </a:p>
-          <a:p>
-            <a:pPr algn="l" lvl="1"/>
-            <a:r>
-              <a:rPr sz="1400" b="0" i="0">
-                <a:solidFill>
-                  <a:srgbClr val="0D47A1"/>
-                </a:solidFill>
-                <a:latin typeface="Arial"/>
-              </a:rPr>
-              <a:t>S · Sistem Perparitan di Belakang Dinding</a:t>
-            </a:r>
-          </a:p>
-          <a:p>
-            <a:pPr algn="l" lvl="2"/>
-            <a:r>
-              <a:rPr sz="1400" b="0" i="0">
-                <a:solidFill>
-                  <a:srgbClr val="0D47A1"/>
-                </a:solidFill>
-                <a:latin typeface="Arial"/>
-              </a:rPr>
-              <a:t>S · Kegagalan dinding penahan selalunya berpunca daripada tekanan air (hydrostatic pressure). Kontraktor wajib memastikan lubang saliran air (weep holes) dibina dan lapisan penapis (seperti batu kelikir) diletakkan di belakang dinding untuk membolehkan air keluar.</a:t>
-            </a:r>
-          </a:p>
-          <a:p>
-            <a:pPr algn="l"/>
-            <a:r>
-              <a:rPr sz="1200" b="0" i="0">
-                <a:solidFill>
-                  <a:srgbClr val="6B6B6B"/>
-                </a:solidFill>
-                <a:latin typeface="Arial"/>
-              </a:rPr>
-              <a:t>u · Klik setiap tajuk untuk memaparkan maklumat.</a:t>
+                  <a:srgbClr val="B71C1C"/>
+                </a:solidFill>
+                <a:latin typeface="Arial"/>
+              </a:rPr>
+              <a:t>[P] TECHNICAL_PROOF · DRAFT_FOR_BARIAH_REVIEW · NOT_INSTRUCTIONALLY_APPROVED · NOT_LEARNER_FACING_FINAL</a:t>
             </a:r>
           </a:p>
         </p:txBody>
@@ -9595,7 +9765,7 @@
         </p:spPr>
         <p:txBody>
           <a:bodyPr wrap="square" lIns="0" rIns="0" tIns="0" bIns="0">
-            <a:spAutoFit/>
+            <a:noAutofit/>
           </a:bodyPr>
           <a:lstStyle/>
           <a:p>
@@ -9613,49 +9783,73 @@
           <a:p>
             <a:pPr algn="l"/>
             <a:r>
-              <a:rPr sz="1000" b="0" i="0">
+              <a:rPr sz="1000" b="0" i="1">
+                <a:solidFill>
+                  <a:srgbClr val="6B6B6B"/>
+                </a:solidFill>
+                <a:latin typeface="Arial"/>
+              </a:rPr>
+              <a:t>Tiada interaksi — skrin statik</a:t>
+            </a:r>
+          </a:p>
+          <a:p>
+            <a:pPr algn="l"/>
+            <a:r>
+              <a:rPr sz="800" b="0" i="0">
                 <a:solidFill>
                   <a:srgbClr val="1A1A1A"/>
                 </a:solidFill>
                 <a:latin typeface="Arial"/>
               </a:rPr>
-              <a:t>click-to-reveal · 3 panel</a:t>
-            </a:r>
-          </a:p>
-          <a:p>
-            <a:pPr algn="l" lvl="1"/>
-            <a:r>
-              <a:rPr sz="900" b="0" i="0">
+              <a:t/>
+            </a:r>
+          </a:p>
+          <a:p>
+            <a:pPr algn="l"/>
+            <a:r>
+              <a:rPr sz="1000" b="1" i="0">
+                <a:solidFill>
+                  <a:srgbClr val="6B6B6B"/>
+                </a:solidFill>
+                <a:latin typeface="Arial"/>
+              </a:rPr>
+              <a:t>VISUAL</a:t>
+            </a:r>
+          </a:p>
+          <a:p>
+            <a:pPr algn="l"/>
+            <a:r>
+              <a:rPr sz="1000" b="0" i="1">
+                <a:solidFill>
+                  <a:srgbClr val="6B6B6B"/>
+                </a:solidFill>
+                <a:latin typeface="Arial"/>
+              </a:rPr>
+              <a:t>Tiada visual khusus</a:t>
+            </a:r>
+          </a:p>
+          <a:p>
+            <a:pPr algn="l"/>
+            <a:r>
+              <a:rPr sz="800" b="0" i="0">
                 <a:solidFill>
                   <a:srgbClr val="1A1A1A"/>
                 </a:solidFill>
                 <a:latin typeface="Arial"/>
               </a:rPr>
-              <a:t>1. Lukisan Jurutera</a:t>
-            </a:r>
-          </a:p>
-          <a:p>
-            <a:pPr algn="l" lvl="1"/>
-            <a:r>
-              <a:rPr sz="900" b="0" i="0">
-                <a:solidFill>
-                  <a:srgbClr val="1A1A1A"/>
-                </a:solidFill>
-                <a:latin typeface="Arial"/>
-              </a:rPr>
-              <a:t>2. Pembinaan Tapak Asas (Foundation)</a:t>
-            </a:r>
-          </a:p>
-          <a:p>
-            <a:pPr algn="l" lvl="1"/>
-            <a:r>
-              <a:rPr sz="900" b="0" i="0">
-                <a:solidFill>
-                  <a:srgbClr val="1A1A1A"/>
-                </a:solidFill>
-                <a:latin typeface="Arial"/>
-              </a:rPr>
-              <a:t>3. Sistem Perparitan di Belakang Dinding</a:t>
+              <a:t/>
+            </a:r>
+          </a:p>
+          <a:p>
+            <a:pPr algn="l"/>
+            <a:r>
+              <a:rPr sz="1000" b="1" i="0">
+                <a:solidFill>
+                  <a:srgbClr val="6B6B6B"/>
+                </a:solidFill>
+                <a:latin typeface="Arial"/>
+              </a:rPr>
+              <a:t>SUMBER DAN KEPUTUSAN</a:t>
             </a:r>
           </a:p>
           <a:p>
@@ -9663,71 +9857,11 @@
             <a:r>
               <a:rPr sz="800" b="0" i="0">
                 <a:solidFill>
-                  <a:srgbClr val="1A1A1A"/>
-                </a:solidFill>
-                <a:latin typeface="Arial"/>
-              </a:rPr>
-              <a:t/>
-            </a:r>
-          </a:p>
-          <a:p>
-            <a:pPr algn="l"/>
-            <a:r>
-              <a:rPr sz="1000" b="1" i="0">
-                <a:solidFill>
-                  <a:srgbClr val="6B6B6B"/>
-                </a:solidFill>
-                <a:latin typeface="Arial"/>
-              </a:rPr>
-              <a:t>VISUAL</a:t>
-            </a:r>
-          </a:p>
-          <a:p>
-            <a:pPr algn="l"/>
-            <a:r>
-              <a:rPr sz="1000" b="0" i="0">
-                <a:solidFill>
-                  <a:srgbClr val="1A1A1A"/>
-                </a:solidFill>
-                <a:latin typeface="Arial"/>
-              </a:rPr>
-              <a:t>Keratan rentas dinding penahan dengan sistem perparitan di belakang</a:t>
-            </a:r>
-          </a:p>
-          <a:p>
-            <a:pPr algn="l"/>
-            <a:r>
-              <a:rPr sz="900" b="0" i="0">
-                <a:solidFill>
-                  <a:srgbClr val="6B6B6B"/>
-                </a:solidFill>
-                <a:latin typeface="Arial"/>
-              </a:rPr>
-              <a:t>Tiada rajah sumber — subjek calon sahaja</a:t>
-            </a:r>
-          </a:p>
-          <a:p>
-            <a:pPr algn="l"/>
-            <a:r>
-              <a:rPr sz="900" b="1" i="0">
-                <a:solidFill>
-                  <a:srgbClr val="B71C1C"/>
-                </a:solidFill>
-                <a:latin typeface="Arial"/>
-              </a:rPr>
-              <a:t>SUBJEK VISUAL: PENDING_BARIAH_UNIT_REVIEW</a:t>
-            </a:r>
-          </a:p>
-          <a:p>
-            <a:pPr algn="l"/>
-            <a:r>
-              <a:rPr sz="900" b="1" i="0">
-                <a:solidFill>
-                  <a:srgbClr val="B71C1C"/>
-                </a:solidFill>
-                <a:latin typeface="Arial"/>
-              </a:rPr>
-              <a:t>ASET VISUAL BELUM DIHASILKAN — NOT_MMD_ASSET</a:t>
+                  <a:srgbClr val="0D47A1"/>
+                </a:solidFill>
+                <a:latin typeface="Arial"/>
+              </a:rPr>
+              <a:t>Baris modul: T03B03-ROW-037, T03B03-ROW-048, T03B03-ROW-054</a:t>
             </a:r>
           </a:p>
           <a:p>
@@ -9735,47 +9869,11 @@
             <a:r>
               <a:rPr sz="800" b="0" i="0">
                 <a:solidFill>
-                  <a:srgbClr val="1A1A1A"/>
-                </a:solidFill>
-                <a:latin typeface="Arial"/>
-              </a:rPr>
-              <a:t/>
-            </a:r>
-          </a:p>
-          <a:p>
-            <a:pPr algn="l"/>
-            <a:r>
-              <a:rPr sz="1000" b="1" i="0">
-                <a:solidFill>
-                  <a:srgbClr val="6B6B6B"/>
-                </a:solidFill>
-                <a:latin typeface="Arial"/>
-              </a:rPr>
-              <a:t>SUMBER DAN KEPUTUSAN</a:t>
-            </a:r>
-          </a:p>
-          <a:p>
-            <a:pPr algn="l"/>
-            <a:r>
-              <a:rPr sz="800" b="0" i="0">
-                <a:solidFill>
-                  <a:srgbClr val="0D47A1"/>
-                </a:solidFill>
-                <a:latin typeface="Arial"/>
-              </a:rPr>
-              <a:t>Baris modul: T03B03-ROW-032, T03B03-ROW-033, T03B03-ROW-035, T03B03-ROW-034, T03B03-ROW-036, T03B03-ROW-038, T03B03-ROW-040, T03B03-ROW-037, T03B03-ROW-039, T03B03-ROW-041</a:t>
-            </a:r>
-          </a:p>
-          <a:p>
-            <a:pPr algn="l"/>
-            <a:r>
-              <a:rPr sz="800" b="0" i="0">
-                <a:solidFill>
-                  <a:srgbClr val="6B6B6B"/>
-                </a:solidFill>
-                <a:latin typeface="Arial"/>
-              </a:rPr>
-              <a:t>Keputusan Bariah: A1, A2</a:t>
+                  <a:srgbClr val="6B6B6B"/>
+                </a:solidFill>
+                <a:latin typeface="Arial"/>
+              </a:rPr>
+              <a:t>Keputusan Bariah: D3, A5, D1</a:t>
             </a:r>
           </a:p>
         </p:txBody>
@@ -9798,7 +9896,7 @@
         </p:spPr>
         <p:txBody>
           <a:bodyPr wrap="square" lIns="0" rIns="0" tIns="0" bIns="0">
-            <a:spAutoFit/>
+            <a:noAutofit/>
           </a:bodyPr>
           <a:lstStyle/>
           <a:p>
@@ -9810,7 +9908,7 @@
                 </a:solidFill>
                 <a:latin typeface="Arial"/>
               </a:rPr>
-              <a:t>K5-PL06-T03-B03 · skrin 6 daripada 12   ·   DRAFT_FOR_BARIAH_REVIEW · NOT_INSTRUCTIONALLY_APPROVED · NOT_LEARNER_FACING_FINAL</a:t>
+              <a:t>K5-PL06-T03-B03 · skrin 2 daripada 12   ·   TECHNICAL_PROOF · DRAFT_FOR_BARIAH_REVIEW · NOT_INSTRUCTIONALLY_APPROVED · NOT_LEARNER_FACING_FINAL</a:t>
             </a:r>
           </a:p>
         </p:txBody>
@@ -9823,7 +9921,7 @@
 </p:sld>
 </file>
 
-<file path=ppt/slides/slide8.xml><?xml version="1.0" encoding="utf-8"?>
+<file path=ppt/slides/slide4.xml><?xml version="1.0" encoding="utf-8"?>
 <p:sld xmlns:a="http://schemas.openxmlformats.org/drawingml/2006/main" xmlns:p="http://schemas.openxmlformats.org/presentationml/2006/main" xmlns:r="http://schemas.openxmlformats.org/officeDocument/2006/relationships">
   <p:cSld>
     <p:spTree>
@@ -9851,7 +9949,7 @@
         </p:spPr>
         <p:txBody>
           <a:bodyPr wrap="square" lIns="0" rIns="0" tIns="0" bIns="0">
-            <a:spAutoFit/>
+            <a:noAutofit/>
           </a:bodyPr>
           <a:lstStyle/>
           <a:p>
@@ -9863,7 +9961,7 @@
                 </a:solidFill>
                 <a:latin typeface="Arial"/>
               </a:rPr>
-              <a:t>T03B03-S07   ·   click-to-reveal   ·   CONTENT</a:t>
+              <a:t>T03B03-S03   ·   static content   ·   SHELL_ORIENTATION</a:t>
             </a:r>
           </a:p>
           <a:p>
@@ -9875,7 +9973,7 @@
                 </a:solidFill>
                 <a:latin typeface="Arial"/>
               </a:rPr>
-              <a:t>Fencing</a:t>
+              <a:t>Apa yang anda akan pelajari</a:t>
             </a:r>
           </a:p>
         </p:txBody>
@@ -9909,7 +10007,7 @@
           <a:fillRef idx="3">
             <a:schemeClr val="accent1"/>
           </a:fillRef>
-          <a:effectRef idx="2">
+          <a:effectRef idx="0">
             <a:schemeClr val="accent1"/>
           </a:effectRef>
           <a:fontRef idx="minor">
@@ -9917,7 +10015,9 @@
           </a:fontRef>
         </p:style>
         <p:txBody>
-          <a:bodyPr rtlCol="0" anchor="ctr"/>
+          <a:bodyPr rtlCol="0" anchor="ctr">
+            <a:noAutofit/>
+          </a:bodyPr>
           <a:lstStyle/>
           <a:p>
             <a:pPr algn="ctr"/>
@@ -9942,7 +10042,7 @@
         </p:spPr>
         <p:txBody>
           <a:bodyPr wrap="square" lIns="0" rIns="0" tIns="0" bIns="0">
-            <a:spAutoFit/>
+            <a:noAutofit/>
           </a:bodyPr>
           <a:lstStyle/>
           <a:p>
@@ -9960,13 +10060,25 @@
           <a:p>
             <a:pPr algn="l"/>
             <a:r>
+              <a:rPr sz="1200" b="0" i="0">
+                <a:solidFill>
+                  <a:srgbClr val="6B6B6B"/>
+                </a:solidFill>
+                <a:latin typeface="Arial"/>
+              </a:rPr>
+              <a:t>[U] Klik setiap tajuk untuk memaparkan maklumat.</a:t>
+            </a:r>
+          </a:p>
+          <a:p>
+            <a:pPr algn="l"/>
+            <a:r>
               <a:rPr sz="1400" b="0" i="0">
                 <a:solidFill>
                   <a:srgbClr val="0D47A1"/>
                 </a:solidFill>
                 <a:latin typeface="Arial"/>
               </a:rPr>
-              <a:t>S · Fencing</a:t>
+              <a:t>[S] Landform / Earthmound</a:t>
             </a:r>
           </a:p>
           <a:p>
@@ -9978,7 +10090,7 @@
                 </a:solidFill>
                 <a:latin typeface="Arial"/>
               </a:rPr>
-              <a:t>S · Pagar dibina untuk tujuan keselamatan, menandakan sempadan, privasi, atau sebagai elemen hiasan.</a:t>
+              <a:t>[S] Sub soil drainage</a:t>
             </a:r>
           </a:p>
           <a:p>
@@ -9990,7 +10102,7 @@
                 </a:solidFill>
                 <a:latin typeface="Arial"/>
               </a:rPr>
-              <a:t>S~ · Jajaran pagar mesti ditanda mengikut Pelan Ukur Sempadan untuk mengelakkan pencerobohan tanah.</a:t>
+              <a:t>[S] Dinding Penahan (Retaining Wall)</a:t>
             </a:r>
           </a:p>
           <a:p>
@@ -10002,11 +10114,11 @@
                 </a:solidFill>
                 <a:latin typeface="Arial"/>
               </a:rPr>
-              <a:t>S · Fungsi</a:t>
-            </a:r>
-          </a:p>
-          <a:p>
-            <a:pPr algn="l" lvl="1"/>
+              <a:t>[S] Fencing</a:t>
+            </a:r>
+          </a:p>
+          <a:p>
+            <a:pPr algn="l"/>
             <a:r>
               <a:rPr sz="1400" b="0" i="0">
                 <a:solidFill>
@@ -10014,7 +10126,7 @@
                 </a:solidFill>
                 <a:latin typeface="Arial"/>
               </a:rPr>
-              <a:t>S · Mengawal akses, menetapkan sempadan hartanah, dan meningkatkan keselamatan.</a:t>
+              <a:t>[S] Swale/ Natural Drain</a:t>
             </a:r>
           </a:p>
           <a:p>
@@ -10026,115 +10138,7 @@
                 </a:solidFill>
                 <a:latin typeface="Arial"/>
               </a:rPr>
-              <a:t>S · Fokus Utama Kontraktor</a:t>
-            </a:r>
-          </a:p>
-          <a:p>
-            <a:pPr algn="l" lvl="1"/>
-            <a:r>
-              <a:rPr sz="1400" b="0" i="0">
-                <a:solidFill>
-                  <a:srgbClr val="0D47A1"/>
-                </a:solidFill>
-                <a:latin typeface="Arial"/>
-              </a:rPr>
-              <a:t>S · Penjajaran Sempadan</a:t>
-            </a:r>
-          </a:p>
-          <a:p>
-            <a:pPr algn="l" lvl="2"/>
-            <a:r>
-              <a:rPr sz="1400" b="0" i="0">
-                <a:solidFill>
-                  <a:srgbClr val="0D47A1"/>
-                </a:solidFill>
-                <a:latin typeface="Arial"/>
-              </a:rPr>
-              <a:t>S · Jajaran pagar mesti ditanda mengikut Pelan Ukur Sempadan untuk mengelakkan isu pencerobohan tanah.</a:t>
-            </a:r>
-          </a:p>
-          <a:p>
-            <a:pPr algn="l" lvl="1"/>
-            <a:r>
-              <a:rPr sz="1400" b="0" i="0">
-                <a:solidFill>
-                  <a:srgbClr val="0D47A1"/>
-                </a:solidFill>
-                <a:latin typeface="Arial"/>
-              </a:rPr>
-              <a:t>S · Pemasangan Tiang</a:t>
-            </a:r>
-          </a:p>
-          <a:p>
-            <a:pPr algn="l" lvl="2"/>
-            <a:r>
-              <a:rPr sz="1400" b="0" i="0">
-                <a:solidFill>
-                  <a:srgbClr val="0D47A1"/>
-                </a:solidFill>
-                <a:latin typeface="Arial"/>
-              </a:rPr>
-              <a:t>S · Kestabilan pagar bergantung pada tiangnya. Tiang mesti dipasang pada jarak yang seragam dan ditanam dalam tapak konkrit dengan saiz dan kedalaman yang mencukupi seperti dalam spesifikasi.</a:t>
-            </a:r>
-          </a:p>
-          <a:p>
-            <a:pPr algn="l" lvl="1"/>
-            <a:r>
-              <a:rPr sz="1400" b="0" i="0">
-                <a:solidFill>
-                  <a:srgbClr val="0D47A1"/>
-                </a:solidFill>
-                <a:latin typeface="Arial"/>
-              </a:rPr>
-              <a:t>S · Ketegangan Pemasangan</a:t>
-            </a:r>
-          </a:p>
-          <a:p>
-            <a:pPr algn="l" lvl="2"/>
-            <a:r>
-              <a:rPr sz="1400" b="0" i="0">
-                <a:solidFill>
-                  <a:srgbClr val="0D47A1"/>
-                </a:solidFill>
-                <a:latin typeface="Arial"/>
-              </a:rPr>
-              <a:t>S · Bagi pagar jenis jejaring (chain-link) atau BRC, ia mesti ditegangkan dengan sempurna untuk mengelakkannya daripada melendut.</a:t>
-            </a:r>
-          </a:p>
-          <a:p>
-            <a:pPr algn="l" lvl="1"/>
-            <a:r>
-              <a:rPr sz="1400" b="0" i="0">
-                <a:solidFill>
-                  <a:srgbClr val="0D47A1"/>
-                </a:solidFill>
-                <a:latin typeface="Arial"/>
-              </a:rPr>
-              <a:t>S · Kemasan Anti-Karat</a:t>
-            </a:r>
-          </a:p>
-          <a:p>
-            <a:pPr algn="l" lvl="2"/>
-            <a:r>
-              <a:rPr sz="1400" b="0" i="0">
-                <a:solidFill>
-                  <a:srgbClr val="0D47A1"/>
-                </a:solidFill>
-                <a:latin typeface="Arial"/>
-              </a:rPr>
-              <a:t>S · Pastikan semua komponen keluli mempunyai lapisan pelindung karat yang sempurna seperti tergalvani panas (hot-dip galvanized) atau cat epoksi.</a:t>
-            </a:r>
-          </a:p>
-          <a:p>
-            <a:pPr algn="l"/>
-            <a:r>
-              <a:rPr sz="1200" b="0" i="0">
-                <a:solidFill>
-                  <a:srgbClr val="6B6B6B"/>
-                </a:solidFill>
-                <a:latin typeface="Arial"/>
-              </a:rPr>
-              <a:t>u · Klik setiap tajuk untuk memaparkan maklumat.</a:t>
+              <a:t>[S] Jalan akses</a:t>
             </a:r>
           </a:p>
         </p:txBody>
@@ -10157,7 +10161,7 @@
         </p:spPr>
         <p:txBody>
           <a:bodyPr wrap="square" lIns="0" rIns="0" tIns="0" bIns="0">
-            <a:spAutoFit/>
+            <a:noAutofit/>
           </a:bodyPr>
           <a:lstStyle/>
           <a:p>
@@ -10175,61 +10179,73 @@
           <a:p>
             <a:pPr algn="l"/>
             <a:r>
-              <a:rPr sz="1000" b="0" i="0">
+              <a:rPr sz="1000" b="0" i="1">
+                <a:solidFill>
+                  <a:srgbClr val="6B6B6B"/>
+                </a:solidFill>
+                <a:latin typeface="Arial"/>
+              </a:rPr>
+              <a:t>Tiada interaksi — skrin statik</a:t>
+            </a:r>
+          </a:p>
+          <a:p>
+            <a:pPr algn="l"/>
+            <a:r>
+              <a:rPr sz="800" b="0" i="0">
                 <a:solidFill>
                   <a:srgbClr val="1A1A1A"/>
                 </a:solidFill>
                 <a:latin typeface="Arial"/>
               </a:rPr>
-              <a:t>click-to-reveal · 4 panel</a:t>
-            </a:r>
-          </a:p>
-          <a:p>
-            <a:pPr algn="l" lvl="1"/>
-            <a:r>
-              <a:rPr sz="900" b="0" i="0">
+              <a:t/>
+            </a:r>
+          </a:p>
+          <a:p>
+            <a:pPr algn="l"/>
+            <a:r>
+              <a:rPr sz="1000" b="1" i="0">
+                <a:solidFill>
+                  <a:srgbClr val="6B6B6B"/>
+                </a:solidFill>
+                <a:latin typeface="Arial"/>
+              </a:rPr>
+              <a:t>VISUAL</a:t>
+            </a:r>
+          </a:p>
+          <a:p>
+            <a:pPr algn="l"/>
+            <a:r>
+              <a:rPr sz="1000" b="0" i="1">
+                <a:solidFill>
+                  <a:srgbClr val="6B6B6B"/>
+                </a:solidFill>
+                <a:latin typeface="Arial"/>
+              </a:rPr>
+              <a:t>Tiada visual khusus</a:t>
+            </a:r>
+          </a:p>
+          <a:p>
+            <a:pPr algn="l"/>
+            <a:r>
+              <a:rPr sz="800" b="0" i="0">
                 <a:solidFill>
                   <a:srgbClr val="1A1A1A"/>
                 </a:solidFill>
                 <a:latin typeface="Arial"/>
               </a:rPr>
-              <a:t>1. Penjajaran Sempadan</a:t>
-            </a:r>
-          </a:p>
-          <a:p>
-            <a:pPr algn="l" lvl="1"/>
-            <a:r>
-              <a:rPr sz="900" b="0" i="0">
-                <a:solidFill>
-                  <a:srgbClr val="1A1A1A"/>
-                </a:solidFill>
-                <a:latin typeface="Arial"/>
-              </a:rPr>
-              <a:t>2. Pemasangan Tiang</a:t>
-            </a:r>
-          </a:p>
-          <a:p>
-            <a:pPr algn="l" lvl="1"/>
-            <a:r>
-              <a:rPr sz="900" b="0" i="0">
-                <a:solidFill>
-                  <a:srgbClr val="1A1A1A"/>
-                </a:solidFill>
-                <a:latin typeface="Arial"/>
-              </a:rPr>
-              <a:t>3. Ketegangan Pemasangan</a:t>
-            </a:r>
-          </a:p>
-          <a:p>
-            <a:pPr algn="l" lvl="1"/>
-            <a:r>
-              <a:rPr sz="900" b="0" i="0">
-                <a:solidFill>
-                  <a:srgbClr val="1A1A1A"/>
-                </a:solidFill>
-                <a:latin typeface="Arial"/>
-              </a:rPr>
-              <a:t>4. Kemasan Anti-Karat</a:t>
+              <a:t/>
+            </a:r>
+          </a:p>
+          <a:p>
+            <a:pPr algn="l"/>
+            <a:r>
+              <a:rPr sz="1000" b="1" i="0">
+                <a:solidFill>
+                  <a:srgbClr val="6B6B6B"/>
+                </a:solidFill>
+                <a:latin typeface="Arial"/>
+              </a:rPr>
+              <a:t>SUMBER DAN KEPUTUSAN</a:t>
             </a:r>
           </a:p>
           <a:p>
@@ -10237,35 +10253,11 @@
             <a:r>
               <a:rPr sz="800" b="0" i="0">
                 <a:solidFill>
-                  <a:srgbClr val="1A1A1A"/>
-                </a:solidFill>
-                <a:latin typeface="Arial"/>
-              </a:rPr>
-              <a:t/>
-            </a:r>
-          </a:p>
-          <a:p>
-            <a:pPr algn="l"/>
-            <a:r>
-              <a:rPr sz="1000" b="1" i="0">
-                <a:solidFill>
-                  <a:srgbClr val="6B6B6B"/>
-                </a:solidFill>
-                <a:latin typeface="Arial"/>
-              </a:rPr>
-              <a:t>VISUAL</a:t>
-            </a:r>
-          </a:p>
-          <a:p>
-            <a:pPr algn="l"/>
-            <a:r>
-              <a:rPr sz="1000" b="0" i="1">
-                <a:solidFill>
-                  <a:srgbClr val="6B6B6B"/>
-                </a:solidFill>
-                <a:latin typeface="Arial"/>
-              </a:rPr>
-              <a:t>Tiada visual khusus</a:t>
+                  <a:srgbClr val="0D47A1"/>
+                </a:solidFill>
+                <a:latin typeface="Arial"/>
+              </a:rPr>
+              <a:t>Baris modul: T03B03-ROW-002, T03B03-ROW-016, T03B03-ROW-032, T03B03-ROW-042, T03B03-ROW-055, T03B03-ROW-064</a:t>
             </a:r>
           </a:p>
           <a:p>
@@ -10273,47 +10265,11 @@
             <a:r>
               <a:rPr sz="800" b="0" i="0">
                 <a:solidFill>
-                  <a:srgbClr val="1A1A1A"/>
-                </a:solidFill>
-                <a:latin typeface="Arial"/>
-              </a:rPr>
-              <a:t/>
-            </a:r>
-          </a:p>
-          <a:p>
-            <a:pPr algn="l"/>
-            <a:r>
-              <a:rPr sz="1000" b="1" i="0">
-                <a:solidFill>
-                  <a:srgbClr val="6B6B6B"/>
-                </a:solidFill>
-                <a:latin typeface="Arial"/>
-              </a:rPr>
-              <a:t>SUMBER DAN KEPUTUSAN</a:t>
-            </a:r>
-          </a:p>
-          <a:p>
-            <a:pPr algn="l"/>
-            <a:r>
-              <a:rPr sz="800" b="0" i="0">
-                <a:solidFill>
-                  <a:srgbClr val="0D47A1"/>
-                </a:solidFill>
-                <a:latin typeface="Arial"/>
-              </a:rPr>
-              <a:t>Baris modul: T03B03-ROW-042, T03B03-ROW-043, T03B03-ROW-044, T03B03-ROW-046, T03B03-ROW-045, T03B03-ROW-047, T03B03-ROW-049, T03B03-ROW-051, T03B03-ROW-053, T03B03-ROW-048 (+3)</a:t>
-            </a:r>
-          </a:p>
-          <a:p>
-            <a:pPr algn="l"/>
-            <a:r>
-              <a:rPr sz="800" b="0" i="0">
-                <a:solidFill>
-                  <a:srgbClr val="6B6B6B"/>
-                </a:solidFill>
-                <a:latin typeface="Arial"/>
-              </a:rPr>
-              <a:t>Keputusan Bariah: A1, A2</a:t>
+                  <a:srgbClr val="6B6B6B"/>
+                </a:solidFill>
+                <a:latin typeface="Arial"/>
+              </a:rPr>
+              <a:t>Keputusan Bariah: A1</a:t>
             </a:r>
           </a:p>
         </p:txBody>
@@ -10336,7 +10292,7 @@
         </p:spPr>
         <p:txBody>
           <a:bodyPr wrap="square" lIns="0" rIns="0" tIns="0" bIns="0">
-            <a:spAutoFit/>
+            <a:noAutofit/>
           </a:bodyPr>
           <a:lstStyle/>
           <a:p>
@@ -10348,7 +10304,7 @@
                 </a:solidFill>
                 <a:latin typeface="Arial"/>
               </a:rPr>
-              <a:t>K5-PL06-T03-B03 · skrin 7 daripada 12   ·   DRAFT_FOR_BARIAH_REVIEW · NOT_INSTRUCTIONALLY_APPROVED · NOT_LEARNER_FACING_FINAL</a:t>
+              <a:t>K5-PL06-T03-B03 · skrin 3 daripada 12   ·   TECHNICAL_PROOF · DRAFT_FOR_BARIAH_REVIEW · NOT_INSTRUCTIONALLY_APPROVED · NOT_LEARNER_FACING_FINAL</a:t>
             </a:r>
           </a:p>
         </p:txBody>
@@ -10361,7 +10317,7 @@
 </p:sld>
 </file>
 
-<file path=ppt/slides/slide9.xml><?xml version="1.0" encoding="utf-8"?>
+<file path=ppt/slides/slide5.xml><?xml version="1.0" encoding="utf-8"?>
 <p:sld xmlns:a="http://schemas.openxmlformats.org/drawingml/2006/main" xmlns:p="http://schemas.openxmlformats.org/presentationml/2006/main" xmlns:r="http://schemas.openxmlformats.org/officeDocument/2006/relationships">
   <p:cSld>
     <p:spTree>
@@ -10389,7 +10345,7 @@
         </p:spPr>
         <p:txBody>
           <a:bodyPr wrap="square" lIns="0" rIns="0" tIns="0" bIns="0">
-            <a:spAutoFit/>
+            <a:noAutofit/>
           </a:bodyPr>
           <a:lstStyle/>
           <a:p>
@@ -10401,7 +10357,7 @@
                 </a:solidFill>
                 <a:latin typeface="Arial"/>
               </a:rPr>
-              <a:t>T03B03-S08   ·   click-to-reveal   ·   CONTENT</a:t>
+              <a:t>T03B03-S04   ·   click-to-reveal   ·   CONTENT</a:t>
             </a:r>
           </a:p>
           <a:p>
@@ -10413,7 +10369,7 @@
                 </a:solidFill>
                 <a:latin typeface="Arial"/>
               </a:rPr>
-              <a:t>Swale/ Natural Drain</a:t>
+              <a:t>Landform / Earthmound   ·   halaman 1/2</a:t>
             </a:r>
           </a:p>
         </p:txBody>
@@ -10447,7 +10403,7 @@
           <a:fillRef idx="3">
             <a:schemeClr val="accent1"/>
           </a:fillRef>
-          <a:effectRef idx="2">
+          <a:effectRef idx="0">
             <a:schemeClr val="accent1"/>
           </a:effectRef>
           <a:fontRef idx="minor">
@@ -10455,7 +10411,9 @@
           </a:fontRef>
         </p:style>
         <p:txBody>
-          <a:bodyPr rtlCol="0" anchor="ctr"/>
+          <a:bodyPr rtlCol="0" anchor="ctr">
+            <a:noAutofit/>
+          </a:bodyPr>
           <a:lstStyle/>
           <a:p>
             <a:pPr algn="ctr"/>
@@ -10480,7 +10438,7 @@
         </p:spPr>
         <p:txBody>
           <a:bodyPr wrap="square" lIns="0" rIns="0" tIns="0" bIns="0">
-            <a:spAutoFit/>
+            <a:noAutofit/>
           </a:bodyPr>
           <a:lstStyle/>
           <a:p>
@@ -10504,7 +10462,7 @@
                 </a:solidFill>
                 <a:latin typeface="Arial"/>
               </a:rPr>
-              <a:t>S · Swale/ Natural Drain</a:t>
+              <a:t>[S] Landform / Earthmound</a:t>
             </a:r>
           </a:p>
           <a:p>
@@ -10516,7 +10474,7 @@
                 </a:solidFill>
                 <a:latin typeface="Arial"/>
               </a:rPr>
-              <a:t>S · Swale adalah sejenis parit yang cetek, lebar, dan ditanami dengan rumput atau tumbuhan. Ia merupakan alternatif mesra alam kepada parit konkrit.</a:t>
+              <a:t>[S~] Busut tanah dibina berlapis, setiap lapisan tidak melebihi 300mm tebal, dan setiap lapisan dipadatkan.</a:t>
             </a:r>
           </a:p>
           <a:p>
@@ -10528,11 +10486,11 @@
                 </a:solidFill>
                 <a:latin typeface="Arial"/>
               </a:rPr>
-              <a:t>S~ · Swale ialah parit cetek dan lebar yang ditanami tumbuhan, alternatif kepada longkang konkrit, yang memperlahankan aliran dan menggalakkan penyerapan.</a:t>
-            </a:r>
-          </a:p>
-          <a:p>
-            <a:pPr algn="l"/>
+              <a:t>[S] Fungsi</a:t>
+            </a:r>
+          </a:p>
+          <a:p>
+            <a:pPr algn="l" lvl="1"/>
             <a:r>
               <a:rPr sz="1400" b="0" i="0">
                 <a:solidFill>
@@ -10540,7 +10498,7 @@
                 </a:solidFill>
                 <a:latin typeface="Arial"/>
               </a:rPr>
-              <a:t>S · Fungsi</a:t>
+              <a:t>[S] Mewujudkan pemandangan yang menarik secara visual serta mengurangkan kerataan tapak.</a:t>
             </a:r>
           </a:p>
           <a:p>
@@ -10552,11 +10510,11 @@
                 </a:solidFill>
                 <a:latin typeface="Arial"/>
               </a:rPr>
-              <a:t>S · Menguruskan aliran air larian permukaan dengan memperlahankannya, menggalakkan penyerapan air ke dalam tanah, dan menapis bahan cemar.</a:t>
-            </a:r>
-          </a:p>
-          <a:p>
-            <a:pPr algn="l"/>
+              <a:t>[S] Berfungsi sebagai penghadang visual atau bunyi.</a:t>
+            </a:r>
+          </a:p>
+          <a:p>
+            <a:pPr algn="l" lvl="1"/>
             <a:r>
               <a:rPr sz="1400" b="0" i="0">
                 <a:solidFill>
@@ -10564,7 +10522,19 @@
                 </a:solidFill>
                 <a:latin typeface="Arial"/>
               </a:rPr>
-              <a:t>S · Fokus Utama Kontraktor:</a:t>
+              <a:t>[S] Mengawal dan mengarahkan aliran air permukaan.</a:t>
+            </a:r>
+          </a:p>
+          <a:p>
+            <a:pPr algn="l"/>
+            <a:r>
+              <a:rPr sz="1400" b="0" i="0">
+                <a:solidFill>
+                  <a:srgbClr val="0D47A1"/>
+                </a:solidFill>
+                <a:latin typeface="Arial"/>
+              </a:rPr>
+              <a:t>[S] Fokus Utama Kontraktor</a:t>
             </a:r>
           </a:p>
           <a:p>
@@ -10576,7 +10546,7 @@
                 </a:solidFill>
                 <a:latin typeface="Arial"/>
               </a:rPr>
-              <a:t>S · Pembentukan Landskap</a:t>
+              <a:t>[S] Penandaan Tapak (Setting Out)</a:t>
             </a:r>
           </a:p>
           <a:p>
@@ -10588,7 +10558,7 @@
                 </a:solidFill>
                 <a:latin typeface="Arial"/>
               </a:rPr>
-              <a:t>S · Swale dibentuk melalui kerja penggalian yang minimum untuk menghasilkan satu lekukan yang landai dan lebar, bukannya parit yang dalam dan curam.</a:t>
+              <a:t>[S] Lokasi, keluasan tapak, dan ketinggian puncak busut mesti ditanda dengan tepat di tapak mengikut pelan kerja tanah (Earthwork Plan).</a:t>
             </a:r>
           </a:p>
           <a:p>
@@ -10600,7 +10570,7 @@
                 </a:solidFill>
                 <a:latin typeface="Arial"/>
               </a:rPr>
-              <a:t>S · Penanaman Tumbuhan</a:t>
+              <a:t>[S] Bahan Timbus</a:t>
             </a:r>
           </a:p>
           <a:p>
@@ -10612,19 +10582,19 @@
                 </a:solidFill>
                 <a:latin typeface="Arial"/>
               </a:rPr>
-              <a:t>S · Permukaan swale mesti ditanam dengan spesies rumput atau tumbuhan tahan air yang sesuai. Tumbuh-tumbuhan ini berfungsi untuk menstabilkan tanah, mengelakkan hakisan, dan membantu dalam proses penapisan air.</a:t>
-            </a:r>
-          </a:p>
-          <a:p>
-            <a:pPr algn="l"/>
-            <a:r>
-              <a:rPr sz="1200" b="0" i="0">
-                <a:solidFill>
-                  <a:srgbClr val="6B6B6B"/>
-                </a:solidFill>
-                <a:latin typeface="Arial"/>
-              </a:rPr>
-              <a:t>u · Klik setiap tajuk untuk memaparkan maklumat.</a:t>
+              <a:t>[S] Bahan tanah yang digunakan mestilah bahan yang sesuai, bebas daripada sisa binaan, akar kayu, dan batu besar. Tanah mestilah diluluskan oleh Pegawai Penguasa (S.O.).</a:t>
+            </a:r>
+          </a:p>
+          <a:p>
+            <a:pPr algn="l" lvl="1"/>
+            <a:r>
+              <a:rPr sz="1400" b="0" i="0">
+                <a:solidFill>
+                  <a:srgbClr val="0D47A1"/>
+                </a:solidFill>
+                <a:latin typeface="Arial"/>
+              </a:rPr>
+              <a:t>[S] Pemadatan Berlapis</a:t>
             </a:r>
           </a:p>
         </p:txBody>
@@ -10647,7 +10617,7 @@
         </p:spPr>
         <p:txBody>
           <a:bodyPr wrap="square" lIns="0" rIns="0" tIns="0" bIns="0">
-            <a:spAutoFit/>
+            <a:noAutofit/>
           </a:bodyPr>
           <a:lstStyle/>
           <a:p>
@@ -10671,7 +10641,7 @@
                 </a:solidFill>
                 <a:latin typeface="Arial"/>
               </a:rPr>
-              <a:t>click-to-reveal · 2 panel</a:t>
+              <a:t>click-to-reveal · 4 panel</a:t>
             </a:r>
           </a:p>
           <a:p>
@@ -10683,7 +10653,7 @@
                 </a:solidFill>
                 <a:latin typeface="Arial"/>
               </a:rPr>
-              <a:t>1. Pembentukan Landskap</a:t>
+              <a:t>1. Penandaan Tapak (Setting Out)</a:t>
             </a:r>
           </a:p>
           <a:p>
@@ -10695,7 +10665,31 @@
                 </a:solidFill>
                 <a:latin typeface="Arial"/>
               </a:rPr>
-              <a:t>2. Penanaman Tumbuhan</a:t>
+              <a:t>2. Bahan Timbus</a:t>
+            </a:r>
+          </a:p>
+          <a:p>
+            <a:pPr algn="l" lvl="1"/>
+            <a:r>
+              <a:rPr sz="900" b="0" i="0">
+                <a:solidFill>
+                  <a:srgbClr val="1A1A1A"/>
+                </a:solidFill>
+                <a:latin typeface="Arial"/>
+              </a:rPr>
+              <a:t>3. Pemadatan Berlapis</a:t>
+            </a:r>
+          </a:p>
+          <a:p>
+            <a:pPr algn="l" lvl="1"/>
+            <a:r>
+              <a:rPr sz="900" b="0" i="0">
+                <a:solidFill>
+                  <a:srgbClr val="1A1A1A"/>
+                </a:solidFill>
+                <a:latin typeface="Arial"/>
+              </a:rPr>
+              <a:t>4. Kecerunan Akhir</a:t>
             </a:r>
           </a:p>
           <a:p>
@@ -10731,7 +10725,7 @@
                 </a:solidFill>
                 <a:latin typeface="Arial"/>
               </a:rPr>
-              <a:t>Keratan rentas swale bertanam</a:t>
+              <a:t>Busut tanah berlapis 300mm dengan kecerunan 1:3</a:t>
             </a:r>
           </a:p>
           <a:p>
@@ -10803,7 +10797,7 @@
                 </a:solidFill>
                 <a:latin typeface="Arial"/>
               </a:rPr>
-              <a:t>Baris modul: T03B03-ROW-055, T03B03-ROW-056, T03B03-ROW-057, T03B03-ROW-059, T03B03-ROW-058, T03B03-ROW-060, T03B03-ROW-062, T03B03-ROW-061, T03B03-ROW-063</a:t>
+              <a:t>Baris modul: T03B03-ROW-002, T03B03-ROW-003, T03B03-ROW-007, T03B03-ROW-004, T03B03-ROW-005, T03B03-ROW-006, T03B03-ROW-008, T03B03-ROW-010, T03B03-ROW-012, T03B03-ROW-014 (+4)</a:t>
             </a:r>
           </a:p>
           <a:p>
@@ -10838,7 +10832,7 @@
         </p:spPr>
         <p:txBody>
           <a:bodyPr wrap="square" lIns="0" rIns="0" tIns="0" bIns="0">
-            <a:spAutoFit/>
+            <a:noAutofit/>
           </a:bodyPr>
           <a:lstStyle/>
           <a:p>
@@ -10850,7 +10844,1891 @@
                 </a:solidFill>
                 <a:latin typeface="Arial"/>
               </a:rPr>
-              <a:t>K5-PL06-T03-B03 · skrin 8 daripada 12   ·   DRAFT_FOR_BARIAH_REVIEW · NOT_INSTRUCTIONALLY_APPROVED · NOT_LEARNER_FACING_FINAL</a:t>
+              <a:t>K5-PL06-T03-B03 · skrin 4 daripada 12  ·  halaman 1/2   ·   TECHNICAL_PROOF · DRAFT_FOR_BARIAH_REVIEW · NOT_INSTRUCTIONALLY_APPROVED · NOT_LEARNER_FACING_FINAL</a:t>
+            </a:r>
+          </a:p>
+        </p:txBody>
+      </p:sp>
+    </p:spTree>
+  </p:cSld>
+  <p:clrMapOvr>
+    <a:masterClrMapping/>
+  </p:clrMapOvr>
+</p:sld>
+</file>
+
+<file path=ppt/slides/slide6.xml><?xml version="1.0" encoding="utf-8"?>
+<p:sld xmlns:a="http://schemas.openxmlformats.org/drawingml/2006/main" xmlns:p="http://schemas.openxmlformats.org/presentationml/2006/main" xmlns:r="http://schemas.openxmlformats.org/officeDocument/2006/relationships">
+  <p:cSld>
+    <p:spTree>
+      <p:nvGrpSpPr>
+        <p:cNvPr id="1" name=""/>
+        <p:cNvGrpSpPr/>
+        <p:nvPr/>
+      </p:nvGrpSpPr>
+      <p:grpSpPr/>
+      <p:sp>
+        <p:nvSpPr>
+          <p:cNvPr id="2" name="TextBox 1"/>
+          <p:cNvSpPr txBox="1"/>
+          <p:nvPr/>
+        </p:nvSpPr>
+        <p:spPr>
+          <a:xfrm>
+            <a:off x="457200" y="320000"/>
+            <a:ext cx="11277600" cy="700000"/>
+          </a:xfrm>
+          <a:prstGeom prst="rect">
+            <a:avLst/>
+          </a:prstGeom>
+          <a:noFill/>
+        </p:spPr>
+        <p:txBody>
+          <a:bodyPr wrap="square" lIns="0" rIns="0" tIns="0" bIns="0">
+            <a:noAutofit/>
+          </a:bodyPr>
+          <a:lstStyle/>
+          <a:p>
+            <a:pPr algn="l"/>
+            <a:r>
+              <a:rPr sz="1100" b="1" i="0">
+                <a:solidFill>
+                  <a:srgbClr val="6B6B6B"/>
+                </a:solidFill>
+                <a:latin typeface="Arial"/>
+              </a:rPr>
+              <a:t>T03B03-S04   ·   click-to-reveal   ·   CONTENT</a:t>
+            </a:r>
+          </a:p>
+          <a:p>
+            <a:pPr algn="l"/>
+            <a:r>
+              <a:rPr sz="2400" b="1" i="0">
+                <a:solidFill>
+                  <a:srgbClr val="1A1A1A"/>
+                </a:solidFill>
+                <a:latin typeface="Arial"/>
+              </a:rPr>
+              <a:t>Landform / Earthmound   ·   halaman 2/2</a:t>
+            </a:r>
+          </a:p>
+        </p:txBody>
+      </p:sp>
+      <p:sp>
+        <p:nvSpPr>
+          <p:cNvPr id="3" name="Rectangle 2"/>
+          <p:cNvSpPr/>
+          <p:nvPr/>
+        </p:nvSpPr>
+        <p:spPr>
+          <a:xfrm>
+            <a:off x="457200" y="1150000"/>
+            <a:ext cx="11277600" cy="9525"/>
+          </a:xfrm>
+          <a:prstGeom prst="rect">
+            <a:avLst/>
+          </a:prstGeom>
+          <a:solidFill>
+            <a:srgbClr val="D8D8D8"/>
+          </a:solidFill>
+          <a:ln>
+            <a:noFill/>
+          </a:ln>
+          <a:effectLst/>
+        </p:spPr>
+        <p:style>
+          <a:lnRef idx="1">
+            <a:schemeClr val="accent1"/>
+          </a:lnRef>
+          <a:fillRef idx="3">
+            <a:schemeClr val="accent1"/>
+          </a:fillRef>
+          <a:effectRef idx="0">
+            <a:schemeClr val="accent1"/>
+          </a:effectRef>
+          <a:fontRef idx="minor">
+            <a:schemeClr val="lt1"/>
+          </a:fontRef>
+        </p:style>
+        <p:txBody>
+          <a:bodyPr rtlCol="0" anchor="ctr">
+            <a:noAutofit/>
+          </a:bodyPr>
+          <a:lstStyle/>
+          <a:p>
+            <a:pPr algn="ctr"/>
+          </a:p>
+        </p:txBody>
+      </p:sp>
+      <p:sp>
+        <p:nvSpPr>
+          <p:cNvPr id="4" name="TextBox 3"/>
+          <p:cNvSpPr txBox="1"/>
+          <p:nvPr/>
+        </p:nvSpPr>
+        <p:spPr>
+          <a:xfrm>
+            <a:off x="457200" y="1320000"/>
+            <a:ext cx="6766560" cy="4600000"/>
+          </a:xfrm>
+          <a:prstGeom prst="rect">
+            <a:avLst/>
+          </a:prstGeom>
+          <a:noFill/>
+        </p:spPr>
+        <p:txBody>
+          <a:bodyPr wrap="square" lIns="0" rIns="0" tIns="0" bIns="0">
+            <a:noAutofit/>
+          </a:bodyPr>
+          <a:lstStyle/>
+          <a:p>
+            <a:pPr algn="l"/>
+            <a:r>
+              <a:rPr sz="1000" b="1" i="0">
+                <a:solidFill>
+                  <a:srgbClr val="6B6B6B"/>
+                </a:solidFill>
+                <a:latin typeface="Arial"/>
+              </a:rPr>
+              <a:t>KANDUNGAN SKRIN (sambungan)</a:t>
+            </a:r>
+          </a:p>
+          <a:p>
+            <a:pPr algn="l" lvl="2"/>
+            <a:r>
+              <a:rPr sz="1400" b="0" i="0">
+                <a:solidFill>
+                  <a:srgbClr val="0D47A1"/>
+                </a:solidFill>
+                <a:latin typeface="Arial"/>
+              </a:rPr>
+              <a:t>[S] Busut tanah mesti dibina secara berperingkat dalam lapisan-lapisan tidak melebihi 300mm tebal. Setiap lapisan wajib dipadatkan dengan sempurna menggunakan jentera pemadat (compactor) untuk mengelakkan mendapan (settlement) pada masa hadapan.</a:t>
+            </a:r>
+          </a:p>
+          <a:p>
+            <a:pPr algn="l" lvl="1"/>
+            <a:r>
+              <a:rPr sz="1400" b="0" i="0">
+                <a:solidFill>
+                  <a:srgbClr val="0D47A1"/>
+                </a:solidFill>
+                <a:latin typeface="Arial"/>
+              </a:rPr>
+              <a:t>[S] Kecerunan Akhir</a:t>
+            </a:r>
+          </a:p>
+          <a:p>
+            <a:pPr algn="l" lvl="2"/>
+            <a:r>
+              <a:rPr sz="1400" b="0" i="0">
+                <a:solidFill>
+                  <a:srgbClr val="0D47A1"/>
+                </a:solidFill>
+                <a:latin typeface="Arial"/>
+              </a:rPr>
+              <a:t>[S] Kecerunan busut mesti dibentuk mengikut nisbah yang ditetapkan dalam lukisan (cth: 1:3) untuk memastikan kestabilan dan mengelakkan hakisan. Permukaan akhir mesti dilindungi segera dengan rumput atau tanaman penutup bumi.</a:t>
+            </a:r>
+          </a:p>
+          <a:p>
+            <a:pPr algn="l"/>
+            <a:r>
+              <a:rPr sz="1200" b="0" i="0">
+                <a:solidFill>
+                  <a:srgbClr val="6B6B6B"/>
+                </a:solidFill>
+                <a:latin typeface="Arial"/>
+              </a:rPr>
+              <a:t>[U] Klik setiap tajuk untuk memaparkan maklumat.</a:t>
+            </a:r>
+          </a:p>
+        </p:txBody>
+      </p:sp>
+      <p:sp>
+        <p:nvSpPr>
+          <p:cNvPr id="5" name="TextBox 4"/>
+          <p:cNvSpPr txBox="1"/>
+          <p:nvPr/>
+        </p:nvSpPr>
+        <p:spPr>
+          <a:xfrm>
+            <a:off x="7523760" y="1320000"/>
+            <a:ext cx="4211040" cy="4600000"/>
+          </a:xfrm>
+          <a:prstGeom prst="rect">
+            <a:avLst/>
+          </a:prstGeom>
+          <a:noFill/>
+        </p:spPr>
+        <p:txBody>
+          <a:bodyPr wrap="square" lIns="0" rIns="0" tIns="0" bIns="0">
+            <a:noAutofit/>
+          </a:bodyPr>
+          <a:lstStyle/>
+          <a:p>
+            <a:pPr algn="l"/>
+            <a:r>
+              <a:rPr sz="1000" b="1" i="0">
+                <a:solidFill>
+                  <a:srgbClr val="6B6B6B"/>
+                </a:solidFill>
+                <a:latin typeface="Arial"/>
+              </a:rPr>
+              <a:t>INTERAKSI</a:t>
+            </a:r>
+          </a:p>
+          <a:p>
+            <a:pPr algn="l"/>
+            <a:r>
+              <a:rPr sz="1000" b="0" i="0">
+                <a:solidFill>
+                  <a:srgbClr val="1A1A1A"/>
+                </a:solidFill>
+                <a:latin typeface="Arial"/>
+              </a:rPr>
+              <a:t>click-to-reveal · 4 panel</a:t>
+            </a:r>
+          </a:p>
+          <a:p>
+            <a:pPr algn="l" lvl="1"/>
+            <a:r>
+              <a:rPr sz="900" b="0" i="0">
+                <a:solidFill>
+                  <a:srgbClr val="1A1A1A"/>
+                </a:solidFill>
+                <a:latin typeface="Arial"/>
+              </a:rPr>
+              <a:t>1. Penandaan Tapak (Setting Out)</a:t>
+            </a:r>
+          </a:p>
+          <a:p>
+            <a:pPr algn="l" lvl="1"/>
+            <a:r>
+              <a:rPr sz="900" b="0" i="0">
+                <a:solidFill>
+                  <a:srgbClr val="1A1A1A"/>
+                </a:solidFill>
+                <a:latin typeface="Arial"/>
+              </a:rPr>
+              <a:t>2. Bahan Timbus</a:t>
+            </a:r>
+          </a:p>
+          <a:p>
+            <a:pPr algn="l" lvl="1"/>
+            <a:r>
+              <a:rPr sz="900" b="0" i="0">
+                <a:solidFill>
+                  <a:srgbClr val="1A1A1A"/>
+                </a:solidFill>
+                <a:latin typeface="Arial"/>
+              </a:rPr>
+              <a:t>3. Pemadatan Berlapis</a:t>
+            </a:r>
+          </a:p>
+          <a:p>
+            <a:pPr algn="l" lvl="1"/>
+            <a:r>
+              <a:rPr sz="900" b="0" i="0">
+                <a:solidFill>
+                  <a:srgbClr val="1A1A1A"/>
+                </a:solidFill>
+                <a:latin typeface="Arial"/>
+              </a:rPr>
+              <a:t>4. Kecerunan Akhir</a:t>
+            </a:r>
+          </a:p>
+          <a:p>
+            <a:pPr algn="l"/>
+            <a:r>
+              <a:rPr sz="800" b="0" i="0">
+                <a:solidFill>
+                  <a:srgbClr val="1A1A1A"/>
+                </a:solidFill>
+                <a:latin typeface="Arial"/>
+              </a:rPr>
+              <a:t/>
+            </a:r>
+          </a:p>
+          <a:p>
+            <a:pPr algn="l"/>
+            <a:r>
+              <a:rPr sz="1000" b="1" i="0">
+                <a:solidFill>
+                  <a:srgbClr val="6B6B6B"/>
+                </a:solidFill>
+                <a:latin typeface="Arial"/>
+              </a:rPr>
+              <a:t>VISUAL</a:t>
+            </a:r>
+          </a:p>
+          <a:p>
+            <a:pPr algn="l"/>
+            <a:r>
+              <a:rPr sz="1000" b="0" i="0">
+                <a:solidFill>
+                  <a:srgbClr val="1A1A1A"/>
+                </a:solidFill>
+                <a:latin typeface="Arial"/>
+              </a:rPr>
+              <a:t>Busut tanah berlapis 300mm dengan kecerunan 1:3</a:t>
+            </a:r>
+          </a:p>
+          <a:p>
+            <a:pPr algn="l"/>
+            <a:r>
+              <a:rPr sz="900" b="0" i="0">
+                <a:solidFill>
+                  <a:srgbClr val="6B6B6B"/>
+                </a:solidFill>
+                <a:latin typeface="Arial"/>
+              </a:rPr>
+              <a:t>Tiada rajah sumber — subjek calon sahaja</a:t>
+            </a:r>
+          </a:p>
+          <a:p>
+            <a:pPr algn="l"/>
+            <a:r>
+              <a:rPr sz="900" b="1" i="0">
+                <a:solidFill>
+                  <a:srgbClr val="B71C1C"/>
+                </a:solidFill>
+                <a:latin typeface="Arial"/>
+              </a:rPr>
+              <a:t>SUBJEK VISUAL: PENDING_BARIAH_UNIT_REVIEW</a:t>
+            </a:r>
+          </a:p>
+          <a:p>
+            <a:pPr algn="l"/>
+            <a:r>
+              <a:rPr sz="900" b="1" i="0">
+                <a:solidFill>
+                  <a:srgbClr val="B71C1C"/>
+                </a:solidFill>
+                <a:latin typeface="Arial"/>
+              </a:rPr>
+              <a:t>ASET VISUAL BELUM DIHASILKAN — NOT_MMD_ASSET</a:t>
+            </a:r>
+          </a:p>
+          <a:p>
+            <a:pPr algn="l"/>
+            <a:r>
+              <a:rPr sz="800" b="0" i="0">
+                <a:solidFill>
+                  <a:srgbClr val="1A1A1A"/>
+                </a:solidFill>
+                <a:latin typeface="Arial"/>
+              </a:rPr>
+              <a:t/>
+            </a:r>
+          </a:p>
+          <a:p>
+            <a:pPr algn="l"/>
+            <a:r>
+              <a:rPr sz="1000" b="1" i="0">
+                <a:solidFill>
+                  <a:srgbClr val="6B6B6B"/>
+                </a:solidFill>
+                <a:latin typeface="Arial"/>
+              </a:rPr>
+              <a:t>SUMBER DAN KEPUTUSAN</a:t>
+            </a:r>
+          </a:p>
+          <a:p>
+            <a:pPr algn="l"/>
+            <a:r>
+              <a:rPr sz="800" b="0" i="0">
+                <a:solidFill>
+                  <a:srgbClr val="0D47A1"/>
+                </a:solidFill>
+                <a:latin typeface="Arial"/>
+              </a:rPr>
+              <a:t>Baris modul: T03B03-ROW-002, T03B03-ROW-003, T03B03-ROW-007, T03B03-ROW-004, T03B03-ROW-005, T03B03-ROW-006, T03B03-ROW-008, T03B03-ROW-010, T03B03-ROW-012, T03B03-ROW-014 (+4)</a:t>
+            </a:r>
+          </a:p>
+          <a:p>
+            <a:pPr algn="l"/>
+            <a:r>
+              <a:rPr sz="800" b="0" i="0">
+                <a:solidFill>
+                  <a:srgbClr val="6B6B6B"/>
+                </a:solidFill>
+                <a:latin typeface="Arial"/>
+              </a:rPr>
+              <a:t>Keputusan Bariah: A1, A2</a:t>
+            </a:r>
+          </a:p>
+        </p:txBody>
+      </p:sp>
+      <p:sp>
+        <p:nvSpPr>
+          <p:cNvPr id="6" name="TextBox 5"/>
+          <p:cNvSpPr txBox="1"/>
+          <p:nvPr/>
+        </p:nvSpPr>
+        <p:spPr>
+          <a:xfrm>
+            <a:off x="457200" y="6150000"/>
+            <a:ext cx="11277600" cy="500000"/>
+          </a:xfrm>
+          <a:prstGeom prst="rect">
+            <a:avLst/>
+          </a:prstGeom>
+          <a:noFill/>
+        </p:spPr>
+        <p:txBody>
+          <a:bodyPr wrap="square" lIns="0" rIns="0" tIns="0" bIns="0">
+            <a:noAutofit/>
+          </a:bodyPr>
+          <a:lstStyle/>
+          <a:p>
+            <a:pPr algn="l"/>
+            <a:r>
+              <a:rPr sz="900" b="0" i="0">
+                <a:solidFill>
+                  <a:srgbClr val="6B6B6B"/>
+                </a:solidFill>
+                <a:latin typeface="Arial"/>
+              </a:rPr>
+              <a:t>K5-PL06-T03-B03 · skrin 4 daripada 12  ·  halaman 2/2   ·   TECHNICAL_PROOF · DRAFT_FOR_BARIAH_REVIEW · NOT_INSTRUCTIONALLY_APPROVED · NOT_LEARNER_FACING_FINAL</a:t>
+            </a:r>
+          </a:p>
+        </p:txBody>
+      </p:sp>
+    </p:spTree>
+  </p:cSld>
+  <p:clrMapOvr>
+    <a:masterClrMapping/>
+  </p:clrMapOvr>
+</p:sld>
+</file>
+
+<file path=ppt/slides/slide7.xml><?xml version="1.0" encoding="utf-8"?>
+<p:sld xmlns:a="http://schemas.openxmlformats.org/drawingml/2006/main" xmlns:p="http://schemas.openxmlformats.org/presentationml/2006/main" xmlns:r="http://schemas.openxmlformats.org/officeDocument/2006/relationships">
+  <p:cSld>
+    <p:spTree>
+      <p:nvGrpSpPr>
+        <p:cNvPr id="1" name=""/>
+        <p:cNvGrpSpPr/>
+        <p:nvPr/>
+      </p:nvGrpSpPr>
+      <p:grpSpPr/>
+      <p:sp>
+        <p:nvSpPr>
+          <p:cNvPr id="2" name="TextBox 1"/>
+          <p:cNvSpPr txBox="1"/>
+          <p:nvPr/>
+        </p:nvSpPr>
+        <p:spPr>
+          <a:xfrm>
+            <a:off x="457200" y="320000"/>
+            <a:ext cx="11277600" cy="700000"/>
+          </a:xfrm>
+          <a:prstGeom prst="rect">
+            <a:avLst/>
+          </a:prstGeom>
+          <a:noFill/>
+        </p:spPr>
+        <p:txBody>
+          <a:bodyPr wrap="square" lIns="0" rIns="0" tIns="0" bIns="0">
+            <a:noAutofit/>
+          </a:bodyPr>
+          <a:lstStyle/>
+          <a:p>
+            <a:pPr algn="l"/>
+            <a:r>
+              <a:rPr sz="1100" b="1" i="0">
+                <a:solidFill>
+                  <a:srgbClr val="6B6B6B"/>
+                </a:solidFill>
+                <a:latin typeface="Arial"/>
+              </a:rPr>
+              <a:t>T03B03-S05   ·   click-to-reveal   ·   CONTENT</a:t>
+            </a:r>
+          </a:p>
+          <a:p>
+            <a:pPr algn="l"/>
+            <a:r>
+              <a:rPr sz="2400" b="1" i="0">
+                <a:solidFill>
+                  <a:srgbClr val="1A1A1A"/>
+                </a:solidFill>
+                <a:latin typeface="Arial"/>
+              </a:rPr>
+              <a:t>Sub soil drainage   ·   halaman 1/2</a:t>
+            </a:r>
+          </a:p>
+        </p:txBody>
+      </p:sp>
+      <p:sp>
+        <p:nvSpPr>
+          <p:cNvPr id="3" name="Rectangle 2"/>
+          <p:cNvSpPr/>
+          <p:nvPr/>
+        </p:nvSpPr>
+        <p:spPr>
+          <a:xfrm>
+            <a:off x="457200" y="1150000"/>
+            <a:ext cx="11277600" cy="9525"/>
+          </a:xfrm>
+          <a:prstGeom prst="rect">
+            <a:avLst/>
+          </a:prstGeom>
+          <a:solidFill>
+            <a:srgbClr val="D8D8D8"/>
+          </a:solidFill>
+          <a:ln>
+            <a:noFill/>
+          </a:ln>
+          <a:effectLst/>
+        </p:spPr>
+        <p:style>
+          <a:lnRef idx="1">
+            <a:schemeClr val="accent1"/>
+          </a:lnRef>
+          <a:fillRef idx="3">
+            <a:schemeClr val="accent1"/>
+          </a:fillRef>
+          <a:effectRef idx="0">
+            <a:schemeClr val="accent1"/>
+          </a:effectRef>
+          <a:fontRef idx="minor">
+            <a:schemeClr val="lt1"/>
+          </a:fontRef>
+        </p:style>
+        <p:txBody>
+          <a:bodyPr rtlCol="0" anchor="ctr">
+            <a:noAutofit/>
+          </a:bodyPr>
+          <a:lstStyle/>
+          <a:p>
+            <a:pPr algn="ctr"/>
+          </a:p>
+        </p:txBody>
+      </p:sp>
+      <p:sp>
+        <p:nvSpPr>
+          <p:cNvPr id="4" name="TextBox 3"/>
+          <p:cNvSpPr txBox="1"/>
+          <p:nvPr/>
+        </p:nvSpPr>
+        <p:spPr>
+          <a:xfrm>
+            <a:off x="457200" y="1320000"/>
+            <a:ext cx="6766560" cy="4600000"/>
+          </a:xfrm>
+          <a:prstGeom prst="rect">
+            <a:avLst/>
+          </a:prstGeom>
+          <a:noFill/>
+        </p:spPr>
+        <p:txBody>
+          <a:bodyPr wrap="square" lIns="0" rIns="0" tIns="0" bIns="0">
+            <a:noAutofit/>
+          </a:bodyPr>
+          <a:lstStyle/>
+          <a:p>
+            <a:pPr algn="l"/>
+            <a:r>
+              <a:rPr sz="1000" b="1" i="0">
+                <a:solidFill>
+                  <a:srgbClr val="6B6B6B"/>
+                </a:solidFill>
+                <a:latin typeface="Arial"/>
+              </a:rPr>
+              <a:t>KANDUNGAN SKRIN</a:t>
+            </a:r>
+          </a:p>
+          <a:p>
+            <a:pPr algn="l"/>
+            <a:r>
+              <a:rPr sz="1400" b="0" i="0">
+                <a:solidFill>
+                  <a:srgbClr val="0D47A1"/>
+                </a:solidFill>
+                <a:latin typeface="Arial"/>
+              </a:rPr>
+              <a:t>[S] Sub soil drainage</a:t>
+            </a:r>
+          </a:p>
+          <a:p>
+            <a:pPr algn="l"/>
+            <a:r>
+              <a:rPr sz="1400" b="0" i="0">
+                <a:solidFill>
+                  <a:srgbClr val="0D47A1"/>
+                </a:solidFill>
+                <a:latin typeface="Arial"/>
+              </a:rPr>
+              <a:t>[S~] Sistem saliran bawah tanah mesti disambungkan ke saluran keluar yang berfungsi.</a:t>
+            </a:r>
+          </a:p>
+          <a:p>
+            <a:pPr algn="l"/>
+            <a:r>
+              <a:rPr sz="1400" b="0" i="0">
+                <a:solidFill>
+                  <a:srgbClr val="0D47A1"/>
+                </a:solidFill>
+                <a:latin typeface="Arial"/>
+              </a:rPr>
+              <a:t>[S] Fungsi</a:t>
+            </a:r>
+          </a:p>
+          <a:p>
+            <a:pPr algn="l" lvl="1"/>
+            <a:r>
+              <a:rPr sz="1400" b="0" i="0">
+                <a:solidFill>
+                  <a:srgbClr val="0D47A1"/>
+                </a:solidFill>
+                <a:latin typeface="Arial"/>
+              </a:rPr>
+              <a:t>[S] Mengelakkan tanah daripada menjadi tepu air, yang boleh merosakkan akar tanaman dan menjadikan kawasan tidak boleh digunakan.</a:t>
+            </a:r>
+          </a:p>
+          <a:p>
+            <a:pPr algn="l"/>
+            <a:r>
+              <a:rPr sz="1400" b="0" i="0">
+                <a:solidFill>
+                  <a:srgbClr val="0D47A1"/>
+                </a:solidFill>
+                <a:latin typeface="Arial"/>
+              </a:rPr>
+              <a:t>[S] Fokus Utama Kontraktor</a:t>
+            </a:r>
+          </a:p>
+          <a:p>
+            <a:pPr algn="l" lvl="1"/>
+            <a:r>
+              <a:rPr sz="1400" b="0" i="0">
+                <a:solidFill>
+                  <a:srgbClr val="0D47A1"/>
+                </a:solidFill>
+                <a:latin typeface="Arial"/>
+              </a:rPr>
+              <a:t>[S] Penggalian Peparit</a:t>
+            </a:r>
+          </a:p>
+          <a:p>
+            <a:pPr algn="l" lvl="2"/>
+            <a:r>
+              <a:rPr sz="1400" b="0" i="0">
+                <a:solidFill>
+                  <a:srgbClr val="0D47A1"/>
+                </a:solidFill>
+                <a:latin typeface="Arial"/>
+              </a:rPr>
+              <a:t>[S] Peparit (trench) digali mengikut jajaran, kedalaman, dan kecerunan yang ditetapkan dalam Pelan Saliran (Drainage Plan). Kecerunan yang betul adalah kritikal untuk memastikan air mengalir.</a:t>
+            </a:r>
+          </a:p>
+          <a:p>
+            <a:pPr algn="l" lvl="1"/>
+            <a:r>
+              <a:rPr sz="1400" b="0" i="0">
+                <a:solidFill>
+                  <a:srgbClr val="0D47A1"/>
+                </a:solidFill>
+                <a:latin typeface="Arial"/>
+              </a:rPr>
+              <a:t>[S] Pemasangan Sistematik</a:t>
+            </a:r>
+          </a:p>
+          <a:p>
+            <a:pPr algn="l" lvl="2"/>
+            <a:r>
+              <a:rPr sz="1400" b="0" i="0">
+                <a:solidFill>
+                  <a:srgbClr val="0D47A1"/>
+                </a:solidFill>
+                <a:latin typeface="Arial"/>
+              </a:rPr>
+              <a:t>[S] Proses pemasangan yang betul adalah kunci kejayaan sistem ini:</a:t>
+            </a:r>
+          </a:p>
+          <a:p>
+            <a:pPr algn="l" lvl="2"/>
+            <a:r>
+              <a:rPr sz="1400" b="0" i="0">
+                <a:solidFill>
+                  <a:srgbClr val="0D47A1"/>
+                </a:solidFill>
+                <a:latin typeface="Arial"/>
+              </a:rPr>
+              <a:t>[S] Lapik peparit dengan kain geotekstil (geotextile fabric).</a:t>
+            </a:r>
+          </a:p>
+          <a:p>
+            <a:pPr algn="l" lvl="2"/>
+            <a:r>
+              <a:rPr sz="1400" b="0" i="0">
+                <a:solidFill>
+                  <a:srgbClr val="0D47A1"/>
+                </a:solidFill>
+                <a:latin typeface="Arial"/>
+              </a:rPr>
+              <a:t>[S] Letakkan lapisan batu kelikir penapis (filter aggregate).</a:t>
+            </a:r>
+          </a:p>
+          <a:p>
+            <a:pPr algn="l" lvl="2"/>
+            <a:r>
+              <a:rPr sz="1400" b="0" i="0">
+                <a:solidFill>
+                  <a:srgbClr val="0D47A1"/>
+                </a:solidFill>
+                <a:latin typeface="Arial"/>
+              </a:rPr>
+              <a:t>[S] Pasang paip berlubang (perforated pipe) dengan lubangnya menghadap ke bawah.</a:t>
+            </a:r>
+          </a:p>
+          <a:p>
+            <a:pPr algn="l" lvl="2"/>
+            <a:r>
+              <a:rPr sz="1400" b="0" i="0">
+                <a:solidFill>
+                  <a:srgbClr val="0D47A1"/>
+                </a:solidFill>
+                <a:latin typeface="Arial"/>
+              </a:rPr>
+              <a:t>[S] Timbus sekeliling paip dengan batu kelikir.</a:t>
+            </a:r>
+          </a:p>
+          <a:p>
+            <a:pPr algn="l" lvl="2"/>
+            <a:r>
+              <a:rPr sz="1400" b="0" i="0">
+                <a:solidFill>
+                  <a:srgbClr val="0D47A1"/>
+                </a:solidFill>
+                <a:latin typeface="Arial"/>
+              </a:rPr>
+              <a:t>[S] Lipat lebihan geotekstil untuk menutup lapisan batu kelikir.</a:t>
+            </a:r>
+          </a:p>
+        </p:txBody>
+      </p:sp>
+      <p:sp>
+        <p:nvSpPr>
+          <p:cNvPr id="5" name="TextBox 4"/>
+          <p:cNvSpPr txBox="1"/>
+          <p:nvPr/>
+        </p:nvSpPr>
+        <p:spPr>
+          <a:xfrm>
+            <a:off x="7523760" y="1320000"/>
+            <a:ext cx="4211040" cy="4600000"/>
+          </a:xfrm>
+          <a:prstGeom prst="rect">
+            <a:avLst/>
+          </a:prstGeom>
+          <a:noFill/>
+        </p:spPr>
+        <p:txBody>
+          <a:bodyPr wrap="square" lIns="0" rIns="0" tIns="0" bIns="0">
+            <a:noAutofit/>
+          </a:bodyPr>
+          <a:lstStyle/>
+          <a:p>
+            <a:pPr algn="l"/>
+            <a:r>
+              <a:rPr sz="1000" b="1" i="0">
+                <a:solidFill>
+                  <a:srgbClr val="6B6B6B"/>
+                </a:solidFill>
+                <a:latin typeface="Arial"/>
+              </a:rPr>
+              <a:t>INTERAKSI</a:t>
+            </a:r>
+          </a:p>
+          <a:p>
+            <a:pPr algn="l"/>
+            <a:r>
+              <a:rPr sz="1000" b="0" i="0">
+                <a:solidFill>
+                  <a:srgbClr val="1A1A1A"/>
+                </a:solidFill>
+                <a:latin typeface="Arial"/>
+              </a:rPr>
+              <a:t>click-to-reveal · 3 panel</a:t>
+            </a:r>
+          </a:p>
+          <a:p>
+            <a:pPr algn="l" lvl="1"/>
+            <a:r>
+              <a:rPr sz="900" b="0" i="0">
+                <a:solidFill>
+                  <a:srgbClr val="1A1A1A"/>
+                </a:solidFill>
+                <a:latin typeface="Arial"/>
+              </a:rPr>
+              <a:t>1. Penggalian Peparit</a:t>
+            </a:r>
+          </a:p>
+          <a:p>
+            <a:pPr algn="l" lvl="1"/>
+            <a:r>
+              <a:rPr sz="900" b="0" i="0">
+                <a:solidFill>
+                  <a:srgbClr val="1A1A1A"/>
+                </a:solidFill>
+                <a:latin typeface="Arial"/>
+              </a:rPr>
+              <a:t>2. Pemasangan Sistematik</a:t>
+            </a:r>
+          </a:p>
+          <a:p>
+            <a:pPr algn="l" lvl="1"/>
+            <a:r>
+              <a:rPr sz="900" b="0" i="0">
+                <a:solidFill>
+                  <a:srgbClr val="1A1A1A"/>
+                </a:solidFill>
+                <a:latin typeface="Arial"/>
+              </a:rPr>
+              <a:t>3. Sambungan ke Saluran Keluar</a:t>
+            </a:r>
+          </a:p>
+          <a:p>
+            <a:pPr algn="l"/>
+            <a:r>
+              <a:rPr sz="800" b="0" i="0">
+                <a:solidFill>
+                  <a:srgbClr val="1A1A1A"/>
+                </a:solidFill>
+                <a:latin typeface="Arial"/>
+              </a:rPr>
+              <a:t/>
+            </a:r>
+          </a:p>
+          <a:p>
+            <a:pPr algn="l"/>
+            <a:r>
+              <a:rPr sz="1000" b="1" i="0">
+                <a:solidFill>
+                  <a:srgbClr val="6B6B6B"/>
+                </a:solidFill>
+                <a:latin typeface="Arial"/>
+              </a:rPr>
+              <a:t>VISUAL</a:t>
+            </a:r>
+          </a:p>
+          <a:p>
+            <a:pPr algn="l"/>
+            <a:r>
+              <a:rPr sz="1000" b="0" i="1">
+                <a:solidFill>
+                  <a:srgbClr val="6B6B6B"/>
+                </a:solidFill>
+                <a:latin typeface="Arial"/>
+              </a:rPr>
+              <a:t>Tiada visual khusus</a:t>
+            </a:r>
+          </a:p>
+          <a:p>
+            <a:pPr algn="l"/>
+            <a:r>
+              <a:rPr sz="800" b="0" i="0">
+                <a:solidFill>
+                  <a:srgbClr val="1A1A1A"/>
+                </a:solidFill>
+                <a:latin typeface="Arial"/>
+              </a:rPr>
+              <a:t/>
+            </a:r>
+          </a:p>
+          <a:p>
+            <a:pPr algn="l"/>
+            <a:r>
+              <a:rPr sz="1000" b="1" i="0">
+                <a:solidFill>
+                  <a:srgbClr val="6B6B6B"/>
+                </a:solidFill>
+                <a:latin typeface="Arial"/>
+              </a:rPr>
+              <a:t>SUMBER DAN KEPUTUSAN</a:t>
+            </a:r>
+          </a:p>
+          <a:p>
+            <a:pPr algn="l"/>
+            <a:r>
+              <a:rPr sz="800" b="0" i="0">
+                <a:solidFill>
+                  <a:srgbClr val="0D47A1"/>
+                </a:solidFill>
+                <a:latin typeface="Arial"/>
+              </a:rPr>
+              <a:t>Baris modul: T03B03-ROW-016, T03B03-ROW-017, T03B03-ROW-019, T03B03-ROW-018, T03B03-ROW-020, T03B03-ROW-022, T03B03-ROW-030, T03B03-ROW-021, T03B03-ROW-023, T03B03-ROW-024 (+6)</a:t>
+            </a:r>
+          </a:p>
+          <a:p>
+            <a:pPr algn="l"/>
+            <a:r>
+              <a:rPr sz="800" b="0" i="0">
+                <a:solidFill>
+                  <a:srgbClr val="6B6B6B"/>
+                </a:solidFill>
+                <a:latin typeface="Arial"/>
+              </a:rPr>
+              <a:t>Keputusan Bariah: A1, A2</a:t>
+            </a:r>
+          </a:p>
+        </p:txBody>
+      </p:sp>
+      <p:sp>
+        <p:nvSpPr>
+          <p:cNvPr id="6" name="TextBox 5"/>
+          <p:cNvSpPr txBox="1"/>
+          <p:nvPr/>
+        </p:nvSpPr>
+        <p:spPr>
+          <a:xfrm>
+            <a:off x="457200" y="6150000"/>
+            <a:ext cx="11277600" cy="500000"/>
+          </a:xfrm>
+          <a:prstGeom prst="rect">
+            <a:avLst/>
+          </a:prstGeom>
+          <a:noFill/>
+        </p:spPr>
+        <p:txBody>
+          <a:bodyPr wrap="square" lIns="0" rIns="0" tIns="0" bIns="0">
+            <a:noAutofit/>
+          </a:bodyPr>
+          <a:lstStyle/>
+          <a:p>
+            <a:pPr algn="l"/>
+            <a:r>
+              <a:rPr sz="900" b="0" i="0">
+                <a:solidFill>
+                  <a:srgbClr val="6B6B6B"/>
+                </a:solidFill>
+                <a:latin typeface="Arial"/>
+              </a:rPr>
+              <a:t>K5-PL06-T03-B03 · skrin 5 daripada 12  ·  halaman 1/2   ·   TECHNICAL_PROOF · DRAFT_FOR_BARIAH_REVIEW · NOT_INSTRUCTIONALLY_APPROVED · NOT_LEARNER_FACING_FINAL</a:t>
+            </a:r>
+          </a:p>
+        </p:txBody>
+      </p:sp>
+    </p:spTree>
+  </p:cSld>
+  <p:clrMapOvr>
+    <a:masterClrMapping/>
+  </p:clrMapOvr>
+</p:sld>
+</file>
+
+<file path=ppt/slides/slide8.xml><?xml version="1.0" encoding="utf-8"?>
+<p:sld xmlns:a="http://schemas.openxmlformats.org/drawingml/2006/main" xmlns:p="http://schemas.openxmlformats.org/presentationml/2006/main" xmlns:r="http://schemas.openxmlformats.org/officeDocument/2006/relationships">
+  <p:cSld>
+    <p:spTree>
+      <p:nvGrpSpPr>
+        <p:cNvPr id="1" name=""/>
+        <p:cNvGrpSpPr/>
+        <p:nvPr/>
+      </p:nvGrpSpPr>
+      <p:grpSpPr/>
+      <p:sp>
+        <p:nvSpPr>
+          <p:cNvPr id="2" name="TextBox 1"/>
+          <p:cNvSpPr txBox="1"/>
+          <p:nvPr/>
+        </p:nvSpPr>
+        <p:spPr>
+          <a:xfrm>
+            <a:off x="457200" y="320000"/>
+            <a:ext cx="11277600" cy="700000"/>
+          </a:xfrm>
+          <a:prstGeom prst="rect">
+            <a:avLst/>
+          </a:prstGeom>
+          <a:noFill/>
+        </p:spPr>
+        <p:txBody>
+          <a:bodyPr wrap="square" lIns="0" rIns="0" tIns="0" bIns="0">
+            <a:noAutofit/>
+          </a:bodyPr>
+          <a:lstStyle/>
+          <a:p>
+            <a:pPr algn="l"/>
+            <a:r>
+              <a:rPr sz="1100" b="1" i="0">
+                <a:solidFill>
+                  <a:srgbClr val="6B6B6B"/>
+                </a:solidFill>
+                <a:latin typeface="Arial"/>
+              </a:rPr>
+              <a:t>T03B03-S05   ·   click-to-reveal   ·   CONTENT</a:t>
+            </a:r>
+          </a:p>
+          <a:p>
+            <a:pPr algn="l"/>
+            <a:r>
+              <a:rPr sz="2400" b="1" i="0">
+                <a:solidFill>
+                  <a:srgbClr val="1A1A1A"/>
+                </a:solidFill>
+                <a:latin typeface="Arial"/>
+              </a:rPr>
+              <a:t>Sub soil drainage   ·   halaman 2/2</a:t>
+            </a:r>
+          </a:p>
+        </p:txBody>
+      </p:sp>
+      <p:sp>
+        <p:nvSpPr>
+          <p:cNvPr id="3" name="Rectangle 2"/>
+          <p:cNvSpPr/>
+          <p:nvPr/>
+        </p:nvSpPr>
+        <p:spPr>
+          <a:xfrm>
+            <a:off x="457200" y="1150000"/>
+            <a:ext cx="11277600" cy="9525"/>
+          </a:xfrm>
+          <a:prstGeom prst="rect">
+            <a:avLst/>
+          </a:prstGeom>
+          <a:solidFill>
+            <a:srgbClr val="D8D8D8"/>
+          </a:solidFill>
+          <a:ln>
+            <a:noFill/>
+          </a:ln>
+          <a:effectLst/>
+        </p:spPr>
+        <p:style>
+          <a:lnRef idx="1">
+            <a:schemeClr val="accent1"/>
+          </a:lnRef>
+          <a:fillRef idx="3">
+            <a:schemeClr val="accent1"/>
+          </a:fillRef>
+          <a:effectRef idx="0">
+            <a:schemeClr val="accent1"/>
+          </a:effectRef>
+          <a:fontRef idx="minor">
+            <a:schemeClr val="lt1"/>
+          </a:fontRef>
+        </p:style>
+        <p:txBody>
+          <a:bodyPr rtlCol="0" anchor="ctr">
+            <a:noAutofit/>
+          </a:bodyPr>
+          <a:lstStyle/>
+          <a:p>
+            <a:pPr algn="ctr"/>
+          </a:p>
+        </p:txBody>
+      </p:sp>
+      <p:sp>
+        <p:nvSpPr>
+          <p:cNvPr id="4" name="TextBox 3"/>
+          <p:cNvSpPr txBox="1"/>
+          <p:nvPr/>
+        </p:nvSpPr>
+        <p:spPr>
+          <a:xfrm>
+            <a:off x="457200" y="1320000"/>
+            <a:ext cx="6766560" cy="4600000"/>
+          </a:xfrm>
+          <a:prstGeom prst="rect">
+            <a:avLst/>
+          </a:prstGeom>
+          <a:noFill/>
+        </p:spPr>
+        <p:txBody>
+          <a:bodyPr wrap="square" lIns="0" rIns="0" tIns="0" bIns="0">
+            <a:noAutofit/>
+          </a:bodyPr>
+          <a:lstStyle/>
+          <a:p>
+            <a:pPr algn="l"/>
+            <a:r>
+              <a:rPr sz="1000" b="1" i="0">
+                <a:solidFill>
+                  <a:srgbClr val="6B6B6B"/>
+                </a:solidFill>
+                <a:latin typeface="Arial"/>
+              </a:rPr>
+              <a:t>KANDUNGAN SKRIN (sambungan)</a:t>
+            </a:r>
+          </a:p>
+          <a:p>
+            <a:pPr algn="l" lvl="2"/>
+            <a:r>
+              <a:rPr sz="1400" b="0" i="0">
+                <a:solidFill>
+                  <a:srgbClr val="0D47A1"/>
+                </a:solidFill>
+                <a:latin typeface="Arial"/>
+              </a:rPr>
+              <a:t>[S] Timbus lapisan atas dengan pasir kasar dan tanah atas.</a:t>
+            </a:r>
+          </a:p>
+          <a:p>
+            <a:pPr algn="l" lvl="1"/>
+            <a:r>
+              <a:rPr sz="1400" b="0" i="0">
+                <a:solidFill>
+                  <a:srgbClr val="0D47A1"/>
+                </a:solidFill>
+                <a:latin typeface="Arial"/>
+              </a:rPr>
+              <a:t>[S] Sambungan ke Saluran Keluar</a:t>
+            </a:r>
+          </a:p>
+          <a:p>
+            <a:pPr algn="l" lvl="2"/>
+            <a:r>
+              <a:rPr sz="1400" b="0" i="0">
+                <a:solidFill>
+                  <a:srgbClr val="0D47A1"/>
+                </a:solidFill>
+                <a:latin typeface="Arial"/>
+              </a:rPr>
+              <a:t>[S] Pastikan sistem saliran bawah tanah ini disambungkan ke saluran keluar yang berfungsi seperti parit utama atau sump.</a:t>
+            </a:r>
+          </a:p>
+          <a:p>
+            <a:pPr algn="l"/>
+            <a:r>
+              <a:rPr sz="1200" b="0" i="0">
+                <a:solidFill>
+                  <a:srgbClr val="6B6B6B"/>
+                </a:solidFill>
+                <a:latin typeface="Arial"/>
+              </a:rPr>
+              <a:t>[U] Klik setiap tajuk untuk memaparkan maklumat.</a:t>
+            </a:r>
+          </a:p>
+        </p:txBody>
+      </p:sp>
+      <p:sp>
+        <p:nvSpPr>
+          <p:cNvPr id="5" name="TextBox 4"/>
+          <p:cNvSpPr txBox="1"/>
+          <p:nvPr/>
+        </p:nvSpPr>
+        <p:spPr>
+          <a:xfrm>
+            <a:off x="7523760" y="1320000"/>
+            <a:ext cx="4211040" cy="4600000"/>
+          </a:xfrm>
+          <a:prstGeom prst="rect">
+            <a:avLst/>
+          </a:prstGeom>
+          <a:noFill/>
+        </p:spPr>
+        <p:txBody>
+          <a:bodyPr wrap="square" lIns="0" rIns="0" tIns="0" bIns="0">
+            <a:noAutofit/>
+          </a:bodyPr>
+          <a:lstStyle/>
+          <a:p>
+            <a:pPr algn="l"/>
+            <a:r>
+              <a:rPr sz="1000" b="1" i="0">
+                <a:solidFill>
+                  <a:srgbClr val="6B6B6B"/>
+                </a:solidFill>
+                <a:latin typeface="Arial"/>
+              </a:rPr>
+              <a:t>INTERAKSI</a:t>
+            </a:r>
+          </a:p>
+          <a:p>
+            <a:pPr algn="l"/>
+            <a:r>
+              <a:rPr sz="1000" b="0" i="0">
+                <a:solidFill>
+                  <a:srgbClr val="1A1A1A"/>
+                </a:solidFill>
+                <a:latin typeface="Arial"/>
+              </a:rPr>
+              <a:t>click-to-reveal · 3 panel</a:t>
+            </a:r>
+          </a:p>
+          <a:p>
+            <a:pPr algn="l" lvl="1"/>
+            <a:r>
+              <a:rPr sz="900" b="0" i="0">
+                <a:solidFill>
+                  <a:srgbClr val="1A1A1A"/>
+                </a:solidFill>
+                <a:latin typeface="Arial"/>
+              </a:rPr>
+              <a:t>1. Penggalian Peparit</a:t>
+            </a:r>
+          </a:p>
+          <a:p>
+            <a:pPr algn="l" lvl="1"/>
+            <a:r>
+              <a:rPr sz="900" b="0" i="0">
+                <a:solidFill>
+                  <a:srgbClr val="1A1A1A"/>
+                </a:solidFill>
+                <a:latin typeface="Arial"/>
+              </a:rPr>
+              <a:t>2. Pemasangan Sistematik</a:t>
+            </a:r>
+          </a:p>
+          <a:p>
+            <a:pPr algn="l" lvl="1"/>
+            <a:r>
+              <a:rPr sz="900" b="0" i="0">
+                <a:solidFill>
+                  <a:srgbClr val="1A1A1A"/>
+                </a:solidFill>
+                <a:latin typeface="Arial"/>
+              </a:rPr>
+              <a:t>3. Sambungan ke Saluran Keluar</a:t>
+            </a:r>
+          </a:p>
+          <a:p>
+            <a:pPr algn="l"/>
+            <a:r>
+              <a:rPr sz="800" b="0" i="0">
+                <a:solidFill>
+                  <a:srgbClr val="1A1A1A"/>
+                </a:solidFill>
+                <a:latin typeface="Arial"/>
+              </a:rPr>
+              <a:t/>
+            </a:r>
+          </a:p>
+          <a:p>
+            <a:pPr algn="l"/>
+            <a:r>
+              <a:rPr sz="1000" b="1" i="0">
+                <a:solidFill>
+                  <a:srgbClr val="6B6B6B"/>
+                </a:solidFill>
+                <a:latin typeface="Arial"/>
+              </a:rPr>
+              <a:t>VISUAL</a:t>
+            </a:r>
+          </a:p>
+          <a:p>
+            <a:pPr algn="l"/>
+            <a:r>
+              <a:rPr sz="1000" b="0" i="1">
+                <a:solidFill>
+                  <a:srgbClr val="6B6B6B"/>
+                </a:solidFill>
+                <a:latin typeface="Arial"/>
+              </a:rPr>
+              <a:t>Tiada visual khusus</a:t>
+            </a:r>
+          </a:p>
+          <a:p>
+            <a:pPr algn="l"/>
+            <a:r>
+              <a:rPr sz="800" b="0" i="0">
+                <a:solidFill>
+                  <a:srgbClr val="1A1A1A"/>
+                </a:solidFill>
+                <a:latin typeface="Arial"/>
+              </a:rPr>
+              <a:t/>
+            </a:r>
+          </a:p>
+          <a:p>
+            <a:pPr algn="l"/>
+            <a:r>
+              <a:rPr sz="1000" b="1" i="0">
+                <a:solidFill>
+                  <a:srgbClr val="6B6B6B"/>
+                </a:solidFill>
+                <a:latin typeface="Arial"/>
+              </a:rPr>
+              <a:t>SUMBER DAN KEPUTUSAN</a:t>
+            </a:r>
+          </a:p>
+          <a:p>
+            <a:pPr algn="l"/>
+            <a:r>
+              <a:rPr sz="800" b="0" i="0">
+                <a:solidFill>
+                  <a:srgbClr val="0D47A1"/>
+                </a:solidFill>
+                <a:latin typeface="Arial"/>
+              </a:rPr>
+              <a:t>Baris modul: T03B03-ROW-016, T03B03-ROW-017, T03B03-ROW-019, T03B03-ROW-018, T03B03-ROW-020, T03B03-ROW-022, T03B03-ROW-030, T03B03-ROW-021, T03B03-ROW-023, T03B03-ROW-024 (+6)</a:t>
+            </a:r>
+          </a:p>
+          <a:p>
+            <a:pPr algn="l"/>
+            <a:r>
+              <a:rPr sz="800" b="0" i="0">
+                <a:solidFill>
+                  <a:srgbClr val="6B6B6B"/>
+                </a:solidFill>
+                <a:latin typeface="Arial"/>
+              </a:rPr>
+              <a:t>Keputusan Bariah: A1, A2</a:t>
+            </a:r>
+          </a:p>
+        </p:txBody>
+      </p:sp>
+      <p:sp>
+        <p:nvSpPr>
+          <p:cNvPr id="6" name="TextBox 5"/>
+          <p:cNvSpPr txBox="1"/>
+          <p:nvPr/>
+        </p:nvSpPr>
+        <p:spPr>
+          <a:xfrm>
+            <a:off x="457200" y="6150000"/>
+            <a:ext cx="11277600" cy="500000"/>
+          </a:xfrm>
+          <a:prstGeom prst="rect">
+            <a:avLst/>
+          </a:prstGeom>
+          <a:noFill/>
+        </p:spPr>
+        <p:txBody>
+          <a:bodyPr wrap="square" lIns="0" rIns="0" tIns="0" bIns="0">
+            <a:noAutofit/>
+          </a:bodyPr>
+          <a:lstStyle/>
+          <a:p>
+            <a:pPr algn="l"/>
+            <a:r>
+              <a:rPr sz="900" b="0" i="0">
+                <a:solidFill>
+                  <a:srgbClr val="6B6B6B"/>
+                </a:solidFill>
+                <a:latin typeface="Arial"/>
+              </a:rPr>
+              <a:t>K5-PL06-T03-B03 · skrin 5 daripada 12  ·  halaman 2/2   ·   TECHNICAL_PROOF · DRAFT_FOR_BARIAH_REVIEW · NOT_INSTRUCTIONALLY_APPROVED · NOT_LEARNER_FACING_FINAL</a:t>
+            </a:r>
+          </a:p>
+        </p:txBody>
+      </p:sp>
+    </p:spTree>
+  </p:cSld>
+  <p:clrMapOvr>
+    <a:masterClrMapping/>
+  </p:clrMapOvr>
+</p:sld>
+</file>
+
+<file path=ppt/slides/slide9.xml><?xml version="1.0" encoding="utf-8"?>
+<p:sld xmlns:a="http://schemas.openxmlformats.org/drawingml/2006/main" xmlns:p="http://schemas.openxmlformats.org/presentationml/2006/main" xmlns:r="http://schemas.openxmlformats.org/officeDocument/2006/relationships">
+  <p:cSld>
+    <p:spTree>
+      <p:nvGrpSpPr>
+        <p:cNvPr id="1" name=""/>
+        <p:cNvGrpSpPr/>
+        <p:nvPr/>
+      </p:nvGrpSpPr>
+      <p:grpSpPr/>
+      <p:sp>
+        <p:nvSpPr>
+          <p:cNvPr id="2" name="TextBox 1"/>
+          <p:cNvSpPr txBox="1"/>
+          <p:nvPr/>
+        </p:nvSpPr>
+        <p:spPr>
+          <a:xfrm>
+            <a:off x="457200" y="320000"/>
+            <a:ext cx="11277600" cy="700000"/>
+          </a:xfrm>
+          <a:prstGeom prst="rect">
+            <a:avLst/>
+          </a:prstGeom>
+          <a:noFill/>
+        </p:spPr>
+        <p:txBody>
+          <a:bodyPr wrap="square" lIns="0" rIns="0" tIns="0" bIns="0">
+            <a:noAutofit/>
+          </a:bodyPr>
+          <a:lstStyle/>
+          <a:p>
+            <a:pPr algn="l"/>
+            <a:r>
+              <a:rPr sz="1100" b="1" i="0">
+                <a:solidFill>
+                  <a:srgbClr val="6B6B6B"/>
+                </a:solidFill>
+                <a:latin typeface="Arial"/>
+              </a:rPr>
+              <a:t>T03B03-S06   ·   click-to-reveal   ·   CONTENT</a:t>
+            </a:r>
+          </a:p>
+          <a:p>
+            <a:pPr algn="l"/>
+            <a:r>
+              <a:rPr sz="2400" b="1" i="0">
+                <a:solidFill>
+                  <a:srgbClr val="1A1A1A"/>
+                </a:solidFill>
+                <a:latin typeface="Arial"/>
+              </a:rPr>
+              <a:t>Dinding Penahan (Retaining Wall)</a:t>
+            </a:r>
+          </a:p>
+        </p:txBody>
+      </p:sp>
+      <p:sp>
+        <p:nvSpPr>
+          <p:cNvPr id="3" name="Rectangle 2"/>
+          <p:cNvSpPr/>
+          <p:nvPr/>
+        </p:nvSpPr>
+        <p:spPr>
+          <a:xfrm>
+            <a:off x="457200" y="1150000"/>
+            <a:ext cx="11277600" cy="9525"/>
+          </a:xfrm>
+          <a:prstGeom prst="rect">
+            <a:avLst/>
+          </a:prstGeom>
+          <a:solidFill>
+            <a:srgbClr val="D8D8D8"/>
+          </a:solidFill>
+          <a:ln>
+            <a:noFill/>
+          </a:ln>
+          <a:effectLst/>
+        </p:spPr>
+        <p:style>
+          <a:lnRef idx="1">
+            <a:schemeClr val="accent1"/>
+          </a:lnRef>
+          <a:fillRef idx="3">
+            <a:schemeClr val="accent1"/>
+          </a:fillRef>
+          <a:effectRef idx="0">
+            <a:schemeClr val="accent1"/>
+          </a:effectRef>
+          <a:fontRef idx="minor">
+            <a:schemeClr val="lt1"/>
+          </a:fontRef>
+        </p:style>
+        <p:txBody>
+          <a:bodyPr rtlCol="0" anchor="ctr">
+            <a:noAutofit/>
+          </a:bodyPr>
+          <a:lstStyle/>
+          <a:p>
+            <a:pPr algn="ctr"/>
+          </a:p>
+        </p:txBody>
+      </p:sp>
+      <p:sp>
+        <p:nvSpPr>
+          <p:cNvPr id="4" name="TextBox 3"/>
+          <p:cNvSpPr txBox="1"/>
+          <p:nvPr/>
+        </p:nvSpPr>
+        <p:spPr>
+          <a:xfrm>
+            <a:off x="457200" y="1320000"/>
+            <a:ext cx="6766560" cy="4600000"/>
+          </a:xfrm>
+          <a:prstGeom prst="rect">
+            <a:avLst/>
+          </a:prstGeom>
+          <a:noFill/>
+        </p:spPr>
+        <p:txBody>
+          <a:bodyPr wrap="square" lIns="0" rIns="0" tIns="0" bIns="0">
+            <a:noAutofit/>
+          </a:bodyPr>
+          <a:lstStyle/>
+          <a:p>
+            <a:pPr algn="l"/>
+            <a:r>
+              <a:rPr sz="1000" b="1" i="0">
+                <a:solidFill>
+                  <a:srgbClr val="6B6B6B"/>
+                </a:solidFill>
+                <a:latin typeface="Arial"/>
+              </a:rPr>
+              <a:t>KANDUNGAN SKRIN</a:t>
+            </a:r>
+          </a:p>
+          <a:p>
+            <a:pPr algn="l"/>
+            <a:r>
+              <a:rPr sz="1400" b="0" i="0">
+                <a:solidFill>
+                  <a:srgbClr val="0D47A1"/>
+                </a:solidFill>
+                <a:latin typeface="Arial"/>
+              </a:rPr>
+              <a:t>[S] Dinding Penahan (Retaining Wall)</a:t>
+            </a:r>
+          </a:p>
+          <a:p>
+            <a:pPr algn="l"/>
+            <a:r>
+              <a:rPr sz="1400" b="0" i="0">
+                <a:solidFill>
+                  <a:srgbClr val="0D47A1"/>
+                </a:solidFill>
+                <a:latin typeface="Arial"/>
+              </a:rPr>
+              <a:t>[S~] Dinding penahan mesti dibina mematuhi sepenuhnya lukisan struktur jurutera bertauliah; tapak asas adalah komponen paling kritikal.</a:t>
+            </a:r>
+          </a:p>
+          <a:p>
+            <a:pPr algn="l"/>
+            <a:r>
+              <a:rPr sz="1400" b="0" i="0">
+                <a:solidFill>
+                  <a:srgbClr val="0D47A1"/>
+                </a:solidFill>
+                <a:latin typeface="Arial"/>
+              </a:rPr>
+              <a:t>[S] Fungsi</a:t>
+            </a:r>
+          </a:p>
+          <a:p>
+            <a:pPr algn="l" lvl="1"/>
+            <a:r>
+              <a:rPr sz="1400" b="0" i="0">
+                <a:solidFill>
+                  <a:srgbClr val="0D47A1"/>
+                </a:solidFill>
+                <a:latin typeface="Arial"/>
+              </a:rPr>
+              <a:t>[S] Membentuk kawasan rata di lereng bukit, menstabilkan cerun, dan menetapkan sempadan aras.</a:t>
+            </a:r>
+          </a:p>
+          <a:p>
+            <a:pPr algn="l"/>
+            <a:r>
+              <a:rPr sz="1400" b="0" i="0">
+                <a:solidFill>
+                  <a:srgbClr val="0D47A1"/>
+                </a:solidFill>
+                <a:latin typeface="Arial"/>
+              </a:rPr>
+              <a:t>[S] Fokus Utama Kontraktor</a:t>
+            </a:r>
+          </a:p>
+          <a:p>
+            <a:pPr algn="l" lvl="1"/>
+            <a:r>
+              <a:rPr sz="1400" b="0" i="0">
+                <a:solidFill>
+                  <a:srgbClr val="0D47A1"/>
+                </a:solidFill>
+                <a:latin typeface="Arial"/>
+              </a:rPr>
+              <a:t>[S] Lukisan Jurutera</a:t>
+            </a:r>
+          </a:p>
+          <a:p>
+            <a:pPr algn="l" lvl="2"/>
+            <a:r>
+              <a:rPr sz="1400" b="0" i="0">
+                <a:solidFill>
+                  <a:srgbClr val="0D47A1"/>
+                </a:solidFill>
+                <a:latin typeface="Arial"/>
+              </a:rPr>
+              <a:t>[S] Dinding penahan mesti dibina dengan mematuhi sepenuhnya Lukisan Struktur Jurutera Bertauliah (Ir.). Sebarang perubahan memerlukan kelulusan jurutera.</a:t>
+            </a:r>
+          </a:p>
+          <a:p>
+            <a:pPr algn="l" lvl="1"/>
+            <a:r>
+              <a:rPr sz="1400" b="0" i="0">
+                <a:solidFill>
+                  <a:srgbClr val="0D47A1"/>
+                </a:solidFill>
+                <a:latin typeface="Arial"/>
+              </a:rPr>
+              <a:t>[S] Pembinaan Tapak Asas (Foundation)</a:t>
+            </a:r>
+          </a:p>
+          <a:p>
+            <a:pPr algn="l" lvl="2"/>
+            <a:r>
+              <a:rPr sz="1400" b="0" i="0">
+                <a:solidFill>
+                  <a:srgbClr val="0D47A1"/>
+                </a:solidFill>
+                <a:latin typeface="Arial"/>
+              </a:rPr>
+              <a:t>[S] Tapak asas adalah komponen paling kritikal. Ia mesti dibina di atas tanah yang stabil pada kedalaman dan saiz yang betul.</a:t>
+            </a:r>
+          </a:p>
+          <a:p>
+            <a:pPr algn="l" lvl="1"/>
+            <a:r>
+              <a:rPr sz="1400" b="0" i="0">
+                <a:solidFill>
+                  <a:srgbClr val="0D47A1"/>
+                </a:solidFill>
+                <a:latin typeface="Arial"/>
+              </a:rPr>
+              <a:t>[S] Sistem Perparitan di Belakang Dinding</a:t>
+            </a:r>
+          </a:p>
+          <a:p>
+            <a:pPr algn="l" lvl="2"/>
+            <a:r>
+              <a:rPr sz="1400" b="0" i="0">
+                <a:solidFill>
+                  <a:srgbClr val="0D47A1"/>
+                </a:solidFill>
+                <a:latin typeface="Arial"/>
+              </a:rPr>
+              <a:t>[S] Kegagalan dinding penahan selalunya berpunca daripada tekanan air (hydrostatic pressure). Kontraktor wajib memastikan lubang saliran air (weep holes) dibina dan lapisan penapis (seperti batu kelikir) diletakkan di belakang dinding untuk membolehkan air keluar.</a:t>
+            </a:r>
+          </a:p>
+          <a:p>
+            <a:pPr algn="l"/>
+            <a:r>
+              <a:rPr sz="1200" b="0" i="0">
+                <a:solidFill>
+                  <a:srgbClr val="6B6B6B"/>
+                </a:solidFill>
+                <a:latin typeface="Arial"/>
+              </a:rPr>
+              <a:t>[U] Klik setiap tajuk untuk memaparkan maklumat.</a:t>
+            </a:r>
+          </a:p>
+        </p:txBody>
+      </p:sp>
+      <p:sp>
+        <p:nvSpPr>
+          <p:cNvPr id="5" name="TextBox 4"/>
+          <p:cNvSpPr txBox="1"/>
+          <p:nvPr/>
+        </p:nvSpPr>
+        <p:spPr>
+          <a:xfrm>
+            <a:off x="7523760" y="1320000"/>
+            <a:ext cx="4211040" cy="4600000"/>
+          </a:xfrm>
+          <a:prstGeom prst="rect">
+            <a:avLst/>
+          </a:prstGeom>
+          <a:noFill/>
+        </p:spPr>
+        <p:txBody>
+          <a:bodyPr wrap="square" lIns="0" rIns="0" tIns="0" bIns="0">
+            <a:noAutofit/>
+          </a:bodyPr>
+          <a:lstStyle/>
+          <a:p>
+            <a:pPr algn="l"/>
+            <a:r>
+              <a:rPr sz="1000" b="1" i="0">
+                <a:solidFill>
+                  <a:srgbClr val="6B6B6B"/>
+                </a:solidFill>
+                <a:latin typeface="Arial"/>
+              </a:rPr>
+              <a:t>INTERAKSI</a:t>
+            </a:r>
+          </a:p>
+          <a:p>
+            <a:pPr algn="l"/>
+            <a:r>
+              <a:rPr sz="1000" b="0" i="0">
+                <a:solidFill>
+                  <a:srgbClr val="1A1A1A"/>
+                </a:solidFill>
+                <a:latin typeface="Arial"/>
+              </a:rPr>
+              <a:t>click-to-reveal · 3 panel</a:t>
+            </a:r>
+          </a:p>
+          <a:p>
+            <a:pPr algn="l" lvl="1"/>
+            <a:r>
+              <a:rPr sz="900" b="0" i="0">
+                <a:solidFill>
+                  <a:srgbClr val="1A1A1A"/>
+                </a:solidFill>
+                <a:latin typeface="Arial"/>
+              </a:rPr>
+              <a:t>1. Lukisan Jurutera</a:t>
+            </a:r>
+          </a:p>
+          <a:p>
+            <a:pPr algn="l" lvl="1"/>
+            <a:r>
+              <a:rPr sz="900" b="0" i="0">
+                <a:solidFill>
+                  <a:srgbClr val="1A1A1A"/>
+                </a:solidFill>
+                <a:latin typeface="Arial"/>
+              </a:rPr>
+              <a:t>2. Pembinaan Tapak Asas (Foundation)</a:t>
+            </a:r>
+          </a:p>
+          <a:p>
+            <a:pPr algn="l" lvl="1"/>
+            <a:r>
+              <a:rPr sz="900" b="0" i="0">
+                <a:solidFill>
+                  <a:srgbClr val="1A1A1A"/>
+                </a:solidFill>
+                <a:latin typeface="Arial"/>
+              </a:rPr>
+              <a:t>3. Sistem Perparitan di Belakang Dinding</a:t>
+            </a:r>
+          </a:p>
+          <a:p>
+            <a:pPr algn="l"/>
+            <a:r>
+              <a:rPr sz="800" b="0" i="0">
+                <a:solidFill>
+                  <a:srgbClr val="1A1A1A"/>
+                </a:solidFill>
+                <a:latin typeface="Arial"/>
+              </a:rPr>
+              <a:t/>
+            </a:r>
+          </a:p>
+          <a:p>
+            <a:pPr algn="l"/>
+            <a:r>
+              <a:rPr sz="1000" b="1" i="0">
+                <a:solidFill>
+                  <a:srgbClr val="6B6B6B"/>
+                </a:solidFill>
+                <a:latin typeface="Arial"/>
+              </a:rPr>
+              <a:t>VISUAL</a:t>
+            </a:r>
+          </a:p>
+          <a:p>
+            <a:pPr algn="l"/>
+            <a:r>
+              <a:rPr sz="1000" b="0" i="0">
+                <a:solidFill>
+                  <a:srgbClr val="1A1A1A"/>
+                </a:solidFill>
+                <a:latin typeface="Arial"/>
+              </a:rPr>
+              <a:t>Keratan rentas dinding penahan dengan sistem perparitan di belakang</a:t>
+            </a:r>
+          </a:p>
+          <a:p>
+            <a:pPr algn="l"/>
+            <a:r>
+              <a:rPr sz="900" b="0" i="0">
+                <a:solidFill>
+                  <a:srgbClr val="6B6B6B"/>
+                </a:solidFill>
+                <a:latin typeface="Arial"/>
+              </a:rPr>
+              <a:t>Tiada rajah sumber — subjek calon sahaja</a:t>
+            </a:r>
+          </a:p>
+          <a:p>
+            <a:pPr algn="l"/>
+            <a:r>
+              <a:rPr sz="900" b="1" i="0">
+                <a:solidFill>
+                  <a:srgbClr val="B71C1C"/>
+                </a:solidFill>
+                <a:latin typeface="Arial"/>
+              </a:rPr>
+              <a:t>SUBJEK VISUAL: PENDING_BARIAH_UNIT_REVIEW</a:t>
+            </a:r>
+          </a:p>
+          <a:p>
+            <a:pPr algn="l"/>
+            <a:r>
+              <a:rPr sz="900" b="1" i="0">
+                <a:solidFill>
+                  <a:srgbClr val="B71C1C"/>
+                </a:solidFill>
+                <a:latin typeface="Arial"/>
+              </a:rPr>
+              <a:t>ASET VISUAL BELUM DIHASILKAN — NOT_MMD_ASSET</a:t>
+            </a:r>
+          </a:p>
+          <a:p>
+            <a:pPr algn="l"/>
+            <a:r>
+              <a:rPr sz="800" b="0" i="0">
+                <a:solidFill>
+                  <a:srgbClr val="1A1A1A"/>
+                </a:solidFill>
+                <a:latin typeface="Arial"/>
+              </a:rPr>
+              <a:t/>
+            </a:r>
+          </a:p>
+          <a:p>
+            <a:pPr algn="l"/>
+            <a:r>
+              <a:rPr sz="1000" b="1" i="0">
+                <a:solidFill>
+                  <a:srgbClr val="6B6B6B"/>
+                </a:solidFill>
+                <a:latin typeface="Arial"/>
+              </a:rPr>
+              <a:t>SUMBER DAN KEPUTUSAN</a:t>
+            </a:r>
+          </a:p>
+          <a:p>
+            <a:pPr algn="l"/>
+            <a:r>
+              <a:rPr sz="800" b="0" i="0">
+                <a:solidFill>
+                  <a:srgbClr val="0D47A1"/>
+                </a:solidFill>
+                <a:latin typeface="Arial"/>
+              </a:rPr>
+              <a:t>Baris modul: T03B03-ROW-032, T03B03-ROW-033, T03B03-ROW-035, T03B03-ROW-034, T03B03-ROW-036, T03B03-ROW-038, T03B03-ROW-040, T03B03-ROW-037, T03B03-ROW-039, T03B03-ROW-041</a:t>
+            </a:r>
+          </a:p>
+          <a:p>
+            <a:pPr algn="l"/>
+            <a:r>
+              <a:rPr sz="800" b="0" i="0">
+                <a:solidFill>
+                  <a:srgbClr val="6B6B6B"/>
+                </a:solidFill>
+                <a:latin typeface="Arial"/>
+              </a:rPr>
+              <a:t>Keputusan Bariah: A1, A2</a:t>
+            </a:r>
+          </a:p>
+        </p:txBody>
+      </p:sp>
+      <p:sp>
+        <p:nvSpPr>
+          <p:cNvPr id="6" name="TextBox 5"/>
+          <p:cNvSpPr txBox="1"/>
+          <p:nvPr/>
+        </p:nvSpPr>
+        <p:spPr>
+          <a:xfrm>
+            <a:off x="457200" y="6150000"/>
+            <a:ext cx="11277600" cy="500000"/>
+          </a:xfrm>
+          <a:prstGeom prst="rect">
+            <a:avLst/>
+          </a:prstGeom>
+          <a:noFill/>
+        </p:spPr>
+        <p:txBody>
+          <a:bodyPr wrap="square" lIns="0" rIns="0" tIns="0" bIns="0">
+            <a:noAutofit/>
+          </a:bodyPr>
+          <a:lstStyle/>
+          <a:p>
+            <a:pPr algn="l"/>
+            <a:r>
+              <a:rPr sz="900" b="0" i="0">
+                <a:solidFill>
+                  <a:srgbClr val="6B6B6B"/>
+                </a:solidFill>
+                <a:latin typeface="Arial"/>
+              </a:rPr>
+              <a:t>K5-PL06-T03-B03 · skrin 6 daripada 12   ·   TECHNICAL_PROOF · DRAFT_FOR_BARIAH_REVIEW · NOT_INSTRUCTIONALLY_APPROVED · NOT_LEARNER_FACING_FINAL</a:t>
             </a:r>
           </a:p>
         </p:txBody>

--- a/reviews/storyboard-bariah/k5_calibration/K5PL06T03B03_STORYBOARD_KALIBRASI_DRAF_v0_1.pptx
+++ b/reviews/storyboard-bariah/k5_calibration/K5PL06T03B03_STORYBOARD_KALIBRASI_DRAF_v0_1.pptx
@@ -965,7 +965,7 @@
           </a:p>
           <a:p>
             <a:r>
-              <a:t>Keputusan Bariah: A6</a:t>
+              <a:t>Keputusan Bariah: A6, D3</a:t>
             </a:r>
           </a:p>
           <a:p/>
@@ -7630,7 +7630,7 @@
                 </a:solidFill>
                 <a:latin typeface="Arial"/>
               </a:rPr>
-              <a:t>[R] Kepentingan: Enam komponen infrastruktur landskap dan fungsi setiap satu.</a:t>
+              <a:t>[R] Enam komponen infrastruktur landskap dan fungsi setiap satu.</a:t>
             </a:r>
           </a:p>
           <a:p>
@@ -7642,7 +7642,7 @@
                 </a:solidFill>
                 <a:latin typeface="Arial"/>
               </a:rPr>
-              <a:t>[R] Skop dan Isi Utama: Titik kegagalan yang paling kerap bagi setiap komponen.</a:t>
+              <a:t>[R] Titik kegagalan yang paling kerap bagi setiap komponen.</a:t>
             </a:r>
           </a:p>
           <a:p>
@@ -7654,7 +7654,7 @@
                 </a:solidFill>
                 <a:latin typeface="Arial"/>
               </a:rPr>
-              <a:t>[R] Manfaat: Dokumen kawalan yang mengikat kontraktor: lukisan struktur, pelan ukur, pelan saliran.</a:t>
+              <a:t>[R] Dokumen kawalan yang mengikat kontraktor: lukisan struktur, pelan ukur, pelan saliran.</a:t>
             </a:r>
           </a:p>
           <a:p>
@@ -7833,7 +7833,7 @@
                 </a:solidFill>
                 <a:latin typeface="Arial"/>
               </a:rPr>
-              <a:t>Keputusan Bariah: A6</a:t>
+              <a:t>Keputusan Bariah: A6, D3</a:t>
             </a:r>
           </a:p>
         </p:txBody>

--- a/reviews/storyboard-bariah/k5_calibration/K5PL06T03B03_STORYBOARD_KALIBRASI_DRAF_v0_1.pptx
+++ b/reviews/storyboard-bariah/k5_calibration/K5PL06T03B03_STORYBOARD_KALIBRASI_DRAF_v0_1.pptx
@@ -954,7 +954,7 @@
           <a:lstStyle/>
           <a:p>
             <a:r>
-              <a:t>VO (Hilmi): Enam komponen infrastruktur landskap dan fungsi setiap satu. Titik kegagalan yang paling kerap bagi setiap komponen. Dokumen kawalan yang mengikat kontraktor: lukisan struktur, pelan ukur, pelan saliran.</a:t>
+              <a:t>VO (Hilmi): Pengurusan infrastruktur landskap yang tepat penting bagi memastikan kerja mematuhi lukisan, sempadan dan keperluan teknikal tapak. Komponen infrastruktur merangkumi Landform/Earthmound, Sub-soil Drainage, Dinding Penahan, Fencing, Swale/Natural Drain dan Jalan Akses. Pemahaman terhadap komponen-komponen ini membantu kontraktor mengawal pelaksanaan kerja, mengenal pasti titik kegagalan dan mengurangkan risiko di tapak.</a:t>
             </a:r>
           </a:p>
           <a:p/>
@@ -965,7 +965,7 @@
           </a:p>
           <a:p>
             <a:r>
-              <a:t>Keputusan Bariah: A6, D3</a:t>
+              <a:t>Keputusan Bariah: D1, D3, D4</a:t>
             </a:r>
           </a:p>
           <a:p/>
@@ -1302,18 +1302,18 @@
           <a:lstStyle/>
           <a:p>
             <a:r>
-              <a:t>VO (Hilmi): Dinding penahan mesti dibina dengan mematuhi sepenuhnya Lukisan Struktur Jurutera Bertauliah (Ir.). Sebarang perubahan memerlukan kelulusan jurutera. Jajaran pagar mesti ditanda mengikut Pelan Ukur Sempadan untuk mengelakkan isu pencerobohan tanah. Pastikan semua komponen keluli mempunyai lapisan pelindung karat yang sempurna seperti tergalvani panas (hot-dip galvanized) atau cat epoksi.</a:t>
+              <a:t>VO (Hilmi): Encik Rahman, jajaran pagar sudah ditanda di tapak. Boleh kita teruskan pemasangan sementara kerja lain berjalan? Belum, Alya. Kedudukan pagar perlu disemak dengan Pelan Ukur Sempadan, manakala dinding penahan mesti mengikut lukisan struktur yang diluluskan. Kalau keadaan sebenar tapak tidak sama dengan lukisan, bolehkah kedudukannya kita ubah sedikit? Jangan ubah terus di tapak. Catat perbezaannya dan dapatkan kelulusan yang diperlukan sebelum kerja diteruskan. Jadi semakan dokumen dan keadaan tapak terlebih dahulu dapat mengelakkan masalah sempadan, kegagalan kerja dan pembaikan semula.</a:t>
             </a:r>
           </a:p>
           <a:p/>
           <a:p>
             <a:r>
-              <a:t>Baris sumber: T03B03-ROW-037, T03B03-ROW-048, T03B03-ROW-054</a:t>
-            </a:r>
-          </a:p>
-          <a:p>
-            <a:r>
-              <a:t>Keputusan Bariah: D3, A5, D1</a:t>
+              <a:t>Baris sumber: T03B03-ROW-037, T03B03-ROW-047, T03B03-ROW-048</a:t>
+            </a:r>
+          </a:p>
+          <a:p>
+            <a:r>
+              <a:t>Keputusan Bariah: C1, C3, E1, E2</a:t>
             </a:r>
           </a:p>
           <a:p/>
@@ -5056,11 +5056,11 @@
             <a:r>
               <a:rPr sz="1100" b="0" i="0">
                 <a:solidFill>
-                  <a:srgbClr val="B71C1C"/>
-                </a:solidFill>
-                <a:latin typeface="Arial"/>
-              </a:rPr>
-              <a:t>WATAK: PENDING_UNIT_REVIEW — D1 menetapkan watak dipilih per unit</a:t>
+                  <a:srgbClr val="1B5E20"/>
+                </a:solidFill>
+                <a:latin typeface="Arial"/>
+              </a:rPr>
+              <a:t>Watak: Alya dan Encik Rahman (A1, Keputusan Bariah)</a:t>
             </a:r>
           </a:p>
           <a:p>
@@ -7626,11 +7626,11 @@
             <a:r>
               <a:rPr sz="1400" b="0" i="0">
                 <a:solidFill>
-                  <a:srgbClr val="6A1B9A"/>
-                </a:solidFill>
-                <a:latin typeface="Arial"/>
-              </a:rPr>
-              <a:t>[R] Enam komponen infrastruktur landskap dan fungsi setiap satu.</a:t>
+                  <a:srgbClr val="1B5E20"/>
+                </a:solidFill>
+                <a:latin typeface="Arial"/>
+              </a:rPr>
+              <a:t>[A] Pengurusan infrastruktur landskap yang tepat penting bagi memastikan kerja mematuhi lukisan, sempadan dan keperluan teknikal tapak. Komponen infrastruktur merangkumi Landform/Earthmound, Sub-soil Drainage, Dinding Penahan, Fencing, Swale/Natural Drain dan Jalan Akses. Pemahaman terhadap komponen-komponen ini membantu kontraktor mengawal pelaksanaan kerja, mengenal pasti titik kegagalan dan mengurangkan risiko di tapak.</a:t>
             </a:r>
           </a:p>
           <a:p>
@@ -7638,35 +7638,11 @@
             <a:r>
               <a:rPr sz="1400" b="0" i="0">
                 <a:solidFill>
-                  <a:srgbClr val="6A1B9A"/>
-                </a:solidFill>
-                <a:latin typeface="Arial"/>
-              </a:rPr>
-              <a:t>[R] Titik kegagalan yang paling kerap bagi setiap komponen.</a:t>
-            </a:r>
-          </a:p>
-          <a:p>
-            <a:pPr algn="l"/>
-            <a:r>
-              <a:rPr sz="1400" b="0" i="0">
-                <a:solidFill>
-                  <a:srgbClr val="6A1B9A"/>
-                </a:solidFill>
-                <a:latin typeface="Arial"/>
-              </a:rPr>
-              <a:t>[R] Dokumen kawalan yang mengikat kontraktor: lukisan struktur, pelan ukur, pelan saliran.</a:t>
-            </a:r>
-          </a:p>
-          <a:p>
-            <a:pPr algn="l"/>
-            <a:r>
-              <a:rPr sz="1400" b="0" i="0">
-                <a:solidFill>
                   <a:srgbClr val="B71C1C"/>
                 </a:solidFill>
                 <a:latin typeface="Arial"/>
               </a:rPr>
-              <a:t>[P] MONTAJ RUMUSAN · PROVISIONAL_VISUAL_DIRECTION · PENDING_BARIAH_UNIT_REVIEW · NOT_MMD_ASSET</a:t>
+              <a:t>[P] VISUAL SOKONGAN · PROVISIONAL_VISUAL_DIRECTION · PENDING_BARIAH_UNIT_REVIEW · NOT_MMD_ASSET</a:t>
             </a:r>
           </a:p>
         </p:txBody>
@@ -7749,7 +7725,7 @@
                 </a:solidFill>
                 <a:latin typeface="Arial"/>
               </a:rPr>
-              <a:t>Montaj tiga komponen mengikut tiga beat Rumusan</a:t>
+              <a:t>Satu visual tapak keseluruhan yang menunjukkan kedudukan enam komponen infrastruktur.</a:t>
             </a:r>
           </a:p>
           <a:p>
@@ -7833,7 +7809,7 @@
                 </a:solidFill>
                 <a:latin typeface="Arial"/>
               </a:rPr>
-              <a:t>Keputusan Bariah: A6, D3</a:t>
+              <a:t>Keputusan Bariah: D1, D3, D4</a:t>
             </a:r>
           </a:p>
         </p:txBody>
@@ -9577,7 +9553,7 @@
                 </a:solidFill>
                 <a:latin typeface="Arial"/>
               </a:rPr>
-              <a:t>T03B03-S02   ·   scenario/dialogue only where justified   ·   SCENARIO</a:t>
+              <a:t>T03B03-S02   ·   dialog dua penutur (E1)   ·   SCENARIO</a:t>
             </a:r>
           </a:p>
           <a:p>
@@ -9676,25 +9652,13 @@
           <a:p>
             <a:pPr algn="l"/>
             <a:r>
-              <a:rPr sz="1200" b="0" i="0">
-                <a:solidFill>
-                  <a:srgbClr val="6B6B6B"/>
-                </a:solidFill>
-                <a:latin typeface="Arial"/>
-              </a:rPr>
-              <a:t>[U] SITUASI</a:t>
-            </a:r>
-          </a:p>
-          <a:p>
-            <a:pPr algn="l"/>
-            <a:r>
               <a:rPr sz="1400" b="0" i="0">
                 <a:solidFill>
-                  <a:srgbClr val="B71C1C"/>
-                </a:solidFill>
-                <a:latin typeface="Arial"/>
-              </a:rPr>
-              <a:t>[P] WATAK: PENDING_UNIT_REVIEW — D1 menetapkan watak dipilih per unit</a:t>
+                  <a:srgbClr val="1B5E20"/>
+                </a:solidFill>
+                <a:latin typeface="Arial"/>
+              </a:rPr>
+              <a:t>[A] Alya: Encik Rahman, jajaran pagar sudah ditanda di tapak. Boleh kita teruskan pemasangan sementara kerja lain berjalan?</a:t>
             </a:r>
           </a:p>
           <a:p>
@@ -9702,11 +9666,11 @@
             <a:r>
               <a:rPr sz="1400" b="0" i="0">
                 <a:solidFill>
-                  <a:srgbClr val="0D47A1"/>
-                </a:solidFill>
-                <a:latin typeface="Arial"/>
-              </a:rPr>
-              <a:t>[S] Dinding penahan mesti dibina dengan mematuhi sepenuhnya Lukisan Struktur Jurutera Bertauliah (Ir.). Sebarang perubahan memerlukan kelulusan jurutera.</a:t>
+                  <a:srgbClr val="1B5E20"/>
+                </a:solidFill>
+                <a:latin typeface="Arial"/>
+              </a:rPr>
+              <a:t>[A] Encik Rahman: Belum, Alya. Kedudukan pagar perlu disemak dengan Pelan Ukur Sempadan, manakala dinding penahan mesti mengikut lukisan struktur yang diluluskan.</a:t>
             </a:r>
           </a:p>
           <a:p>
@@ -9714,11 +9678,11 @@
             <a:r>
               <a:rPr sz="1400" b="0" i="0">
                 <a:solidFill>
-                  <a:srgbClr val="0D47A1"/>
-                </a:solidFill>
-                <a:latin typeface="Arial"/>
-              </a:rPr>
-              <a:t>[S] Jajaran pagar mesti ditanda mengikut Pelan Ukur Sempadan untuk mengelakkan isu pencerobohan tanah.</a:t>
+                  <a:srgbClr val="1B5E20"/>
+                </a:solidFill>
+                <a:latin typeface="Arial"/>
+              </a:rPr>
+              <a:t>[A] Alya: Kalau keadaan sebenar tapak tidak sama dengan lukisan, bolehkah kedudukannya kita ubah sedikit?</a:t>
             </a:r>
           </a:p>
           <a:p>
@@ -9726,11 +9690,23 @@
             <a:r>
               <a:rPr sz="1400" b="0" i="0">
                 <a:solidFill>
-                  <a:srgbClr val="0D47A1"/>
-                </a:solidFill>
-                <a:latin typeface="Arial"/>
-              </a:rPr>
-              <a:t>[S] Pastikan semua komponen keluli mempunyai lapisan pelindung karat yang sempurna seperti tergalvani panas (hot-dip galvanized) atau cat epoksi.</a:t>
+                  <a:srgbClr val="1B5E20"/>
+                </a:solidFill>
+                <a:latin typeface="Arial"/>
+              </a:rPr>
+              <a:t>[A] Encik Rahman: Jangan ubah terus di tapak. Catat perbezaannya dan dapatkan kelulusan yang diperlukan sebelum kerja diteruskan.</a:t>
+            </a:r>
+          </a:p>
+          <a:p>
+            <a:pPr algn="l"/>
+            <a:r>
+              <a:rPr sz="1400" b="0" i="0">
+                <a:solidFill>
+                  <a:srgbClr val="1B5E20"/>
+                </a:solidFill>
+                <a:latin typeface="Arial"/>
+              </a:rPr>
+              <a:t>[A] Alya: Jadi semakan dokumen dan keadaan tapak terlebih dahulu dapat mengelakkan masalah sempadan, kegagalan kerja dan pembaikan semula.</a:t>
             </a:r>
           </a:p>
           <a:p>
@@ -9861,7 +9837,7 @@
                 </a:solidFill>
                 <a:latin typeface="Arial"/>
               </a:rPr>
-              <a:t>Baris modul: T03B03-ROW-037, T03B03-ROW-048, T03B03-ROW-054</a:t>
+              <a:t>Baris modul: T03B03-ROW-037, T03B03-ROW-047, T03B03-ROW-048</a:t>
             </a:r>
           </a:p>
           <a:p>
@@ -9873,7 +9849,7 @@
                 </a:solidFill>
                 <a:latin typeface="Arial"/>
               </a:rPr>
-              <a:t>Keputusan Bariah: D3, A5, D1</a:t>
+              <a:t>Keputusan Bariah: C1, C3, E1, E2</a:t>
             </a:r>
           </a:p>
         </p:txBody>

--- a/reviews/storyboard-bariah/k5_calibration/K5PL06T03B03_STORYBOARD_KALIBRASI_DRAF_v0_1.pptx
+++ b/reviews/storyboard-bariah/k5_calibration/K5PL06T03B03_STORYBOARD_KALIBRASI_DRAF_v0_1.pptx
@@ -22,7 +22,6 @@
     <p:sldId id="270" r:id="rId22"/>
     <p:sldId id="271" r:id="rId23"/>
     <p:sldId id="272" r:id="rId24"/>
-    <p:sldId id="273" r:id="rId25"/>
   </p:sldIdLst>
   <p:sldSz cx="12192000" cy="6858000" type="screen4x3"/>
   <p:notesSz cx="6858000" cy="9144000"/>
@@ -606,13 +605,13 @@
           <a:lstStyle/>
           <a:p>
             <a:r>
-              <a:t>VO (Hilmi): Jajaran pagar mesti ditanda mengikut Pelan Ukur Sempadan untuk mengelakkan pencerobohan tanah.</a:t>
+              <a:t>VO (Hilmi): Swale ialah parit cetek dan lebar yang ditanami tumbuhan, alternatif kepada longkang konkrit, yang memperlahankan aliran dan menggalakkan penyerapan.</a:t>
             </a:r>
           </a:p>
           <a:p/>
           <a:p>
             <a:r>
-              <a:t>Baris sumber: T03B03-ROW-042, T03B03-ROW-043, T03B03-ROW-044, T03B03-ROW-046, T03B03-ROW-045, T03B03-ROW-047, T03B03-ROW-049, T03B03-ROW-051, T03B03-ROW-053, T03B03-ROW-048, T03B03-ROW-050, T03B03-ROW-052, T03B03-ROW-054</a:t>
+              <a:t>Baris sumber: T03B03-ROW-055, T03B03-ROW-056, T03B03-ROW-057, T03B03-ROW-059, T03B03-ROW-058, T03B03-ROW-060, T03B03-ROW-062, T03B03-ROW-061, T03B03-ROW-063</a:t>
             </a:r>
           </a:p>
           <a:p>
@@ -693,13 +692,13 @@
           <a:lstStyle/>
           <a:p>
             <a:r>
-              <a:t>VO (Hilmi): Swale ialah parit cetek dan lebar yang ditanami tumbuhan, alternatif kepada longkang konkrit, yang memperlahankan aliran dan menggalakkan penyerapan.</a:t>
+              <a:t>VO (Hilmi): Permukaan jalan akses dibina dengan kamber — kecerunan melintang dari tengah ke tepi — supaya air tidak bertakung.</a:t>
             </a:r>
           </a:p>
           <a:p/>
           <a:p>
             <a:r>
-              <a:t>Baris sumber: T03B03-ROW-055, T03B03-ROW-056, T03B03-ROW-057, T03B03-ROW-059, T03B03-ROW-058, T03B03-ROW-060, T03B03-ROW-062, T03B03-ROW-061, T03B03-ROW-063</a:t>
+              <a:t>Baris sumber: T03B03-ROW-064, T03B03-ROW-065, T03B03-ROW-066, T03B03-ROW-068, T03B03-ROW-067, T03B03-ROW-069, T03B03-ROW-071, T03B03-ROW-073, T03B03-ROW-075, T03B03-ROW-070, T03B03-ROW-072, T03B03-ROW-074, T03B03-ROW-076</a:t>
             </a:r>
           </a:p>
           <a:p>
@@ -867,18 +866,18 @@
           <a:lstStyle/>
           <a:p>
             <a:r>
-              <a:t>VO (Hilmi): Permukaan jalan akses dibina dengan kamber — kecerunan melintang dari tengah ke tepi — supaya air tidak bertakung.</a:t>
+              <a:t>VO (Hilmi): Pengurusan infrastruktur landskap yang tepat penting bagi memastikan kerja mematuhi lukisan, sempadan dan keperluan teknikal tapak. Komponen infrastruktur merangkumi Landform/Earthmound, Sub-soil Drainage, Dinding Penahan, Fencing, Swale/Natural Drain dan Jalan Akses. Pemahaman terhadap komponen-komponen ini membantu kontraktor mengawal pelaksanaan kerja, mengenal pasti titik kegagalan dan mengurangkan risiko di tapak.</a:t>
             </a:r>
           </a:p>
           <a:p/>
           <a:p>
             <a:r>
-              <a:t>Baris sumber: T03B03-ROW-064, T03B03-ROW-065, T03B03-ROW-066, T03B03-ROW-068, T03B03-ROW-067, T03B03-ROW-069, T03B03-ROW-071, T03B03-ROW-073, T03B03-ROW-075, T03B03-ROW-070, T03B03-ROW-072, T03B03-ROW-074, T03B03-ROW-076</a:t>
-            </a:r>
-          </a:p>
-          <a:p>
-            <a:r>
-              <a:t>Keputusan Bariah: A1, A2</a:t>
+              <a:t>Baris sumber: tiada — skrin struktur</a:t>
+            </a:r>
+          </a:p>
+          <a:p>
+            <a:r>
+              <a:t>Keputusan Bariah: D1, D3, D4</a:t>
             </a:r>
           </a:p>
           <a:p/>
@@ -954,18 +953,18 @@
           <a:lstStyle/>
           <a:p>
             <a:r>
-              <a:t>VO (Hilmi): Pengurusan infrastruktur landskap yang tepat penting bagi memastikan kerja mematuhi lukisan, sempadan dan keperluan teknikal tapak. Komponen infrastruktur merangkumi Landform/Earthmound, Sub-soil Drainage, Dinding Penahan, Fencing, Swale/Natural Drain dan Jalan Akses. Pemahaman terhadap komponen-komponen ini membantu kontraktor mengawal pelaksanaan kerja, mengenal pasti titik kegagalan dan mengurangkan risiko di tapak.</a:t>
+              <a:t>VO (Hilmi): Jawab kelima-lima soalan.</a:t>
             </a:r>
           </a:p>
           <a:p/>
           <a:p>
             <a:r>
-              <a:t>Baris sumber: tiada — skrin struktur</a:t>
-            </a:r>
-          </a:p>
-          <a:p>
-            <a:r>
-              <a:t>Keputusan Bariah: D1, D3, D4</a:t>
+              <a:t>Baris sumber: T03B03-ROW-013, T03B03-ROW-041, T03B03-ROW-048, T03B03-ROW-056, T03B03-ROW-058, T03B03-ROW-063, T03B03-ROW-076</a:t>
+            </a:r>
+          </a:p>
+          <a:p>
+            <a:r>
+              <a:t>Keputusan Bariah: A7</a:t>
             </a:r>
           </a:p>
           <a:p/>
@@ -1128,93 +1127,6 @@
           <a:lstStyle/>
           <a:p>
             <a:r>
-              <a:t>VO (Hilmi): Jawab kelima-lima soalan.</a:t>
-            </a:r>
-          </a:p>
-          <a:p/>
-          <a:p>
-            <a:r>
-              <a:t>Baris sumber: T03B03-ROW-013, T03B03-ROW-041, T03B03-ROW-048, T03B03-ROW-056, T03B03-ROW-058, T03B03-ROW-063, T03B03-ROW-076</a:t>
-            </a:r>
-          </a:p>
-          <a:p>
-            <a:r>
-              <a:t>Keputusan Bariah: A7</a:t>
-            </a:r>
-          </a:p>
-          <a:p/>
-          <a:p>
-            <a:r>
-              <a:t>TECHNICAL_PROOF · DRAFT_FOR_BARIAH_REVIEW · NOT_INSTRUCTIONALLY_APPROVED · NOT_LEARNER_FACING_FINAL</a:t>
-            </a:r>
-          </a:p>
-        </p:txBody>
-      </p:sp>
-      <p:sp>
-        <p:nvSpPr>
-          <p:cNvPr id="4" name="Slide Number Placeholder 3"/>
-          <p:cNvSpPr>
-            <a:spLocks noGrp="1"/>
-          </p:cNvSpPr>
-          <p:nvPr>
-            <p:ph type="sldNum" idx="5" sz="quarter"/>
-          </p:nvPr>
-        </p:nvSpPr>
-        <p:spPr/>
-      </p:sp>
-    </p:spTree>
-  </p:cSld>
-  <p:clrMapOvr>
-    <a:masterClrMapping/>
-  </p:clrMapOvr>
-</p:notes>
-</file>
-
-<file path=ppt/notesSlides/notesSlide17.xml><?xml version="1.0" encoding="utf-8"?>
-<p:notes xmlns:a="http://schemas.openxmlformats.org/drawingml/2006/main" xmlns:p="http://schemas.openxmlformats.org/presentationml/2006/main" xmlns:r="http://schemas.openxmlformats.org/officeDocument/2006/relationships">
-  <p:cSld>
-    <p:spTree>
-      <p:nvGrpSpPr>
-        <p:cNvPr id="1" name=""/>
-        <p:cNvGrpSpPr/>
-        <p:nvPr/>
-      </p:nvGrpSpPr>
-      <p:grpSpPr>
-        <a:xfrm>
-          <a:off x="0" y="0"/>
-          <a:ext cx="0" cy="0"/>
-          <a:chOff x="0" y="0"/>
-          <a:chExt cx="0" cy="0"/>
-        </a:xfrm>
-      </p:grpSpPr>
-      <p:sp>
-        <p:nvSpPr>
-          <p:cNvPr id="2" name="Slide Image Placeholder 1"/>
-          <p:cNvSpPr>
-            <a:spLocks noGrp="1"/>
-          </p:cNvSpPr>
-          <p:nvPr>
-            <p:ph type="sldImg" idx="2"/>
-          </p:nvPr>
-        </p:nvSpPr>
-        <p:spPr/>
-      </p:sp>
-      <p:sp>
-        <p:nvSpPr>
-          <p:cNvPr id="3" name="Notes Placeholder 2"/>
-          <p:cNvSpPr>
-            <a:spLocks noGrp="1"/>
-          </p:cNvSpPr>
-          <p:nvPr>
-            <p:ph type="body" idx="3" sz="quarter"/>
-          </p:nvPr>
-        </p:nvSpPr>
-        <p:spPr/>
-        <p:txBody>
-          <a:bodyPr/>
-          <a:lstStyle/>
-          <a:p>
-            <a:r>
               <a:t>VO (Hilmi): Tamat Bahagian 3. Teruskan pembelajaran ke bahagian seterusnya</a:t>
             </a:r>
           </a:p>
@@ -1737,13 +1649,13 @@
           <a:lstStyle/>
           <a:p>
             <a:r>
-              <a:t>VO (Hilmi): Sistem saliran bawah tanah mesti disambungkan ke saluran keluar yang berfungsi.</a:t>
+              <a:t>VO (Hilmi): Dinding penahan mesti dibina mematuhi sepenuhnya lukisan struktur jurutera bertauliah; tapak asas adalah komponen paling kritikal. Kegagalan dinding penahan selalunya berpunca daripada tekanan air, jadi sistem perparitan di belakang dinding adalah wajib.</a:t>
             </a:r>
           </a:p>
           <a:p/>
           <a:p>
             <a:r>
-              <a:t>Baris sumber: T03B03-ROW-016, T03B03-ROW-017, T03B03-ROW-019, T03B03-ROW-018, T03B03-ROW-020, T03B03-ROW-022, T03B03-ROW-030, T03B03-ROW-021, T03B03-ROW-023, T03B03-ROW-024, T03B03-ROW-025, T03B03-ROW-026, T03B03-ROW-027, T03B03-ROW-028, T03B03-ROW-029, T03B03-ROW-031</a:t>
+              <a:t>Baris sumber: T03B03-ROW-032, T03B03-ROW-033, T03B03-ROW-035, T03B03-ROW-034, T03B03-ROW-036, T03B03-ROW-038, T03B03-ROW-040, T03B03-ROW-037, T03B03-ROW-039, T03B03-ROW-041</a:t>
             </a:r>
           </a:p>
           <a:p>
@@ -1824,13 +1736,13 @@
           <a:lstStyle/>
           <a:p>
             <a:r>
-              <a:t>VO (Hilmi): Dinding penahan mesti dibina mematuhi sepenuhnya lukisan struktur jurutera bertauliah; tapak asas adalah komponen paling kritikal. Kegagalan dinding penahan selalunya berpunca daripada tekanan air, jadi sistem perparitan di belakang dinding adalah wajib.</a:t>
+              <a:t>VO (Hilmi): Jajaran pagar mesti ditanda mengikut Pelan Ukur Sempadan untuk mengelakkan pencerobohan tanah.</a:t>
             </a:r>
           </a:p>
           <a:p/>
           <a:p>
             <a:r>
-              <a:t>Baris sumber: T03B03-ROW-032, T03B03-ROW-033, T03B03-ROW-035, T03B03-ROW-034, T03B03-ROW-036, T03B03-ROW-038, T03B03-ROW-040, T03B03-ROW-037, T03B03-ROW-039, T03B03-ROW-041</a:t>
+              <a:t>Baris sumber: T03B03-ROW-042, T03B03-ROW-043, T03B03-ROW-044, T03B03-ROW-046, T03B03-ROW-045, T03B03-ROW-047, T03B03-ROW-049, T03B03-ROW-051, T03B03-ROW-053, T03B03-ROW-048, T03B03-ROW-050, T03B03-ROW-052, T03B03-ROW-054</a:t>
             </a:r>
           </a:p>
           <a:p>
@@ -4988,7 +4900,7 @@
                 </a:solidFill>
                 <a:latin typeface="Arial"/>
               </a:rPr>
-              <a:t>12 skrin pembelajaran · 43 keadaan runtime</a:t>
+              <a:t>12 skrin pembelajaran · 46 keadaan runtime</a:t>
             </a:r>
           </a:p>
           <a:p>
@@ -5149,7 +5061,7 @@
                 </a:solidFill>
                 <a:latin typeface="Arial"/>
               </a:rPr>
-              <a:t>T03B03-S07   ·   click-to-reveal   ·   CONTENT</a:t>
+              <a:t>T03B03-S07   ·   Click-to-Reveal   ·   CONTENT</a:t>
             </a:r>
           </a:p>
           <a:p>
@@ -5161,7 +5073,7 @@
                 </a:solidFill>
                 <a:latin typeface="Arial"/>
               </a:rPr>
-              <a:t>Fencing   ·   halaman 1/2</a:t>
+              <a:t>Fencing   ·   halaman 2/2</a:t>
             </a:r>
           </a:p>
         </p:txBody>
@@ -5242,11 +5154,11 @@
                 </a:solidFill>
                 <a:latin typeface="Arial"/>
               </a:rPr>
-              <a:t>KANDUNGAN SKRIN</a:t>
-            </a:r>
-          </a:p>
-          <a:p>
-            <a:pPr algn="l"/>
+              <a:t>KANDUNGAN SKRIN (sambungan)</a:t>
+            </a:r>
+          </a:p>
+          <a:p>
+            <a:pPr algn="l" lvl="1"/>
             <a:r>
               <a:rPr sz="1400" b="0" i="0">
                 <a:solidFill>
@@ -5254,11 +5166,11 @@
                 </a:solidFill>
                 <a:latin typeface="Arial"/>
               </a:rPr>
-              <a:t>[S] Fencing</a:t>
-            </a:r>
-          </a:p>
-          <a:p>
-            <a:pPr algn="l"/>
+              <a:t>[S] Kemasan Anti-Karat</a:t>
+            </a:r>
+          </a:p>
+          <a:p>
+            <a:pPr algn="l" lvl="2"/>
             <a:r>
               <a:rPr sz="1400" b="0" i="0">
                 <a:solidFill>
@@ -5266,127 +5178,19 @@
                 </a:solidFill>
                 <a:latin typeface="Arial"/>
               </a:rPr>
-              <a:t>[S] Pagar dibina untuk tujuan keselamatan, menandakan sempadan, privasi, atau sebagai elemen hiasan.</a:t>
-            </a:r>
-          </a:p>
-          <a:p>
-            <a:pPr algn="l"/>
-            <a:r>
-              <a:rPr sz="1400" b="0" i="0">
-                <a:solidFill>
-                  <a:srgbClr val="0D47A1"/>
-                </a:solidFill>
-                <a:latin typeface="Arial"/>
-              </a:rPr>
-              <a:t>[S~] Jajaran pagar mesti ditanda mengikut Pelan Ukur Sempadan untuk mengelakkan pencerobohan tanah.</a:t>
-            </a:r>
-          </a:p>
-          <a:p>
-            <a:pPr algn="l"/>
-            <a:r>
-              <a:rPr sz="1400" b="0" i="0">
-                <a:solidFill>
-                  <a:srgbClr val="0D47A1"/>
-                </a:solidFill>
-                <a:latin typeface="Arial"/>
-              </a:rPr>
-              <a:t>[S] Fungsi</a:t>
-            </a:r>
-          </a:p>
-          <a:p>
-            <a:pPr algn="l" lvl="1"/>
-            <a:r>
-              <a:rPr sz="1400" b="0" i="0">
-                <a:solidFill>
-                  <a:srgbClr val="0D47A1"/>
-                </a:solidFill>
-                <a:latin typeface="Arial"/>
-              </a:rPr>
-              <a:t>[S] Mengawal akses, menetapkan sempadan hartanah, dan meningkatkan keselamatan.</a:t>
-            </a:r>
-          </a:p>
-          <a:p>
-            <a:pPr algn="l"/>
-            <a:r>
-              <a:rPr sz="1400" b="0" i="0">
-                <a:solidFill>
-                  <a:srgbClr val="0D47A1"/>
-                </a:solidFill>
-                <a:latin typeface="Arial"/>
-              </a:rPr>
-              <a:t>[S] Fokus Utama Kontraktor</a:t>
-            </a:r>
-          </a:p>
-          <a:p>
-            <a:pPr algn="l" lvl="1"/>
-            <a:r>
-              <a:rPr sz="1400" b="0" i="0">
-                <a:solidFill>
-                  <a:srgbClr val="0D47A1"/>
-                </a:solidFill>
-                <a:latin typeface="Arial"/>
-              </a:rPr>
-              <a:t>[S] Penjajaran Sempadan</a:t>
-            </a:r>
-          </a:p>
-          <a:p>
-            <a:pPr algn="l" lvl="2"/>
-            <a:r>
-              <a:rPr sz="1400" b="0" i="0">
-                <a:solidFill>
-                  <a:srgbClr val="0D47A1"/>
-                </a:solidFill>
-                <a:latin typeface="Arial"/>
-              </a:rPr>
-              <a:t>[S] Jajaran pagar mesti ditanda mengikut Pelan Ukur Sempadan untuk mengelakkan isu pencerobohan tanah.</a:t>
-            </a:r>
-          </a:p>
-          <a:p>
-            <a:pPr algn="l" lvl="1"/>
-            <a:r>
-              <a:rPr sz="1400" b="0" i="0">
-                <a:solidFill>
-                  <a:srgbClr val="0D47A1"/>
-                </a:solidFill>
-                <a:latin typeface="Arial"/>
-              </a:rPr>
-              <a:t>[S] Pemasangan Tiang</a:t>
-            </a:r>
-          </a:p>
-          <a:p>
-            <a:pPr algn="l" lvl="2"/>
-            <a:r>
-              <a:rPr sz="1400" b="0" i="0">
-                <a:solidFill>
-                  <a:srgbClr val="0D47A1"/>
-                </a:solidFill>
-                <a:latin typeface="Arial"/>
-              </a:rPr>
-              <a:t>[S] Kestabilan pagar bergantung pada tiangnya. Tiang mesti dipasang pada jarak yang seragam dan ditanam dalam tapak konkrit dengan saiz dan kedalaman yang mencukupi seperti dalam spesifikasi.</a:t>
-            </a:r>
-          </a:p>
-          <a:p>
-            <a:pPr algn="l" lvl="1"/>
-            <a:r>
-              <a:rPr sz="1400" b="0" i="0">
-                <a:solidFill>
-                  <a:srgbClr val="0D47A1"/>
-                </a:solidFill>
-                <a:latin typeface="Arial"/>
-              </a:rPr>
-              <a:t>[S] Ketegangan Pemasangan</a:t>
-            </a:r>
-          </a:p>
-          <a:p>
-            <a:pPr algn="l" lvl="2"/>
-            <a:r>
-              <a:rPr sz="1400" b="0" i="0">
-                <a:solidFill>
-                  <a:srgbClr val="0D47A1"/>
-                </a:solidFill>
-                <a:latin typeface="Arial"/>
-              </a:rPr>
-              <a:t>[S] Bagi pagar jenis jejaring (chain-link) atau BRC, ia mesti ditegangkan dengan sempurna untuk mengelakkannya daripada melendut.</a:t>
+              <a:t>[S] Pastikan semua komponen keluli mempunyai lapisan pelindung karat yang sempurna seperti tergalvani panas (hot-dip galvanized) atau cat epoksi.</a:t>
+            </a:r>
+          </a:p>
+          <a:p>
+            <a:pPr algn="l"/>
+            <a:r>
+              <a:rPr sz="1200" b="0" i="0">
+                <a:solidFill>
+                  <a:srgbClr val="6B6B6B"/>
+                </a:solidFill>
+                <a:latin typeface="Arial"/>
+              </a:rPr>
+              <a:t>[U] Klik setiap tajuk untuk memaparkan maklumat.</a:t>
             </a:r>
           </a:p>
         </p:txBody>
@@ -5433,7 +5237,7 @@
                 </a:solidFill>
                 <a:latin typeface="Arial"/>
               </a:rPr>
-              <a:t>click-to-reveal · 4 panel</a:t>
+              <a:t>Click-to-Reveal · 4 panel</a:t>
             </a:r>
           </a:p>
           <a:p>
@@ -5600,7 +5404,7 @@
                 </a:solidFill>
                 <a:latin typeface="Arial"/>
               </a:rPr>
-              <a:t>K5-PL06-T03-B03 · skrin 7 daripada 12  ·  halaman 1/2   ·   TECHNICAL_PROOF · DRAFT_FOR_BARIAH_REVIEW · NOT_INSTRUCTIONALLY_APPROVED · NOT_LEARNER_FACING_FINAL</a:t>
+              <a:t>K5-PL06-T03-B03 · skrin 7 daripada 12  ·  halaman 2/2   ·   TECHNICAL_PROOF · DRAFT_FOR_BARIAH_REVIEW · NOT_INSTRUCTIONALLY_APPROVED · NOT_LEARNER_FACING_FINAL</a:t>
             </a:r>
           </a:p>
         </p:txBody>
@@ -5653,7 +5457,7 @@
                 </a:solidFill>
                 <a:latin typeface="Arial"/>
               </a:rPr>
-              <a:t>T03B03-S07   ·   click-to-reveal   ·   CONTENT</a:t>
+              <a:t>T03B03-S08   ·   Click-to-Reveal   ·   CONTENT</a:t>
             </a:r>
           </a:p>
           <a:p>
@@ -5665,7 +5469,7 @@
                 </a:solidFill>
                 <a:latin typeface="Arial"/>
               </a:rPr>
-              <a:t>Fencing   ·   halaman 2/2</a:t>
+              <a:t>Swale/ Natural Drain</a:t>
             </a:r>
           </a:p>
         </p:txBody>
@@ -5746,7 +5550,55 @@
                 </a:solidFill>
                 <a:latin typeface="Arial"/>
               </a:rPr>
-              <a:t>KANDUNGAN SKRIN (sambungan)</a:t>
+              <a:t>KANDUNGAN SKRIN</a:t>
+            </a:r>
+          </a:p>
+          <a:p>
+            <a:pPr algn="l"/>
+            <a:r>
+              <a:rPr sz="1400" b="0" i="0">
+                <a:solidFill>
+                  <a:srgbClr val="0D47A1"/>
+                </a:solidFill>
+                <a:latin typeface="Arial"/>
+              </a:rPr>
+              <a:t>[S] Swale/ Natural Drain</a:t>
+            </a:r>
+          </a:p>
+          <a:p>
+            <a:pPr algn="l"/>
+            <a:r>
+              <a:rPr sz="1400" b="0" i="0">
+                <a:solidFill>
+                  <a:srgbClr val="0D47A1"/>
+                </a:solidFill>
+                <a:latin typeface="Arial"/>
+              </a:rPr>
+              <a:t>[S] Swale adalah sejenis parit yang cetek, lebar, dan ditanami dengan rumput atau tumbuhan. Ia merupakan alternatif mesra alam kepada parit konkrit.</a:t>
+            </a:r>
+          </a:p>
+          <a:p>
+            <a:pPr algn="l"/>
+            <a:r>
+              <a:rPr sz="1400" b="0" i="0">
+                <a:solidFill>
+                  <a:srgbClr val="0D47A1"/>
+                </a:solidFill>
+                <a:latin typeface="Arial"/>
+              </a:rPr>
+              <a:t>[S~] Swale ialah parit cetek dan lebar yang ditanami tumbuhan, alternatif kepada longkang konkrit, yang memperlahankan aliran dan menggalakkan penyerapan.</a:t>
+            </a:r>
+          </a:p>
+          <a:p>
+            <a:pPr algn="l"/>
+            <a:r>
+              <a:rPr sz="1400" b="0" i="0">
+                <a:solidFill>
+                  <a:srgbClr val="0D47A1"/>
+                </a:solidFill>
+                <a:latin typeface="Arial"/>
+              </a:rPr>
+              <a:t>[S] Fungsi</a:t>
             </a:r>
           </a:p>
           <a:p>
@@ -5758,7 +5610,31 @@
                 </a:solidFill>
                 <a:latin typeface="Arial"/>
               </a:rPr>
-              <a:t>[S] Kemasan Anti-Karat</a:t>
+              <a:t>[S] Menguruskan aliran air larian permukaan dengan memperlahankannya, menggalakkan penyerapan air ke dalam tanah, dan menapis bahan cemar.</a:t>
+            </a:r>
+          </a:p>
+          <a:p>
+            <a:pPr algn="l"/>
+            <a:r>
+              <a:rPr sz="1400" b="0" i="0">
+                <a:solidFill>
+                  <a:srgbClr val="0D47A1"/>
+                </a:solidFill>
+                <a:latin typeface="Arial"/>
+              </a:rPr>
+              <a:t>[S] Fokus Utama Kontraktor:</a:t>
+            </a:r>
+          </a:p>
+          <a:p>
+            <a:pPr algn="l" lvl="1"/>
+            <a:r>
+              <a:rPr sz="1400" b="0" i="0">
+                <a:solidFill>
+                  <a:srgbClr val="0D47A1"/>
+                </a:solidFill>
+                <a:latin typeface="Arial"/>
+              </a:rPr>
+              <a:t>[S] Pembentukan Landskap</a:t>
             </a:r>
           </a:p>
           <a:p>
@@ -5770,7 +5646,31 @@
                 </a:solidFill>
                 <a:latin typeface="Arial"/>
               </a:rPr>
-              <a:t>[S] Pastikan semua komponen keluli mempunyai lapisan pelindung karat yang sempurna seperti tergalvani panas (hot-dip galvanized) atau cat epoksi.</a:t>
+              <a:t>[S] Swale dibentuk melalui kerja penggalian yang minimum untuk menghasilkan satu lekukan yang landai dan lebar, bukannya parit yang dalam dan curam.</a:t>
+            </a:r>
+          </a:p>
+          <a:p>
+            <a:pPr algn="l" lvl="1"/>
+            <a:r>
+              <a:rPr sz="1400" b="0" i="0">
+                <a:solidFill>
+                  <a:srgbClr val="0D47A1"/>
+                </a:solidFill>
+                <a:latin typeface="Arial"/>
+              </a:rPr>
+              <a:t>[S] Penanaman Tumbuhan</a:t>
+            </a:r>
+          </a:p>
+          <a:p>
+            <a:pPr algn="l" lvl="2"/>
+            <a:r>
+              <a:rPr sz="1400" b="0" i="0">
+                <a:solidFill>
+                  <a:srgbClr val="0D47A1"/>
+                </a:solidFill>
+                <a:latin typeface="Arial"/>
+              </a:rPr>
+              <a:t>[S] Permukaan swale mesti ditanam dengan spesies rumput atau tumbuhan tahan air yang sesuai. Tumbuh-tumbuhan ini berfungsi untuk menstabilkan tanah, mengelakkan hakisan, dan membantu dalam proses penapisan air.</a:t>
             </a:r>
           </a:p>
           <a:p>
@@ -5829,7 +5729,7 @@
                 </a:solidFill>
                 <a:latin typeface="Arial"/>
               </a:rPr>
-              <a:t>click-to-reveal · 4 panel</a:t>
+              <a:t>Click-to-Reveal · 2 panel</a:t>
             </a:r>
           </a:p>
           <a:p>
@@ -5841,7 +5741,7 @@
                 </a:solidFill>
                 <a:latin typeface="Arial"/>
               </a:rPr>
-              <a:t>1. Penjajaran Sempadan</a:t>
+              <a:t>1. Pembentukan Landskap</a:t>
             </a:r>
           </a:p>
           <a:p>
@@ -5853,31 +5753,103 @@
                 </a:solidFill>
                 <a:latin typeface="Arial"/>
               </a:rPr>
-              <a:t>2. Pemasangan Tiang</a:t>
-            </a:r>
-          </a:p>
-          <a:p>
-            <a:pPr algn="l" lvl="1"/>
+              <a:t>2. Penanaman Tumbuhan</a:t>
+            </a:r>
+          </a:p>
+          <a:p>
+            <a:pPr algn="l"/>
+            <a:r>
+              <a:rPr sz="800" b="0" i="0">
+                <a:solidFill>
+                  <a:srgbClr val="1A1A1A"/>
+                </a:solidFill>
+                <a:latin typeface="Arial"/>
+              </a:rPr>
+              <a:t/>
+            </a:r>
+          </a:p>
+          <a:p>
+            <a:pPr algn="l"/>
+            <a:r>
+              <a:rPr sz="1000" b="1" i="0">
+                <a:solidFill>
+                  <a:srgbClr val="6B6B6B"/>
+                </a:solidFill>
+                <a:latin typeface="Arial"/>
+              </a:rPr>
+              <a:t>VISUAL</a:t>
+            </a:r>
+          </a:p>
+          <a:p>
+            <a:pPr algn="l"/>
+            <a:r>
+              <a:rPr sz="1000" b="0" i="0">
+                <a:solidFill>
+                  <a:srgbClr val="1A1A1A"/>
+                </a:solidFill>
+                <a:latin typeface="Arial"/>
+              </a:rPr>
+              <a:t>Keratan rentas swale bertanam</a:t>
+            </a:r>
+          </a:p>
+          <a:p>
+            <a:pPr algn="l"/>
             <a:r>
               <a:rPr sz="900" b="0" i="0">
                 <a:solidFill>
+                  <a:srgbClr val="6B6B6B"/>
+                </a:solidFill>
+                <a:latin typeface="Arial"/>
+              </a:rPr>
+              <a:t>Tiada rajah sumber — subjek calon sahaja</a:t>
+            </a:r>
+          </a:p>
+          <a:p>
+            <a:pPr algn="l"/>
+            <a:r>
+              <a:rPr sz="900" b="1" i="0">
+                <a:solidFill>
+                  <a:srgbClr val="B71C1C"/>
+                </a:solidFill>
+                <a:latin typeface="Arial"/>
+              </a:rPr>
+              <a:t>SUBJEK VISUAL: PENDING_BARIAH_UNIT_REVIEW</a:t>
+            </a:r>
+          </a:p>
+          <a:p>
+            <a:pPr algn="l"/>
+            <a:r>
+              <a:rPr sz="900" b="1" i="0">
+                <a:solidFill>
+                  <a:srgbClr val="B71C1C"/>
+                </a:solidFill>
+                <a:latin typeface="Arial"/>
+              </a:rPr>
+              <a:t>ASET VISUAL BELUM DIHASILKAN — NOT_MMD_ASSET</a:t>
+            </a:r>
+          </a:p>
+          <a:p>
+            <a:pPr algn="l"/>
+            <a:r>
+              <a:rPr sz="800" b="0" i="0">
+                <a:solidFill>
                   <a:srgbClr val="1A1A1A"/>
                 </a:solidFill>
                 <a:latin typeface="Arial"/>
               </a:rPr>
-              <a:t>3. Ketegangan Pemasangan</a:t>
-            </a:r>
-          </a:p>
-          <a:p>
-            <a:pPr algn="l" lvl="1"/>
-            <a:r>
-              <a:rPr sz="900" b="0" i="0">
-                <a:solidFill>
-                  <a:srgbClr val="1A1A1A"/>
-                </a:solidFill>
-                <a:latin typeface="Arial"/>
-              </a:rPr>
-              <a:t>4. Kemasan Anti-Karat</a:t>
+              <a:t/>
+            </a:r>
+          </a:p>
+          <a:p>
+            <a:pPr algn="l"/>
+            <a:r>
+              <a:rPr sz="1000" b="1" i="0">
+                <a:solidFill>
+                  <a:srgbClr val="6B6B6B"/>
+                </a:solidFill>
+                <a:latin typeface="Arial"/>
+              </a:rPr>
+              <a:t>SUMBER DAN KEPUTUSAN</a:t>
             </a:r>
           </a:p>
           <a:p>
@@ -5885,71 +5857,11 @@
             <a:r>
               <a:rPr sz="800" b="0" i="0">
                 <a:solidFill>
-                  <a:srgbClr val="1A1A1A"/>
-                </a:solidFill>
-                <a:latin typeface="Arial"/>
-              </a:rPr>
-              <a:t/>
-            </a:r>
-          </a:p>
-          <a:p>
-            <a:pPr algn="l"/>
-            <a:r>
-              <a:rPr sz="1000" b="1" i="0">
-                <a:solidFill>
-                  <a:srgbClr val="6B6B6B"/>
-                </a:solidFill>
-                <a:latin typeface="Arial"/>
-              </a:rPr>
-              <a:t>VISUAL</a:t>
-            </a:r>
-          </a:p>
-          <a:p>
-            <a:pPr algn="l"/>
-            <a:r>
-              <a:rPr sz="1000" b="0" i="1">
-                <a:solidFill>
-                  <a:srgbClr val="6B6B6B"/>
-                </a:solidFill>
-                <a:latin typeface="Arial"/>
-              </a:rPr>
-              <a:t>Tiada visual khusus</a:t>
-            </a:r>
-          </a:p>
-          <a:p>
-            <a:pPr algn="l"/>
-            <a:r>
-              <a:rPr sz="800" b="0" i="0">
-                <a:solidFill>
-                  <a:srgbClr val="1A1A1A"/>
-                </a:solidFill>
-                <a:latin typeface="Arial"/>
-              </a:rPr>
-              <a:t/>
-            </a:r>
-          </a:p>
-          <a:p>
-            <a:pPr algn="l"/>
-            <a:r>
-              <a:rPr sz="1000" b="1" i="0">
-                <a:solidFill>
-                  <a:srgbClr val="6B6B6B"/>
-                </a:solidFill>
-                <a:latin typeface="Arial"/>
-              </a:rPr>
-              <a:t>SUMBER DAN KEPUTUSAN</a:t>
-            </a:r>
-          </a:p>
-          <a:p>
-            <a:pPr algn="l"/>
-            <a:r>
-              <a:rPr sz="800" b="0" i="0">
-                <a:solidFill>
                   <a:srgbClr val="0D47A1"/>
                 </a:solidFill>
                 <a:latin typeface="Arial"/>
               </a:rPr>
-              <a:t>Baris modul: T03B03-ROW-042, T03B03-ROW-043, T03B03-ROW-044, T03B03-ROW-046, T03B03-ROW-045, T03B03-ROW-047, T03B03-ROW-049, T03B03-ROW-051, T03B03-ROW-053, T03B03-ROW-048 (+3)</a:t>
+              <a:t>Baris modul: T03B03-ROW-055, T03B03-ROW-056, T03B03-ROW-057, T03B03-ROW-059, T03B03-ROW-058, T03B03-ROW-060, T03B03-ROW-062, T03B03-ROW-061, T03B03-ROW-063</a:t>
             </a:r>
           </a:p>
           <a:p>
@@ -5996,7 +5908,7 @@
                 </a:solidFill>
                 <a:latin typeface="Arial"/>
               </a:rPr>
-              <a:t>K5-PL06-T03-B03 · skrin 7 daripada 12  ·  halaman 2/2   ·   TECHNICAL_PROOF · DRAFT_FOR_BARIAH_REVIEW · NOT_INSTRUCTIONALLY_APPROVED · NOT_LEARNER_FACING_FINAL</a:t>
+              <a:t>K5-PL06-T03-B03 · skrin 8 daripada 12   ·   TECHNICAL_PROOF · DRAFT_FOR_BARIAH_REVIEW · NOT_INSTRUCTIONALLY_APPROVED · NOT_LEARNER_FACING_FINAL</a:t>
             </a:r>
           </a:p>
         </p:txBody>
@@ -6049,7 +5961,7 @@
                 </a:solidFill>
                 <a:latin typeface="Arial"/>
               </a:rPr>
-              <a:t>T03B03-S08   ·   click-to-reveal   ·   CONTENT</a:t>
+              <a:t>T03B03-S09   ·   Click-to-Reveal   ·   CONTENT</a:t>
             </a:r>
           </a:p>
           <a:p>
@@ -6061,7 +5973,7 @@
                 </a:solidFill>
                 <a:latin typeface="Arial"/>
               </a:rPr>
-              <a:t>Swale/ Natural Drain</a:t>
+              <a:t>Jalan akses   ·   halaman 1/2</a:t>
             </a:r>
           </a:p>
         </p:txBody>
@@ -6154,7 +6066,7 @@
                 </a:solidFill>
                 <a:latin typeface="Arial"/>
               </a:rPr>
-              <a:t>[S] Swale/ Natural Drain</a:t>
+              <a:t>[S] Jalan akses</a:t>
             </a:r>
           </a:p>
           <a:p>
@@ -6166,7 +6078,7 @@
                 </a:solidFill>
                 <a:latin typeface="Arial"/>
               </a:rPr>
-              <a:t>[S] Swale adalah sejenis parit yang cetek, lebar, dan ditanami dengan rumput atau tumbuhan. Ia merupakan alternatif mesra alam kepada parit konkrit.</a:t>
+              <a:t>[S] Jalan akses dalam konteks landskap menyediakan laluan untuk kenderaan penyelenggaraan atau laluan pejalan kaki utama.</a:t>
             </a:r>
           </a:p>
           <a:p>
@@ -6178,7 +6090,7 @@
                 </a:solidFill>
                 <a:latin typeface="Arial"/>
               </a:rPr>
-              <a:t>[S~] Swale ialah parit cetek dan lebar yang ditanami tumbuhan, alternatif kepada longkang konkrit, yang memperlahankan aliran dan menggalakkan penyerapan.</a:t>
+              <a:t>[S~] Permukaan jalan akses dibina dengan kamber — kecerunan melintang dari tengah ke tepi — supaya air tidak bertakung.</a:t>
             </a:r>
           </a:p>
           <a:p>
@@ -6202,7 +6114,7 @@
                 </a:solidFill>
                 <a:latin typeface="Arial"/>
               </a:rPr>
-              <a:t>[S] Menguruskan aliran air larian permukaan dengan memperlahankannya, menggalakkan penyerapan air ke dalam tanah, dan menapis bahan cemar.</a:t>
+              <a:t>[S] Menyediakan perhubungan dan akses ke seluruh kawasan tapak.</a:t>
             </a:r>
           </a:p>
           <a:p>
@@ -6214,7 +6126,7 @@
                 </a:solidFill>
                 <a:latin typeface="Arial"/>
               </a:rPr>
-              <a:t>[S] Fokus Utama Kontraktor:</a:t>
+              <a:t>[S] Fokus Utama Kontraktor</a:t>
             </a:r>
           </a:p>
           <a:p>
@@ -6226,7 +6138,7 @@
                 </a:solidFill>
                 <a:latin typeface="Arial"/>
               </a:rPr>
-              <a:t>[S] Pembentukan Landskap</a:t>
+              <a:t>[S] Penyediaan Tapak Asas (Sub-base)</a:t>
             </a:r>
           </a:p>
           <a:p>
@@ -6238,7 +6150,7 @@
                 </a:solidFill>
                 <a:latin typeface="Arial"/>
               </a:rPr>
-              <a:t>[S] Swale dibentuk melalui kerja penggalian yang minimum untuk menghasilkan satu lekukan yang landai dan lebar, bukannya parit yang dalam dan curam.</a:t>
+              <a:t>[S] Kualiti jalan bergantung pada tapak asasnya. Lapisan tanah asal mesti dipadatkan, diikuti dengan lapisan batu kasaran (crusher run) yang dipadatkan mengikut ketebalan yang ditetapkan dalam lukisan.</a:t>
             </a:r>
           </a:p>
           <a:p>
@@ -6250,7 +6162,7 @@
                 </a:solidFill>
                 <a:latin typeface="Arial"/>
               </a:rPr>
-              <a:t>[S] Penanaman Tumbuhan</a:t>
+              <a:t>[S] Pemasangan Bebendul (Kerb)</a:t>
             </a:r>
           </a:p>
           <a:p>
@@ -6262,19 +6174,31 @@
                 </a:solidFill>
                 <a:latin typeface="Arial"/>
               </a:rPr>
-              <a:t>[S] Permukaan swale mesti ditanam dengan spesies rumput atau tumbuhan tahan air yang sesuai. Tumbuh-tumbuhan ini berfungsi untuk menstabilkan tanah, mengelakkan hakisan, dan membantu dalam proses penapisan air.</a:t>
-            </a:r>
-          </a:p>
-          <a:p>
-            <a:pPr algn="l"/>
-            <a:r>
-              <a:rPr sz="1200" b="0" i="0">
-                <a:solidFill>
-                  <a:srgbClr val="6B6B6B"/>
-                </a:solidFill>
-                <a:latin typeface="Arial"/>
-              </a:rPr>
-              <a:t>[U] Klik setiap tajuk untuk memaparkan maklumat.</a:t>
+              <a:t>[S] Bebendul konkrit dipasang di kedua-dua belah jalan untuk menetapkan jajaran dan menahan lapisan permukaan.</a:t>
+            </a:r>
+          </a:p>
+          <a:p>
+            <a:pPr algn="l" lvl="1"/>
+            <a:r>
+              <a:rPr sz="1400" b="0" i="0">
+                <a:solidFill>
+                  <a:srgbClr val="0D47A1"/>
+                </a:solidFill>
+                <a:latin typeface="Arial"/>
+              </a:rPr>
+              <a:t>[S] Lapisan Permukaan</a:t>
+            </a:r>
+          </a:p>
+          <a:p>
+            <a:pPr algn="l" lvl="2"/>
+            <a:r>
+              <a:rPr sz="1400" b="0" i="0">
+                <a:solidFill>
+                  <a:srgbClr val="0D47A1"/>
+                </a:solidFill>
+                <a:latin typeface="Arial"/>
+              </a:rPr>
+              <a:t>[S] Permukaan akhir boleh terdiri daripada pelbagai bahan seperti premix/asphalt, blok turapan (interlocking pavers), atau konkrit bertetulang, dan mesti dibina mengikut spesifikasi yang betul.</a:t>
             </a:r>
           </a:p>
         </p:txBody>
@@ -6321,7 +6245,7 @@
                 </a:solidFill>
                 <a:latin typeface="Arial"/>
               </a:rPr>
-              <a:t>click-to-reveal · 2 panel</a:t>
+              <a:t>Click-to-Reveal · 4 panel</a:t>
             </a:r>
           </a:p>
           <a:p>
@@ -6333,7 +6257,7 @@
                 </a:solidFill>
                 <a:latin typeface="Arial"/>
               </a:rPr>
-              <a:t>1. Pembentukan Landskap</a:t>
+              <a:t>1. Penyediaan Tapak Asas (Sub-base)</a:t>
             </a:r>
           </a:p>
           <a:p>
@@ -6345,7 +6269,31 @@
                 </a:solidFill>
                 <a:latin typeface="Arial"/>
               </a:rPr>
-              <a:t>2. Penanaman Tumbuhan</a:t>
+              <a:t>2. Pemasangan Bebendul (Kerb)</a:t>
+            </a:r>
+          </a:p>
+          <a:p>
+            <a:pPr algn="l" lvl="1"/>
+            <a:r>
+              <a:rPr sz="900" b="0" i="0">
+                <a:solidFill>
+                  <a:srgbClr val="1A1A1A"/>
+                </a:solidFill>
+                <a:latin typeface="Arial"/>
+              </a:rPr>
+              <a:t>3. Lapisan Permukaan</a:t>
+            </a:r>
+          </a:p>
+          <a:p>
+            <a:pPr algn="l" lvl="1"/>
+            <a:r>
+              <a:rPr sz="900" b="0" i="0">
+                <a:solidFill>
+                  <a:srgbClr val="1A1A1A"/>
+                </a:solidFill>
+                <a:latin typeface="Arial"/>
+              </a:rPr>
+              <a:t>4. Kamber (Camber)</a:t>
             </a:r>
           </a:p>
           <a:p>
@@ -6381,7 +6329,7 @@
                 </a:solidFill>
                 <a:latin typeface="Arial"/>
               </a:rPr>
-              <a:t>Keratan rentas swale bertanam</a:t>
+              <a:t>Susunan lapisan jalan akses: sub-base, bebendul, permukaan, kamber</a:t>
             </a:r>
           </a:p>
           <a:p>
@@ -6453,7 +6401,7 @@
                 </a:solidFill>
                 <a:latin typeface="Arial"/>
               </a:rPr>
-              <a:t>Baris modul: T03B03-ROW-055, T03B03-ROW-056, T03B03-ROW-057, T03B03-ROW-059, T03B03-ROW-058, T03B03-ROW-060, T03B03-ROW-062, T03B03-ROW-061, T03B03-ROW-063</a:t>
+              <a:t>Baris modul: T03B03-ROW-064, T03B03-ROW-065, T03B03-ROW-066, T03B03-ROW-068, T03B03-ROW-067, T03B03-ROW-069, T03B03-ROW-071, T03B03-ROW-073, T03B03-ROW-075, T03B03-ROW-070 (+3)</a:t>
             </a:r>
           </a:p>
           <a:p>
@@ -6500,7 +6448,7 @@
                 </a:solidFill>
                 <a:latin typeface="Arial"/>
               </a:rPr>
-              <a:t>K5-PL06-T03-B03 · skrin 8 daripada 12   ·   TECHNICAL_PROOF · DRAFT_FOR_BARIAH_REVIEW · NOT_INSTRUCTIONALLY_APPROVED · NOT_LEARNER_FACING_FINAL</a:t>
+              <a:t>K5-PL06-T03-B03 · skrin 9 daripada 12  ·  halaman 1/2   ·   TECHNICAL_PROOF · DRAFT_FOR_BARIAH_REVIEW · NOT_INSTRUCTIONALLY_APPROVED · NOT_LEARNER_FACING_FINAL</a:t>
             </a:r>
           </a:p>
         </p:txBody>
@@ -6553,7 +6501,7 @@
                 </a:solidFill>
                 <a:latin typeface="Arial"/>
               </a:rPr>
-              <a:t>T03B03-S09   ·   click-to-reveal   ·   CONTENT</a:t>
+              <a:t>T03B03-S09   ·   Click-to-Reveal   ·   CONTENT</a:t>
             </a:r>
           </a:p>
           <a:p>
@@ -6565,7 +6513,7 @@
                 </a:solidFill>
                 <a:latin typeface="Arial"/>
               </a:rPr>
-              <a:t>Jalan akses   ·   halaman 1/2</a:t>
+              <a:t>Jalan akses   ·   halaman 2/2</a:t>
             </a:r>
           </a:p>
         </p:txBody>
@@ -6646,11 +6594,11 @@
                 </a:solidFill>
                 <a:latin typeface="Arial"/>
               </a:rPr>
-              <a:t>KANDUNGAN SKRIN</a:t>
-            </a:r>
-          </a:p>
-          <a:p>
-            <a:pPr algn="l"/>
+              <a:t>KANDUNGAN SKRIN (sambungan)</a:t>
+            </a:r>
+          </a:p>
+          <a:p>
+            <a:pPr algn="l" lvl="1"/>
             <a:r>
               <a:rPr sz="1400" b="0" i="0">
                 <a:solidFill>
@@ -6658,11 +6606,11 @@
                 </a:solidFill>
                 <a:latin typeface="Arial"/>
               </a:rPr>
-              <a:t>[S] Jalan akses</a:t>
-            </a:r>
-          </a:p>
-          <a:p>
-            <a:pPr algn="l"/>
+              <a:t>[S] Kamber (Camber)</a:t>
+            </a:r>
+          </a:p>
+          <a:p>
+            <a:pPr algn="l" lvl="2"/>
             <a:r>
               <a:rPr sz="1400" b="0" i="0">
                 <a:solidFill>
@@ -6670,127 +6618,19 @@
                 </a:solidFill>
                 <a:latin typeface="Arial"/>
               </a:rPr>
-              <a:t>[S] Jalan akses dalam konteks landskap menyediakan laluan untuk kenderaan penyelenggaraan atau laluan pejalan kaki utama.</a:t>
-            </a:r>
-          </a:p>
-          <a:p>
-            <a:pPr algn="l"/>
-            <a:r>
-              <a:rPr sz="1400" b="0" i="0">
-                <a:solidFill>
-                  <a:srgbClr val="0D47A1"/>
-                </a:solidFill>
-                <a:latin typeface="Arial"/>
-              </a:rPr>
-              <a:t>[S~] Permukaan jalan akses dibina dengan kamber — kecerunan melintang dari tengah ke tepi — supaya air tidak bertakung.</a:t>
-            </a:r>
-          </a:p>
-          <a:p>
-            <a:pPr algn="l"/>
-            <a:r>
-              <a:rPr sz="1400" b="0" i="0">
-                <a:solidFill>
-                  <a:srgbClr val="0D47A1"/>
-                </a:solidFill>
-                <a:latin typeface="Arial"/>
-              </a:rPr>
-              <a:t>[S] Fungsi</a:t>
-            </a:r>
-          </a:p>
-          <a:p>
-            <a:pPr algn="l" lvl="1"/>
-            <a:r>
-              <a:rPr sz="1400" b="0" i="0">
-                <a:solidFill>
-                  <a:srgbClr val="0D47A1"/>
-                </a:solidFill>
-                <a:latin typeface="Arial"/>
-              </a:rPr>
-              <a:t>[S] Menyediakan perhubungan dan akses ke seluruh kawasan tapak.</a:t>
-            </a:r>
-          </a:p>
-          <a:p>
-            <a:pPr algn="l"/>
-            <a:r>
-              <a:rPr sz="1400" b="0" i="0">
-                <a:solidFill>
-                  <a:srgbClr val="0D47A1"/>
-                </a:solidFill>
-                <a:latin typeface="Arial"/>
-              </a:rPr>
-              <a:t>[S] Fokus Utama Kontraktor</a:t>
-            </a:r>
-          </a:p>
-          <a:p>
-            <a:pPr algn="l" lvl="1"/>
-            <a:r>
-              <a:rPr sz="1400" b="0" i="0">
-                <a:solidFill>
-                  <a:srgbClr val="0D47A1"/>
-                </a:solidFill>
-                <a:latin typeface="Arial"/>
-              </a:rPr>
-              <a:t>[S] Penyediaan Tapak Asas (Sub-base)</a:t>
-            </a:r>
-          </a:p>
-          <a:p>
-            <a:pPr algn="l" lvl="2"/>
-            <a:r>
-              <a:rPr sz="1400" b="0" i="0">
-                <a:solidFill>
-                  <a:srgbClr val="0D47A1"/>
-                </a:solidFill>
-                <a:latin typeface="Arial"/>
-              </a:rPr>
-              <a:t>[S] Kualiti jalan bergantung pada tapak asasnya. Lapisan tanah asal mesti dipadatkan, diikuti dengan lapisan batu kasaran (crusher run) yang dipadatkan mengikut ketebalan yang ditetapkan dalam lukisan.</a:t>
-            </a:r>
-          </a:p>
-          <a:p>
-            <a:pPr algn="l" lvl="1"/>
-            <a:r>
-              <a:rPr sz="1400" b="0" i="0">
-                <a:solidFill>
-                  <a:srgbClr val="0D47A1"/>
-                </a:solidFill>
-                <a:latin typeface="Arial"/>
-              </a:rPr>
-              <a:t>[S] Pemasangan Bebendul (Kerb)</a:t>
-            </a:r>
-          </a:p>
-          <a:p>
-            <a:pPr algn="l" lvl="2"/>
-            <a:r>
-              <a:rPr sz="1400" b="0" i="0">
-                <a:solidFill>
-                  <a:srgbClr val="0D47A1"/>
-                </a:solidFill>
-                <a:latin typeface="Arial"/>
-              </a:rPr>
-              <a:t>[S] Bebendul konkrit dipasang di kedua-dua belah jalan untuk menetapkan jajaran dan menahan lapisan permukaan.</a:t>
-            </a:r>
-          </a:p>
-          <a:p>
-            <a:pPr algn="l" lvl="1"/>
-            <a:r>
-              <a:rPr sz="1400" b="0" i="0">
-                <a:solidFill>
-                  <a:srgbClr val="0D47A1"/>
-                </a:solidFill>
-                <a:latin typeface="Arial"/>
-              </a:rPr>
-              <a:t>[S] Lapisan Permukaan</a:t>
-            </a:r>
-          </a:p>
-          <a:p>
-            <a:pPr algn="l" lvl="2"/>
-            <a:r>
-              <a:rPr sz="1400" b="0" i="0">
-                <a:solidFill>
-                  <a:srgbClr val="0D47A1"/>
-                </a:solidFill>
-                <a:latin typeface="Arial"/>
-              </a:rPr>
-              <a:t>[S] Permukaan akhir boleh terdiri daripada pelbagai bahan seperti premix/asphalt, blok turapan (interlocking pavers), atau konkrit bertetulang, dan mesti dibina mengikut spesifikasi yang betul.</a:t>
+              <a:t>[S] Permukaan jalan mesti dibina dengan sedikit kecerunan melintang dari bahagian tengah ke tepi untuk memastikan air hujan mengalir ke sistem perparitan.</a:t>
+            </a:r>
+          </a:p>
+          <a:p>
+            <a:pPr algn="l"/>
+            <a:r>
+              <a:rPr sz="1200" b="0" i="0">
+                <a:solidFill>
+                  <a:srgbClr val="6B6B6B"/>
+                </a:solidFill>
+                <a:latin typeface="Arial"/>
+              </a:rPr>
+              <a:t>[U] Klik setiap tajuk untuk memaparkan maklumat.</a:t>
             </a:r>
           </a:p>
         </p:txBody>
@@ -6837,7 +6677,7 @@
                 </a:solidFill>
                 <a:latin typeface="Arial"/>
               </a:rPr>
-              <a:t>click-to-reveal · 4 panel</a:t>
+              <a:t>Click-to-Reveal · 4 panel</a:t>
             </a:r>
           </a:p>
           <a:p>
@@ -7040,7 +6880,7 @@
                 </a:solidFill>
                 <a:latin typeface="Arial"/>
               </a:rPr>
-              <a:t>K5-PL06-T03-B03 · skrin 9 daripada 12  ·  halaman 1/2   ·   TECHNICAL_PROOF · DRAFT_FOR_BARIAH_REVIEW · NOT_INSTRUCTIONALLY_APPROVED · NOT_LEARNER_FACING_FINAL</a:t>
+              <a:t>K5-PL06-T03-B03 · skrin 9 daripada 12  ·  halaman 2/2   ·   TECHNICAL_PROOF · DRAFT_FOR_BARIAH_REVIEW · NOT_INSTRUCTIONALLY_APPROVED · NOT_LEARNER_FACING_FINAL</a:t>
             </a:r>
           </a:p>
         </p:txBody>
@@ -7093,7 +6933,7 @@
                 </a:solidFill>
                 <a:latin typeface="Arial"/>
               </a:rPr>
-              <a:t>T03B03-S09   ·   click-to-reveal   ·   CONTENT</a:t>
+              <a:t>T03B03-S10   ·   static content   ·   RUMUSAN</a:t>
             </a:r>
           </a:p>
           <a:p>
@@ -7105,7 +6945,7 @@
                 </a:solidFill>
                 <a:latin typeface="Arial"/>
               </a:rPr>
-              <a:t>Jalan akses   ·   halaman 2/2</a:t>
+              <a:t>Rumusan</a:t>
             </a:r>
           </a:p>
         </p:txBody>
@@ -7186,43 +7026,31 @@
                 </a:solidFill>
                 <a:latin typeface="Arial"/>
               </a:rPr>
-              <a:t>KANDUNGAN SKRIN (sambungan)</a:t>
-            </a:r>
-          </a:p>
-          <a:p>
-            <a:pPr algn="l" lvl="1"/>
+              <a:t>KANDUNGAN SKRIN</a:t>
+            </a:r>
+          </a:p>
+          <a:p>
+            <a:pPr algn="l"/>
             <a:r>
               <a:rPr sz="1400" b="0" i="0">
                 <a:solidFill>
-                  <a:srgbClr val="0D47A1"/>
-                </a:solidFill>
-                <a:latin typeface="Arial"/>
-              </a:rPr>
-              <a:t>[S] Kamber (Camber)</a:t>
-            </a:r>
-          </a:p>
-          <a:p>
-            <a:pPr algn="l" lvl="2"/>
+                  <a:srgbClr val="1B5E20"/>
+                </a:solidFill>
+                <a:latin typeface="Arial"/>
+              </a:rPr>
+              <a:t>[A] Pengurusan infrastruktur landskap yang tepat penting bagi memastikan kerja mematuhi lukisan, sempadan dan keperluan teknikal tapak. Komponen infrastruktur merangkumi Landform/Earthmound, Sub-soil Drainage, Dinding Penahan, Fencing, Swale/Natural Drain dan Jalan Akses. Pemahaman terhadap komponen-komponen ini membantu kontraktor mengawal pelaksanaan kerja, mengenal pasti titik kegagalan dan mengurangkan risiko di tapak.</a:t>
+            </a:r>
+          </a:p>
+          <a:p>
+            <a:pPr algn="l"/>
             <a:r>
               <a:rPr sz="1400" b="0" i="0">
                 <a:solidFill>
-                  <a:srgbClr val="0D47A1"/>
-                </a:solidFill>
-                <a:latin typeface="Arial"/>
-              </a:rPr>
-              <a:t>[S] Permukaan jalan mesti dibina dengan sedikit kecerunan melintang dari bahagian tengah ke tepi untuk memastikan air hujan mengalir ke sistem perparitan.</a:t>
-            </a:r>
-          </a:p>
-          <a:p>
-            <a:pPr algn="l"/>
-            <a:r>
-              <a:rPr sz="1200" b="0" i="0">
-                <a:solidFill>
-                  <a:srgbClr val="6B6B6B"/>
-                </a:solidFill>
-                <a:latin typeface="Arial"/>
-              </a:rPr>
-              <a:t>[U] Klik setiap tajuk untuk memaparkan maklumat.</a:t>
+                  <a:srgbClr val="B71C1C"/>
+                </a:solidFill>
+                <a:latin typeface="Arial"/>
+              </a:rPr>
+              <a:t>[P] VISUAL SOKONGAN · PROVISIONAL_VISUAL_DIRECTION · PENDING_BARIAH_UNIT_REVIEW · NOT_MMD_ASSET</a:t>
             </a:r>
           </a:p>
         </p:txBody>
@@ -7263,61 +7091,109 @@
           <a:p>
             <a:pPr algn="l"/>
             <a:r>
+              <a:rPr sz="1000" b="0" i="1">
+                <a:solidFill>
+                  <a:srgbClr val="6B6B6B"/>
+                </a:solidFill>
+                <a:latin typeface="Arial"/>
+              </a:rPr>
+              <a:t>Tiada interaksi — skrin statik</a:t>
+            </a:r>
+          </a:p>
+          <a:p>
+            <a:pPr algn="l"/>
+            <a:r>
+              <a:rPr sz="800" b="0" i="0">
+                <a:solidFill>
+                  <a:srgbClr val="1A1A1A"/>
+                </a:solidFill>
+                <a:latin typeface="Arial"/>
+              </a:rPr>
+              <a:t/>
+            </a:r>
+          </a:p>
+          <a:p>
+            <a:pPr algn="l"/>
+            <a:r>
+              <a:rPr sz="1000" b="1" i="0">
+                <a:solidFill>
+                  <a:srgbClr val="6B6B6B"/>
+                </a:solidFill>
+                <a:latin typeface="Arial"/>
+              </a:rPr>
+              <a:t>VISUAL</a:t>
+            </a:r>
+          </a:p>
+          <a:p>
+            <a:pPr algn="l"/>
+            <a:r>
               <a:rPr sz="1000" b="0" i="0">
                 <a:solidFill>
                   <a:srgbClr val="1A1A1A"/>
                 </a:solidFill>
                 <a:latin typeface="Arial"/>
               </a:rPr>
-              <a:t>click-to-reveal · 4 panel</a:t>
-            </a:r>
-          </a:p>
-          <a:p>
-            <a:pPr algn="l" lvl="1"/>
+              <a:t>Satu visual tapak keseluruhan yang menunjukkan kedudukan enam komponen infrastruktur.</a:t>
+            </a:r>
+          </a:p>
+          <a:p>
+            <a:pPr algn="l"/>
             <a:r>
               <a:rPr sz="900" b="0" i="0">
                 <a:solidFill>
+                  <a:srgbClr val="6B6B6B"/>
+                </a:solidFill>
+                <a:latin typeface="Arial"/>
+              </a:rPr>
+              <a:t>Tiada rajah sumber — subjek calon sahaja</a:t>
+            </a:r>
+          </a:p>
+          <a:p>
+            <a:pPr algn="l"/>
+            <a:r>
+              <a:rPr sz="900" b="1" i="0">
+                <a:solidFill>
+                  <a:srgbClr val="B71C1C"/>
+                </a:solidFill>
+                <a:latin typeface="Arial"/>
+              </a:rPr>
+              <a:t>PROVISIONAL_VISUAL_DIRECTION · PENDING_BARIAH_UNIT_REVIEW · NOT_MMD_ASSET</a:t>
+            </a:r>
+          </a:p>
+          <a:p>
+            <a:pPr algn="l"/>
+            <a:r>
+              <a:rPr sz="900" b="1" i="0">
+                <a:solidFill>
+                  <a:srgbClr val="B71C1C"/>
+                </a:solidFill>
+                <a:latin typeface="Arial"/>
+              </a:rPr>
+              <a:t>ASET VISUAL BELUM DIHASILKAN — NOT_MMD_ASSET</a:t>
+            </a:r>
+          </a:p>
+          <a:p>
+            <a:pPr algn="l"/>
+            <a:r>
+              <a:rPr sz="800" b="0" i="0">
+                <a:solidFill>
                   <a:srgbClr val="1A1A1A"/>
                 </a:solidFill>
                 <a:latin typeface="Arial"/>
               </a:rPr>
-              <a:t>1. Penyediaan Tapak Asas (Sub-base)</a:t>
-            </a:r>
-          </a:p>
-          <a:p>
-            <a:pPr algn="l" lvl="1"/>
-            <a:r>
-              <a:rPr sz="900" b="0" i="0">
-                <a:solidFill>
-                  <a:srgbClr val="1A1A1A"/>
-                </a:solidFill>
-                <a:latin typeface="Arial"/>
-              </a:rPr>
-              <a:t>2. Pemasangan Bebendul (Kerb)</a:t>
-            </a:r>
-          </a:p>
-          <a:p>
-            <a:pPr algn="l" lvl="1"/>
-            <a:r>
-              <a:rPr sz="900" b="0" i="0">
-                <a:solidFill>
-                  <a:srgbClr val="1A1A1A"/>
-                </a:solidFill>
-                <a:latin typeface="Arial"/>
-              </a:rPr>
-              <a:t>3. Lapisan Permukaan</a:t>
-            </a:r>
-          </a:p>
-          <a:p>
-            <a:pPr algn="l" lvl="1"/>
-            <a:r>
-              <a:rPr sz="900" b="0" i="0">
-                <a:solidFill>
-                  <a:srgbClr val="1A1A1A"/>
-                </a:solidFill>
-                <a:latin typeface="Arial"/>
-              </a:rPr>
-              <a:t>4. Kamber (Camber)</a:t>
+              <a:t/>
+            </a:r>
+          </a:p>
+          <a:p>
+            <a:pPr algn="l"/>
+            <a:r>
+              <a:rPr sz="1000" b="1" i="0">
+                <a:solidFill>
+                  <a:srgbClr val="6B6B6B"/>
+                </a:solidFill>
+                <a:latin typeface="Arial"/>
+              </a:rPr>
+              <a:t>SUMBER DAN KEPUTUSAN</a:t>
             </a:r>
           </a:p>
           <a:p>
@@ -7325,71 +7201,11 @@
             <a:r>
               <a:rPr sz="800" b="0" i="0">
                 <a:solidFill>
-                  <a:srgbClr val="1A1A1A"/>
-                </a:solidFill>
-                <a:latin typeface="Arial"/>
-              </a:rPr>
-              <a:t/>
-            </a:r>
-          </a:p>
-          <a:p>
-            <a:pPr algn="l"/>
-            <a:r>
-              <a:rPr sz="1000" b="1" i="0">
-                <a:solidFill>
-                  <a:srgbClr val="6B6B6B"/>
-                </a:solidFill>
-                <a:latin typeface="Arial"/>
-              </a:rPr>
-              <a:t>VISUAL</a:t>
-            </a:r>
-          </a:p>
-          <a:p>
-            <a:pPr algn="l"/>
-            <a:r>
-              <a:rPr sz="1000" b="0" i="0">
-                <a:solidFill>
-                  <a:srgbClr val="1A1A1A"/>
-                </a:solidFill>
-                <a:latin typeface="Arial"/>
-              </a:rPr>
-              <a:t>Susunan lapisan jalan akses: sub-base, bebendul, permukaan, kamber</a:t>
-            </a:r>
-          </a:p>
-          <a:p>
-            <a:pPr algn="l"/>
-            <a:r>
-              <a:rPr sz="900" b="0" i="0">
-                <a:solidFill>
-                  <a:srgbClr val="6B6B6B"/>
-                </a:solidFill>
-                <a:latin typeface="Arial"/>
-              </a:rPr>
-              <a:t>Tiada rajah sumber — subjek calon sahaja</a:t>
-            </a:r>
-          </a:p>
-          <a:p>
-            <a:pPr algn="l"/>
-            <a:r>
-              <a:rPr sz="900" b="1" i="0">
-                <a:solidFill>
-                  <a:srgbClr val="B71C1C"/>
-                </a:solidFill>
-                <a:latin typeface="Arial"/>
-              </a:rPr>
-              <a:t>SUBJEK VISUAL: PENDING_BARIAH_UNIT_REVIEW</a:t>
-            </a:r>
-          </a:p>
-          <a:p>
-            <a:pPr algn="l"/>
-            <a:r>
-              <a:rPr sz="900" b="1" i="0">
-                <a:solidFill>
-                  <a:srgbClr val="B71C1C"/>
-                </a:solidFill>
-                <a:latin typeface="Arial"/>
-              </a:rPr>
-              <a:t>ASET VISUAL BELUM DIHASILKAN — NOT_MMD_ASSET</a:t>
+                  <a:srgbClr val="0D47A1"/>
+                </a:solidFill>
+                <a:latin typeface="Arial"/>
+              </a:rPr>
+              <a:t>Skrin struktur — tiada baris modul</a:t>
             </a:r>
           </a:p>
           <a:p>
@@ -7397,47 +7213,11 @@
             <a:r>
               <a:rPr sz="800" b="0" i="0">
                 <a:solidFill>
-                  <a:srgbClr val="1A1A1A"/>
-                </a:solidFill>
-                <a:latin typeface="Arial"/>
-              </a:rPr>
-              <a:t/>
-            </a:r>
-          </a:p>
-          <a:p>
-            <a:pPr algn="l"/>
-            <a:r>
-              <a:rPr sz="1000" b="1" i="0">
-                <a:solidFill>
-                  <a:srgbClr val="6B6B6B"/>
-                </a:solidFill>
-                <a:latin typeface="Arial"/>
-              </a:rPr>
-              <a:t>SUMBER DAN KEPUTUSAN</a:t>
-            </a:r>
-          </a:p>
-          <a:p>
-            <a:pPr algn="l"/>
-            <a:r>
-              <a:rPr sz="800" b="0" i="0">
-                <a:solidFill>
-                  <a:srgbClr val="0D47A1"/>
-                </a:solidFill>
-                <a:latin typeface="Arial"/>
-              </a:rPr>
-              <a:t>Baris modul: T03B03-ROW-064, T03B03-ROW-065, T03B03-ROW-066, T03B03-ROW-068, T03B03-ROW-067, T03B03-ROW-069, T03B03-ROW-071, T03B03-ROW-073, T03B03-ROW-075, T03B03-ROW-070 (+3)</a:t>
-            </a:r>
-          </a:p>
-          <a:p>
-            <a:pPr algn="l"/>
-            <a:r>
-              <a:rPr sz="800" b="0" i="0">
-                <a:solidFill>
-                  <a:srgbClr val="6B6B6B"/>
-                </a:solidFill>
-                <a:latin typeface="Arial"/>
-              </a:rPr>
-              <a:t>Keputusan Bariah: A1, A2</a:t>
+                  <a:srgbClr val="6B6B6B"/>
+                </a:solidFill>
+                <a:latin typeface="Arial"/>
+              </a:rPr>
+              <a:t>Keputusan Bariah: D1, D3, D4</a:t>
             </a:r>
           </a:p>
         </p:txBody>
@@ -7472,7 +7252,7 @@
                 </a:solidFill>
                 <a:latin typeface="Arial"/>
               </a:rPr>
-              <a:t>K5-PL06-T03-B03 · skrin 9 daripada 12  ·  halaman 2/2   ·   TECHNICAL_PROOF · DRAFT_FOR_BARIAH_REVIEW · NOT_INSTRUCTIONALLY_APPROVED · NOT_LEARNER_FACING_FINAL</a:t>
+              <a:t>K5-PL06-T03-B03 · skrin 10 daripada 12   ·   TECHNICAL_PROOF · DRAFT_FOR_BARIAH_REVIEW · NOT_INSTRUCTIONALLY_APPROVED · NOT_LEARNER_FACING_FINAL</a:t>
             </a:r>
           </a:p>
         </p:txBody>
@@ -7525,7 +7305,7 @@
                 </a:solidFill>
                 <a:latin typeface="Arial"/>
               </a:rPr>
-              <a:t>T03B03-S10   ·   static content   ·   RUMUSAN</a:t>
+              <a:t>T03B03-S11   ·   static content   ·   KUIZ</a:t>
             </a:r>
           </a:p>
           <a:p>
@@ -7537,7 +7317,7 @@
                 </a:solidFill>
                 <a:latin typeface="Arial"/>
               </a:rPr>
-              <a:t>Rumusan</a:t>
+              <a:t>Kuiz   ·   halaman 1/2</a:t>
             </a:r>
           </a:p>
         </p:txBody>
@@ -7626,23 +7406,191 @@
             <a:r>
               <a:rPr sz="1400" b="0" i="0">
                 <a:solidFill>
-                  <a:srgbClr val="1B5E20"/>
-                </a:solidFill>
-                <a:latin typeface="Arial"/>
-              </a:rPr>
-              <a:t>[A] Pengurusan infrastruktur landskap yang tepat penting bagi memastikan kerja mematuhi lukisan, sempadan dan keperluan teknikal tapak. Komponen infrastruktur merangkumi Landform/Earthmound, Sub-soil Drainage, Dinding Penahan, Fencing, Swale/Natural Drain dan Jalan Akses. Pemahaman terhadap komponen-komponen ini membantu kontraktor mengawal pelaksanaan kerja, mengenal pasti titik kegagalan dan mengurangkan risiko di tapak.</a:t>
-            </a:r>
-          </a:p>
-          <a:p>
-            <a:pPr algn="l"/>
+                  <a:srgbClr val="6A1B9A"/>
+                </a:solidFill>
+                <a:latin typeface="Arial"/>
+              </a:rPr>
+              <a:t>[D] Q1 · Apakah ketebalan maksimum setiap lapisan semasa membina busut tanah (earthmound)?</a:t>
+            </a:r>
+          </a:p>
+          <a:p>
+            <a:pPr algn="l" lvl="1"/>
             <a:r>
               <a:rPr sz="1400" b="0" i="0">
                 <a:solidFill>
-                  <a:srgbClr val="B71C1C"/>
-                </a:solidFill>
-                <a:latin typeface="Arial"/>
-              </a:rPr>
-              <a:t>[P] VISUAL SOKONGAN · PROVISIONAL_VISUAL_DIRECTION · PENDING_BARIAH_UNIT_REVIEW · NOT_MMD_ASSET</a:t>
+                  <a:srgbClr val="6A1B9A"/>
+                </a:solidFill>
+                <a:latin typeface="Arial"/>
+              </a:rPr>
+              <a:t>[D] [dicadangkan betul] Tidak melebihi 300mm setiap lapisan, dan setiap lapisan dipadatkan.</a:t>
+            </a:r>
+          </a:p>
+          <a:p>
+            <a:pPr algn="l" lvl="1"/>
+            <a:r>
+              <a:rPr sz="1400" b="0" i="0">
+                <a:solidFill>
+                  <a:srgbClr val="6A1B9A"/>
+                </a:solidFill>
+                <a:latin typeface="Arial"/>
+              </a:rPr>
+              <a:t>[D] Tidak melebihi 600mm, dipadatkan sekali pada akhir</a:t>
+            </a:r>
+          </a:p>
+          <a:p>
+            <a:pPr algn="l" lvl="1"/>
+            <a:r>
+              <a:rPr sz="1400" b="0" i="0">
+                <a:solidFill>
+                  <a:srgbClr val="6A1B9A"/>
+                </a:solidFill>
+                <a:latin typeface="Arial"/>
+              </a:rPr>
+              <a:t>[D] Tiada had ketebalan selagi jentera boleh memadat</a:t>
+            </a:r>
+          </a:p>
+          <a:p>
+            <a:pPr algn="l" lvl="1"/>
+            <a:r>
+              <a:rPr sz="1400" b="0" i="0">
+                <a:solidFill>
+                  <a:srgbClr val="6A1B9A"/>
+                </a:solidFill>
+                <a:latin typeface="Arial"/>
+              </a:rPr>
+              <a:t>[D] Satu lapisan penuh sehingga ketinggian puncak</a:t>
+            </a:r>
+          </a:p>
+          <a:p>
+            <a:pPr algn="l"/>
+            <a:r>
+              <a:rPr sz="1400" b="0" i="0">
+                <a:solidFill>
+                  <a:srgbClr val="6A1B9A"/>
+                </a:solidFill>
+                <a:latin typeface="Arial"/>
+              </a:rPr>
+              <a:t>[D] Q2 · Mengapakah sistem perparitan di belakang dinding penahan adalah wajib?</a:t>
+            </a:r>
+          </a:p>
+          <a:p>
+            <a:pPr algn="l" lvl="1"/>
+            <a:r>
+              <a:rPr sz="1400" b="0" i="0">
+                <a:solidFill>
+                  <a:srgbClr val="6A1B9A"/>
+                </a:solidFill>
+                <a:latin typeface="Arial"/>
+              </a:rPr>
+              <a:t>[D] [dicadangkan betul] Kerana kegagalan dinding penahan selalunya berpunca daripada tekanan air (hydrostatic pressure).</a:t>
+            </a:r>
+          </a:p>
+          <a:p>
+            <a:pPr algn="l" lvl="1"/>
+            <a:r>
+              <a:rPr sz="1400" b="0" i="0">
+                <a:solidFill>
+                  <a:srgbClr val="6A1B9A"/>
+                </a:solidFill>
+                <a:latin typeface="Arial"/>
+              </a:rPr>
+              <a:t>[D] Kerana ia mengurangkan kos konkrit dinding</a:t>
+            </a:r>
+          </a:p>
+          <a:p>
+            <a:pPr algn="l" lvl="1"/>
+            <a:r>
+              <a:rPr sz="1400" b="0" i="0">
+                <a:solidFill>
+                  <a:srgbClr val="6A1B9A"/>
+                </a:solidFill>
+                <a:latin typeface="Arial"/>
+              </a:rPr>
+              <a:t>[D] Kerana ia diperlukan untuk kemasan estetik belakang dinding</a:t>
+            </a:r>
+          </a:p>
+          <a:p>
+            <a:pPr algn="l" lvl="1"/>
+            <a:r>
+              <a:rPr sz="1400" b="0" i="0">
+                <a:solidFill>
+                  <a:srgbClr val="6A1B9A"/>
+                </a:solidFill>
+                <a:latin typeface="Arial"/>
+              </a:rPr>
+              <a:t>[D] Kerana ia menggantikan keperluan tapak asas</a:t>
+            </a:r>
+          </a:p>
+          <a:p>
+            <a:pPr algn="l"/>
+            <a:r>
+              <a:rPr sz="1400" b="0" i="0">
+                <a:solidFill>
+                  <a:srgbClr val="6A1B9A"/>
+                </a:solidFill>
+                <a:latin typeface="Arial"/>
+              </a:rPr>
+              <a:t>[D] Q3 · Pelan manakah yang menentukan jajaran pagar di tapak?</a:t>
+            </a:r>
+          </a:p>
+          <a:p>
+            <a:pPr algn="l" lvl="1"/>
+            <a:r>
+              <a:rPr sz="1400" b="0" i="0">
+                <a:solidFill>
+                  <a:srgbClr val="6A1B9A"/>
+                </a:solidFill>
+                <a:latin typeface="Arial"/>
+              </a:rPr>
+              <a:t>[D] [dicadangkan betul] Pelan Ukur Sempadan.</a:t>
+            </a:r>
+          </a:p>
+          <a:p>
+            <a:pPr algn="l" lvl="1"/>
+            <a:r>
+              <a:rPr sz="1400" b="0" i="0">
+                <a:solidFill>
+                  <a:srgbClr val="6A1B9A"/>
+                </a:solidFill>
+                <a:latin typeface="Arial"/>
+              </a:rPr>
+              <a:t>[D] Pelan Saliran</a:t>
+            </a:r>
+          </a:p>
+          <a:p>
+            <a:pPr algn="l" lvl="1"/>
+            <a:r>
+              <a:rPr sz="1400" b="0" i="0">
+                <a:solidFill>
+                  <a:srgbClr val="6A1B9A"/>
+                </a:solidFill>
+                <a:latin typeface="Arial"/>
+              </a:rPr>
+              <a:t>[D] Lukisan Struktur Jurutera</a:t>
+            </a:r>
+          </a:p>
+          <a:p>
+            <a:pPr algn="l" lvl="1"/>
+            <a:r>
+              <a:rPr sz="1400" b="0" i="0">
+                <a:solidFill>
+                  <a:srgbClr val="6A1B9A"/>
+                </a:solidFill>
+                <a:latin typeface="Arial"/>
+              </a:rPr>
+              <a:t>[D] Pelan Susun Atur Tanaman</a:t>
+            </a:r>
+          </a:p>
+          <a:p>
+            <a:pPr algn="l"/>
+            <a:r>
+              <a:rPr sz="1400" b="0" i="0">
+                <a:solidFill>
+                  <a:srgbClr val="6A1B9A"/>
+                </a:solidFill>
+                <a:latin typeface="Arial"/>
+              </a:rPr>
+              <a:t>[D] Q4 · Apakah fungsi kamber (camber) pada permukaan jalan akses?</a:t>
             </a:r>
           </a:p>
         </p:txBody>
@@ -7719,49 +7667,37 @@
           <a:p>
             <a:pPr algn="l"/>
             <a:r>
-              <a:rPr sz="1000" b="0" i="0">
+              <a:rPr sz="1000" b="0" i="1">
+                <a:solidFill>
+                  <a:srgbClr val="6B6B6B"/>
+                </a:solidFill>
+                <a:latin typeface="Arial"/>
+              </a:rPr>
+              <a:t>Tiada visual khusus</a:t>
+            </a:r>
+          </a:p>
+          <a:p>
+            <a:pPr algn="l"/>
+            <a:r>
+              <a:rPr sz="800" b="0" i="0">
                 <a:solidFill>
                   <a:srgbClr val="1A1A1A"/>
                 </a:solidFill>
                 <a:latin typeface="Arial"/>
               </a:rPr>
-              <a:t>Satu visual tapak keseluruhan yang menunjukkan kedudukan enam komponen infrastruktur.</a:t>
-            </a:r>
-          </a:p>
-          <a:p>
-            <a:pPr algn="l"/>
-            <a:r>
-              <a:rPr sz="900" b="0" i="0">
-                <a:solidFill>
-                  <a:srgbClr val="6B6B6B"/>
-                </a:solidFill>
-                <a:latin typeface="Arial"/>
-              </a:rPr>
-              <a:t>Tiada rajah sumber — subjek calon sahaja</a:t>
-            </a:r>
-          </a:p>
-          <a:p>
-            <a:pPr algn="l"/>
-            <a:r>
-              <a:rPr sz="900" b="1" i="0">
-                <a:solidFill>
-                  <a:srgbClr val="B71C1C"/>
-                </a:solidFill>
-                <a:latin typeface="Arial"/>
-              </a:rPr>
-              <a:t>PROVISIONAL_VISUAL_DIRECTION · PENDING_BARIAH_UNIT_REVIEW · NOT_MMD_ASSET</a:t>
-            </a:r>
-          </a:p>
-          <a:p>
-            <a:pPr algn="l"/>
-            <a:r>
-              <a:rPr sz="900" b="1" i="0">
-                <a:solidFill>
-                  <a:srgbClr val="B71C1C"/>
-                </a:solidFill>
-                <a:latin typeface="Arial"/>
-              </a:rPr>
-              <a:t>ASET VISUAL BELUM DIHASILKAN — NOT_MMD_ASSET</a:t>
+              <a:t/>
+            </a:r>
+          </a:p>
+          <a:p>
+            <a:pPr algn="l"/>
+            <a:r>
+              <a:rPr sz="1000" b="1" i="0">
+                <a:solidFill>
+                  <a:srgbClr val="6B6B6B"/>
+                </a:solidFill>
+                <a:latin typeface="Arial"/>
+              </a:rPr>
+              <a:t>SUMBER DAN KEPUTUSAN</a:t>
             </a:r>
           </a:p>
           <a:p>
@@ -7769,23 +7705,11 @@
             <a:r>
               <a:rPr sz="800" b="0" i="0">
                 <a:solidFill>
-                  <a:srgbClr val="1A1A1A"/>
-                </a:solidFill>
-                <a:latin typeface="Arial"/>
-              </a:rPr>
-              <a:t/>
-            </a:r>
-          </a:p>
-          <a:p>
-            <a:pPr algn="l"/>
-            <a:r>
-              <a:rPr sz="1000" b="1" i="0">
-                <a:solidFill>
-                  <a:srgbClr val="6B6B6B"/>
-                </a:solidFill>
-                <a:latin typeface="Arial"/>
-              </a:rPr>
-              <a:t>SUMBER DAN KEPUTUSAN</a:t>
+                  <a:srgbClr val="0D47A1"/>
+                </a:solidFill>
+                <a:latin typeface="Arial"/>
+              </a:rPr>
+              <a:t>Baris modul: T03B03-ROW-013, T03B03-ROW-041, T03B03-ROW-048, T03B03-ROW-056, T03B03-ROW-058, T03B03-ROW-063, T03B03-ROW-076</a:t>
             </a:r>
           </a:p>
           <a:p>
@@ -7793,23 +7717,11 @@
             <a:r>
               <a:rPr sz="800" b="0" i="0">
                 <a:solidFill>
-                  <a:srgbClr val="0D47A1"/>
-                </a:solidFill>
-                <a:latin typeface="Arial"/>
-              </a:rPr>
-              <a:t>Skrin struktur — tiada baris modul</a:t>
-            </a:r>
-          </a:p>
-          <a:p>
-            <a:pPr algn="l"/>
-            <a:r>
-              <a:rPr sz="800" b="0" i="0">
-                <a:solidFill>
-                  <a:srgbClr val="6B6B6B"/>
-                </a:solidFill>
-                <a:latin typeface="Arial"/>
-              </a:rPr>
-              <a:t>Keputusan Bariah: D1, D3, D4</a:t>
+                  <a:srgbClr val="6B6B6B"/>
+                </a:solidFill>
+                <a:latin typeface="Arial"/>
+              </a:rPr>
+              <a:t>Keputusan Bariah: A7</a:t>
             </a:r>
           </a:p>
         </p:txBody>
@@ -7844,7 +7756,7 @@
                 </a:solidFill>
                 <a:latin typeface="Arial"/>
               </a:rPr>
-              <a:t>K5-PL06-T03-B03 · skrin 10 daripada 12   ·   TECHNICAL_PROOF · DRAFT_FOR_BARIAH_REVIEW · NOT_INSTRUCTIONALLY_APPROVED · NOT_LEARNER_FACING_FINAL</a:t>
+              <a:t>K5-PL06-T03-B03 · skrin 11 daripada 12  ·  halaman 1/2   ·   TECHNICAL_PROOF · DRAFT_FOR_BARIAH_REVIEW · NOT_INSTRUCTIONALLY_APPROVED · NOT_LEARNER_FACING_FINAL</a:t>
             </a:r>
           </a:p>
         </p:txBody>
@@ -7909,7 +7821,7 @@
                 </a:solidFill>
                 <a:latin typeface="Arial"/>
               </a:rPr>
-              <a:t>Kuiz   ·   halaman 1/2</a:t>
+              <a:t>Kuiz   ·   halaman 2/2</a:t>
             </a:r>
           </a:p>
         </p:txBody>
@@ -7990,11 +7902,11 @@
                 </a:solidFill>
                 <a:latin typeface="Arial"/>
               </a:rPr>
-              <a:t>KANDUNGAN SKRIN</a:t>
-            </a:r>
-          </a:p>
-          <a:p>
-            <a:pPr algn="l"/>
+              <a:t>KANDUNGAN SKRIN (sambungan)</a:t>
+            </a:r>
+          </a:p>
+          <a:p>
+            <a:pPr algn="l" lvl="1"/>
             <a:r>
               <a:rPr sz="1400" b="0" i="0">
                 <a:solidFill>
@@ -8002,7 +7914,7 @@
                 </a:solidFill>
                 <a:latin typeface="Arial"/>
               </a:rPr>
-              <a:t>[D] Q1 · Apakah ketebalan maksimum setiap lapisan semasa membina busut tanah (earthmound)?</a:t>
+              <a:t>[D] [dicadangkan betul] Memberikan kecerunan melintang dari tengah ke tepi supaya air tidak bertakung di permukaan.</a:t>
             </a:r>
           </a:p>
           <a:p>
@@ -8014,7 +7926,7 @@
                 </a:solidFill>
                 <a:latin typeface="Arial"/>
               </a:rPr>
-              <a:t>[D] [dicadangkan betul] Tidak melebihi 300mm setiap lapisan, dan setiap lapisan dipadatkan.</a:t>
+              <a:t>[D] Menambah ketebalan lapisan permukaan di bahagian tengah</a:t>
             </a:r>
           </a:p>
           <a:p>
@@ -8026,7 +7938,7 @@
                 </a:solidFill>
                 <a:latin typeface="Arial"/>
               </a:rPr>
-              <a:t>[D] Tidak melebihi 600mm, dipadatkan sekali pada akhir</a:t>
+              <a:t>[D] Menandakan sempadan jalan untuk pemandu</a:t>
             </a:r>
           </a:p>
           <a:p>
@@ -8038,7 +7950,19 @@
                 </a:solidFill>
                 <a:latin typeface="Arial"/>
               </a:rPr>
-              <a:t>[D] Tiada had ketebalan selagi jentera boleh memadat</a:t>
+              <a:t>[D] Menahan lapisan permukaan daripada bergerak ke tepi</a:t>
+            </a:r>
+          </a:p>
+          <a:p>
+            <a:pPr algn="l"/>
+            <a:r>
+              <a:rPr sz="1400" b="0" i="0">
+                <a:solidFill>
+                  <a:srgbClr val="6A1B9A"/>
+                </a:solidFill>
+                <a:latin typeface="Arial"/>
+              </a:rPr>
+              <a:t>[D] Q5 · Pilih SEMUA ciri yang menepati swale sebagai alternatif kepada longkang konkrit.</a:t>
             </a:r>
           </a:p>
           <a:p>
@@ -8050,11 +7974,11 @@
                 </a:solidFill>
                 <a:latin typeface="Arial"/>
               </a:rPr>
-              <a:t>[D] Satu lapisan penuh sehingga ketinggian puncak</a:t>
-            </a:r>
-          </a:p>
-          <a:p>
-            <a:pPr algn="l"/>
+              <a:t>[D] [dicadangkan betul] Parit yang cetek dan lebar</a:t>
+            </a:r>
+          </a:p>
+          <a:p>
+            <a:pPr algn="l" lvl="1"/>
             <a:r>
               <a:rPr sz="1400" b="0" i="0">
                 <a:solidFill>
@@ -8062,7 +7986,7 @@
                 </a:solidFill>
                 <a:latin typeface="Arial"/>
               </a:rPr>
-              <a:t>[D] Q2 · Mengapakah sistem perparitan di belakang dinding penahan adalah wajib?</a:t>
+              <a:t>[D] [dicadangkan betul] Ditanami rumput atau tumbuhan tahan air</a:t>
             </a:r>
           </a:p>
           <a:p>
@@ -8074,7 +7998,7 @@
                 </a:solidFill>
                 <a:latin typeface="Arial"/>
               </a:rPr>
-              <a:t>[D] [dicadangkan betul] Kerana kegagalan dinding penahan selalunya berpunca daripada tekanan air (hydrostatic pressure).</a:t>
+              <a:t>[D] [dicadangkan betul] Memperlahankan aliran air larian permukaan</a:t>
             </a:r>
           </a:p>
           <a:p>
@@ -8086,7 +8010,7 @@
                 </a:solidFill>
                 <a:latin typeface="Arial"/>
               </a:rPr>
-              <a:t>[D] Kerana ia mengurangkan kos konkrit dinding</a:t>
+              <a:t>[D] [dicadangkan betul] Menggalakkan penyerapan air ke dalam tanah</a:t>
             </a:r>
           </a:p>
           <a:p>
@@ -8098,7 +8022,7 @@
                 </a:solidFill>
                 <a:latin typeface="Arial"/>
               </a:rPr>
-              <a:t>[D] Kerana ia diperlukan untuk kemasan estetik belakang dinding</a:t>
+              <a:t>[D] Dilapisi konkrit di seluruh permukaannya</a:t>
             </a:r>
           </a:p>
           <a:p>
@@ -8110,7 +8034,7 @@
                 </a:solidFill>
                 <a:latin typeface="Arial"/>
               </a:rPr>
-              <a:t>[D] Kerana ia menggantikan keperluan tapak asas</a:t>
+              <a:t>[D] Direka untuk mempercepatkan aliran ke saluran keluar</a:t>
             </a:r>
           </a:p>
           <a:p>
@@ -8118,71 +8042,23 @@
             <a:r>
               <a:rPr sz="1400" b="0" i="0">
                 <a:solidFill>
-                  <a:srgbClr val="6A1B9A"/>
-                </a:solidFill>
-                <a:latin typeface="Arial"/>
-              </a:rPr>
-              <a:t>[D] Q3 · Pelan manakah yang menentukan jajaran pagar di tapak?</a:t>
-            </a:r>
-          </a:p>
-          <a:p>
-            <a:pPr algn="l" lvl="1"/>
+                  <a:srgbClr val="1B5E20"/>
+                </a:solidFill>
+                <a:latin typeface="Arial"/>
+              </a:rPr>
+              <a:t>[A] Markah lulus 60 peratus</a:t>
+            </a:r>
+          </a:p>
+          <a:p>
+            <a:pPr algn="l"/>
             <a:r>
               <a:rPr sz="1400" b="0" i="0">
                 <a:solidFill>
-                  <a:srgbClr val="6A1B9A"/>
-                </a:solidFill>
-                <a:latin typeface="Arial"/>
-              </a:rPr>
-              <a:t>[D] [dicadangkan betul] Pelan Ukur Sempadan.</a:t>
-            </a:r>
-          </a:p>
-          <a:p>
-            <a:pPr algn="l" lvl="1"/>
-            <a:r>
-              <a:rPr sz="1400" b="0" i="0">
-                <a:solidFill>
-                  <a:srgbClr val="6A1B9A"/>
-                </a:solidFill>
-                <a:latin typeface="Arial"/>
-              </a:rPr>
-              <a:t>[D] Pelan Saliran</a:t>
-            </a:r>
-          </a:p>
-          <a:p>
-            <a:pPr algn="l" lvl="1"/>
-            <a:r>
-              <a:rPr sz="1400" b="0" i="0">
-                <a:solidFill>
-                  <a:srgbClr val="6A1B9A"/>
-                </a:solidFill>
-                <a:latin typeface="Arial"/>
-              </a:rPr>
-              <a:t>[D] Lukisan Struktur Jurutera</a:t>
-            </a:r>
-          </a:p>
-          <a:p>
-            <a:pPr algn="l" lvl="1"/>
-            <a:r>
-              <a:rPr sz="1400" b="0" i="0">
-                <a:solidFill>
-                  <a:srgbClr val="6A1B9A"/>
-                </a:solidFill>
-                <a:latin typeface="Arial"/>
-              </a:rPr>
-              <a:t>[D] Pelan Susun Atur Tanaman</a:t>
-            </a:r>
-          </a:p>
-          <a:p>
-            <a:pPr algn="l"/>
-            <a:r>
-              <a:rPr sz="1400" b="0" i="0">
-                <a:solidFill>
-                  <a:srgbClr val="6A1B9A"/>
-                </a:solidFill>
-                <a:latin typeface="Arial"/>
-              </a:rPr>
-              <a:t>[D] Q4 · Apakah fungsi kamber (camber) pada permukaan jalan akses?</a:t>
+                  <a:srgbClr val="B71C1C"/>
+                </a:solidFill>
+                <a:latin typeface="Arial"/>
+              </a:rPr>
+              <a:t>[P] KUNCI JAWAPAN: DRAFTED_NOT_APPROVED</a:t>
             </a:r>
           </a:p>
         </p:txBody>
@@ -8348,7 +8224,7 @@
                 </a:solidFill>
                 <a:latin typeface="Arial"/>
               </a:rPr>
-              <a:t>K5-PL06-T03-B03 · skrin 11 daripada 12  ·  halaman 1/2   ·   TECHNICAL_PROOF · DRAFT_FOR_BARIAH_REVIEW · NOT_INSTRUCTIONALLY_APPROVED · NOT_LEARNER_FACING_FINAL</a:t>
+              <a:t>K5-PL06-T03-B03 · skrin 11 daripada 12  ·  halaman 2/2   ·   TECHNICAL_PROOF · DRAFT_FOR_BARIAH_REVIEW · NOT_INSTRUCTIONALLY_APPROVED · NOT_LEARNER_FACING_FINAL</a:t>
             </a:r>
           </a:p>
         </p:txBody>
@@ -8401,7 +8277,7 @@
                 </a:solidFill>
                 <a:latin typeface="Arial"/>
               </a:rPr>
-              <a:t>T03B03-S11   ·   static content   ·   KUIZ</a:t>
+              <a:t>T03B03-S12   ·   static content   ·   TAMAT</a:t>
             </a:r>
           </a:p>
           <a:p>
@@ -8413,7 +8289,7 @@
                 </a:solidFill>
                 <a:latin typeface="Arial"/>
               </a:rPr>
-              <a:t>Kuiz   ·   halaman 2/2</a:t>
+              <a:t>Tamat Bahagian</a:t>
             </a:r>
           </a:p>
         </p:txBody>
@@ -8494,163 +8370,31 @@
                 </a:solidFill>
                 <a:latin typeface="Arial"/>
               </a:rPr>
-              <a:t>KANDUNGAN SKRIN (sambungan)</a:t>
-            </a:r>
-          </a:p>
-          <a:p>
-            <a:pPr algn="l" lvl="1"/>
+              <a:t>KANDUNGAN SKRIN</a:t>
+            </a:r>
+          </a:p>
+          <a:p>
+            <a:pPr algn="l"/>
             <a:r>
               <a:rPr sz="1400" b="0" i="0">
                 <a:solidFill>
-                  <a:srgbClr val="6A1B9A"/>
-                </a:solidFill>
-                <a:latin typeface="Arial"/>
-              </a:rPr>
-              <a:t>[D] [dicadangkan betul] Memberikan kecerunan melintang dari tengah ke tepi supaya air tidak bertakung di permukaan.</a:t>
-            </a:r>
-          </a:p>
-          <a:p>
-            <a:pPr algn="l" lvl="1"/>
-            <a:r>
-              <a:rPr sz="1400" b="0" i="0">
-                <a:solidFill>
-                  <a:srgbClr val="6A1B9A"/>
-                </a:solidFill>
-                <a:latin typeface="Arial"/>
-              </a:rPr>
-              <a:t>[D] Menambah ketebalan lapisan permukaan di bahagian tengah</a:t>
-            </a:r>
-          </a:p>
-          <a:p>
-            <a:pPr algn="l" lvl="1"/>
-            <a:r>
-              <a:rPr sz="1400" b="0" i="0">
-                <a:solidFill>
-                  <a:srgbClr val="6A1B9A"/>
-                </a:solidFill>
-                <a:latin typeface="Arial"/>
-              </a:rPr>
-              <a:t>[D] Menandakan sempadan jalan untuk pemandu</a:t>
-            </a:r>
-          </a:p>
-          <a:p>
-            <a:pPr algn="l" lvl="1"/>
-            <a:r>
-              <a:rPr sz="1400" b="0" i="0">
-                <a:solidFill>
-                  <a:srgbClr val="6A1B9A"/>
-                </a:solidFill>
-                <a:latin typeface="Arial"/>
-              </a:rPr>
-              <a:t>[D] Menahan lapisan permukaan daripada bergerak ke tepi</a:t>
-            </a:r>
-          </a:p>
-          <a:p>
-            <a:pPr algn="l"/>
-            <a:r>
-              <a:rPr sz="1400" b="0" i="0">
-                <a:solidFill>
-                  <a:srgbClr val="6A1B9A"/>
-                </a:solidFill>
-                <a:latin typeface="Arial"/>
-              </a:rPr>
-              <a:t>[D] Q5 · Pilih SEMUA ciri yang menepati swale sebagai alternatif kepada longkang konkrit.</a:t>
-            </a:r>
-          </a:p>
-          <a:p>
-            <a:pPr algn="l" lvl="1"/>
-            <a:r>
-              <a:rPr sz="1400" b="0" i="0">
-                <a:solidFill>
-                  <a:srgbClr val="6A1B9A"/>
-                </a:solidFill>
-                <a:latin typeface="Arial"/>
-              </a:rPr>
-              <a:t>[D] [dicadangkan betul] Parit yang cetek dan lebar</a:t>
-            </a:r>
-          </a:p>
-          <a:p>
-            <a:pPr algn="l" lvl="1"/>
-            <a:r>
-              <a:rPr sz="1400" b="0" i="0">
-                <a:solidFill>
-                  <a:srgbClr val="6A1B9A"/>
-                </a:solidFill>
-                <a:latin typeface="Arial"/>
-              </a:rPr>
-              <a:t>[D] [dicadangkan betul] Ditanami rumput atau tumbuhan tahan air</a:t>
-            </a:r>
-          </a:p>
-          <a:p>
-            <a:pPr algn="l" lvl="1"/>
-            <a:r>
-              <a:rPr sz="1400" b="0" i="0">
-                <a:solidFill>
-                  <a:srgbClr val="6A1B9A"/>
-                </a:solidFill>
-                <a:latin typeface="Arial"/>
-              </a:rPr>
-              <a:t>[D] [dicadangkan betul] Memperlahankan aliran air larian permukaan</a:t>
-            </a:r>
-          </a:p>
-          <a:p>
-            <a:pPr algn="l" lvl="1"/>
-            <a:r>
-              <a:rPr sz="1400" b="0" i="0">
-                <a:solidFill>
-                  <a:srgbClr val="6A1B9A"/>
-                </a:solidFill>
-                <a:latin typeface="Arial"/>
-              </a:rPr>
-              <a:t>[D] [dicadangkan betul] Menggalakkan penyerapan air ke dalam tanah</a:t>
-            </a:r>
-          </a:p>
-          <a:p>
-            <a:pPr algn="l" lvl="1"/>
-            <a:r>
-              <a:rPr sz="1400" b="0" i="0">
-                <a:solidFill>
-                  <a:srgbClr val="6A1B9A"/>
-                </a:solidFill>
-                <a:latin typeface="Arial"/>
-              </a:rPr>
-              <a:t>[D] Dilapisi konkrit di seluruh permukaannya</a:t>
-            </a:r>
-          </a:p>
-          <a:p>
-            <a:pPr algn="l" lvl="1"/>
-            <a:r>
-              <a:rPr sz="1400" b="0" i="0">
-                <a:solidFill>
-                  <a:srgbClr val="6A1B9A"/>
-                </a:solidFill>
-                <a:latin typeface="Arial"/>
-              </a:rPr>
-              <a:t>[D] Direka untuk mempercepatkan aliran ke saluran keluar</a:t>
-            </a:r>
-          </a:p>
-          <a:p>
-            <a:pPr algn="l"/>
-            <a:r>
-              <a:rPr sz="1400" b="0" i="0">
-                <a:solidFill>
                   <a:srgbClr val="1B5E20"/>
                 </a:solidFill>
                 <a:latin typeface="Arial"/>
               </a:rPr>
-              <a:t>[A] Markah lulus 60 peratus</a:t>
-            </a:r>
-          </a:p>
-          <a:p>
-            <a:pPr algn="l"/>
-            <a:r>
-              <a:rPr sz="1400" b="0" i="0">
-                <a:solidFill>
-                  <a:srgbClr val="B71C1C"/>
-                </a:solidFill>
-                <a:latin typeface="Arial"/>
-              </a:rPr>
-              <a:t>[P] KUNCI JAWAPAN: DRAFTED_NOT_APPROVED</a:t>
+              <a:t>[A] Tamat Bahagian 3. Teruskan pembelajaran ke bahagian seterusnya</a:t>
+            </a:r>
+          </a:p>
+          <a:p>
+            <a:pPr algn="l"/>
+            <a:r>
+              <a:rPr sz="1200" b="0" i="0">
+                <a:solidFill>
+                  <a:srgbClr val="6B6B6B"/>
+                </a:solidFill>
+                <a:latin typeface="Arial"/>
+              </a:rPr>
+              <a:t>[U] SETERUSNYA</a:t>
             </a:r>
           </a:p>
         </p:txBody>
@@ -8769,7 +8513,7 @@
                 </a:solidFill>
                 <a:latin typeface="Arial"/>
               </a:rPr>
-              <a:t>Baris modul: T03B03-ROW-013, T03B03-ROW-041, T03B03-ROW-048, T03B03-ROW-056, T03B03-ROW-058, T03B03-ROW-063, T03B03-ROW-076</a:t>
+              <a:t>Skrin struktur — tiada baris modul</a:t>
             </a:r>
           </a:p>
           <a:p>
@@ -8781,7 +8525,7 @@
                 </a:solidFill>
                 <a:latin typeface="Arial"/>
               </a:rPr>
-              <a:t>Keputusan Bariah: A7</a:t>
+              <a:t>Keputusan Bariah: D4</a:t>
             </a:r>
           </a:p>
         </p:txBody>
@@ -8816,7 +8560,7 @@
                 </a:solidFill>
                 <a:latin typeface="Arial"/>
               </a:rPr>
-              <a:t>K5-PL06-T03-B03 · skrin 11 daripada 12  ·  halaman 2/2   ·   TECHNICAL_PROOF · DRAFT_FOR_BARIAH_REVIEW · NOT_INSTRUCTIONALLY_APPROVED · NOT_LEARNER_FACING_FINAL</a:t>
+              <a:t>K5-PL06-T03-B03 · skrin 12 daripada 12   ·   TECHNICAL_PROOF · DRAFT_FOR_BARIAH_REVIEW · NOT_INSTRUCTIONALLY_APPROVED · NOT_LEARNER_FACING_FINAL</a:t>
             </a:r>
           </a:p>
         </p:txBody>
@@ -8829,7 +8573,7 @@
 </p:sld>
 </file>
 
-<file path=ppt/slides/slide18.xml><?xml version="1.0" encoding="utf-8"?>
+<file path=ppt/slides/slide2.xml><?xml version="1.0" encoding="utf-8"?>
 <p:sld xmlns:a="http://schemas.openxmlformats.org/drawingml/2006/main" xmlns:p="http://schemas.openxmlformats.org/presentationml/2006/main" xmlns:r="http://schemas.openxmlformats.org/officeDocument/2006/relationships">
   <p:cSld>
     <p:spTree>
@@ -8869,7 +8613,7 @@
                 </a:solidFill>
                 <a:latin typeface="Arial"/>
               </a:rPr>
-              <a:t>T03B03-S12   ·   static content   ·   TAMAT</a:t>
+              <a:t>T03B03-S01   ·   static content   ·   SHELL_ENTRY</a:t>
             </a:r>
           </a:p>
           <a:p>
@@ -8881,7 +8625,7 @@
                 </a:solidFill>
                 <a:latin typeface="Arial"/>
               </a:rPr>
-              <a:t>Tamat Bahagian</a:t>
+              <a:t>Infrastruktur</a:t>
             </a:r>
           </a:p>
         </p:txBody>
@@ -8970,11 +8714,23 @@
             <a:r>
               <a:rPr sz="1400" b="0" i="0">
                 <a:solidFill>
+                  <a:srgbClr val="0D47A1"/>
+                </a:solidFill>
+                <a:latin typeface="Arial"/>
+              </a:rPr>
+              <a:t>[S] Infrastruktur</a:t>
+            </a:r>
+          </a:p>
+          <a:p>
+            <a:pPr algn="l"/>
+            <a:r>
+              <a:rPr sz="1400" b="0" i="0">
+                <a:solidFill>
                   <a:srgbClr val="1B5E20"/>
                 </a:solidFill>
                 <a:latin typeface="Arial"/>
               </a:rPr>
-              <a:t>[A] Tamat Bahagian 3. Teruskan pembelajaran ke bahagian seterusnya</a:t>
+              <a:t>[A] Narator: Hilmi</a:t>
             </a:r>
           </a:p>
           <a:p>
@@ -8986,7 +8742,7 @@
                 </a:solidFill>
                 <a:latin typeface="Arial"/>
               </a:rPr>
-              <a:t>[U] SETERUSNYA</a:t>
+              <a:t>[U] MULA</a:t>
             </a:r>
           </a:p>
         </p:txBody>
@@ -9105,7 +8861,7 @@
                 </a:solidFill>
                 <a:latin typeface="Arial"/>
               </a:rPr>
-              <a:t>Skrin struktur — tiada baris modul</a:t>
+              <a:t>Baris modul: T03B03-ROW-001</a:t>
             </a:r>
           </a:p>
           <a:p>
@@ -9117,7 +8873,7 @@
                 </a:solidFill>
                 <a:latin typeface="Arial"/>
               </a:rPr>
-              <a:t>Keputusan Bariah: D4</a:t>
+              <a:t>Keputusan Bariah: D2, D4</a:t>
             </a:r>
           </a:p>
         </p:txBody>
@@ -9152,7 +8908,7 @@
                 </a:solidFill>
                 <a:latin typeface="Arial"/>
               </a:rPr>
-              <a:t>K5-PL06-T03-B03 · skrin 12 daripada 12   ·   TECHNICAL_PROOF · DRAFT_FOR_BARIAH_REVIEW · NOT_INSTRUCTIONALLY_APPROVED · NOT_LEARNER_FACING_FINAL</a:t>
+              <a:t>K5-PL06-T03-B03 · skrin 1 daripada 12   ·   TECHNICAL_PROOF · DRAFT_FOR_BARIAH_REVIEW · NOT_INSTRUCTIONALLY_APPROVED · NOT_LEARNER_FACING_FINAL</a:t>
             </a:r>
           </a:p>
         </p:txBody>
@@ -9165,7 +8921,7 @@
 </p:sld>
 </file>
 
-<file path=ppt/slides/slide2.xml><?xml version="1.0" encoding="utf-8"?>
+<file path=ppt/slides/slide3.xml><?xml version="1.0" encoding="utf-8"?>
 <p:sld xmlns:a="http://schemas.openxmlformats.org/drawingml/2006/main" xmlns:p="http://schemas.openxmlformats.org/presentationml/2006/main" xmlns:r="http://schemas.openxmlformats.org/officeDocument/2006/relationships">
   <p:cSld>
     <p:spTree>
@@ -9205,7 +8961,7 @@
                 </a:solidFill>
                 <a:latin typeface="Arial"/>
               </a:rPr>
-              <a:t>T03B03-S01   ·   static content   ·   SHELL_ENTRY</a:t>
+              <a:t>T03B03-S02   ·   dialog dua penutur (E1)   ·   SCENARIO</a:t>
             </a:r>
           </a:p>
           <a:p>
@@ -9217,7 +8973,7 @@
                 </a:solidFill>
                 <a:latin typeface="Arial"/>
               </a:rPr>
-              <a:t>Infrastruktur</a:t>
+              <a:t>Situasi di tapak</a:t>
             </a:r>
           </a:p>
         </p:txBody>
@@ -9306,11 +9062,11 @@
             <a:r>
               <a:rPr sz="1400" b="0" i="0">
                 <a:solidFill>
-                  <a:srgbClr val="0D47A1"/>
-                </a:solidFill>
-                <a:latin typeface="Arial"/>
-              </a:rPr>
-              <a:t>[S] Infrastruktur</a:t>
+                  <a:srgbClr val="1B5E20"/>
+                </a:solidFill>
+                <a:latin typeface="Arial"/>
+              </a:rPr>
+              <a:t>[A] Alya: Encik Rahman, jajaran pagar sudah ditanda di tapak. Boleh kita teruskan pemasangan sementara kerja lain berjalan?</a:t>
             </a:r>
           </a:p>
           <a:p>
@@ -9322,19 +9078,55 @@
                 </a:solidFill>
                 <a:latin typeface="Arial"/>
               </a:rPr>
-              <a:t>[A] Narator: Hilmi</a:t>
-            </a:r>
-          </a:p>
-          <a:p>
-            <a:pPr algn="l"/>
-            <a:r>
-              <a:rPr sz="1200" b="0" i="0">
-                <a:solidFill>
-                  <a:srgbClr val="6B6B6B"/>
-                </a:solidFill>
-                <a:latin typeface="Arial"/>
-              </a:rPr>
-              <a:t>[U] MULA</a:t>
+              <a:t>[A] Encik Rahman: Belum, Alya. Kedudukan pagar perlu disemak dengan Pelan Ukur Sempadan, manakala dinding penahan mesti mengikut lukisan struktur yang diluluskan.</a:t>
+            </a:r>
+          </a:p>
+          <a:p>
+            <a:pPr algn="l"/>
+            <a:r>
+              <a:rPr sz="1400" b="0" i="0">
+                <a:solidFill>
+                  <a:srgbClr val="1B5E20"/>
+                </a:solidFill>
+                <a:latin typeface="Arial"/>
+              </a:rPr>
+              <a:t>[A] Alya: Kalau keadaan sebenar tapak tidak sama dengan lukisan, bolehkah kedudukannya kita ubah sedikit?</a:t>
+            </a:r>
+          </a:p>
+          <a:p>
+            <a:pPr algn="l"/>
+            <a:r>
+              <a:rPr sz="1400" b="0" i="0">
+                <a:solidFill>
+                  <a:srgbClr val="1B5E20"/>
+                </a:solidFill>
+                <a:latin typeface="Arial"/>
+              </a:rPr>
+              <a:t>[A] Encik Rahman: Jangan ubah terus di tapak. Catat perbezaannya dan dapatkan kelulusan yang diperlukan sebelum kerja diteruskan.</a:t>
+            </a:r>
+          </a:p>
+          <a:p>
+            <a:pPr algn="l"/>
+            <a:r>
+              <a:rPr sz="1400" b="0" i="0">
+                <a:solidFill>
+                  <a:srgbClr val="1B5E20"/>
+                </a:solidFill>
+                <a:latin typeface="Arial"/>
+              </a:rPr>
+              <a:t>[A] Alya: Jadi semakan dokumen dan keadaan tapak terlebih dahulu dapat mengelakkan masalah sempadan, kegagalan kerja dan pembaikan semula.</a:t>
+            </a:r>
+          </a:p>
+          <a:p>
+            <a:pPr algn="l"/>
+            <a:r>
+              <a:rPr sz="1400" b="0" i="0">
+                <a:solidFill>
+                  <a:srgbClr val="B71C1C"/>
+                </a:solidFill>
+                <a:latin typeface="Arial"/>
+              </a:rPr>
+              <a:t>[P] TECHNICAL_PROOF · DRAFT_FOR_BARIAH_REVIEW · NOT_INSTRUCTIONALLY_APPROVED · NOT_LEARNER_FACING_FINAL</a:t>
             </a:r>
           </a:p>
         </p:txBody>
@@ -9453,7 +9245,7 @@
                 </a:solidFill>
                 <a:latin typeface="Arial"/>
               </a:rPr>
-              <a:t>Baris modul: T03B03-ROW-001</a:t>
+              <a:t>Baris modul: T03B03-ROW-037, T03B03-ROW-047, T03B03-ROW-048</a:t>
             </a:r>
           </a:p>
           <a:p>
@@ -9465,7 +9257,7 @@
                 </a:solidFill>
                 <a:latin typeface="Arial"/>
               </a:rPr>
-              <a:t>Keputusan Bariah: D2, D4</a:t>
+              <a:t>Keputusan Bariah: C1, C3, E1, E2</a:t>
             </a:r>
           </a:p>
         </p:txBody>
@@ -9500,7 +9292,7 @@
                 </a:solidFill>
                 <a:latin typeface="Arial"/>
               </a:rPr>
-              <a:t>K5-PL06-T03-B03 · skrin 1 daripada 12   ·   TECHNICAL_PROOF · DRAFT_FOR_BARIAH_REVIEW · NOT_INSTRUCTIONALLY_APPROVED · NOT_LEARNER_FACING_FINAL</a:t>
+              <a:t>K5-PL06-T03-B03 · skrin 2 daripada 12   ·   TECHNICAL_PROOF · DRAFT_FOR_BARIAH_REVIEW · NOT_INSTRUCTIONALLY_APPROVED · NOT_LEARNER_FACING_FINAL</a:t>
             </a:r>
           </a:p>
         </p:txBody>
@@ -9513,7 +9305,7 @@
 </p:sld>
 </file>
 
-<file path=ppt/slides/slide3.xml><?xml version="1.0" encoding="utf-8"?>
+<file path=ppt/slides/slide4.xml><?xml version="1.0" encoding="utf-8"?>
 <p:sld xmlns:a="http://schemas.openxmlformats.org/drawingml/2006/main" xmlns:p="http://schemas.openxmlformats.org/presentationml/2006/main" xmlns:r="http://schemas.openxmlformats.org/officeDocument/2006/relationships">
   <p:cSld>
     <p:spTree>
@@ -9553,7 +9345,7 @@
                 </a:solidFill>
                 <a:latin typeface="Arial"/>
               </a:rPr>
-              <a:t>T03B03-S02   ·   dialog dua penutur (E1)   ·   SCENARIO</a:t>
+              <a:t>T03B03-S03   ·   static content   ·   SHELL_ORIENTATION</a:t>
             </a:r>
           </a:p>
           <a:p>
@@ -9565,7 +9357,7 @@
                 </a:solidFill>
                 <a:latin typeface="Arial"/>
               </a:rPr>
-              <a:t>Situasi di tapak</a:t>
+              <a:t>Apa yang anda akan pelajari</a:t>
             </a:r>
           </a:p>
         </p:txBody>
@@ -9652,13 +9444,25 @@
           <a:p>
             <a:pPr algn="l"/>
             <a:r>
+              <a:rPr sz="1200" b="0" i="0">
+                <a:solidFill>
+                  <a:srgbClr val="6B6B6B"/>
+                </a:solidFill>
+                <a:latin typeface="Arial"/>
+              </a:rPr>
+              <a:t>[U] Klik setiap tajuk untuk memaparkan maklumat.</a:t>
+            </a:r>
+          </a:p>
+          <a:p>
+            <a:pPr algn="l"/>
+            <a:r>
               <a:rPr sz="1400" b="0" i="0">
                 <a:solidFill>
-                  <a:srgbClr val="1B5E20"/>
-                </a:solidFill>
-                <a:latin typeface="Arial"/>
-              </a:rPr>
-              <a:t>[A] Alya: Encik Rahman, jajaran pagar sudah ditanda di tapak. Boleh kita teruskan pemasangan sementara kerja lain berjalan?</a:t>
+                  <a:srgbClr val="0D47A1"/>
+                </a:solidFill>
+                <a:latin typeface="Arial"/>
+              </a:rPr>
+              <a:t>[S] Landform / Earthmound</a:t>
             </a:r>
           </a:p>
           <a:p>
@@ -9666,11 +9470,11 @@
             <a:r>
               <a:rPr sz="1400" b="0" i="0">
                 <a:solidFill>
-                  <a:srgbClr val="1B5E20"/>
-                </a:solidFill>
-                <a:latin typeface="Arial"/>
-              </a:rPr>
-              <a:t>[A] Encik Rahman: Belum, Alya. Kedudukan pagar perlu disemak dengan Pelan Ukur Sempadan, manakala dinding penahan mesti mengikut lukisan struktur yang diluluskan.</a:t>
+                  <a:srgbClr val="0D47A1"/>
+                </a:solidFill>
+                <a:latin typeface="Arial"/>
+              </a:rPr>
+              <a:t>[S] Sub soil drainage</a:t>
             </a:r>
           </a:p>
           <a:p>
@@ -9678,11 +9482,11 @@
             <a:r>
               <a:rPr sz="1400" b="0" i="0">
                 <a:solidFill>
-                  <a:srgbClr val="1B5E20"/>
-                </a:solidFill>
-                <a:latin typeface="Arial"/>
-              </a:rPr>
-              <a:t>[A] Alya: Kalau keadaan sebenar tapak tidak sama dengan lukisan, bolehkah kedudukannya kita ubah sedikit?</a:t>
+                  <a:srgbClr val="0D47A1"/>
+                </a:solidFill>
+                <a:latin typeface="Arial"/>
+              </a:rPr>
+              <a:t>[S] Dinding Penahan (Retaining Wall)</a:t>
             </a:r>
           </a:p>
           <a:p>
@@ -9690,11 +9494,11 @@
             <a:r>
               <a:rPr sz="1400" b="0" i="0">
                 <a:solidFill>
-                  <a:srgbClr val="1B5E20"/>
-                </a:solidFill>
-                <a:latin typeface="Arial"/>
-              </a:rPr>
-              <a:t>[A] Encik Rahman: Jangan ubah terus di tapak. Catat perbezaannya dan dapatkan kelulusan yang diperlukan sebelum kerja diteruskan.</a:t>
+                  <a:srgbClr val="0D47A1"/>
+                </a:solidFill>
+                <a:latin typeface="Arial"/>
+              </a:rPr>
+              <a:t>[S] Fencing</a:t>
             </a:r>
           </a:p>
           <a:p>
@@ -9702,11 +9506,11 @@
             <a:r>
               <a:rPr sz="1400" b="0" i="0">
                 <a:solidFill>
-                  <a:srgbClr val="1B5E20"/>
-                </a:solidFill>
-                <a:latin typeface="Arial"/>
-              </a:rPr>
-              <a:t>[A] Alya: Jadi semakan dokumen dan keadaan tapak terlebih dahulu dapat mengelakkan masalah sempadan, kegagalan kerja dan pembaikan semula.</a:t>
+                  <a:srgbClr val="0D47A1"/>
+                </a:solidFill>
+                <a:latin typeface="Arial"/>
+              </a:rPr>
+              <a:t>[S] Swale/ Natural Drain</a:t>
             </a:r>
           </a:p>
           <a:p>
@@ -9714,11 +9518,11 @@
             <a:r>
               <a:rPr sz="1400" b="0" i="0">
                 <a:solidFill>
-                  <a:srgbClr val="B71C1C"/>
-                </a:solidFill>
-                <a:latin typeface="Arial"/>
-              </a:rPr>
-              <a:t>[P] TECHNICAL_PROOF · DRAFT_FOR_BARIAH_REVIEW · NOT_INSTRUCTIONALLY_APPROVED · NOT_LEARNER_FACING_FINAL</a:t>
+                  <a:srgbClr val="0D47A1"/>
+                </a:solidFill>
+                <a:latin typeface="Arial"/>
+              </a:rPr>
+              <a:t>[S] Jalan akses</a:t>
             </a:r>
           </a:p>
         </p:txBody>
@@ -9837,7 +9641,7 @@
                 </a:solidFill>
                 <a:latin typeface="Arial"/>
               </a:rPr>
-              <a:t>Baris modul: T03B03-ROW-037, T03B03-ROW-047, T03B03-ROW-048</a:t>
+              <a:t>Baris modul: T03B03-ROW-002, T03B03-ROW-016, T03B03-ROW-032, T03B03-ROW-042, T03B03-ROW-055, T03B03-ROW-064</a:t>
             </a:r>
           </a:p>
           <a:p>
@@ -9849,7 +9653,7 @@
                 </a:solidFill>
                 <a:latin typeface="Arial"/>
               </a:rPr>
-              <a:t>Keputusan Bariah: C1, C3, E1, E2</a:t>
+              <a:t>Keputusan Bariah: A1</a:t>
             </a:r>
           </a:p>
         </p:txBody>
@@ -9884,7 +9688,7 @@
                 </a:solidFill>
                 <a:latin typeface="Arial"/>
               </a:rPr>
-              <a:t>K5-PL06-T03-B03 · skrin 2 daripada 12   ·   TECHNICAL_PROOF · DRAFT_FOR_BARIAH_REVIEW · NOT_INSTRUCTIONALLY_APPROVED · NOT_LEARNER_FACING_FINAL</a:t>
+              <a:t>K5-PL06-T03-B03 · skrin 3 daripada 12   ·   TECHNICAL_PROOF · DRAFT_FOR_BARIAH_REVIEW · NOT_INSTRUCTIONALLY_APPROVED · NOT_LEARNER_FACING_FINAL</a:t>
             </a:r>
           </a:p>
         </p:txBody>
@@ -9897,7 +9701,7 @@
 </p:sld>
 </file>
 
-<file path=ppt/slides/slide4.xml><?xml version="1.0" encoding="utf-8"?>
+<file path=ppt/slides/slide5.xml><?xml version="1.0" encoding="utf-8"?>
 <p:sld xmlns:a="http://schemas.openxmlformats.org/drawingml/2006/main" xmlns:p="http://schemas.openxmlformats.org/presentationml/2006/main" xmlns:r="http://schemas.openxmlformats.org/officeDocument/2006/relationships">
   <p:cSld>
     <p:spTree>
@@ -9937,7 +9741,7 @@
                 </a:solidFill>
                 <a:latin typeface="Arial"/>
               </a:rPr>
-              <a:t>T03B03-S03   ·   static content   ·   SHELL_ORIENTATION</a:t>
+              <a:t>T03B03-S04   ·   Click-to-Reveal   ·   CONTENT</a:t>
             </a:r>
           </a:p>
           <a:p>
@@ -9949,7 +9753,7 @@
                 </a:solidFill>
                 <a:latin typeface="Arial"/>
               </a:rPr>
-              <a:t>Apa yang anda akan pelajari</a:t>
+              <a:t>Landform / Earthmound   ·   halaman 1/2</a:t>
             </a:r>
           </a:p>
         </p:txBody>
@@ -10036,18 +9840,6 @@
           <a:p>
             <a:pPr algn="l"/>
             <a:r>
-              <a:rPr sz="1200" b="0" i="0">
-                <a:solidFill>
-                  <a:srgbClr val="6B6B6B"/>
-                </a:solidFill>
-                <a:latin typeface="Arial"/>
-              </a:rPr>
-              <a:t>[U] Klik setiap tajuk untuk memaparkan maklumat.</a:t>
-            </a:r>
-          </a:p>
-          <a:p>
-            <a:pPr algn="l"/>
-            <a:r>
               <a:rPr sz="1400" b="0" i="0">
                 <a:solidFill>
                   <a:srgbClr val="0D47A1"/>
@@ -10066,7 +9858,7 @@
                 </a:solidFill>
                 <a:latin typeface="Arial"/>
               </a:rPr>
-              <a:t>[S] Sub soil drainage</a:t>
+              <a:t>[S~] Busut tanah dibina berlapis, setiap lapisan tidak melebihi 300mm tebal, dan setiap lapisan dipadatkan.</a:t>
             </a:r>
           </a:p>
           <a:p>
@@ -10078,11 +9870,11 @@
                 </a:solidFill>
                 <a:latin typeface="Arial"/>
               </a:rPr>
-              <a:t>[S] Dinding Penahan (Retaining Wall)</a:t>
-            </a:r>
-          </a:p>
-          <a:p>
-            <a:pPr algn="l"/>
+              <a:t>[S] Fungsi</a:t>
+            </a:r>
+          </a:p>
+          <a:p>
+            <a:pPr algn="l" lvl="1"/>
             <a:r>
               <a:rPr sz="1400" b="0" i="0">
                 <a:solidFill>
@@ -10090,11 +9882,11 @@
                 </a:solidFill>
                 <a:latin typeface="Arial"/>
               </a:rPr>
-              <a:t>[S] Fencing</a:t>
-            </a:r>
-          </a:p>
-          <a:p>
-            <a:pPr algn="l"/>
+              <a:t>[S] Mewujudkan pemandangan yang menarik secara visual serta mengurangkan kerataan tapak.</a:t>
+            </a:r>
+          </a:p>
+          <a:p>
+            <a:pPr algn="l" lvl="1"/>
             <a:r>
               <a:rPr sz="1400" b="0" i="0">
                 <a:solidFill>
@@ -10102,11 +9894,11 @@
                 </a:solidFill>
                 <a:latin typeface="Arial"/>
               </a:rPr>
-              <a:t>[S] Swale/ Natural Drain</a:t>
-            </a:r>
-          </a:p>
-          <a:p>
-            <a:pPr algn="l"/>
+              <a:t>[S] Berfungsi sebagai penghadang visual atau bunyi.</a:t>
+            </a:r>
+          </a:p>
+          <a:p>
+            <a:pPr algn="l" lvl="1"/>
             <a:r>
               <a:rPr sz="1400" b="0" i="0">
                 <a:solidFill>
@@ -10114,7 +9906,79 @@
                 </a:solidFill>
                 <a:latin typeface="Arial"/>
               </a:rPr>
-              <a:t>[S] Jalan akses</a:t>
+              <a:t>[S] Mengawal dan mengarahkan aliran air permukaan.</a:t>
+            </a:r>
+          </a:p>
+          <a:p>
+            <a:pPr algn="l"/>
+            <a:r>
+              <a:rPr sz="1400" b="0" i="0">
+                <a:solidFill>
+                  <a:srgbClr val="0D47A1"/>
+                </a:solidFill>
+                <a:latin typeface="Arial"/>
+              </a:rPr>
+              <a:t>[S] Fokus Utama Kontraktor</a:t>
+            </a:r>
+          </a:p>
+          <a:p>
+            <a:pPr algn="l" lvl="1"/>
+            <a:r>
+              <a:rPr sz="1400" b="0" i="0">
+                <a:solidFill>
+                  <a:srgbClr val="0D47A1"/>
+                </a:solidFill>
+                <a:latin typeface="Arial"/>
+              </a:rPr>
+              <a:t>[S] Penandaan Tapak (Setting Out)</a:t>
+            </a:r>
+          </a:p>
+          <a:p>
+            <a:pPr algn="l" lvl="2"/>
+            <a:r>
+              <a:rPr sz="1400" b="0" i="0">
+                <a:solidFill>
+                  <a:srgbClr val="0D47A1"/>
+                </a:solidFill>
+                <a:latin typeface="Arial"/>
+              </a:rPr>
+              <a:t>[S] Lokasi, keluasan tapak, dan ketinggian puncak busut mesti ditanda dengan tepat di tapak mengikut pelan kerja tanah (Earthwork Plan).</a:t>
+            </a:r>
+          </a:p>
+          <a:p>
+            <a:pPr algn="l" lvl="1"/>
+            <a:r>
+              <a:rPr sz="1400" b="0" i="0">
+                <a:solidFill>
+                  <a:srgbClr val="0D47A1"/>
+                </a:solidFill>
+                <a:latin typeface="Arial"/>
+              </a:rPr>
+              <a:t>[S] Bahan Timbus</a:t>
+            </a:r>
+          </a:p>
+          <a:p>
+            <a:pPr algn="l" lvl="2"/>
+            <a:r>
+              <a:rPr sz="1400" b="0" i="0">
+                <a:solidFill>
+                  <a:srgbClr val="0D47A1"/>
+                </a:solidFill>
+                <a:latin typeface="Arial"/>
+              </a:rPr>
+              <a:t>[S] Bahan tanah yang digunakan mestilah bahan yang sesuai, bebas daripada sisa binaan, akar kayu, dan batu besar. Tanah mestilah diluluskan oleh Pegawai Penguasa (S.O.).</a:t>
+            </a:r>
+          </a:p>
+          <a:p>
+            <a:pPr algn="l" lvl="1"/>
+            <a:r>
+              <a:rPr sz="1400" b="0" i="0">
+                <a:solidFill>
+                  <a:srgbClr val="0D47A1"/>
+                </a:solidFill>
+                <a:latin typeface="Arial"/>
+              </a:rPr>
+              <a:t>[S] Pemadatan Berlapis</a:t>
             </a:r>
           </a:p>
         </p:txBody>
@@ -10155,13 +10019,61 @@
           <a:p>
             <a:pPr algn="l"/>
             <a:r>
-              <a:rPr sz="1000" b="0" i="1">
-                <a:solidFill>
-                  <a:srgbClr val="6B6B6B"/>
-                </a:solidFill>
-                <a:latin typeface="Arial"/>
-              </a:rPr>
-              <a:t>Tiada interaksi — skrin statik</a:t>
+              <a:rPr sz="1000" b="0" i="0">
+                <a:solidFill>
+                  <a:srgbClr val="1A1A1A"/>
+                </a:solidFill>
+                <a:latin typeface="Arial"/>
+              </a:rPr>
+              <a:t>Click-to-Reveal · 4 panel</a:t>
+            </a:r>
+          </a:p>
+          <a:p>
+            <a:pPr algn="l" lvl="1"/>
+            <a:r>
+              <a:rPr sz="900" b="0" i="0">
+                <a:solidFill>
+                  <a:srgbClr val="1A1A1A"/>
+                </a:solidFill>
+                <a:latin typeface="Arial"/>
+              </a:rPr>
+              <a:t>1. Penandaan Tapak (Setting Out)</a:t>
+            </a:r>
+          </a:p>
+          <a:p>
+            <a:pPr algn="l" lvl="1"/>
+            <a:r>
+              <a:rPr sz="900" b="0" i="0">
+                <a:solidFill>
+                  <a:srgbClr val="1A1A1A"/>
+                </a:solidFill>
+                <a:latin typeface="Arial"/>
+              </a:rPr>
+              <a:t>2. Bahan Timbus</a:t>
+            </a:r>
+          </a:p>
+          <a:p>
+            <a:pPr algn="l" lvl="1"/>
+            <a:r>
+              <a:rPr sz="900" b="0" i="0">
+                <a:solidFill>
+                  <a:srgbClr val="1A1A1A"/>
+                </a:solidFill>
+                <a:latin typeface="Arial"/>
+              </a:rPr>
+              <a:t>3. Pemadatan Berlapis</a:t>
+            </a:r>
+          </a:p>
+          <a:p>
+            <a:pPr algn="l" lvl="1"/>
+            <a:r>
+              <a:rPr sz="900" b="0" i="0">
+                <a:solidFill>
+                  <a:srgbClr val="1A1A1A"/>
+                </a:solidFill>
+                <a:latin typeface="Arial"/>
+              </a:rPr>
+              <a:t>4. Kecerunan Akhir</a:t>
             </a:r>
           </a:p>
           <a:p>
@@ -10191,13 +10103,49 @@
           <a:p>
             <a:pPr algn="l"/>
             <a:r>
-              <a:rPr sz="1000" b="0" i="1">
-                <a:solidFill>
-                  <a:srgbClr val="6B6B6B"/>
-                </a:solidFill>
-                <a:latin typeface="Arial"/>
-              </a:rPr>
-              <a:t>Tiada visual khusus</a:t>
+              <a:rPr sz="1000" b="0" i="0">
+                <a:solidFill>
+                  <a:srgbClr val="1A1A1A"/>
+                </a:solidFill>
+                <a:latin typeface="Arial"/>
+              </a:rPr>
+              <a:t>Busut tanah berlapis 300mm dengan kecerunan 1:3</a:t>
+            </a:r>
+          </a:p>
+          <a:p>
+            <a:pPr algn="l"/>
+            <a:r>
+              <a:rPr sz="900" b="0" i="0">
+                <a:solidFill>
+                  <a:srgbClr val="6B6B6B"/>
+                </a:solidFill>
+                <a:latin typeface="Arial"/>
+              </a:rPr>
+              <a:t>Tiada rajah sumber — subjek calon sahaja</a:t>
+            </a:r>
+          </a:p>
+          <a:p>
+            <a:pPr algn="l"/>
+            <a:r>
+              <a:rPr sz="900" b="1" i="0">
+                <a:solidFill>
+                  <a:srgbClr val="B71C1C"/>
+                </a:solidFill>
+                <a:latin typeface="Arial"/>
+              </a:rPr>
+              <a:t>SUBJEK VISUAL: PENDING_BARIAH_UNIT_REVIEW</a:t>
+            </a:r>
+          </a:p>
+          <a:p>
+            <a:pPr algn="l"/>
+            <a:r>
+              <a:rPr sz="900" b="1" i="0">
+                <a:solidFill>
+                  <a:srgbClr val="B71C1C"/>
+                </a:solidFill>
+                <a:latin typeface="Arial"/>
+              </a:rPr>
+              <a:t>ASET VISUAL BELUM DIHASILKAN — NOT_MMD_ASSET</a:t>
             </a:r>
           </a:p>
           <a:p>
@@ -10233,7 +10181,7 @@
                 </a:solidFill>
                 <a:latin typeface="Arial"/>
               </a:rPr>
-              <a:t>Baris modul: T03B03-ROW-002, T03B03-ROW-016, T03B03-ROW-032, T03B03-ROW-042, T03B03-ROW-055, T03B03-ROW-064</a:t>
+              <a:t>Baris modul: T03B03-ROW-002, T03B03-ROW-003, T03B03-ROW-007, T03B03-ROW-004, T03B03-ROW-005, T03B03-ROW-006, T03B03-ROW-008, T03B03-ROW-010, T03B03-ROW-012, T03B03-ROW-014 (+4)</a:t>
             </a:r>
           </a:p>
           <a:p>
@@ -10245,7 +10193,7 @@
                 </a:solidFill>
                 <a:latin typeface="Arial"/>
               </a:rPr>
-              <a:t>Keputusan Bariah: A1</a:t>
+              <a:t>Keputusan Bariah: A1, A2</a:t>
             </a:r>
           </a:p>
         </p:txBody>
@@ -10280,7 +10228,7 @@
                 </a:solidFill>
                 <a:latin typeface="Arial"/>
               </a:rPr>
-              <a:t>K5-PL06-T03-B03 · skrin 3 daripada 12   ·   TECHNICAL_PROOF · DRAFT_FOR_BARIAH_REVIEW · NOT_INSTRUCTIONALLY_APPROVED · NOT_LEARNER_FACING_FINAL</a:t>
+              <a:t>K5-PL06-T03-B03 · skrin 4 daripada 12  ·  halaman 1/2   ·   TECHNICAL_PROOF · DRAFT_FOR_BARIAH_REVIEW · NOT_INSTRUCTIONALLY_APPROVED · NOT_LEARNER_FACING_FINAL</a:t>
             </a:r>
           </a:p>
         </p:txBody>
@@ -10293,7 +10241,7 @@
 </p:sld>
 </file>
 
-<file path=ppt/slides/slide5.xml><?xml version="1.0" encoding="utf-8"?>
+<file path=ppt/slides/slide6.xml><?xml version="1.0" encoding="utf-8"?>
 <p:sld xmlns:a="http://schemas.openxmlformats.org/drawingml/2006/main" xmlns:p="http://schemas.openxmlformats.org/presentationml/2006/main" xmlns:r="http://schemas.openxmlformats.org/officeDocument/2006/relationships">
   <p:cSld>
     <p:spTree>
@@ -10333,7 +10281,7 @@
                 </a:solidFill>
                 <a:latin typeface="Arial"/>
               </a:rPr>
-              <a:t>T03B03-S04   ·   click-to-reveal   ·   CONTENT</a:t>
+              <a:t>T03B03-S04   ·   Click-to-Reveal   ·   CONTENT</a:t>
             </a:r>
           </a:p>
           <a:p>
@@ -10345,7 +10293,7 @@
                 </a:solidFill>
                 <a:latin typeface="Arial"/>
               </a:rPr>
-              <a:t>Landform / Earthmound   ·   halaman 1/2</a:t>
+              <a:t>Landform / Earthmound   ·   halaman 2/2</a:t>
             </a:r>
           </a:p>
         </p:txBody>
@@ -10426,11 +10374,11 @@
                 </a:solidFill>
                 <a:latin typeface="Arial"/>
               </a:rPr>
-              <a:t>KANDUNGAN SKRIN</a:t>
-            </a:r>
-          </a:p>
-          <a:p>
-            <a:pPr algn="l"/>
+              <a:t>KANDUNGAN SKRIN (sambungan)</a:t>
+            </a:r>
+          </a:p>
+          <a:p>
+            <a:pPr algn="l" lvl="2"/>
             <a:r>
               <a:rPr sz="1400" b="0" i="0">
                 <a:solidFill>
@@ -10438,11 +10386,11 @@
                 </a:solidFill>
                 <a:latin typeface="Arial"/>
               </a:rPr>
-              <a:t>[S] Landform / Earthmound</a:t>
-            </a:r>
-          </a:p>
-          <a:p>
-            <a:pPr algn="l"/>
+              <a:t>[S] Busut tanah mesti dibina secara berperingkat dalam lapisan-lapisan tidak melebihi 300mm tebal. Setiap lapisan wajib dipadatkan dengan sempurna menggunakan jentera pemadat (compactor) untuk mengelakkan mendapan (settlement) pada masa hadapan.</a:t>
+            </a:r>
+          </a:p>
+          <a:p>
+            <a:pPr algn="l" lvl="1"/>
             <a:r>
               <a:rPr sz="1400" b="0" i="0">
                 <a:solidFill>
@@ -10450,11 +10398,11 @@
                 </a:solidFill>
                 <a:latin typeface="Arial"/>
               </a:rPr>
-              <a:t>[S~] Busut tanah dibina berlapis, setiap lapisan tidak melebihi 300mm tebal, dan setiap lapisan dipadatkan.</a:t>
-            </a:r>
-          </a:p>
-          <a:p>
-            <a:pPr algn="l"/>
+              <a:t>[S] Kecerunan Akhir</a:t>
+            </a:r>
+          </a:p>
+          <a:p>
+            <a:pPr algn="l" lvl="2"/>
             <a:r>
               <a:rPr sz="1400" b="0" i="0">
                 <a:solidFill>
@@ -10462,115 +10410,19 @@
                 </a:solidFill>
                 <a:latin typeface="Arial"/>
               </a:rPr>
-              <a:t>[S] Fungsi</a:t>
-            </a:r>
-          </a:p>
-          <a:p>
-            <a:pPr algn="l" lvl="1"/>
-            <a:r>
-              <a:rPr sz="1400" b="0" i="0">
-                <a:solidFill>
-                  <a:srgbClr val="0D47A1"/>
-                </a:solidFill>
-                <a:latin typeface="Arial"/>
-              </a:rPr>
-              <a:t>[S] Mewujudkan pemandangan yang menarik secara visual serta mengurangkan kerataan tapak.</a:t>
-            </a:r>
-          </a:p>
-          <a:p>
-            <a:pPr algn="l" lvl="1"/>
-            <a:r>
-              <a:rPr sz="1400" b="0" i="0">
-                <a:solidFill>
-                  <a:srgbClr val="0D47A1"/>
-                </a:solidFill>
-                <a:latin typeface="Arial"/>
-              </a:rPr>
-              <a:t>[S] Berfungsi sebagai penghadang visual atau bunyi.</a:t>
-            </a:r>
-          </a:p>
-          <a:p>
-            <a:pPr algn="l" lvl="1"/>
-            <a:r>
-              <a:rPr sz="1400" b="0" i="0">
-                <a:solidFill>
-                  <a:srgbClr val="0D47A1"/>
-                </a:solidFill>
-                <a:latin typeface="Arial"/>
-              </a:rPr>
-              <a:t>[S] Mengawal dan mengarahkan aliran air permukaan.</a:t>
-            </a:r>
-          </a:p>
-          <a:p>
-            <a:pPr algn="l"/>
-            <a:r>
-              <a:rPr sz="1400" b="0" i="0">
-                <a:solidFill>
-                  <a:srgbClr val="0D47A1"/>
-                </a:solidFill>
-                <a:latin typeface="Arial"/>
-              </a:rPr>
-              <a:t>[S] Fokus Utama Kontraktor</a:t>
-            </a:r>
-          </a:p>
-          <a:p>
-            <a:pPr algn="l" lvl="1"/>
-            <a:r>
-              <a:rPr sz="1400" b="0" i="0">
-                <a:solidFill>
-                  <a:srgbClr val="0D47A1"/>
-                </a:solidFill>
-                <a:latin typeface="Arial"/>
-              </a:rPr>
-              <a:t>[S] Penandaan Tapak (Setting Out)</a:t>
-            </a:r>
-          </a:p>
-          <a:p>
-            <a:pPr algn="l" lvl="2"/>
-            <a:r>
-              <a:rPr sz="1400" b="0" i="0">
-                <a:solidFill>
-                  <a:srgbClr val="0D47A1"/>
-                </a:solidFill>
-                <a:latin typeface="Arial"/>
-              </a:rPr>
-              <a:t>[S] Lokasi, keluasan tapak, dan ketinggian puncak busut mesti ditanda dengan tepat di tapak mengikut pelan kerja tanah (Earthwork Plan).</a:t>
-            </a:r>
-          </a:p>
-          <a:p>
-            <a:pPr algn="l" lvl="1"/>
-            <a:r>
-              <a:rPr sz="1400" b="0" i="0">
-                <a:solidFill>
-                  <a:srgbClr val="0D47A1"/>
-                </a:solidFill>
-                <a:latin typeface="Arial"/>
-              </a:rPr>
-              <a:t>[S] Bahan Timbus</a:t>
-            </a:r>
-          </a:p>
-          <a:p>
-            <a:pPr algn="l" lvl="2"/>
-            <a:r>
-              <a:rPr sz="1400" b="0" i="0">
-                <a:solidFill>
-                  <a:srgbClr val="0D47A1"/>
-                </a:solidFill>
-                <a:latin typeface="Arial"/>
-              </a:rPr>
-              <a:t>[S] Bahan tanah yang digunakan mestilah bahan yang sesuai, bebas daripada sisa binaan, akar kayu, dan batu besar. Tanah mestilah diluluskan oleh Pegawai Penguasa (S.O.).</a:t>
-            </a:r>
-          </a:p>
-          <a:p>
-            <a:pPr algn="l" lvl="1"/>
-            <a:r>
-              <a:rPr sz="1400" b="0" i="0">
-                <a:solidFill>
-                  <a:srgbClr val="0D47A1"/>
-                </a:solidFill>
-                <a:latin typeface="Arial"/>
-              </a:rPr>
-              <a:t>[S] Pemadatan Berlapis</a:t>
+              <a:t>[S] Kecerunan busut mesti dibentuk mengikut nisbah yang ditetapkan dalam lukisan (cth: 1:3) untuk memastikan kestabilan dan mengelakkan hakisan. Permukaan akhir mesti dilindungi segera dengan rumput atau tanaman penutup bumi.</a:t>
+            </a:r>
+          </a:p>
+          <a:p>
+            <a:pPr algn="l"/>
+            <a:r>
+              <a:rPr sz="1200" b="0" i="0">
+                <a:solidFill>
+                  <a:srgbClr val="6B6B6B"/>
+                </a:solidFill>
+                <a:latin typeface="Arial"/>
+              </a:rPr>
+              <a:t>[U] Klik setiap tajuk untuk memaparkan maklumat.</a:t>
             </a:r>
           </a:p>
         </p:txBody>
@@ -10617,7 +10469,7 @@
                 </a:solidFill>
                 <a:latin typeface="Arial"/>
               </a:rPr>
-              <a:t>click-to-reveal · 4 panel</a:t>
+              <a:t>Click-to-Reveal · 4 panel</a:t>
             </a:r>
           </a:p>
           <a:p>
@@ -10820,7 +10672,7 @@
                 </a:solidFill>
                 <a:latin typeface="Arial"/>
               </a:rPr>
-              <a:t>K5-PL06-T03-B03 · skrin 4 daripada 12  ·  halaman 1/2   ·   TECHNICAL_PROOF · DRAFT_FOR_BARIAH_REVIEW · NOT_INSTRUCTIONALLY_APPROVED · NOT_LEARNER_FACING_FINAL</a:t>
+              <a:t>K5-PL06-T03-B03 · skrin 4 daripada 12  ·  halaman 2/2   ·   TECHNICAL_PROOF · DRAFT_FOR_BARIAH_REVIEW · NOT_INSTRUCTIONALLY_APPROVED · NOT_LEARNER_FACING_FINAL</a:t>
             </a:r>
           </a:p>
         </p:txBody>
@@ -10833,7 +10685,7 @@
 </p:sld>
 </file>
 
-<file path=ppt/slides/slide6.xml><?xml version="1.0" encoding="utf-8"?>
+<file path=ppt/slides/slide7.xml><?xml version="1.0" encoding="utf-8"?>
 <p:sld xmlns:a="http://schemas.openxmlformats.org/drawingml/2006/main" xmlns:p="http://schemas.openxmlformats.org/presentationml/2006/main" xmlns:r="http://schemas.openxmlformats.org/officeDocument/2006/relationships">
   <p:cSld>
     <p:spTree>
@@ -10873,7 +10725,7 @@
                 </a:solidFill>
                 <a:latin typeface="Arial"/>
               </a:rPr>
-              <a:t>T03B03-S04   ·   click-to-reveal   ·   CONTENT</a:t>
+              <a:t>T03B03-S05   ·   Langkah demi langkah   ·   CONTENT</a:t>
             </a:r>
           </a:p>
           <a:p>
@@ -10885,7 +10737,7 @@
                 </a:solidFill>
                 <a:latin typeface="Arial"/>
               </a:rPr>
-              <a:t>Landform / Earthmound   ·   halaman 2/2</a:t>
+              <a:t>Sub soil drainage</a:t>
             </a:r>
           </a:p>
         </p:txBody>
@@ -10966,7 +10818,127 @@
                 </a:solidFill>
                 <a:latin typeface="Arial"/>
               </a:rPr>
-              <a:t>KANDUNGAN SKRIN (sambungan)</a:t>
+              <a:t>KANDUNGAN SKRIN</a:t>
+            </a:r>
+          </a:p>
+          <a:p>
+            <a:pPr algn="l"/>
+            <a:r>
+              <a:rPr sz="1400" b="0" i="0">
+                <a:solidFill>
+                  <a:srgbClr val="0D47A1"/>
+                </a:solidFill>
+                <a:latin typeface="Arial"/>
+              </a:rPr>
+              <a:t>[S] Sub soil drainage</a:t>
+            </a:r>
+          </a:p>
+          <a:p>
+            <a:pPr algn="l"/>
+            <a:r>
+              <a:rPr sz="1400" b="0" i="0">
+                <a:solidFill>
+                  <a:srgbClr val="0D47A1"/>
+                </a:solidFill>
+                <a:latin typeface="Arial"/>
+              </a:rPr>
+              <a:t>[S~] Sistem saliran bawah tanah mesti disambungkan ke saluran keluar yang berfungsi.</a:t>
+            </a:r>
+          </a:p>
+          <a:p>
+            <a:pPr algn="l"/>
+            <a:r>
+              <a:rPr sz="1400" b="0" i="0">
+                <a:solidFill>
+                  <a:srgbClr val="0D47A1"/>
+                </a:solidFill>
+                <a:latin typeface="Arial"/>
+              </a:rPr>
+              <a:t>[S] Fungsi</a:t>
+            </a:r>
+          </a:p>
+          <a:p>
+            <a:pPr algn="l" lvl="1"/>
+            <a:r>
+              <a:rPr sz="1400" b="0" i="0">
+                <a:solidFill>
+                  <a:srgbClr val="0D47A1"/>
+                </a:solidFill>
+                <a:latin typeface="Arial"/>
+              </a:rPr>
+              <a:t>[S] Mengelakkan tanah daripada menjadi tepu air, yang boleh merosakkan akar tanaman dan menjadikan kawasan tidak boleh digunakan.</a:t>
+            </a:r>
+          </a:p>
+          <a:p>
+            <a:pPr algn="l"/>
+            <a:r>
+              <a:rPr sz="1400" b="0" i="0">
+                <a:solidFill>
+                  <a:srgbClr val="0D47A1"/>
+                </a:solidFill>
+                <a:latin typeface="Arial"/>
+              </a:rPr>
+              <a:t>[S] Fokus Utama Kontraktor</a:t>
+            </a:r>
+          </a:p>
+          <a:p>
+            <a:pPr algn="l" lvl="1"/>
+            <a:r>
+              <a:rPr sz="1400" b="0" i="0">
+                <a:solidFill>
+                  <a:srgbClr val="0D47A1"/>
+                </a:solidFill>
+                <a:latin typeface="Arial"/>
+              </a:rPr>
+              <a:t>[S] Penggalian Peparit</a:t>
+            </a:r>
+          </a:p>
+          <a:p>
+            <a:pPr algn="l" lvl="1"/>
+            <a:r>
+              <a:rPr sz="1400" b="0" i="0">
+                <a:solidFill>
+                  <a:srgbClr val="0D47A1"/>
+                </a:solidFill>
+                <a:latin typeface="Arial"/>
+              </a:rPr>
+              <a:t>[S] Pemasangan Sistematik</a:t>
+            </a:r>
+          </a:p>
+          <a:p>
+            <a:pPr algn="l" lvl="1"/>
+            <a:r>
+              <a:rPr sz="1400" b="0" i="0">
+                <a:solidFill>
+                  <a:srgbClr val="0D47A1"/>
+                </a:solidFill>
+                <a:latin typeface="Arial"/>
+              </a:rPr>
+              <a:t>[S] Sambungan ke Saluran Keluar</a:t>
+            </a:r>
+          </a:p>
+          <a:p>
+            <a:pPr algn="l"/>
+            <a:r>
+              <a:rPr sz="1200" b="0" i="0">
+                <a:solidFill>
+                  <a:srgbClr val="6B6B6B"/>
+                </a:solidFill>
+                <a:latin typeface="Arial"/>
+              </a:rPr>
+              <a:t>[U] Klik setiap tajuk untuk memaparkan maklumat.</a:t>
+            </a:r>
+          </a:p>
+          <a:p>
+            <a:pPr algn="l"/>
+            <a:r>
+              <a:rPr sz="1400" b="0" i="0">
+                <a:solidFill>
+                  <a:srgbClr val="0D47A1"/>
+                </a:solidFill>
+                <a:latin typeface="Arial"/>
+              </a:rPr>
+              <a:t>[S] Proses pemasangan yang betul adalah kunci kejayaan sistem ini:</a:t>
             </a:r>
           </a:p>
           <a:p>
@@ -10978,11 +10950,11 @@
                 </a:solidFill>
                 <a:latin typeface="Arial"/>
               </a:rPr>
-              <a:t>[S] Busut tanah mesti dibina secara berperingkat dalam lapisan-lapisan tidak melebihi 300mm tebal. Setiap lapisan wajib dipadatkan dengan sempurna menggunakan jentera pemadat (compactor) untuk mengelakkan mendapan (settlement) pada masa hadapan.</a:t>
-            </a:r>
-          </a:p>
-          <a:p>
-            <a:pPr algn="l" lvl="1"/>
+              <a:t>[S] Lapik peparit dengan kain geotekstil (geotextile fabric).</a:t>
+            </a:r>
+          </a:p>
+          <a:p>
+            <a:pPr algn="l" lvl="2"/>
             <a:r>
               <a:rPr sz="1400" b="0" i="0">
                 <a:solidFill>
@@ -10990,7 +10962,7 @@
                 </a:solidFill>
                 <a:latin typeface="Arial"/>
               </a:rPr>
-              <a:t>[S] Kecerunan Akhir</a:t>
+              <a:t>[S] Letakkan lapisan batu kelikir penapis (filter aggregate).</a:t>
             </a:r>
           </a:p>
           <a:p>
@@ -11002,19 +10974,43 @@
                 </a:solidFill>
                 <a:latin typeface="Arial"/>
               </a:rPr>
-              <a:t>[S] Kecerunan busut mesti dibentuk mengikut nisbah yang ditetapkan dalam lukisan (cth: 1:3) untuk memastikan kestabilan dan mengelakkan hakisan. Permukaan akhir mesti dilindungi segera dengan rumput atau tanaman penutup bumi.</a:t>
-            </a:r>
-          </a:p>
-          <a:p>
-            <a:pPr algn="l"/>
-            <a:r>
-              <a:rPr sz="1200" b="0" i="0">
-                <a:solidFill>
-                  <a:srgbClr val="6B6B6B"/>
-                </a:solidFill>
-                <a:latin typeface="Arial"/>
-              </a:rPr>
-              <a:t>[U] Klik setiap tajuk untuk memaparkan maklumat.</a:t>
+              <a:t>[S] Pasang paip berlubang (perforated pipe) dengan lubangnya menghadap ke bawah.</a:t>
+            </a:r>
+          </a:p>
+          <a:p>
+            <a:pPr algn="l" lvl="2"/>
+            <a:r>
+              <a:rPr sz="1400" b="0" i="0">
+                <a:solidFill>
+                  <a:srgbClr val="0D47A1"/>
+                </a:solidFill>
+                <a:latin typeface="Arial"/>
+              </a:rPr>
+              <a:t>[S] Timbus sekeliling paip dengan batu kelikir.</a:t>
+            </a:r>
+          </a:p>
+          <a:p>
+            <a:pPr algn="l" lvl="2"/>
+            <a:r>
+              <a:rPr sz="1400" b="0" i="0">
+                <a:solidFill>
+                  <a:srgbClr val="0D47A1"/>
+                </a:solidFill>
+                <a:latin typeface="Arial"/>
+              </a:rPr>
+              <a:t>[S] Lipat lebihan geotekstil untuk menutup lapisan batu kelikir.</a:t>
+            </a:r>
+          </a:p>
+          <a:p>
+            <a:pPr algn="l" lvl="2"/>
+            <a:r>
+              <a:rPr sz="1400" b="0" i="0">
+                <a:solidFill>
+                  <a:srgbClr val="0D47A1"/>
+                </a:solidFill>
+                <a:latin typeface="Arial"/>
+              </a:rPr>
+              <a:t>[S] Timbus lapisan atas dengan pasir kasar dan tanah atas.</a:t>
             </a:r>
           </a:p>
         </p:txBody>
@@ -11055,61 +11051,73 @@
           <a:p>
             <a:pPr algn="l"/>
             <a:r>
-              <a:rPr sz="1000" b="0" i="0">
+              <a:rPr sz="1000" b="0" i="1">
+                <a:solidFill>
+                  <a:srgbClr val="6B6B6B"/>
+                </a:solidFill>
+                <a:latin typeface="Arial"/>
+              </a:rPr>
+              <a:t>Tiada interaksi — skrin statik</a:t>
+            </a:r>
+          </a:p>
+          <a:p>
+            <a:pPr algn="l"/>
+            <a:r>
+              <a:rPr sz="800" b="0" i="0">
                 <a:solidFill>
                   <a:srgbClr val="1A1A1A"/>
                 </a:solidFill>
                 <a:latin typeface="Arial"/>
               </a:rPr>
-              <a:t>click-to-reveal · 4 panel</a:t>
-            </a:r>
-          </a:p>
-          <a:p>
-            <a:pPr algn="l" lvl="1"/>
-            <a:r>
-              <a:rPr sz="900" b="0" i="0">
+              <a:t/>
+            </a:r>
+          </a:p>
+          <a:p>
+            <a:pPr algn="l"/>
+            <a:r>
+              <a:rPr sz="1000" b="1" i="0">
+                <a:solidFill>
+                  <a:srgbClr val="6B6B6B"/>
+                </a:solidFill>
+                <a:latin typeface="Arial"/>
+              </a:rPr>
+              <a:t>VISUAL</a:t>
+            </a:r>
+          </a:p>
+          <a:p>
+            <a:pPr algn="l"/>
+            <a:r>
+              <a:rPr sz="1000" b="0" i="1">
+                <a:solidFill>
+                  <a:srgbClr val="6B6B6B"/>
+                </a:solidFill>
+                <a:latin typeface="Arial"/>
+              </a:rPr>
+              <a:t>Tiada visual khusus</a:t>
+            </a:r>
+          </a:p>
+          <a:p>
+            <a:pPr algn="l"/>
+            <a:r>
+              <a:rPr sz="800" b="0" i="0">
                 <a:solidFill>
                   <a:srgbClr val="1A1A1A"/>
                 </a:solidFill>
                 <a:latin typeface="Arial"/>
               </a:rPr>
-              <a:t>1. Penandaan Tapak (Setting Out)</a:t>
-            </a:r>
-          </a:p>
-          <a:p>
-            <a:pPr algn="l" lvl="1"/>
-            <a:r>
-              <a:rPr sz="900" b="0" i="0">
-                <a:solidFill>
-                  <a:srgbClr val="1A1A1A"/>
-                </a:solidFill>
-                <a:latin typeface="Arial"/>
-              </a:rPr>
-              <a:t>2. Bahan Timbus</a:t>
-            </a:r>
-          </a:p>
-          <a:p>
-            <a:pPr algn="l" lvl="1"/>
-            <a:r>
-              <a:rPr sz="900" b="0" i="0">
-                <a:solidFill>
-                  <a:srgbClr val="1A1A1A"/>
-                </a:solidFill>
-                <a:latin typeface="Arial"/>
-              </a:rPr>
-              <a:t>3. Pemadatan Berlapis</a:t>
-            </a:r>
-          </a:p>
-          <a:p>
-            <a:pPr algn="l" lvl="1"/>
-            <a:r>
-              <a:rPr sz="900" b="0" i="0">
-                <a:solidFill>
-                  <a:srgbClr val="1A1A1A"/>
-                </a:solidFill>
-                <a:latin typeface="Arial"/>
-              </a:rPr>
-              <a:t>4. Kecerunan Akhir</a:t>
+              <a:t/>
+            </a:r>
+          </a:p>
+          <a:p>
+            <a:pPr algn="l"/>
+            <a:r>
+              <a:rPr sz="1000" b="1" i="0">
+                <a:solidFill>
+                  <a:srgbClr val="6B6B6B"/>
+                </a:solidFill>
+                <a:latin typeface="Arial"/>
+              </a:rPr>
+              <a:t>SUMBER DAN KEPUTUSAN</a:t>
             </a:r>
           </a:p>
           <a:p>
@@ -11117,107 +11125,11 @@
             <a:r>
               <a:rPr sz="800" b="0" i="0">
                 <a:solidFill>
-                  <a:srgbClr val="1A1A1A"/>
-                </a:solidFill>
-                <a:latin typeface="Arial"/>
-              </a:rPr>
-              <a:t/>
-            </a:r>
-          </a:p>
-          <a:p>
-            <a:pPr algn="l"/>
-            <a:r>
-              <a:rPr sz="1000" b="1" i="0">
-                <a:solidFill>
-                  <a:srgbClr val="6B6B6B"/>
-                </a:solidFill>
-                <a:latin typeface="Arial"/>
-              </a:rPr>
-              <a:t>VISUAL</a:t>
-            </a:r>
-          </a:p>
-          <a:p>
-            <a:pPr algn="l"/>
-            <a:r>
-              <a:rPr sz="1000" b="0" i="0">
-                <a:solidFill>
-                  <a:srgbClr val="1A1A1A"/>
-                </a:solidFill>
-                <a:latin typeface="Arial"/>
-              </a:rPr>
-              <a:t>Busut tanah berlapis 300mm dengan kecerunan 1:3</a:t>
-            </a:r>
-          </a:p>
-          <a:p>
-            <a:pPr algn="l"/>
-            <a:r>
-              <a:rPr sz="900" b="0" i="0">
-                <a:solidFill>
-                  <a:srgbClr val="6B6B6B"/>
-                </a:solidFill>
-                <a:latin typeface="Arial"/>
-              </a:rPr>
-              <a:t>Tiada rajah sumber — subjek calon sahaja</a:t>
-            </a:r>
-          </a:p>
-          <a:p>
-            <a:pPr algn="l"/>
-            <a:r>
-              <a:rPr sz="900" b="1" i="0">
-                <a:solidFill>
-                  <a:srgbClr val="B71C1C"/>
-                </a:solidFill>
-                <a:latin typeface="Arial"/>
-              </a:rPr>
-              <a:t>SUBJEK VISUAL: PENDING_BARIAH_UNIT_REVIEW</a:t>
-            </a:r>
-          </a:p>
-          <a:p>
-            <a:pPr algn="l"/>
-            <a:r>
-              <a:rPr sz="900" b="1" i="0">
-                <a:solidFill>
-                  <a:srgbClr val="B71C1C"/>
-                </a:solidFill>
-                <a:latin typeface="Arial"/>
-              </a:rPr>
-              <a:t>ASET VISUAL BELUM DIHASILKAN — NOT_MMD_ASSET</a:t>
-            </a:r>
-          </a:p>
-          <a:p>
-            <a:pPr algn="l"/>
-            <a:r>
-              <a:rPr sz="800" b="0" i="0">
-                <a:solidFill>
-                  <a:srgbClr val="1A1A1A"/>
-                </a:solidFill>
-                <a:latin typeface="Arial"/>
-              </a:rPr>
-              <a:t/>
-            </a:r>
-          </a:p>
-          <a:p>
-            <a:pPr algn="l"/>
-            <a:r>
-              <a:rPr sz="1000" b="1" i="0">
-                <a:solidFill>
-                  <a:srgbClr val="6B6B6B"/>
-                </a:solidFill>
-                <a:latin typeface="Arial"/>
-              </a:rPr>
-              <a:t>SUMBER DAN KEPUTUSAN</a:t>
-            </a:r>
-          </a:p>
-          <a:p>
-            <a:pPr algn="l"/>
-            <a:r>
-              <a:rPr sz="800" b="0" i="0">
-                <a:solidFill>
                   <a:srgbClr val="0D47A1"/>
                 </a:solidFill>
                 <a:latin typeface="Arial"/>
               </a:rPr>
-              <a:t>Baris modul: T03B03-ROW-002, T03B03-ROW-003, T03B03-ROW-007, T03B03-ROW-004, T03B03-ROW-005, T03B03-ROW-006, T03B03-ROW-008, T03B03-ROW-010, T03B03-ROW-012, T03B03-ROW-014 (+4)</a:t>
+              <a:t>Baris modul: T03B03-ROW-016, T03B03-ROW-017, T03B03-ROW-019, T03B03-ROW-018, T03B03-ROW-020, T03B03-ROW-022, T03B03-ROW-030, T03B03-ROW-021, T03B03-ROW-023, T03B03-ROW-024 (+6)</a:t>
             </a:r>
           </a:p>
           <a:p>
@@ -11264,7 +11176,7 @@
                 </a:solidFill>
                 <a:latin typeface="Arial"/>
               </a:rPr>
-              <a:t>K5-PL06-T03-B03 · skrin 4 daripada 12  ·  halaman 2/2   ·   TECHNICAL_PROOF · DRAFT_FOR_BARIAH_REVIEW · NOT_INSTRUCTIONALLY_APPROVED · NOT_LEARNER_FACING_FINAL</a:t>
+              <a:t>K5-PL06-T03-B03 · skrin 5 daripada 12   ·   TECHNICAL_PROOF · DRAFT_FOR_BARIAH_REVIEW · NOT_INSTRUCTIONALLY_APPROVED · NOT_LEARNER_FACING_FINAL</a:t>
             </a:r>
           </a:p>
         </p:txBody>
@@ -11277,7 +11189,7 @@
 </p:sld>
 </file>
 
-<file path=ppt/slides/slide7.xml><?xml version="1.0" encoding="utf-8"?>
+<file path=ppt/slides/slide8.xml><?xml version="1.0" encoding="utf-8"?>
 <p:sld xmlns:a="http://schemas.openxmlformats.org/drawingml/2006/main" xmlns:p="http://schemas.openxmlformats.org/presentationml/2006/main" xmlns:r="http://schemas.openxmlformats.org/officeDocument/2006/relationships">
   <p:cSld>
     <p:spTree>
@@ -11317,7 +11229,7 @@
                 </a:solidFill>
                 <a:latin typeface="Arial"/>
               </a:rPr>
-              <a:t>T03B03-S05   ·   click-to-reveal   ·   CONTENT</a:t>
+              <a:t>T03B03-S06   ·   Click-to-Reveal   ·   CONTENT</a:t>
             </a:r>
           </a:p>
           <a:p>
@@ -11329,7 +11241,7 @@
                 </a:solidFill>
                 <a:latin typeface="Arial"/>
               </a:rPr>
-              <a:t>Sub soil drainage   ·   halaman 1/2</a:t>
+              <a:t>Dinding Penahan (Retaining Wall)</a:t>
             </a:r>
           </a:p>
         </p:txBody>
@@ -11422,7 +11334,7 @@
                 </a:solidFill>
                 <a:latin typeface="Arial"/>
               </a:rPr>
-              <a:t>[S] Sub soil drainage</a:t>
+              <a:t>[S] Dinding Penahan (Retaining Wall)</a:t>
             </a:r>
           </a:p>
           <a:p>
@@ -11434,7 +11346,7 @@
                 </a:solidFill>
                 <a:latin typeface="Arial"/>
               </a:rPr>
-              <a:t>[S~] Sistem saliran bawah tanah mesti disambungkan ke saluran keluar yang berfungsi.</a:t>
+              <a:t>[S~] Dinding penahan mesti dibina mematuhi sepenuhnya lukisan struktur jurutera bertauliah; tapak asas adalah komponen paling kritikal.</a:t>
             </a:r>
           </a:p>
           <a:p>
@@ -11458,7 +11370,7 @@
                 </a:solidFill>
                 <a:latin typeface="Arial"/>
               </a:rPr>
-              <a:t>[S] Mengelakkan tanah daripada menjadi tepu air, yang boleh merosakkan akar tanaman dan menjadikan kawasan tidak boleh digunakan.</a:t>
+              <a:t>[S] Membentuk kawasan rata di lereng bukit, menstabilkan cerun, dan menetapkan sempadan aras.</a:t>
             </a:r>
           </a:p>
           <a:p>
@@ -11482,7 +11394,7 @@
                 </a:solidFill>
                 <a:latin typeface="Arial"/>
               </a:rPr>
-              <a:t>[S] Penggalian Peparit</a:t>
+              <a:t>[S] Lukisan Jurutera</a:t>
             </a:r>
           </a:p>
           <a:p>
@@ -11494,7 +11406,7 @@
                 </a:solidFill>
                 <a:latin typeface="Arial"/>
               </a:rPr>
-              <a:t>[S] Peparit (trench) digali mengikut jajaran, kedalaman, dan kecerunan yang ditetapkan dalam Pelan Saliran (Drainage Plan). Kecerunan yang betul adalah kritikal untuk memastikan air mengalir.</a:t>
+              <a:t>[S] Dinding penahan mesti dibina dengan mematuhi sepenuhnya Lukisan Struktur Jurutera Bertauliah (Ir.). Sebarang perubahan memerlukan kelulusan jurutera.</a:t>
             </a:r>
           </a:p>
           <a:p>
@@ -11506,7 +11418,7 @@
                 </a:solidFill>
                 <a:latin typeface="Arial"/>
               </a:rPr>
-              <a:t>[S] Pemasangan Sistematik</a:t>
+              <a:t>[S] Pembinaan Tapak Asas (Foundation)</a:t>
             </a:r>
           </a:p>
           <a:p>
@@ -11518,7 +11430,19 @@
                 </a:solidFill>
                 <a:latin typeface="Arial"/>
               </a:rPr>
-              <a:t>[S] Proses pemasangan yang betul adalah kunci kejayaan sistem ini:</a:t>
+              <a:t>[S] Tapak asas adalah komponen paling kritikal. Ia mesti dibina di atas tanah yang stabil pada kedalaman dan saiz yang betul.</a:t>
+            </a:r>
+          </a:p>
+          <a:p>
+            <a:pPr algn="l" lvl="1"/>
+            <a:r>
+              <a:rPr sz="1400" b="0" i="0">
+                <a:solidFill>
+                  <a:srgbClr val="0D47A1"/>
+                </a:solidFill>
+                <a:latin typeface="Arial"/>
+              </a:rPr>
+              <a:t>[S] Sistem Perparitan di Belakang Dinding</a:t>
             </a:r>
           </a:p>
           <a:p>
@@ -11530,55 +11454,19 @@
                 </a:solidFill>
                 <a:latin typeface="Arial"/>
               </a:rPr>
-              <a:t>[S] Lapik peparit dengan kain geotekstil (geotextile fabric).</a:t>
-            </a:r>
-          </a:p>
-          <a:p>
-            <a:pPr algn="l" lvl="2"/>
-            <a:r>
-              <a:rPr sz="1400" b="0" i="0">
-                <a:solidFill>
-                  <a:srgbClr val="0D47A1"/>
-                </a:solidFill>
-                <a:latin typeface="Arial"/>
-              </a:rPr>
-              <a:t>[S] Letakkan lapisan batu kelikir penapis (filter aggregate).</a:t>
-            </a:r>
-          </a:p>
-          <a:p>
-            <a:pPr algn="l" lvl="2"/>
-            <a:r>
-              <a:rPr sz="1400" b="0" i="0">
-                <a:solidFill>
-                  <a:srgbClr val="0D47A1"/>
-                </a:solidFill>
-                <a:latin typeface="Arial"/>
-              </a:rPr>
-              <a:t>[S] Pasang paip berlubang (perforated pipe) dengan lubangnya menghadap ke bawah.</a:t>
-            </a:r>
-          </a:p>
-          <a:p>
-            <a:pPr algn="l" lvl="2"/>
-            <a:r>
-              <a:rPr sz="1400" b="0" i="0">
-                <a:solidFill>
-                  <a:srgbClr val="0D47A1"/>
-                </a:solidFill>
-                <a:latin typeface="Arial"/>
-              </a:rPr>
-              <a:t>[S] Timbus sekeliling paip dengan batu kelikir.</a:t>
-            </a:r>
-          </a:p>
-          <a:p>
-            <a:pPr algn="l" lvl="2"/>
-            <a:r>
-              <a:rPr sz="1400" b="0" i="0">
-                <a:solidFill>
-                  <a:srgbClr val="0D47A1"/>
-                </a:solidFill>
-                <a:latin typeface="Arial"/>
-              </a:rPr>
-              <a:t>[S] Lipat lebihan geotekstil untuk menutup lapisan batu kelikir.</a:t>
+              <a:t>[S] Kegagalan dinding penahan selalunya berpunca daripada tekanan air (hydrostatic pressure). Kontraktor wajib memastikan lubang saliran air (weep holes) dibina dan lapisan penapis (seperti batu kelikir) diletakkan di belakang dinding untuk membolehkan air keluar.</a:t>
+            </a:r>
+          </a:p>
+          <a:p>
+            <a:pPr algn="l"/>
+            <a:r>
+              <a:rPr sz="1200" b="0" i="0">
+                <a:solidFill>
+                  <a:srgbClr val="6B6B6B"/>
+                </a:solidFill>
+                <a:latin typeface="Arial"/>
+              </a:rPr>
+              <a:t>[U] Klik setiap tajuk untuk memaparkan maklumat.</a:t>
             </a:r>
           </a:p>
         </p:txBody>
@@ -11625,7 +11513,7 @@
                 </a:solidFill>
                 <a:latin typeface="Arial"/>
               </a:rPr>
-              <a:t>click-to-reveal · 3 panel</a:t>
+              <a:t>Click-to-Reveal · 3 panel</a:t>
             </a:r>
           </a:p>
           <a:p>
@@ -11637,7 +11525,7 @@
                 </a:solidFill>
                 <a:latin typeface="Arial"/>
               </a:rPr>
-              <a:t>1. Penggalian Peparit</a:t>
+              <a:t>1. Lukisan Jurutera</a:t>
             </a:r>
           </a:p>
           <a:p>
@@ -11649,7 +11537,7 @@
                 </a:solidFill>
                 <a:latin typeface="Arial"/>
               </a:rPr>
-              <a:t>2. Pemasangan Sistematik</a:t>
+              <a:t>2. Pembinaan Tapak Asas (Foundation)</a:t>
             </a:r>
           </a:p>
           <a:p>
@@ -11661,7 +11549,7 @@
                 </a:solidFill>
                 <a:latin typeface="Arial"/>
               </a:rPr>
-              <a:t>3. Sambungan ke Saluran Keluar</a:t>
+              <a:t>3. Sistem Perparitan di Belakang Dinding</a:t>
             </a:r>
           </a:p>
           <a:p>
@@ -11691,13 +11579,49 @@
           <a:p>
             <a:pPr algn="l"/>
             <a:r>
-              <a:rPr sz="1000" b="0" i="1">
-                <a:solidFill>
-                  <a:srgbClr val="6B6B6B"/>
-                </a:solidFill>
-                <a:latin typeface="Arial"/>
-              </a:rPr>
-              <a:t>Tiada visual khusus</a:t>
+              <a:rPr sz="1000" b="0" i="0">
+                <a:solidFill>
+                  <a:srgbClr val="1A1A1A"/>
+                </a:solidFill>
+                <a:latin typeface="Arial"/>
+              </a:rPr>
+              <a:t>Keratan rentas dinding penahan dengan sistem perparitan di belakang</a:t>
+            </a:r>
+          </a:p>
+          <a:p>
+            <a:pPr algn="l"/>
+            <a:r>
+              <a:rPr sz="900" b="0" i="0">
+                <a:solidFill>
+                  <a:srgbClr val="6B6B6B"/>
+                </a:solidFill>
+                <a:latin typeface="Arial"/>
+              </a:rPr>
+              <a:t>Tiada rajah sumber — subjek calon sahaja</a:t>
+            </a:r>
+          </a:p>
+          <a:p>
+            <a:pPr algn="l"/>
+            <a:r>
+              <a:rPr sz="900" b="1" i="0">
+                <a:solidFill>
+                  <a:srgbClr val="B71C1C"/>
+                </a:solidFill>
+                <a:latin typeface="Arial"/>
+              </a:rPr>
+              <a:t>SUBJEK VISUAL: PENDING_BARIAH_UNIT_REVIEW</a:t>
+            </a:r>
+          </a:p>
+          <a:p>
+            <a:pPr algn="l"/>
+            <a:r>
+              <a:rPr sz="900" b="1" i="0">
+                <a:solidFill>
+                  <a:srgbClr val="B71C1C"/>
+                </a:solidFill>
+                <a:latin typeface="Arial"/>
+              </a:rPr>
+              <a:t>ASET VISUAL BELUM DIHASILKAN — NOT_MMD_ASSET</a:t>
             </a:r>
           </a:p>
           <a:p>
@@ -11733,7 +11657,7 @@
                 </a:solidFill>
                 <a:latin typeface="Arial"/>
               </a:rPr>
-              <a:t>Baris modul: T03B03-ROW-016, T03B03-ROW-017, T03B03-ROW-019, T03B03-ROW-018, T03B03-ROW-020, T03B03-ROW-022, T03B03-ROW-030, T03B03-ROW-021, T03B03-ROW-023, T03B03-ROW-024 (+6)</a:t>
+              <a:t>Baris modul: T03B03-ROW-032, T03B03-ROW-033, T03B03-ROW-035, T03B03-ROW-034, T03B03-ROW-036, T03B03-ROW-038, T03B03-ROW-040, T03B03-ROW-037, T03B03-ROW-039, T03B03-ROW-041</a:t>
             </a:r>
           </a:p>
           <a:p>
@@ -11780,7 +11704,7 @@
                 </a:solidFill>
                 <a:latin typeface="Arial"/>
               </a:rPr>
-              <a:t>K5-PL06-T03-B03 · skrin 5 daripada 12  ·  halaman 1/2   ·   TECHNICAL_PROOF · DRAFT_FOR_BARIAH_REVIEW · NOT_INSTRUCTIONALLY_APPROVED · NOT_LEARNER_FACING_FINAL</a:t>
+              <a:t>K5-PL06-T03-B03 · skrin 6 daripada 12   ·   TECHNICAL_PROOF · DRAFT_FOR_BARIAH_REVIEW · NOT_INSTRUCTIONALLY_APPROVED · NOT_LEARNER_FACING_FINAL</a:t>
             </a:r>
           </a:p>
         </p:txBody>
@@ -11793,7 +11717,7 @@
 </p:sld>
 </file>
 
-<file path=ppt/slides/slide8.xml><?xml version="1.0" encoding="utf-8"?>
+<file path=ppt/slides/slide9.xml><?xml version="1.0" encoding="utf-8"?>
 <p:sld xmlns:a="http://schemas.openxmlformats.org/drawingml/2006/main" xmlns:p="http://schemas.openxmlformats.org/presentationml/2006/main" xmlns:r="http://schemas.openxmlformats.org/officeDocument/2006/relationships">
   <p:cSld>
     <p:spTree>
@@ -11833,7 +11757,7 @@
                 </a:solidFill>
                 <a:latin typeface="Arial"/>
               </a:rPr>
-              <a:t>T03B03-S05   ·   click-to-reveal   ·   CONTENT</a:t>
+              <a:t>T03B03-S07   ·   Click-to-Reveal   ·   CONTENT</a:t>
             </a:r>
           </a:p>
           <a:p>
@@ -11845,7 +11769,7 @@
                 </a:solidFill>
                 <a:latin typeface="Arial"/>
               </a:rPr>
-              <a:t>Sub soil drainage   ·   halaman 2/2</a:t>
+              <a:t>Fencing   ·   halaman 1/2</a:t>
             </a:r>
           </a:p>
         </p:txBody>
@@ -11926,7 +11850,91 @@
                 </a:solidFill>
                 <a:latin typeface="Arial"/>
               </a:rPr>
-              <a:t>KANDUNGAN SKRIN (sambungan)</a:t>
+              <a:t>KANDUNGAN SKRIN</a:t>
+            </a:r>
+          </a:p>
+          <a:p>
+            <a:pPr algn="l"/>
+            <a:r>
+              <a:rPr sz="1400" b="0" i="0">
+                <a:solidFill>
+                  <a:srgbClr val="0D47A1"/>
+                </a:solidFill>
+                <a:latin typeface="Arial"/>
+              </a:rPr>
+              <a:t>[S] Fencing</a:t>
+            </a:r>
+          </a:p>
+          <a:p>
+            <a:pPr algn="l"/>
+            <a:r>
+              <a:rPr sz="1400" b="0" i="0">
+                <a:solidFill>
+                  <a:srgbClr val="0D47A1"/>
+                </a:solidFill>
+                <a:latin typeface="Arial"/>
+              </a:rPr>
+              <a:t>[S] Pagar dibina untuk tujuan keselamatan, menandakan sempadan, privasi, atau sebagai elemen hiasan.</a:t>
+            </a:r>
+          </a:p>
+          <a:p>
+            <a:pPr algn="l"/>
+            <a:r>
+              <a:rPr sz="1400" b="0" i="0">
+                <a:solidFill>
+                  <a:srgbClr val="0D47A1"/>
+                </a:solidFill>
+                <a:latin typeface="Arial"/>
+              </a:rPr>
+              <a:t>[S~] Jajaran pagar mesti ditanda mengikut Pelan Ukur Sempadan untuk mengelakkan pencerobohan tanah.</a:t>
+            </a:r>
+          </a:p>
+          <a:p>
+            <a:pPr algn="l"/>
+            <a:r>
+              <a:rPr sz="1400" b="0" i="0">
+                <a:solidFill>
+                  <a:srgbClr val="0D47A1"/>
+                </a:solidFill>
+                <a:latin typeface="Arial"/>
+              </a:rPr>
+              <a:t>[S] Fungsi</a:t>
+            </a:r>
+          </a:p>
+          <a:p>
+            <a:pPr algn="l" lvl="1"/>
+            <a:r>
+              <a:rPr sz="1400" b="0" i="0">
+                <a:solidFill>
+                  <a:srgbClr val="0D47A1"/>
+                </a:solidFill>
+                <a:latin typeface="Arial"/>
+              </a:rPr>
+              <a:t>[S] Mengawal akses, menetapkan sempadan hartanah, dan meningkatkan keselamatan.</a:t>
+            </a:r>
+          </a:p>
+          <a:p>
+            <a:pPr algn="l"/>
+            <a:r>
+              <a:rPr sz="1400" b="0" i="0">
+                <a:solidFill>
+                  <a:srgbClr val="0D47A1"/>
+                </a:solidFill>
+                <a:latin typeface="Arial"/>
+              </a:rPr>
+              <a:t>[S] Fokus Utama Kontraktor</a:t>
+            </a:r>
+          </a:p>
+          <a:p>
+            <a:pPr algn="l" lvl="1"/>
+            <a:r>
+              <a:rPr sz="1400" b="0" i="0">
+                <a:solidFill>
+                  <a:srgbClr val="0D47A1"/>
+                </a:solidFill>
+                <a:latin typeface="Arial"/>
+              </a:rPr>
+              <a:t>[S] Penjajaran Sempadan</a:t>
             </a:r>
           </a:p>
           <a:p>
@@ -11938,7 +11946,7 @@
                 </a:solidFill>
                 <a:latin typeface="Arial"/>
               </a:rPr>
-              <a:t>[S] Timbus lapisan atas dengan pasir kasar dan tanah atas.</a:t>
+              <a:t>[S] Jajaran pagar mesti ditanda mengikut Pelan Ukur Sempadan untuk mengelakkan isu pencerobohan tanah.</a:t>
             </a:r>
           </a:p>
           <a:p>
@@ -11950,7 +11958,7 @@
                 </a:solidFill>
                 <a:latin typeface="Arial"/>
               </a:rPr>
-              <a:t>[S] Sambungan ke Saluran Keluar</a:t>
+              <a:t>[S] Pemasangan Tiang</a:t>
             </a:r>
           </a:p>
           <a:p>
@@ -11962,19 +11970,31 @@
                 </a:solidFill>
                 <a:latin typeface="Arial"/>
               </a:rPr>
-              <a:t>[S] Pastikan sistem saliran bawah tanah ini disambungkan ke saluran keluar yang berfungsi seperti parit utama atau sump.</a:t>
-            </a:r>
-          </a:p>
-          <a:p>
-            <a:pPr algn="l"/>
-            <a:r>
-              <a:rPr sz="1200" b="0" i="0">
-                <a:solidFill>
-                  <a:srgbClr val="6B6B6B"/>
-                </a:solidFill>
-                <a:latin typeface="Arial"/>
-              </a:rPr>
-              <a:t>[U] Klik setiap tajuk untuk memaparkan maklumat.</a:t>
+              <a:t>[S] Kestabilan pagar bergantung pada tiangnya. Tiang mesti dipasang pada jarak yang seragam dan ditanam dalam tapak konkrit dengan saiz dan kedalaman yang mencukupi seperti dalam spesifikasi.</a:t>
+            </a:r>
+          </a:p>
+          <a:p>
+            <a:pPr algn="l" lvl="1"/>
+            <a:r>
+              <a:rPr sz="1400" b="0" i="0">
+                <a:solidFill>
+                  <a:srgbClr val="0D47A1"/>
+                </a:solidFill>
+                <a:latin typeface="Arial"/>
+              </a:rPr>
+              <a:t>[S] Ketegangan Pemasangan</a:t>
+            </a:r>
+          </a:p>
+          <a:p>
+            <a:pPr algn="l" lvl="2"/>
+            <a:r>
+              <a:rPr sz="1400" b="0" i="0">
+                <a:solidFill>
+                  <a:srgbClr val="0D47A1"/>
+                </a:solidFill>
+                <a:latin typeface="Arial"/>
+              </a:rPr>
+              <a:t>[S] Bagi pagar jenis jejaring (chain-link) atau BRC, ia mesti ditegangkan dengan sempurna untuk mengelakkannya daripada melendut.</a:t>
             </a:r>
           </a:p>
         </p:txBody>
@@ -12021,7 +12041,7 @@
                 </a:solidFill>
                 <a:latin typeface="Arial"/>
               </a:rPr>
-              <a:t>click-to-reveal · 3 panel</a:t>
+              <a:t>Click-to-Reveal · 4 panel</a:t>
             </a:r>
           </a:p>
           <a:p>
@@ -12033,7 +12053,7 @@
                 </a:solidFill>
                 <a:latin typeface="Arial"/>
               </a:rPr>
-              <a:t>1. Penggalian Peparit</a:t>
+              <a:t>1. Penjajaran Sempadan</a:t>
             </a:r>
           </a:p>
           <a:p>
@@ -12045,7 +12065,7 @@
                 </a:solidFill>
                 <a:latin typeface="Arial"/>
               </a:rPr>
-              <a:t>2. Pemasangan Sistematik</a:t>
+              <a:t>2. Pemasangan Tiang</a:t>
             </a:r>
           </a:p>
           <a:p>
@@ -12057,7 +12077,19 @@
                 </a:solidFill>
                 <a:latin typeface="Arial"/>
               </a:rPr>
-              <a:t>3. Sambungan ke Saluran Keluar</a:t>
+              <a:t>3. Ketegangan Pemasangan</a:t>
+            </a:r>
+          </a:p>
+          <a:p>
+            <a:pPr algn="l" lvl="1"/>
+            <a:r>
+              <a:rPr sz="900" b="0" i="0">
+                <a:solidFill>
+                  <a:srgbClr val="1A1A1A"/>
+                </a:solidFill>
+                <a:latin typeface="Arial"/>
+              </a:rPr>
+              <a:t>4. Kemasan Anti-Karat</a:t>
             </a:r>
           </a:p>
           <a:p>
@@ -12129,7 +12161,7 @@
                 </a:solidFill>
                 <a:latin typeface="Arial"/>
               </a:rPr>
-              <a:t>Baris modul: T03B03-ROW-016, T03B03-ROW-017, T03B03-ROW-019, T03B03-ROW-018, T03B03-ROW-020, T03B03-ROW-022, T03B03-ROW-030, T03B03-ROW-021, T03B03-ROW-023, T03B03-ROW-024 (+6)</a:t>
+              <a:t>Baris modul: T03B03-ROW-042, T03B03-ROW-043, T03B03-ROW-044, T03B03-ROW-046, T03B03-ROW-045, T03B03-ROW-047, T03B03-ROW-049, T03B03-ROW-051, T03B03-ROW-053, T03B03-ROW-048 (+3)</a:t>
             </a:r>
           </a:p>
           <a:p>
@@ -12176,535 +12208,7 @@
                 </a:solidFill>
                 <a:latin typeface="Arial"/>
               </a:rPr>
-              <a:t>K5-PL06-T03-B03 · skrin 5 daripada 12  ·  halaman 2/2   ·   TECHNICAL_PROOF · DRAFT_FOR_BARIAH_REVIEW · NOT_INSTRUCTIONALLY_APPROVED · NOT_LEARNER_FACING_FINAL</a:t>
-            </a:r>
-          </a:p>
-        </p:txBody>
-      </p:sp>
-    </p:spTree>
-  </p:cSld>
-  <p:clrMapOvr>
-    <a:masterClrMapping/>
-  </p:clrMapOvr>
-</p:sld>
-</file>
-
-<file path=ppt/slides/slide9.xml><?xml version="1.0" encoding="utf-8"?>
-<p:sld xmlns:a="http://schemas.openxmlformats.org/drawingml/2006/main" xmlns:p="http://schemas.openxmlformats.org/presentationml/2006/main" xmlns:r="http://schemas.openxmlformats.org/officeDocument/2006/relationships">
-  <p:cSld>
-    <p:spTree>
-      <p:nvGrpSpPr>
-        <p:cNvPr id="1" name=""/>
-        <p:cNvGrpSpPr/>
-        <p:nvPr/>
-      </p:nvGrpSpPr>
-      <p:grpSpPr/>
-      <p:sp>
-        <p:nvSpPr>
-          <p:cNvPr id="2" name="TextBox 1"/>
-          <p:cNvSpPr txBox="1"/>
-          <p:nvPr/>
-        </p:nvSpPr>
-        <p:spPr>
-          <a:xfrm>
-            <a:off x="457200" y="320000"/>
-            <a:ext cx="11277600" cy="700000"/>
-          </a:xfrm>
-          <a:prstGeom prst="rect">
-            <a:avLst/>
-          </a:prstGeom>
-          <a:noFill/>
-        </p:spPr>
-        <p:txBody>
-          <a:bodyPr wrap="square" lIns="0" rIns="0" tIns="0" bIns="0">
-            <a:noAutofit/>
-          </a:bodyPr>
-          <a:lstStyle/>
-          <a:p>
-            <a:pPr algn="l"/>
-            <a:r>
-              <a:rPr sz="1100" b="1" i="0">
-                <a:solidFill>
-                  <a:srgbClr val="6B6B6B"/>
-                </a:solidFill>
-                <a:latin typeface="Arial"/>
-              </a:rPr>
-              <a:t>T03B03-S06   ·   click-to-reveal   ·   CONTENT</a:t>
-            </a:r>
-          </a:p>
-          <a:p>
-            <a:pPr algn="l"/>
-            <a:r>
-              <a:rPr sz="2400" b="1" i="0">
-                <a:solidFill>
-                  <a:srgbClr val="1A1A1A"/>
-                </a:solidFill>
-                <a:latin typeface="Arial"/>
-              </a:rPr>
-              <a:t>Dinding Penahan (Retaining Wall)</a:t>
-            </a:r>
-          </a:p>
-        </p:txBody>
-      </p:sp>
-      <p:sp>
-        <p:nvSpPr>
-          <p:cNvPr id="3" name="Rectangle 2"/>
-          <p:cNvSpPr/>
-          <p:nvPr/>
-        </p:nvSpPr>
-        <p:spPr>
-          <a:xfrm>
-            <a:off x="457200" y="1150000"/>
-            <a:ext cx="11277600" cy="9525"/>
-          </a:xfrm>
-          <a:prstGeom prst="rect">
-            <a:avLst/>
-          </a:prstGeom>
-          <a:solidFill>
-            <a:srgbClr val="D8D8D8"/>
-          </a:solidFill>
-          <a:ln>
-            <a:noFill/>
-          </a:ln>
-          <a:effectLst/>
-        </p:spPr>
-        <p:style>
-          <a:lnRef idx="1">
-            <a:schemeClr val="accent1"/>
-          </a:lnRef>
-          <a:fillRef idx="3">
-            <a:schemeClr val="accent1"/>
-          </a:fillRef>
-          <a:effectRef idx="0">
-            <a:schemeClr val="accent1"/>
-          </a:effectRef>
-          <a:fontRef idx="minor">
-            <a:schemeClr val="lt1"/>
-          </a:fontRef>
-        </p:style>
-        <p:txBody>
-          <a:bodyPr rtlCol="0" anchor="ctr">
-            <a:noAutofit/>
-          </a:bodyPr>
-          <a:lstStyle/>
-          <a:p>
-            <a:pPr algn="ctr"/>
-          </a:p>
-        </p:txBody>
-      </p:sp>
-      <p:sp>
-        <p:nvSpPr>
-          <p:cNvPr id="4" name="TextBox 3"/>
-          <p:cNvSpPr txBox="1"/>
-          <p:nvPr/>
-        </p:nvSpPr>
-        <p:spPr>
-          <a:xfrm>
-            <a:off x="457200" y="1320000"/>
-            <a:ext cx="6766560" cy="4600000"/>
-          </a:xfrm>
-          <a:prstGeom prst="rect">
-            <a:avLst/>
-          </a:prstGeom>
-          <a:noFill/>
-        </p:spPr>
-        <p:txBody>
-          <a:bodyPr wrap="square" lIns="0" rIns="0" tIns="0" bIns="0">
-            <a:noAutofit/>
-          </a:bodyPr>
-          <a:lstStyle/>
-          <a:p>
-            <a:pPr algn="l"/>
-            <a:r>
-              <a:rPr sz="1000" b="1" i="0">
-                <a:solidFill>
-                  <a:srgbClr val="6B6B6B"/>
-                </a:solidFill>
-                <a:latin typeface="Arial"/>
-              </a:rPr>
-              <a:t>KANDUNGAN SKRIN</a:t>
-            </a:r>
-          </a:p>
-          <a:p>
-            <a:pPr algn="l"/>
-            <a:r>
-              <a:rPr sz="1400" b="0" i="0">
-                <a:solidFill>
-                  <a:srgbClr val="0D47A1"/>
-                </a:solidFill>
-                <a:latin typeface="Arial"/>
-              </a:rPr>
-              <a:t>[S] Dinding Penahan (Retaining Wall)</a:t>
-            </a:r>
-          </a:p>
-          <a:p>
-            <a:pPr algn="l"/>
-            <a:r>
-              <a:rPr sz="1400" b="0" i="0">
-                <a:solidFill>
-                  <a:srgbClr val="0D47A1"/>
-                </a:solidFill>
-                <a:latin typeface="Arial"/>
-              </a:rPr>
-              <a:t>[S~] Dinding penahan mesti dibina mematuhi sepenuhnya lukisan struktur jurutera bertauliah; tapak asas adalah komponen paling kritikal.</a:t>
-            </a:r>
-          </a:p>
-          <a:p>
-            <a:pPr algn="l"/>
-            <a:r>
-              <a:rPr sz="1400" b="0" i="0">
-                <a:solidFill>
-                  <a:srgbClr val="0D47A1"/>
-                </a:solidFill>
-                <a:latin typeface="Arial"/>
-              </a:rPr>
-              <a:t>[S] Fungsi</a:t>
-            </a:r>
-          </a:p>
-          <a:p>
-            <a:pPr algn="l" lvl="1"/>
-            <a:r>
-              <a:rPr sz="1400" b="0" i="0">
-                <a:solidFill>
-                  <a:srgbClr val="0D47A1"/>
-                </a:solidFill>
-                <a:latin typeface="Arial"/>
-              </a:rPr>
-              <a:t>[S] Membentuk kawasan rata di lereng bukit, menstabilkan cerun, dan menetapkan sempadan aras.</a:t>
-            </a:r>
-          </a:p>
-          <a:p>
-            <a:pPr algn="l"/>
-            <a:r>
-              <a:rPr sz="1400" b="0" i="0">
-                <a:solidFill>
-                  <a:srgbClr val="0D47A1"/>
-                </a:solidFill>
-                <a:latin typeface="Arial"/>
-              </a:rPr>
-              <a:t>[S] Fokus Utama Kontraktor</a:t>
-            </a:r>
-          </a:p>
-          <a:p>
-            <a:pPr algn="l" lvl="1"/>
-            <a:r>
-              <a:rPr sz="1400" b="0" i="0">
-                <a:solidFill>
-                  <a:srgbClr val="0D47A1"/>
-                </a:solidFill>
-                <a:latin typeface="Arial"/>
-              </a:rPr>
-              <a:t>[S] Lukisan Jurutera</a:t>
-            </a:r>
-          </a:p>
-          <a:p>
-            <a:pPr algn="l" lvl="2"/>
-            <a:r>
-              <a:rPr sz="1400" b="0" i="0">
-                <a:solidFill>
-                  <a:srgbClr val="0D47A1"/>
-                </a:solidFill>
-                <a:latin typeface="Arial"/>
-              </a:rPr>
-              <a:t>[S] Dinding penahan mesti dibina dengan mematuhi sepenuhnya Lukisan Struktur Jurutera Bertauliah (Ir.). Sebarang perubahan memerlukan kelulusan jurutera.</a:t>
-            </a:r>
-          </a:p>
-          <a:p>
-            <a:pPr algn="l" lvl="1"/>
-            <a:r>
-              <a:rPr sz="1400" b="0" i="0">
-                <a:solidFill>
-                  <a:srgbClr val="0D47A1"/>
-                </a:solidFill>
-                <a:latin typeface="Arial"/>
-              </a:rPr>
-              <a:t>[S] Pembinaan Tapak Asas (Foundation)</a:t>
-            </a:r>
-          </a:p>
-          <a:p>
-            <a:pPr algn="l" lvl="2"/>
-            <a:r>
-              <a:rPr sz="1400" b="0" i="0">
-                <a:solidFill>
-                  <a:srgbClr val="0D47A1"/>
-                </a:solidFill>
-                <a:latin typeface="Arial"/>
-              </a:rPr>
-              <a:t>[S] Tapak asas adalah komponen paling kritikal. Ia mesti dibina di atas tanah yang stabil pada kedalaman dan saiz yang betul.</a:t>
-            </a:r>
-          </a:p>
-          <a:p>
-            <a:pPr algn="l" lvl="1"/>
-            <a:r>
-              <a:rPr sz="1400" b="0" i="0">
-                <a:solidFill>
-                  <a:srgbClr val="0D47A1"/>
-                </a:solidFill>
-                <a:latin typeface="Arial"/>
-              </a:rPr>
-              <a:t>[S] Sistem Perparitan di Belakang Dinding</a:t>
-            </a:r>
-          </a:p>
-          <a:p>
-            <a:pPr algn="l" lvl="2"/>
-            <a:r>
-              <a:rPr sz="1400" b="0" i="0">
-                <a:solidFill>
-                  <a:srgbClr val="0D47A1"/>
-                </a:solidFill>
-                <a:latin typeface="Arial"/>
-              </a:rPr>
-              <a:t>[S] Kegagalan dinding penahan selalunya berpunca daripada tekanan air (hydrostatic pressure). Kontraktor wajib memastikan lubang saliran air (weep holes) dibina dan lapisan penapis (seperti batu kelikir) diletakkan di belakang dinding untuk membolehkan air keluar.</a:t>
-            </a:r>
-          </a:p>
-          <a:p>
-            <a:pPr algn="l"/>
-            <a:r>
-              <a:rPr sz="1200" b="0" i="0">
-                <a:solidFill>
-                  <a:srgbClr val="6B6B6B"/>
-                </a:solidFill>
-                <a:latin typeface="Arial"/>
-              </a:rPr>
-              <a:t>[U] Klik setiap tajuk untuk memaparkan maklumat.</a:t>
-            </a:r>
-          </a:p>
-        </p:txBody>
-      </p:sp>
-      <p:sp>
-        <p:nvSpPr>
-          <p:cNvPr id="5" name="TextBox 4"/>
-          <p:cNvSpPr txBox="1"/>
-          <p:nvPr/>
-        </p:nvSpPr>
-        <p:spPr>
-          <a:xfrm>
-            <a:off x="7523760" y="1320000"/>
-            <a:ext cx="4211040" cy="4600000"/>
-          </a:xfrm>
-          <a:prstGeom prst="rect">
-            <a:avLst/>
-          </a:prstGeom>
-          <a:noFill/>
-        </p:spPr>
-        <p:txBody>
-          <a:bodyPr wrap="square" lIns="0" rIns="0" tIns="0" bIns="0">
-            <a:noAutofit/>
-          </a:bodyPr>
-          <a:lstStyle/>
-          <a:p>
-            <a:pPr algn="l"/>
-            <a:r>
-              <a:rPr sz="1000" b="1" i="0">
-                <a:solidFill>
-                  <a:srgbClr val="6B6B6B"/>
-                </a:solidFill>
-                <a:latin typeface="Arial"/>
-              </a:rPr>
-              <a:t>INTERAKSI</a:t>
-            </a:r>
-          </a:p>
-          <a:p>
-            <a:pPr algn="l"/>
-            <a:r>
-              <a:rPr sz="1000" b="0" i="0">
-                <a:solidFill>
-                  <a:srgbClr val="1A1A1A"/>
-                </a:solidFill>
-                <a:latin typeface="Arial"/>
-              </a:rPr>
-              <a:t>click-to-reveal · 3 panel</a:t>
-            </a:r>
-          </a:p>
-          <a:p>
-            <a:pPr algn="l" lvl="1"/>
-            <a:r>
-              <a:rPr sz="900" b="0" i="0">
-                <a:solidFill>
-                  <a:srgbClr val="1A1A1A"/>
-                </a:solidFill>
-                <a:latin typeface="Arial"/>
-              </a:rPr>
-              <a:t>1. Lukisan Jurutera</a:t>
-            </a:r>
-          </a:p>
-          <a:p>
-            <a:pPr algn="l" lvl="1"/>
-            <a:r>
-              <a:rPr sz="900" b="0" i="0">
-                <a:solidFill>
-                  <a:srgbClr val="1A1A1A"/>
-                </a:solidFill>
-                <a:latin typeface="Arial"/>
-              </a:rPr>
-              <a:t>2. Pembinaan Tapak Asas (Foundation)</a:t>
-            </a:r>
-          </a:p>
-          <a:p>
-            <a:pPr algn="l" lvl="1"/>
-            <a:r>
-              <a:rPr sz="900" b="0" i="0">
-                <a:solidFill>
-                  <a:srgbClr val="1A1A1A"/>
-                </a:solidFill>
-                <a:latin typeface="Arial"/>
-              </a:rPr>
-              <a:t>3. Sistem Perparitan di Belakang Dinding</a:t>
-            </a:r>
-          </a:p>
-          <a:p>
-            <a:pPr algn="l"/>
-            <a:r>
-              <a:rPr sz="800" b="0" i="0">
-                <a:solidFill>
-                  <a:srgbClr val="1A1A1A"/>
-                </a:solidFill>
-                <a:latin typeface="Arial"/>
-              </a:rPr>
-              <a:t/>
-            </a:r>
-          </a:p>
-          <a:p>
-            <a:pPr algn="l"/>
-            <a:r>
-              <a:rPr sz="1000" b="1" i="0">
-                <a:solidFill>
-                  <a:srgbClr val="6B6B6B"/>
-                </a:solidFill>
-                <a:latin typeface="Arial"/>
-              </a:rPr>
-              <a:t>VISUAL</a:t>
-            </a:r>
-          </a:p>
-          <a:p>
-            <a:pPr algn="l"/>
-            <a:r>
-              <a:rPr sz="1000" b="0" i="0">
-                <a:solidFill>
-                  <a:srgbClr val="1A1A1A"/>
-                </a:solidFill>
-                <a:latin typeface="Arial"/>
-              </a:rPr>
-              <a:t>Keratan rentas dinding penahan dengan sistem perparitan di belakang</a:t>
-            </a:r>
-          </a:p>
-          <a:p>
-            <a:pPr algn="l"/>
-            <a:r>
-              <a:rPr sz="900" b="0" i="0">
-                <a:solidFill>
-                  <a:srgbClr val="6B6B6B"/>
-                </a:solidFill>
-                <a:latin typeface="Arial"/>
-              </a:rPr>
-              <a:t>Tiada rajah sumber — subjek calon sahaja</a:t>
-            </a:r>
-          </a:p>
-          <a:p>
-            <a:pPr algn="l"/>
-            <a:r>
-              <a:rPr sz="900" b="1" i="0">
-                <a:solidFill>
-                  <a:srgbClr val="B71C1C"/>
-                </a:solidFill>
-                <a:latin typeface="Arial"/>
-              </a:rPr>
-              <a:t>SUBJEK VISUAL: PENDING_BARIAH_UNIT_REVIEW</a:t>
-            </a:r>
-          </a:p>
-          <a:p>
-            <a:pPr algn="l"/>
-            <a:r>
-              <a:rPr sz="900" b="1" i="0">
-                <a:solidFill>
-                  <a:srgbClr val="B71C1C"/>
-                </a:solidFill>
-                <a:latin typeface="Arial"/>
-              </a:rPr>
-              <a:t>ASET VISUAL BELUM DIHASILKAN — NOT_MMD_ASSET</a:t>
-            </a:r>
-          </a:p>
-          <a:p>
-            <a:pPr algn="l"/>
-            <a:r>
-              <a:rPr sz="800" b="0" i="0">
-                <a:solidFill>
-                  <a:srgbClr val="1A1A1A"/>
-                </a:solidFill>
-                <a:latin typeface="Arial"/>
-              </a:rPr>
-              <a:t/>
-            </a:r>
-          </a:p>
-          <a:p>
-            <a:pPr algn="l"/>
-            <a:r>
-              <a:rPr sz="1000" b="1" i="0">
-                <a:solidFill>
-                  <a:srgbClr val="6B6B6B"/>
-                </a:solidFill>
-                <a:latin typeface="Arial"/>
-              </a:rPr>
-              <a:t>SUMBER DAN KEPUTUSAN</a:t>
-            </a:r>
-          </a:p>
-          <a:p>
-            <a:pPr algn="l"/>
-            <a:r>
-              <a:rPr sz="800" b="0" i="0">
-                <a:solidFill>
-                  <a:srgbClr val="0D47A1"/>
-                </a:solidFill>
-                <a:latin typeface="Arial"/>
-              </a:rPr>
-              <a:t>Baris modul: T03B03-ROW-032, T03B03-ROW-033, T03B03-ROW-035, T03B03-ROW-034, T03B03-ROW-036, T03B03-ROW-038, T03B03-ROW-040, T03B03-ROW-037, T03B03-ROW-039, T03B03-ROW-041</a:t>
-            </a:r>
-          </a:p>
-          <a:p>
-            <a:pPr algn="l"/>
-            <a:r>
-              <a:rPr sz="800" b="0" i="0">
-                <a:solidFill>
-                  <a:srgbClr val="6B6B6B"/>
-                </a:solidFill>
-                <a:latin typeface="Arial"/>
-              </a:rPr>
-              <a:t>Keputusan Bariah: A1, A2</a:t>
-            </a:r>
-          </a:p>
-        </p:txBody>
-      </p:sp>
-      <p:sp>
-        <p:nvSpPr>
-          <p:cNvPr id="6" name="TextBox 5"/>
-          <p:cNvSpPr txBox="1"/>
-          <p:nvPr/>
-        </p:nvSpPr>
-        <p:spPr>
-          <a:xfrm>
-            <a:off x="457200" y="6150000"/>
-            <a:ext cx="11277600" cy="500000"/>
-          </a:xfrm>
-          <a:prstGeom prst="rect">
-            <a:avLst/>
-          </a:prstGeom>
-          <a:noFill/>
-        </p:spPr>
-        <p:txBody>
-          <a:bodyPr wrap="square" lIns="0" rIns="0" tIns="0" bIns="0">
-            <a:noAutofit/>
-          </a:bodyPr>
-          <a:lstStyle/>
-          <a:p>
-            <a:pPr algn="l"/>
-            <a:r>
-              <a:rPr sz="900" b="0" i="0">
-                <a:solidFill>
-                  <a:srgbClr val="6B6B6B"/>
-                </a:solidFill>
-                <a:latin typeface="Arial"/>
-              </a:rPr>
-              <a:t>K5-PL06-T03-B03 · skrin 6 daripada 12   ·   TECHNICAL_PROOF · DRAFT_FOR_BARIAH_REVIEW · NOT_INSTRUCTIONALLY_APPROVED · NOT_LEARNER_FACING_FINAL</a:t>
+              <a:t>K5-PL06-T03-B03 · skrin 7 daripada 12  ·  halaman 1/2   ·   TECHNICAL_PROOF · DRAFT_FOR_BARIAH_REVIEW · NOT_INSTRUCTIONALLY_APPROVED · NOT_LEARNER_FACING_FINAL</a:t>
             </a:r>
           </a:p>
         </p:txBody>
